--- a/docs/entreprise/deck/Quantinvo-presentation-marque.pptx
+++ b/docs/entreprise/deck/Quantinvo-presentation-marque.pptx
@@ -2472,7 +2472,7 @@
                 <a:ea typeface="Inter" pitchFamily="34" charset="-122"/>
                 <a:cs typeface="Inter" pitchFamily="34" charset="-120"/>
               </a:rPr>
-              <a:t>Pas d'inscription libre : on entre sur invitation. Administrateur, superviseur, compteur, chacun voit son périmètre. Double authentification pour qui le souhaite.</a:t>
+              <a:t>Pas d'inscription libre : on entre sur invitation. Administrateur, superviseur, compteur, chacun voit son périmètre. Double authentification pour qui le souhaite.</a:t>
             </a:r>
             <a:endParaRPr lang="en-US" sz="1250" dirty="0"/>
           </a:p>
@@ -2623,7 +2623,7 @@
                 <a:ea typeface="Inter" pitchFamily="34" charset="-122"/>
                 <a:cs typeface="Inter" pitchFamily="34" charset="-120"/>
               </a:rPr>
-              <a:t>Un dossier technique séparé répond aux questions d'une DSI : architecture, hébergement, déploiement par votre catalogue d'entreprise, comptes, sécurité. Demandez-le.</a:t>
+              <a:t>Un dossier technique séparé répond aux questions d'une DSI : architecture, hébergement, déploiement par votre catalogue d'entreprise, comptes, sécurité. Demandez-le.</a:t>
             </a:r>
             <a:endParaRPr lang="en-US" sz="1150" dirty="0"/>
           </a:p>
@@ -2986,7 +2986,7 @@
                 <a:ea typeface="Inter" pitchFamily="34" charset="-122"/>
                 <a:cs typeface="Inter" pitchFamily="34" charset="-120"/>
               </a:rPr>
-              <a:t>Tout est compris : l'application, le tableau de bord, les mises à jour. Un réseau active une licence par magasin, à son rythme.</a:t>
+              <a:t>Tout est compris : l'application, le tableau de bord, les mises à jour. Un réseau active une licence par magasin, à son rythme.</a:t>
             </a:r>
             <a:endParaRPr lang="en-US" sz="1250" dirty="0"/>
           </a:p>
@@ -4273,7 +4273,7 @@
                 <a:ea typeface="Inter" pitchFamily="34" charset="-122"/>
                 <a:cs typeface="Inter" pitchFamily="34" charset="-120"/>
               </a:rPr>
-              <a:t>Une démonstration de trente minutes, sur votre propre référentiel : vous l'importez, on scanne quelques articles, et vous repartez avec le rapport. Pas de données fictives.</a:t>
+              <a:t>Une démonstration de trente minutes, sur votre propre référentiel : vous l'importez, on scanne quelques articles, et vous repartez avec le rapport. Pas de données fictives.</a:t>
             </a:r>
             <a:endParaRPr lang="en-US" sz="1450" dirty="0"/>
           </a:p>
@@ -5193,7 +5193,7 @@
                 <a:ea typeface="Inter" pitchFamily="34" charset="-122"/>
                 <a:cs typeface="Inter" pitchFamily="34" charset="-120"/>
               </a:rPr>
-              <a:t>Son auteur fait du contrôle des stocks en magasin. Les irritants, il les a sous les yeux à chaque inventaire : la balise qu'on ne retrouve pas, la réserve sans réseau, le fichier Excel qu'il faut reformater avant chaque import, le rapport qui arrive trois jours après, quand tout le monde est passé à autre chose.</a:t>
+              <a:t>Son auteur fait du contrôle des stocks en magasin. Les irritants, il les a sous les yeux à chaque inventaire : la balise qu'on ne retrouve pas, la réserve sans réseau, le fichier Excel qu'il faut reformater avant chaque import, le rapport qui arrive trois jours après, quand tout le monde est passé à autre chose.</a:t>
             </a:r>
             <a:endParaRPr lang="en-US" sz="1400" dirty="0"/>
           </a:p>
@@ -6582,7 +6582,7 @@
                 <a:ea typeface="Inter" pitchFamily="34" charset="-122"/>
                 <a:cs typeface="Inter" pitchFamily="34" charset="-120"/>
               </a:rPr>
-              <a:t>Votre référentiel et votre stock théorique, en CSV ou en Excel, tels qu'ils sortent de votre système. SKU, EAN, Gencod, Qté : les noms de colonnes sont reconnus.</a:t>
+              <a:t>Votre référentiel et votre stock théorique, en CSV ou en Excel, tels qu'ils sortent de votre système. SKU, EAN, Gencod, Qté : les noms de colonnes sont reconnus.</a:t>
             </a:r>
             <a:endParaRPr lang="en-US" sz="1200" dirty="0"/>
           </a:p>
@@ -6960,7 +6960,7 @@
                 <a:ea typeface="Inter" pitchFamily="34" charset="-122"/>
                 <a:cs typeface="Inter" pitchFamily="34" charset="-120"/>
               </a:rPr>
-              <a:t>Le rapport sort en Excel : résultats, écarts en valeur, détail par zone. Il part tel quel à la correction du stock.</a:t>
+              <a:t>Le rapport sort en Excel : résultats, écarts en valeur, détail par zone. Il part tel quel à la correction du stock.</a:t>
             </a:r>
             <a:endParaRPr lang="en-US" sz="1200" dirty="0"/>
           </a:p>
@@ -7068,7 +7068,7 @@
                 <a:ea typeface="Inter" pitchFamily="34" charset="-122"/>
                 <a:cs typeface="Inter" pitchFamily="34" charset="-120"/>
               </a:rPr>
-              <a:t>Le premier inventaire se fait généralement sur un rayon, un mardi matin, avec deux personnes. Pas besoin de la nuit entière pour commencer : c'est justement l'idée.</a:t>
+              <a:t>Le premier inventaire se fait généralement sur un rayon, un mardi matin, avec deux personnes. Pas besoin de la nuit entière pour commencer : c'est justement l'idée.</a:t>
             </a:r>
             <a:endParaRPr lang="en-US" sz="1150" dirty="0"/>
           </a:p>
@@ -7389,7 +7389,7 @@
                 <a:ea typeface="Inter" pitchFamily="34" charset="-122"/>
                 <a:cs typeface="Inter" pitchFamily="34" charset="-120"/>
               </a:rPr>
-              <a:t>Depuis le bureau, sur le site : combien d'appareils comptent, combien auditent, l'avancement zone par zone, les derniers scans. Ce que vous ne voyez pas, et c'est voulu : qui fait quoi. Le suivi est agrégé, on pilote le travail, pas les personnes.</a:t>
+              <a:t>Depuis le bureau, sur le site : combien d'appareils comptent, combien auditent, l'avancement zone par zone, les derniers scans. Ce que vous ne voyez pas, et c'est voulu : qui fait quoi. Le suivi est agrégé, on pilote le travail, pas les personnes.</a:t>
             </a:r>
             <a:endParaRPr lang="en-US" sz="1250" dirty="0"/>
           </a:p>
@@ -8858,7 +8858,7 @@
                 <a:ea typeface="Inter" pitchFamily="34" charset="-122"/>
                 <a:cs typeface="Inter" pitchFamily="34" charset="-120"/>
               </a:rPr>
-              <a:t>Les comptes sont nominatifs, créés par invitation. Pas de SAML ni d'Entra ID pour l'instant ; dites-nous si c'est une exigence.</a:t>
+              <a:t>Les comptes sont nominatifs, créés par invitation. Pas de SAML ni d'Entra ID pour l'instant ; dites-nous si c'est une exigence.</a:t>
             </a:r>
             <a:endParaRPr lang="en-US" sz="1400" dirty="0"/>
           </a:p>

--- a/docs/entreprise/deck/Quantinvo-presentation-marque.pptx
+++ b/docs/entreprise/deck/Quantinvo-presentation-marque.pptx
@@ -17,9 +17,11 @@
     <p:sldId id="265" r:id="rId11"/>
     <p:sldId id="266" r:id="rId12"/>
     <p:sldId id="267" r:id="rId13"/>
+    <p:sldId id="268" r:id="rId14"/>
+    <p:sldId id="269" r:id="rId15"/>
   </p:sldIdLst>
   <p:notesMasterIdLst>
-    <p:notesMasterId r:id="rId14"/>
+    <p:notesMasterId r:id="rId16"/>
   </p:notesMasterIdLst>
   <p:sldSz cx="12192000" cy="6858000"/>
   <p:notesSz cx="6858000" cy="12192000"/>
@@ -601,7 +603,7 @@
           <a:p>
             <a:r>
               <a:rPr lang="en-US" dirty="0"/>
-              <a:t>Conformité réelle, suivi agrégé, données en Europe. Le dossier DSI existe : le proposer tout de suite évite six semaines d'aller-retour.</a:t>
+              <a:t>Cette page répond à la question qui bloque tous les achats logiciels : « combien de temps avant que ça serve ? ». La réponse est : le jour même.</a:t>
             </a:r>
             <a:endParaRPr lang="en-US" dirty="0"/>
           </a:p>
@@ -689,7 +691,7 @@
           <a:p>
             <a:r>
               <a:rPr lang="en-US" dirty="0"/>
-              <a:t>Parler en budget d'inventaire annuel, jamais en prix d'application. Le volume se lit dans le fichier de stock du prospect ; il le déclare au devis. Un grand magasin dépasse 200 000 pièces : c'est la borne qui parle dans le métier. Tarifs confirmés au devis.</a:t>
+              <a:t>Conformité réelle, suivi agrégé, données en Europe. Le dossier DSI existe : le proposer tout de suite évite six semaines d'aller-retour.</a:t>
             </a:r>
             <a:endParaRPr lang="en-US" dirty="0"/>
           </a:p>
@@ -777,7 +779,7 @@
           <a:p>
             <a:r>
               <a:rPr lang="en-US" dirty="0"/>
-              <a:t>Clore sur la démonstration concrète, sur leurs fichiers. C'est l'engagement qu'on prend et celui qu'on leur demande.</a:t>
+              <a:t>Parler en budget d'inventaire annuel, jamais en prix d'application : comparer au prestataire et au matériel. Annoncer le mensuel ; l'annuel économise 300 € sur Advanced. Le détail vit dans le deck tarification.</a:t>
             </a:r>
             <a:endParaRPr lang="en-US" dirty="0"/>
           </a:p>
@@ -801,6 +803,182 @@
             <a:fld id="{F7021451-1387-4CA6-816F-3879F97B5CBC}" type="slidenum">
               <a:rPr lang="en-US"/>
               <a:t>12</a:t>
+            </a:fld>
+            <a:endParaRPr lang="en-US"/>
+          </a:p>
+        </p:txBody>
+      </p:sp>
+    </p:spTree>
+    <p:extLst>
+      <p:ext uri="{BB962C8B-B14F-4D97-AF65-F5344CB8AC3E}">
+        <p14:creationId xmlns:p14="http://schemas.microsoft.com/office/powerpoint/2010/main" val="1024086991"/>
+      </p:ext>
+    </p:extLst>
+  </p:cSld>
+  <p:clrMapOvr>
+    <a:masterClrMapping/>
+  </p:clrMapOvr>
+</p:notes>
+</file>
+
+<file path=ppt/notesSlides/notesSlide13.xml><?xml version="1.0" encoding="utf-8"?>
+<p:notes xmlns:a="http://schemas.openxmlformats.org/drawingml/2006/main" xmlns:r="http://schemas.openxmlformats.org/officeDocument/2006/relationships" xmlns:p="http://schemas.openxmlformats.org/presentationml/2006/main">
+  <p:cSld>
+    <p:spTree>
+      <p:nvGrpSpPr>
+        <p:cNvPr id="1" name=""/>
+        <p:cNvGrpSpPr/>
+        <p:nvPr/>
+      </p:nvGrpSpPr>
+      <p:grpSpPr>
+        <a:xfrm>
+          <a:off x="0" y="0"/>
+          <a:ext cx="0" cy="0"/>
+          <a:chOff x="0" y="0"/>
+          <a:chExt cx="0" cy="0"/>
+        </a:xfrm>
+      </p:grpSpPr>
+      <p:sp>
+        <p:nvSpPr>
+          <p:cNvPr id="2" name="Slide Image Placeholder 1"/>
+          <p:cNvSpPr>
+            <a:spLocks noGrp="1" noRot="1" noChangeAspect="1"/>
+          </p:cNvSpPr>
+          <p:nvPr>
+            <p:ph type="sldImg"/>
+          </p:nvPr>
+        </p:nvSpPr>
+        <p:spPr/>
+      </p:sp>
+      <p:sp>
+        <p:nvSpPr>
+          <p:cNvPr id="3" name="Notes Placeholder 2"/>
+          <p:cNvSpPr>
+            <a:spLocks noGrp="1"/>
+          </p:cNvSpPr>
+          <p:nvPr>
+            <p:ph type="body" idx="1"/>
+          </p:nvPr>
+        </p:nvSpPr>
+        <p:spPr/>
+        <p:txBody>
+          <a:bodyPr/>
+          <a:lstStyle/>
+          <a:p>
+            <a:r>
+              <a:rPr lang="en-US" dirty="0"/>
+              <a:t>Cette page désarme les objections. Ne pas la sauter : un prospect qui découvre une limite après coup perd confiance, un prospect averti la comprend.</a:t>
+            </a:r>
+            <a:endParaRPr lang="en-US" dirty="0"/>
+          </a:p>
+        </p:txBody>
+      </p:sp>
+      <p:sp>
+        <p:nvSpPr>
+          <p:cNvPr id="4" name="Slide Number Placeholder 3"/>
+          <p:cNvSpPr>
+            <a:spLocks noGrp="1"/>
+          </p:cNvSpPr>
+          <p:nvPr>
+            <p:ph type="sldNum" sz="quarter" idx="10"/>
+          </p:nvPr>
+        </p:nvSpPr>
+        <p:spPr/>
+        <p:txBody>
+          <a:bodyPr/>
+          <a:lstStyle/>
+          <a:p>
+            <a:fld id="{F7021451-1387-4CA6-816F-3879F97B5CBC}" type="slidenum">
+              <a:rPr lang="en-US"/>
+              <a:t>13</a:t>
+            </a:fld>
+            <a:endParaRPr lang="en-US"/>
+          </a:p>
+        </p:txBody>
+      </p:sp>
+    </p:spTree>
+    <p:extLst>
+      <p:ext uri="{BB962C8B-B14F-4D97-AF65-F5344CB8AC3E}">
+        <p14:creationId xmlns:p14="http://schemas.microsoft.com/office/powerpoint/2010/main" val="1024086991"/>
+      </p:ext>
+    </p:extLst>
+  </p:cSld>
+  <p:clrMapOvr>
+    <a:masterClrMapping/>
+  </p:clrMapOvr>
+</p:notes>
+</file>
+
+<file path=ppt/notesSlides/notesSlide14.xml><?xml version="1.0" encoding="utf-8"?>
+<p:notes xmlns:a="http://schemas.openxmlformats.org/drawingml/2006/main" xmlns:r="http://schemas.openxmlformats.org/officeDocument/2006/relationships" xmlns:p="http://schemas.openxmlformats.org/presentationml/2006/main">
+  <p:cSld>
+    <p:spTree>
+      <p:nvGrpSpPr>
+        <p:cNvPr id="1" name=""/>
+        <p:cNvGrpSpPr/>
+        <p:nvPr/>
+      </p:nvGrpSpPr>
+      <p:grpSpPr>
+        <a:xfrm>
+          <a:off x="0" y="0"/>
+          <a:ext cx="0" cy="0"/>
+          <a:chOff x="0" y="0"/>
+          <a:chExt cx="0" cy="0"/>
+        </a:xfrm>
+      </p:grpSpPr>
+      <p:sp>
+        <p:nvSpPr>
+          <p:cNvPr id="2" name="Slide Image Placeholder 1"/>
+          <p:cNvSpPr>
+            <a:spLocks noGrp="1" noRot="1" noChangeAspect="1"/>
+          </p:cNvSpPr>
+          <p:nvPr>
+            <p:ph type="sldImg"/>
+          </p:nvPr>
+        </p:nvSpPr>
+        <p:spPr/>
+      </p:sp>
+      <p:sp>
+        <p:nvSpPr>
+          <p:cNvPr id="3" name="Notes Placeholder 2"/>
+          <p:cNvSpPr>
+            <a:spLocks noGrp="1"/>
+          </p:cNvSpPr>
+          <p:nvPr>
+            <p:ph type="body" idx="1"/>
+          </p:nvPr>
+        </p:nvSpPr>
+        <p:spPr/>
+        <p:txBody>
+          <a:bodyPr/>
+          <a:lstStyle/>
+          <a:p>
+            <a:r>
+              <a:rPr lang="en-US" dirty="0"/>
+              <a:t>Clore sur la démonstration concrète, sur leurs fichiers. C'est l'engagement qu'on prend et celui qu'on leur demande.</a:t>
+            </a:r>
+            <a:endParaRPr lang="en-US" dirty="0"/>
+          </a:p>
+        </p:txBody>
+      </p:sp>
+      <p:sp>
+        <p:nvSpPr>
+          <p:cNvPr id="4" name="Slide Number Placeholder 3"/>
+          <p:cNvSpPr>
+            <a:spLocks noGrp="1"/>
+          </p:cNvSpPr>
+          <p:nvPr>
+            <p:ph type="sldNum" sz="quarter" idx="10"/>
+          </p:nvPr>
+        </p:nvSpPr>
+        <p:spPr/>
+        <p:txBody>
+          <a:bodyPr/>
+          <a:lstStyle/>
+          <a:p>
+            <a:fld id="{F7021451-1387-4CA6-816F-3879F97B5CBC}" type="slidenum">
+              <a:rPr lang="en-US"/>
+              <a:t>14</a:t>
             </a:fld>
             <a:endParaRPr lang="en-US"/>
           </a:p>
@@ -1217,7 +1395,7 @@
           <a:p>
             <a:r>
               <a:rPr lang="en-US" dirty="0"/>
-              <a:t>Montrer la capture, ne pas la commenter ligne à ligne. L'argument du suivi agrégé parle aux RH et au CSE : le dire ici évite une objection plus tard.</a:t>
+              <a:t>De vraies captures. Le point à faire remarquer : il n'y a rien d'autre sur ces écrans. Un compteur n'a pas de menu à apprendre.</a:t>
             </a:r>
             <a:endParaRPr lang="en-US" dirty="0"/>
           </a:p>
@@ -1305,7 +1483,7 @@
           <a:p>
             <a:r>
               <a:rPr lang="en-US" dirty="0"/>
-              <a:t>Le point qui compte pour un responsable de magasin : trancher à chaud, avec le compteur encore dans le rayon.</a:t>
+              <a:t>Montrer la capture, ne pas la commenter ligne à ligne. L'argument du suivi agrégé parle aux RH et au CSE : le dire ici évite une objection plus tard.</a:t>
             </a:r>
             <a:endParaRPr lang="en-US" dirty="0"/>
           </a:p>
@@ -1393,7 +1571,7 @@
           <a:p>
             <a:r>
               <a:rPr lang="en-US" dirty="0"/>
-              <a:t>La règle : le fichier qui fait foi est le stock théorique. Sans fichier théorique, le rapport ne montre que ce qui a été compté.</a:t>
+              <a:t>Le point qui compte pour un responsable de magasin : trancher à chaud, avec le compteur encore dans le rayon. Les deux boutons portent la quantité de chacun — un appui suffit.</a:t>
             </a:r>
             <a:endParaRPr lang="en-US" dirty="0"/>
           </a:p>
@@ -1481,7 +1659,7 @@
           <a:p>
             <a:r>
               <a:rPr lang="en-US" dirty="0"/>
-              <a:t>Cette page désarme les objections. Ne pas la sauter : un prospect qui découvre une limite après coup perd confiance, un prospect averti la comprend.</a:t>
+              <a:t>La règle : le fichier qui fait foi est le stock théorique. Sans fichier théorique, le rapport ne montre que ce qui a été compté.</a:t>
             </a:r>
             <a:endParaRPr lang="en-US" dirty="0"/>
           </a:p>
@@ -2232,7 +2410,7 @@
                 <a:ea typeface="Inter" pitchFamily="34" charset="-122"/>
                 <a:cs typeface="Inter" pitchFamily="34" charset="-120"/>
               </a:rPr>
-              <a:t>Confiance</a:t>
+              <a:t>Mise en route</a:t>
             </a:r>
             <a:endParaRPr lang="en-US" sz="1000" dirty="0"/>
           </a:p>
@@ -2299,7 +2477,7 @@
                 <a:ea typeface="Sora" pitchFamily="34" charset="-122"/>
                 <a:cs typeface="Sora" pitchFamily="34" charset="-120"/>
               </a:rPr>
-              <a:t>Pensé pour une entreprise, pas pour un particulier</a:t>
+              <a:t>De la souscription au premier comptage</a:t>
             </a:r>
             <a:endParaRPr lang="en-US" sz="2600" dirty="0"/>
           </a:p>
@@ -2307,14 +2485,121 @@
       </p:sp>
       <p:sp>
         <p:nvSpPr>
-          <p:cNvPr id="7" name="Text 4"/>
-          <p:cNvSpPr/>
-          <p:nvPr/>
-        </p:nvSpPr>
-        <p:spPr>
-          <a:xfrm>
-            <a:off x="731520" y="2286000"/>
-            <a:ext cx="5088636" cy="2926080"/>
+          <p:cNvPr id="7" name="Shape 4"/>
+          <p:cNvSpPr/>
+          <p:nvPr/>
+        </p:nvSpPr>
+        <p:spPr>
+          <a:xfrm>
+            <a:off x="914400" y="2569464"/>
+            <a:ext cx="10360152" cy="0"/>
+          </a:xfrm>
+          <a:prstGeom prst="line">
+            <a:avLst/>
+          </a:prstGeom>
+          <a:noFill/>
+          <a:ln w="9525">
+            <a:solidFill>
+              <a:srgbClr val="E3E6EE"/>
+            </a:solidFill>
+            <a:prstDash val="solid"/>
+          </a:ln>
+        </p:spPr>
+      </p:sp>
+      <p:sp>
+        <p:nvSpPr>
+          <p:cNvPr id="8" name="Text 5"/>
+          <p:cNvSpPr/>
+          <p:nvPr/>
+        </p:nvSpPr>
+        <p:spPr>
+          <a:xfrm>
+            <a:off x="731520" y="2377440"/>
+            <a:ext cx="384048" cy="384048"/>
+          </a:xfrm>
+          <a:prstGeom prst="ellipse">
+            <a:avLst/>
+          </a:prstGeom>
+          <a:solidFill>
+            <a:srgbClr val="4636B0"/>
+          </a:solidFill>
+          <a:ln>
+            <a:solidFill>
+              <a:srgbClr val="4636B0"/>
+            </a:solidFill>
+          </a:ln>
+        </p:spPr>
+        <p:txBody>
+          <a:bodyPr wrap="square" lIns="0" tIns="0" rIns="0" bIns="0" rtlCol="0" anchor="ctr"/>
+          <a:lstStyle/>
+          <a:p>
+            <a:pPr algn="ctr" indent="0" marL="0">
+              <a:buNone/>
+            </a:pPr>
+            <a:r>
+              <a:rPr lang="en-US" sz="1200" b="1" dirty="0">
+                <a:solidFill>
+                  <a:srgbClr val="FFFFFF"/>
+                </a:solidFill>
+                <a:latin typeface="Sora" pitchFamily="34" charset="0"/>
+                <a:ea typeface="Sora" pitchFamily="34" charset="-122"/>
+                <a:cs typeface="Sora" pitchFamily="34" charset="-120"/>
+              </a:rPr>
+              <a:t>1</a:t>
+            </a:r>
+            <a:endParaRPr lang="en-US" sz="1200" dirty="0"/>
+          </a:p>
+        </p:txBody>
+      </p:sp>
+      <p:sp>
+        <p:nvSpPr>
+          <p:cNvPr id="9" name="Text 6"/>
+          <p:cNvSpPr/>
+          <p:nvPr/>
+        </p:nvSpPr>
+        <p:spPr>
+          <a:xfrm>
+            <a:off x="731520" y="2971800"/>
+            <a:ext cx="2407158" cy="365760"/>
+          </a:xfrm>
+          <a:prstGeom prst="rect">
+            <a:avLst/>
+          </a:prstGeom>
+          <a:noFill/>
+          <a:ln/>
+        </p:spPr>
+        <p:txBody>
+          <a:bodyPr wrap="square" lIns="0" tIns="0" rIns="0" bIns="0" rtlCol="0" anchor="t"/>
+          <a:lstStyle/>
+          <a:p>
+            <a:pPr indent="0" marL="0">
+              <a:buNone/>
+            </a:pPr>
+            <a:r>
+              <a:rPr lang="en-US" sz="1600" b="1" dirty="0">
+                <a:solidFill>
+                  <a:srgbClr val="4636B0"/>
+                </a:solidFill>
+                <a:latin typeface="Sora" pitchFamily="34" charset="0"/>
+                <a:ea typeface="Sora" pitchFamily="34" charset="-122"/>
+                <a:cs typeface="Sora" pitchFamily="34" charset="-120"/>
+              </a:rPr>
+              <a:t>Le jour même</a:t>
+            </a:r>
+            <a:endParaRPr lang="en-US" sz="1600" dirty="0"/>
+          </a:p>
+        </p:txBody>
+      </p:sp>
+      <p:sp>
+        <p:nvSpPr>
+          <p:cNvPr id="10" name="Text 7"/>
+          <p:cNvSpPr/>
+          <p:nvPr/>
+        </p:nvSpPr>
+        <p:spPr>
+          <a:xfrm>
+            <a:off x="731520" y="3364992"/>
+            <a:ext cx="2407158" cy="1828800"/>
           </a:xfrm>
           <a:prstGeom prst="rect">
             <a:avLst/>
@@ -2330,33 +2615,136 @@
               <a:lnSpc>
                 <a:spcPct val="118000"/>
               </a:lnSpc>
-              <a:spcAft>
-                <a:spcPts val="1200"/>
-              </a:spcAft>
-              <a:buNone/>
-            </a:pPr>
-            <a:r>
-              <a:rPr lang="en-US" sz="1250" b="1" dirty="0">
-                <a:solidFill>
-                  <a:srgbClr val="0B0F19"/>
-                </a:solidFill>
-                <a:latin typeface="Inter" pitchFamily="34" charset="0"/>
-                <a:ea typeface="Inter" pitchFamily="34" charset="-122"/>
-                <a:cs typeface="Inter" pitchFamily="34" charset="-120"/>
-              </a:rPr>
-              <a:t>Les données restent en Europe. </a:t>
-            </a:r>
+              <a:buNone/>
+            </a:pPr>
+            <a:r>
+              <a:rPr lang="en-US" sz="1200" dirty="0">
+                <a:solidFill>
+                  <a:srgbClr val="3D4556"/>
+                </a:solidFill>
+                <a:latin typeface="Inter" pitchFamily="34" charset="0"/>
+                <a:ea typeface="Inter" pitchFamily="34" charset="-122"/>
+                <a:cs typeface="Inter" pitchFamily="34" charset="-120"/>
+              </a:rPr>
+              <a:t>Vous souscrivez en ligne, votre espace est créé dès l'encaissement. Vous recevez vos accès par e-mail.</a:t>
+            </a:r>
+            <a:endParaRPr lang="en-US" sz="1200" dirty="0"/>
+          </a:p>
+        </p:txBody>
+      </p:sp>
+      <p:sp>
+        <p:nvSpPr>
+          <p:cNvPr id="11" name="Text 8"/>
+          <p:cNvSpPr/>
+          <p:nvPr/>
+        </p:nvSpPr>
+        <p:spPr>
+          <a:xfrm>
+            <a:off x="3504438" y="2377440"/>
+            <a:ext cx="384048" cy="384048"/>
+          </a:xfrm>
+          <a:prstGeom prst="ellipse">
+            <a:avLst/>
+          </a:prstGeom>
+          <a:solidFill>
+            <a:srgbClr val="4636B0"/>
+          </a:solidFill>
+          <a:ln>
+            <a:solidFill>
+              <a:srgbClr val="4636B0"/>
+            </a:solidFill>
+          </a:ln>
+        </p:spPr>
+        <p:txBody>
+          <a:bodyPr wrap="square" lIns="0" tIns="0" rIns="0" bIns="0" rtlCol="0" anchor="ctr"/>
+          <a:lstStyle/>
+          <a:p>
+            <a:pPr algn="ctr" indent="0" marL="0">
+              <a:buNone/>
+            </a:pPr>
+            <a:r>
+              <a:rPr lang="en-US" sz="1200" b="1" dirty="0">
+                <a:solidFill>
+                  <a:srgbClr val="FFFFFF"/>
+                </a:solidFill>
+                <a:latin typeface="Sora" pitchFamily="34" charset="0"/>
+                <a:ea typeface="Sora" pitchFamily="34" charset="-122"/>
+                <a:cs typeface="Sora" pitchFamily="34" charset="-120"/>
+              </a:rPr>
+              <a:t>2</a:t>
+            </a:r>
+            <a:endParaRPr lang="en-US" sz="1200" dirty="0"/>
+          </a:p>
+        </p:txBody>
+      </p:sp>
+      <p:sp>
+        <p:nvSpPr>
+          <p:cNvPr id="12" name="Text 9"/>
+          <p:cNvSpPr/>
+          <p:nvPr/>
+        </p:nvSpPr>
+        <p:spPr>
+          <a:xfrm>
+            <a:off x="3504438" y="2971800"/>
+            <a:ext cx="2407158" cy="365760"/>
+          </a:xfrm>
+          <a:prstGeom prst="rect">
+            <a:avLst/>
+          </a:prstGeom>
+          <a:noFill/>
+          <a:ln/>
+        </p:spPr>
+        <p:txBody>
+          <a:bodyPr wrap="square" lIns="0" tIns="0" rIns="0" bIns="0" rtlCol="0" anchor="t"/>
+          <a:lstStyle/>
+          <a:p>
+            <a:pPr indent="0" marL="0">
+              <a:buNone/>
+            </a:pPr>
+            <a:r>
+              <a:rPr lang="en-US" sz="1600" b="1" dirty="0">
+                <a:solidFill>
+                  <a:srgbClr val="4636B0"/>
+                </a:solidFill>
+                <a:latin typeface="Sora" pitchFamily="34" charset="0"/>
+                <a:ea typeface="Sora" pitchFamily="34" charset="-122"/>
+                <a:cs typeface="Sora" pitchFamily="34" charset="-120"/>
+              </a:rPr>
+              <a:t>Dans l’heure</a:t>
+            </a:r>
+            <a:endParaRPr lang="en-US" sz="1600" dirty="0"/>
+          </a:p>
+        </p:txBody>
+      </p:sp>
+      <p:sp>
+        <p:nvSpPr>
+          <p:cNvPr id="13" name="Text 10"/>
+          <p:cNvSpPr/>
+          <p:nvPr/>
+        </p:nvSpPr>
+        <p:spPr>
+          <a:xfrm>
+            <a:off x="3504438" y="3364992"/>
+            <a:ext cx="2407158" cy="1828800"/>
+          </a:xfrm>
+          <a:prstGeom prst="rect">
+            <a:avLst/>
+          </a:prstGeom>
+          <a:noFill/>
+          <a:ln/>
+        </p:spPr>
+        <p:txBody>
+          <a:bodyPr wrap="square" lIns="0" tIns="0" rIns="0" bIns="0" rtlCol="0" anchor="t"/>
+          <a:lstStyle/>
+          <a:p>
             <a:pPr indent="0" marL="0">
               <a:lnSpc>
                 <a:spcPct val="118000"/>
               </a:lnSpc>
-              <a:spcAft>
-                <a:spcPts val="1200"/>
-              </a:spcAft>
-              <a:buNone/>
-            </a:pPr>
-            <a:r>
-              <a:rPr lang="en-US" sz="1250" dirty="0">
+              <a:buNone/>
+            </a:pPr>
+            <a:r>
+              <a:rPr lang="en-US" sz="1200" dirty="0">
                 <a:solidFill>
                   <a:srgbClr val="3D4556"/>
                 </a:solidFill>
@@ -2364,42 +2752,251 @@
                 <a:ea typeface="Inter" pitchFamily="34" charset="-122"/>
                 <a:cs typeface="Inter" pitchFamily="34" charset="-120"/>
               </a:rPr>
-              <a:t>Les données d'inventaire sont hébergées en Irlande. La politique de confidentialité est publique et les sous-traitants y sont nommés.</a:t>
-            </a:r>
-            <a:endParaRPr lang="en-US" sz="1250" dirty="0"/>
-          </a:p>
+              <a:t>Vous invitez votre équipe — prénom, nom, adresse. Chacun reçoit son lien, choisit son mot de passe et installe l'application.</a:t>
+            </a:r>
+            <a:endParaRPr lang="en-US" sz="1200" dirty="0"/>
+          </a:p>
+        </p:txBody>
+      </p:sp>
+      <p:sp>
+        <p:nvSpPr>
+          <p:cNvPr id="14" name="Text 11"/>
+          <p:cNvSpPr/>
+          <p:nvPr/>
+        </p:nvSpPr>
+        <p:spPr>
+          <a:xfrm>
+            <a:off x="6277356" y="2377440"/>
+            <a:ext cx="384048" cy="384048"/>
+          </a:xfrm>
+          <a:prstGeom prst="ellipse">
+            <a:avLst/>
+          </a:prstGeom>
+          <a:solidFill>
+            <a:srgbClr val="4636B0"/>
+          </a:solidFill>
+          <a:ln>
+            <a:solidFill>
+              <a:srgbClr val="4636B0"/>
+            </a:solidFill>
+          </a:ln>
+        </p:spPr>
+        <p:txBody>
+          <a:bodyPr wrap="square" lIns="0" tIns="0" rIns="0" bIns="0" rtlCol="0" anchor="ctr"/>
+          <a:lstStyle/>
+          <a:p>
+            <a:pPr algn="ctr" indent="0" marL="0">
+              <a:buNone/>
+            </a:pPr>
+            <a:r>
+              <a:rPr lang="en-US" sz="1200" b="1" dirty="0">
+                <a:solidFill>
+                  <a:srgbClr val="FFFFFF"/>
+                </a:solidFill>
+                <a:latin typeface="Sora" pitchFamily="34" charset="0"/>
+                <a:ea typeface="Sora" pitchFamily="34" charset="-122"/>
+                <a:cs typeface="Sora" pitchFamily="34" charset="-120"/>
+              </a:rPr>
+              <a:t>3</a:t>
+            </a:r>
+            <a:endParaRPr lang="en-US" sz="1200" dirty="0"/>
+          </a:p>
+        </p:txBody>
+      </p:sp>
+      <p:sp>
+        <p:nvSpPr>
+          <p:cNvPr id="15" name="Text 12"/>
+          <p:cNvSpPr/>
+          <p:nvPr/>
+        </p:nvSpPr>
+        <p:spPr>
+          <a:xfrm>
+            <a:off x="6277356" y="2971800"/>
+            <a:ext cx="2407158" cy="365760"/>
+          </a:xfrm>
+          <a:prstGeom prst="rect">
+            <a:avLst/>
+          </a:prstGeom>
+          <a:noFill/>
+          <a:ln/>
+        </p:spPr>
+        <p:txBody>
+          <a:bodyPr wrap="square" lIns="0" tIns="0" rIns="0" bIns="0" rtlCol="0" anchor="t"/>
+          <a:lstStyle/>
+          <a:p>
+            <a:pPr indent="0" marL="0">
+              <a:buNone/>
+            </a:pPr>
+            <a:r>
+              <a:rPr lang="en-US" sz="1600" b="1" dirty="0">
+                <a:solidFill>
+                  <a:srgbClr val="4636B0"/>
+                </a:solidFill>
+                <a:latin typeface="Sora" pitchFamily="34" charset="0"/>
+                <a:ea typeface="Sora" pitchFamily="34" charset="-122"/>
+                <a:cs typeface="Sora" pitchFamily="34" charset="-120"/>
+              </a:rPr>
+              <a:t>Le premier rayon</a:t>
+            </a:r>
+            <a:endParaRPr lang="en-US" sz="1600" dirty="0"/>
+          </a:p>
+        </p:txBody>
+      </p:sp>
+      <p:sp>
+        <p:nvSpPr>
+          <p:cNvPr id="16" name="Text 13"/>
+          <p:cNvSpPr/>
+          <p:nvPr/>
+        </p:nvSpPr>
+        <p:spPr>
+          <a:xfrm>
+            <a:off x="6277356" y="3364992"/>
+            <a:ext cx="2407158" cy="1828800"/>
+          </a:xfrm>
+          <a:prstGeom prst="rect">
+            <a:avLst/>
+          </a:prstGeom>
+          <a:noFill/>
+          <a:ln/>
+        </p:spPr>
+        <p:txBody>
+          <a:bodyPr wrap="square" lIns="0" tIns="0" rIns="0" bIns="0" rtlCol="0" anchor="t"/>
+          <a:lstStyle/>
           <a:p>
             <a:pPr indent="0" marL="0">
               <a:lnSpc>
                 <a:spcPct val="118000"/>
               </a:lnSpc>
-              <a:spcAft>
-                <a:spcPts val="1200"/>
-              </a:spcAft>
-              <a:buNone/>
-            </a:pPr>
-            <a:r>
-              <a:rPr lang="en-US" sz="1250" b="1" dirty="0">
-                <a:solidFill>
-                  <a:srgbClr val="0B0F19"/>
-                </a:solidFill>
-                <a:latin typeface="Inter" pitchFamily="34" charset="0"/>
-                <a:ea typeface="Inter" pitchFamily="34" charset="-122"/>
-                <a:cs typeface="Inter" pitchFamily="34" charset="-120"/>
-              </a:rPr>
-              <a:t>Le RGPD est dans le produit. </a:t>
-            </a:r>
+              <a:buNone/>
+            </a:pPr>
+            <a:r>
+              <a:rPr lang="en-US" sz="1200" dirty="0">
+                <a:solidFill>
+                  <a:srgbClr val="3D4556"/>
+                </a:solidFill>
+                <a:latin typeface="Inter" pitchFamily="34" charset="0"/>
+                <a:ea typeface="Inter" pitchFamily="34" charset="-122"/>
+                <a:cs typeface="Inter" pitchFamily="34" charset="-120"/>
+              </a:rPr>
+              <a:t>Vous importez vos fichiers, vous imprimez une planche de balises, et deux personnes comptent un rayon pour prendre la main.</a:t>
+            </a:r>
+            <a:endParaRPr lang="en-US" sz="1200" dirty="0"/>
+          </a:p>
+        </p:txBody>
+      </p:sp>
+      <p:sp>
+        <p:nvSpPr>
+          <p:cNvPr id="17" name="Text 14"/>
+          <p:cNvSpPr/>
+          <p:nvPr/>
+        </p:nvSpPr>
+        <p:spPr>
+          <a:xfrm>
+            <a:off x="9050274" y="2377440"/>
+            <a:ext cx="384048" cy="384048"/>
+          </a:xfrm>
+          <a:prstGeom prst="ellipse">
+            <a:avLst/>
+          </a:prstGeom>
+          <a:solidFill>
+            <a:srgbClr val="4636B0"/>
+          </a:solidFill>
+          <a:ln>
+            <a:solidFill>
+              <a:srgbClr val="4636B0"/>
+            </a:solidFill>
+          </a:ln>
+        </p:spPr>
+        <p:txBody>
+          <a:bodyPr wrap="square" lIns="0" tIns="0" rIns="0" bIns="0" rtlCol="0" anchor="ctr"/>
+          <a:lstStyle/>
+          <a:p>
+            <a:pPr algn="ctr" indent="0" marL="0">
+              <a:buNone/>
+            </a:pPr>
+            <a:r>
+              <a:rPr lang="en-US" sz="1200" b="1" dirty="0">
+                <a:solidFill>
+                  <a:srgbClr val="FFFFFF"/>
+                </a:solidFill>
+                <a:latin typeface="Sora" pitchFamily="34" charset="0"/>
+                <a:ea typeface="Sora" pitchFamily="34" charset="-122"/>
+                <a:cs typeface="Sora" pitchFamily="34" charset="-120"/>
+              </a:rPr>
+              <a:t>4</a:t>
+            </a:r>
+            <a:endParaRPr lang="en-US" sz="1200" dirty="0"/>
+          </a:p>
+        </p:txBody>
+      </p:sp>
+      <p:sp>
+        <p:nvSpPr>
+          <p:cNvPr id="18" name="Text 15"/>
+          <p:cNvSpPr/>
+          <p:nvPr/>
+        </p:nvSpPr>
+        <p:spPr>
+          <a:xfrm>
+            <a:off x="9050274" y="2971800"/>
+            <a:ext cx="2407158" cy="365760"/>
+          </a:xfrm>
+          <a:prstGeom prst="rect">
+            <a:avLst/>
+          </a:prstGeom>
+          <a:noFill/>
+          <a:ln/>
+        </p:spPr>
+        <p:txBody>
+          <a:bodyPr wrap="square" lIns="0" tIns="0" rIns="0" bIns="0" rtlCol="0" anchor="t"/>
+          <a:lstStyle/>
+          <a:p>
+            <a:pPr indent="0" marL="0">
+              <a:buNone/>
+            </a:pPr>
+            <a:r>
+              <a:rPr lang="en-US" sz="1600" b="1" dirty="0">
+                <a:solidFill>
+                  <a:srgbClr val="4636B0"/>
+                </a:solidFill>
+                <a:latin typeface="Sora" pitchFamily="34" charset="0"/>
+                <a:ea typeface="Sora" pitchFamily="34" charset="-122"/>
+                <a:cs typeface="Sora" pitchFamily="34" charset="-120"/>
+              </a:rPr>
+              <a:t>Ensuite</a:t>
+            </a:r>
+            <a:endParaRPr lang="en-US" sz="1600" dirty="0"/>
+          </a:p>
+        </p:txBody>
+      </p:sp>
+      <p:sp>
+        <p:nvSpPr>
+          <p:cNvPr id="19" name="Text 16"/>
+          <p:cNvSpPr/>
+          <p:nvPr/>
+        </p:nvSpPr>
+        <p:spPr>
+          <a:xfrm>
+            <a:off x="9050274" y="3364992"/>
+            <a:ext cx="2407158" cy="1828800"/>
+          </a:xfrm>
+          <a:prstGeom prst="rect">
+            <a:avLst/>
+          </a:prstGeom>
+          <a:noFill/>
+          <a:ln/>
+        </p:spPr>
+        <p:txBody>
+          <a:bodyPr wrap="square" lIns="0" tIns="0" rIns="0" bIns="0" rtlCol="0" anchor="t"/>
+          <a:lstStyle/>
+          <a:p>
             <a:pPr indent="0" marL="0">
               <a:lnSpc>
                 <a:spcPct val="118000"/>
               </a:lnSpc>
-              <a:spcAft>
-                <a:spcPts val="1200"/>
-              </a:spcAft>
-              <a:buNone/>
-            </a:pPr>
-            <a:r>
-              <a:rPr lang="en-US" sz="1250" dirty="0">
+              <a:buNone/>
+            </a:pPr>
+            <a:r>
+              <a:rPr lang="en-US" sz="1200" dirty="0">
                 <a:solidFill>
                   <a:srgbClr val="3D4556"/>
                 </a:solidFill>
@@ -2407,129 +3004,21 @@
                 <a:ea typeface="Inter" pitchFamily="34" charset="-122"/>
                 <a:cs typeface="Inter" pitchFamily="34" charset="-120"/>
               </a:rPr>
-              <a:t>Chaque personne peut télécharger ses données ou demander la suppression de son compte depuis son écran. Les clauses de sous-traitance sont fournies à la signature.</a:t>
-            </a:r>
-            <a:endParaRPr lang="en-US" sz="1250" dirty="0"/>
-          </a:p>
-        </p:txBody>
-      </p:sp>
-      <p:sp>
-        <p:nvSpPr>
-          <p:cNvPr id="8" name="Text 5"/>
-          <p:cNvSpPr/>
-          <p:nvPr/>
-        </p:nvSpPr>
-        <p:spPr>
-          <a:xfrm>
-            <a:off x="6368796" y="2286000"/>
-            <a:ext cx="5088636" cy="2926080"/>
-          </a:xfrm>
-          <a:prstGeom prst="rect">
-            <a:avLst/>
-          </a:prstGeom>
-          <a:noFill/>
-          <a:ln/>
-        </p:spPr>
-        <p:txBody>
-          <a:bodyPr wrap="square" lIns="0" tIns="0" rIns="0" bIns="0" rtlCol="0" anchor="t"/>
-          <a:lstStyle/>
-          <a:p>
-            <a:pPr indent="0" marL="0">
-              <a:lnSpc>
-                <a:spcPct val="118000"/>
-              </a:lnSpc>
-              <a:spcAft>
-                <a:spcPts val="1200"/>
-              </a:spcAft>
-              <a:buNone/>
-            </a:pPr>
-            <a:r>
-              <a:rPr lang="en-US" sz="1250" b="1" dirty="0">
-                <a:solidFill>
-                  <a:srgbClr val="0B0F19"/>
-                </a:solidFill>
-                <a:latin typeface="Inter" pitchFamily="34" charset="0"/>
-                <a:ea typeface="Inter" pitchFamily="34" charset="-122"/>
-                <a:cs typeface="Inter" pitchFamily="34" charset="-120"/>
-              </a:rPr>
-              <a:t>Les accès sont nominatifs. </a:t>
-            </a:r>
-            <a:pPr indent="0" marL="0">
-              <a:lnSpc>
-                <a:spcPct val="118000"/>
-              </a:lnSpc>
-              <a:spcAft>
-                <a:spcPts val="1200"/>
-              </a:spcAft>
-              <a:buNone/>
-            </a:pPr>
-            <a:r>
-              <a:rPr lang="en-US" sz="1250" dirty="0">
-                <a:solidFill>
-                  <a:srgbClr val="3D4556"/>
-                </a:solidFill>
-                <a:latin typeface="Inter" pitchFamily="34" charset="0"/>
-                <a:ea typeface="Inter" pitchFamily="34" charset="-122"/>
-                <a:cs typeface="Inter" pitchFamily="34" charset="-120"/>
-              </a:rPr>
-              <a:t>Pas d'inscription libre : on entre sur invitation. Administrateur, superviseur, compteur, chacun voit son périmètre. Double authentification pour qui le souhaite.</a:t>
-            </a:r>
-            <a:endParaRPr lang="en-US" sz="1250" dirty="0"/>
-          </a:p>
-          <a:p>
-            <a:pPr indent="0" marL="0">
-              <a:lnSpc>
-                <a:spcPct val="118000"/>
-              </a:lnSpc>
-              <a:spcAft>
-                <a:spcPts val="1200"/>
-              </a:spcAft>
-              <a:buNone/>
-            </a:pPr>
-            <a:r>
-              <a:rPr lang="en-US" sz="1250" b="1" dirty="0">
-                <a:solidFill>
-                  <a:srgbClr val="0B0F19"/>
-                </a:solidFill>
-                <a:latin typeface="Inter" pitchFamily="34" charset="0"/>
-                <a:ea typeface="Inter" pitchFamily="34" charset="-122"/>
-                <a:cs typeface="Inter" pitchFamily="34" charset="-120"/>
-              </a:rPr>
-              <a:t>Aucun traceur. </a:t>
-            </a:r>
-            <a:pPr indent="0" marL="0">
-              <a:lnSpc>
-                <a:spcPct val="118000"/>
-              </a:lnSpc>
-              <a:spcAft>
-                <a:spcPts val="1200"/>
-              </a:spcAft>
-              <a:buNone/>
-            </a:pPr>
-            <a:r>
-              <a:rPr lang="en-US" sz="1250" dirty="0">
-                <a:solidFill>
-                  <a:srgbClr val="3D4556"/>
-                </a:solidFill>
-                <a:latin typeface="Inter" pitchFamily="34" charset="0"/>
-                <a:ea typeface="Inter" pitchFamily="34" charset="-122"/>
-                <a:cs typeface="Inter" pitchFamily="34" charset="-120"/>
-              </a:rPr>
-              <a:t>Pas de cookie publicitaire, pas de mesure d'audience, pas de revente. L'outil travaille, il n'observe pas.</a:t>
-            </a:r>
-            <a:endParaRPr lang="en-US" sz="1250" dirty="0"/>
-          </a:p>
-        </p:txBody>
-      </p:sp>
-      <p:sp>
-        <p:nvSpPr>
-          <p:cNvPr id="9" name="Shape 6"/>
-          <p:cNvSpPr/>
-          <p:nvPr/>
-        </p:nvSpPr>
-        <p:spPr>
-          <a:xfrm>
-            <a:off x="731520" y="5257800"/>
+              <a:t>Vous comptez à votre rythme : un rayon par semaine, une marque, un magasin entier. Le prix ne bouge pas.</a:t>
+            </a:r>
+            <a:endParaRPr lang="en-US" sz="1200" dirty="0"/>
+          </a:p>
+        </p:txBody>
+      </p:sp>
+      <p:sp>
+        <p:nvSpPr>
+          <p:cNvPr id="20" name="Shape 17"/>
+          <p:cNvSpPr/>
+          <p:nvPr/>
+        </p:nvSpPr>
+        <p:spPr>
+          <a:xfrm>
+            <a:off x="731520" y="5120640"/>
             <a:ext cx="10725912" cy="914400"/>
           </a:xfrm>
           <a:prstGeom prst="roundRect">
@@ -2550,13 +3039,13 @@
       </p:sp>
       <p:sp>
         <p:nvSpPr>
-          <p:cNvPr id="10" name="Text 7"/>
-          <p:cNvSpPr/>
-          <p:nvPr/>
-        </p:nvSpPr>
-        <p:spPr>
-          <a:xfrm>
-            <a:off x="1005840" y="5422392"/>
+          <p:cNvPr id="21" name="Text 18"/>
+          <p:cNvSpPr/>
+          <p:nvPr/>
+        </p:nvSpPr>
+        <p:spPr>
+          <a:xfrm>
+            <a:off x="1005840" y="5285232"/>
             <a:ext cx="10177272" cy="228600"/>
           </a:xfrm>
           <a:prstGeom prst="rect">
@@ -2581,7 +3070,7 @@
                 <a:ea typeface="Inter" pitchFamily="34" charset="-122"/>
                 <a:cs typeface="Inter" pitchFamily="34" charset="-120"/>
               </a:rPr>
-              <a:t>Pour votre direction informatique</a:t>
+              <a:t>Pas de projet informatique</a:t>
             </a:r>
             <a:endParaRPr lang="en-US" sz="950" dirty="0"/>
           </a:p>
@@ -2589,13 +3078,13 @@
       </p:sp>
       <p:sp>
         <p:nvSpPr>
-          <p:cNvPr id="11" name="Text 8"/>
-          <p:cNvSpPr/>
-          <p:nvPr/>
-        </p:nvSpPr>
-        <p:spPr>
-          <a:xfrm>
-            <a:off x="1005840" y="5678424"/>
+          <p:cNvPr id="22" name="Text 19"/>
+          <p:cNvSpPr/>
+          <p:nvPr/>
+        </p:nvSpPr>
+        <p:spPr>
+          <a:xfrm>
+            <a:off x="1005840" y="5541264"/>
             <a:ext cx="10177272" cy="365760"/>
           </a:xfrm>
           <a:prstGeom prst="rect">
@@ -2623,7 +3112,7 @@
                 <a:ea typeface="Inter" pitchFamily="34" charset="-122"/>
                 <a:cs typeface="Inter" pitchFamily="34" charset="-120"/>
               </a:rPr>
-              <a:t>Un dossier technique séparé répond aux questions d'une DSI : architecture, hébergement, déploiement par votre catalogue d'entreprise, comptes, sécurité. Demandez-le.</a:t>
+              <a:t>Aucun serveur à installer, aucune intégration obligatoire, aucun développement. L'échange se fait par fichiers : vous importez un CSV ou un Excel, vous récupérez un Excel.</a:t>
             </a:r>
             <a:endParaRPr lang="en-US" sz="1150" dirty="0"/>
           </a:p>
@@ -2631,7 +3120,7 @@
       </p:sp>
       <p:sp>
         <p:nvSpPr>
-          <p:cNvPr id="12" name="Text 9"/>
+          <p:cNvPr id="23" name="Text 20"/>
           <p:cNvSpPr/>
           <p:nvPr/>
         </p:nvSpPr>
@@ -2670,7 +3159,7 @@
       </p:sp>
       <p:sp>
         <p:nvSpPr>
-          <p:cNvPr id="13" name="Text 10"/>
+          <p:cNvPr id="24" name="Text 21"/>
           <p:cNvSpPr/>
           <p:nvPr/>
         </p:nvSpPr>
@@ -2835,7 +3324,7 @@
                 <a:ea typeface="Inter" pitchFamily="34" charset="-122"/>
                 <a:cs typeface="Inter" pitchFamily="34" charset="-120"/>
               </a:rPr>
-              <a:t>L'offre</a:t>
+              <a:t>Confiance</a:t>
             </a:r>
             <a:endParaRPr lang="en-US" sz="1000" dirty="0"/>
           </a:p>
@@ -2874,8 +3363,8 @@
         </p:nvSpPr>
         <p:spPr>
           <a:xfrm>
-            <a:off x="731520" y="1325880"/>
-            <a:ext cx="4206240" cy="1645920"/>
+            <a:off x="731520" y="1280160"/>
+            <a:ext cx="10725912" cy="822960"/>
           </a:xfrm>
           <a:prstGeom prst="rect">
             <a:avLst/>
@@ -2894,7 +3383,7 @@
               <a:buNone/>
             </a:pPr>
             <a:r>
-              <a:rPr lang="en-US" sz="2400" b="1" dirty="0">
+              <a:rPr lang="en-US" sz="2600" b="1" dirty="0">
                 <a:solidFill>
                   <a:srgbClr val="4636B0"/>
                 </a:solidFill>
@@ -2902,9 +3391,9 @@
                 <a:ea typeface="Sora" pitchFamily="34" charset="-122"/>
                 <a:cs typeface="Sora" pitchFamily="34" charset="-120"/>
               </a:rPr>
-              <a:t>Une licence par magasin, à l’année, comptages illimités.</a:t>
-            </a:r>
-            <a:endParaRPr lang="en-US" sz="2400" dirty="0"/>
+              <a:t>Pensé pour une entreprise, pas pour un particulier</a:t>
+            </a:r>
+            <a:endParaRPr lang="en-US" sz="2600" dirty="0"/>
           </a:p>
         </p:txBody>
       </p:sp>
@@ -2916,65 +3405,46 @@
         </p:nvSpPr>
         <p:spPr>
           <a:xfrm>
-            <a:off x="731520" y="3063240"/>
-            <a:ext cx="4206240" cy="1188720"/>
-          </a:xfrm>
-          <a:prstGeom prst="rect">
-            <a:avLst/>
-          </a:prstGeom>
-          <a:noFill/>
-          <a:ln/>
-        </p:spPr>
-        <p:txBody>
-          <a:bodyPr wrap="square" lIns="0" tIns="0" rIns="0" bIns="0" rtlCol="0" anchor="t"/>
-          <a:lstStyle/>
-          <a:p>
-            <a:pPr algn="l" indent="0" marL="0">
+            <a:off x="731520" y="2286000"/>
+            <a:ext cx="5088636" cy="2926080"/>
+          </a:xfrm>
+          <a:prstGeom prst="rect">
+            <a:avLst/>
+          </a:prstGeom>
+          <a:noFill/>
+          <a:ln/>
+        </p:spPr>
+        <p:txBody>
+          <a:bodyPr wrap="square" lIns="0" tIns="0" rIns="0" bIns="0" rtlCol="0" anchor="t"/>
+          <a:lstStyle/>
+          <a:p>
+            <a:pPr indent="0" marL="0">
               <a:lnSpc>
                 <a:spcPct val="118000"/>
               </a:lnSpc>
-              <a:buNone/>
-            </a:pPr>
-            <a:r>
-              <a:rPr lang="en-US" sz="1250" dirty="0">
-                <a:solidFill>
-                  <a:srgbClr val="3D4556"/>
-                </a:solidFill>
-                <a:latin typeface="Inter" pitchFamily="34" charset="0"/>
-                <a:ea typeface="Inter" pitchFamily="34" charset="-122"/>
-                <a:cs typeface="Inter" pitchFamily="34" charset="-120"/>
-              </a:rPr>
-              <a:t>Le prix suit la taille de votre stock, en unités physiques. Il ne dépend ni du nombre de compteurs, ni du nombre d'inventaires dans l'année.</a:t>
-            </a:r>
-            <a:endParaRPr lang="en-US" sz="1250" dirty="0"/>
-          </a:p>
-        </p:txBody>
-      </p:sp>
-      <p:sp>
-        <p:nvSpPr>
-          <p:cNvPr id="8" name="Text 5"/>
-          <p:cNvSpPr/>
-          <p:nvPr/>
-        </p:nvSpPr>
-        <p:spPr>
-          <a:xfrm>
-            <a:off x="731520" y="4206240"/>
-            <a:ext cx="4206240" cy="1097280"/>
-          </a:xfrm>
-          <a:prstGeom prst="rect">
-            <a:avLst/>
-          </a:prstGeom>
-          <a:noFill/>
-          <a:ln/>
-        </p:spPr>
-        <p:txBody>
-          <a:bodyPr wrap="square" lIns="0" tIns="0" rIns="0" bIns="0" rtlCol="0" anchor="t"/>
-          <a:lstStyle/>
-          <a:p>
-            <a:pPr algn="l" indent="0" marL="0">
+              <a:spcAft>
+                <a:spcPts val="1200"/>
+              </a:spcAft>
+              <a:buNone/>
+            </a:pPr>
+            <a:r>
+              <a:rPr lang="en-US" sz="1250" b="1" dirty="0">
+                <a:solidFill>
+                  <a:srgbClr val="0B0F19"/>
+                </a:solidFill>
+                <a:latin typeface="Inter" pitchFamily="34" charset="0"/>
+                <a:ea typeface="Inter" pitchFamily="34" charset="-122"/>
+                <a:cs typeface="Inter" pitchFamily="34" charset="-120"/>
+              </a:rPr>
+              <a:t>Les données restent en Europe. </a:t>
+            </a:r>
+            <a:pPr indent="0" marL="0">
               <a:lnSpc>
                 <a:spcPct val="118000"/>
               </a:lnSpc>
+              <a:spcAft>
+                <a:spcPts val="1200"/>
+              </a:spcAft>
               <a:buNone/>
             </a:pPr>
             <a:r>
@@ -2986,108 +3456,185 @@
                 <a:ea typeface="Inter" pitchFamily="34" charset="-122"/>
                 <a:cs typeface="Inter" pitchFamily="34" charset="-120"/>
               </a:rPr>
-              <a:t>Tout est compris : l'application, le tableau de bord, les mises à jour. Un réseau active une licence par magasin, à son rythme.</a:t>
+              <a:t>Les données d'inventaire sont hébergées en Irlande. La politique de confidentialité est publique et les sous-traitants y sont nommés.</a:t>
             </a:r>
             <a:endParaRPr lang="en-US" sz="1250" dirty="0"/>
           </a:p>
-        </p:txBody>
-      </p:sp>
-      <p:sp>
-        <p:nvSpPr>
-          <p:cNvPr id="9" name="Text 6"/>
-          <p:cNvSpPr/>
-          <p:nvPr/>
-        </p:nvSpPr>
-        <p:spPr>
-          <a:xfrm>
-            <a:off x="5394960" y="1371600"/>
-            <a:ext cx="2743200" cy="274320"/>
-          </a:xfrm>
-          <a:prstGeom prst="rect">
-            <a:avLst/>
-          </a:prstGeom>
-          <a:noFill/>
-          <a:ln/>
-        </p:spPr>
-        <p:txBody>
-          <a:bodyPr wrap="square" lIns="0" tIns="0" rIns="0" bIns="0" rtlCol="0" anchor="t"/>
-          <a:lstStyle/>
-          <a:p>
-            <a:pPr indent="0" marL="0">
-              <a:buNone/>
-            </a:pPr>
-            <a:r>
-              <a:rPr lang="en-US" sz="1000" b="1" dirty="0">
-                <a:solidFill>
-                  <a:srgbClr val="5B6475"/>
-                </a:solidFill>
-                <a:latin typeface="Inter" pitchFamily="34" charset="0"/>
-                <a:ea typeface="Inter" pitchFamily="34" charset="-122"/>
-                <a:cs typeface="Inter" pitchFamily="34" charset="-120"/>
-              </a:rPr>
-              <a:t>Profil du magasin</a:t>
-            </a:r>
-            <a:endParaRPr lang="en-US" sz="1000" dirty="0"/>
-          </a:p>
-        </p:txBody>
-      </p:sp>
-      <p:sp>
-        <p:nvSpPr>
-          <p:cNvPr id="10" name="Text 7"/>
-          <p:cNvSpPr/>
-          <p:nvPr/>
-        </p:nvSpPr>
-        <p:spPr>
-          <a:xfrm>
-            <a:off x="8531352" y="1371600"/>
-            <a:ext cx="2926080" cy="274320"/>
-          </a:xfrm>
-          <a:prstGeom prst="rect">
-            <a:avLst/>
-          </a:prstGeom>
-          <a:noFill/>
-          <a:ln/>
-        </p:spPr>
-        <p:txBody>
-          <a:bodyPr wrap="square" lIns="0" tIns="0" rIns="0" bIns="0" rtlCol="0" anchor="t"/>
-          <a:lstStyle/>
-          <a:p>
-            <a:pPr algn="r" indent="0" marL="0">
-              <a:buNone/>
-            </a:pPr>
-            <a:r>
-              <a:rPr lang="en-US" sz="1000" b="1" dirty="0">
-                <a:solidFill>
-                  <a:srgbClr val="5B6475"/>
-                </a:solidFill>
-                <a:latin typeface="Inter" pitchFamily="34" charset="0"/>
-                <a:ea typeface="Inter" pitchFamily="34" charset="-122"/>
-                <a:cs typeface="Inter" pitchFamily="34" charset="-120"/>
-              </a:rPr>
-              <a:t>par an et par magasin, HT</a:t>
-            </a:r>
-            <a:endParaRPr lang="en-US" sz="1000" dirty="0"/>
-          </a:p>
-        </p:txBody>
-      </p:sp>
-      <p:sp>
-        <p:nvSpPr>
-          <p:cNvPr id="11" name="Shape 8"/>
-          <p:cNvSpPr/>
-          <p:nvPr/>
-        </p:nvSpPr>
-        <p:spPr>
-          <a:xfrm>
-            <a:off x="5394960" y="1719072"/>
-            <a:ext cx="6062472" cy="0"/>
-          </a:xfrm>
-          <a:prstGeom prst="line">
-            <a:avLst/>
-          </a:prstGeom>
-          <a:noFill/>
-          <a:ln w="9525">
+          <a:p>
+            <a:pPr indent="0" marL="0">
+              <a:lnSpc>
+                <a:spcPct val="118000"/>
+              </a:lnSpc>
+              <a:spcAft>
+                <a:spcPts val="1200"/>
+              </a:spcAft>
+              <a:buNone/>
+            </a:pPr>
+            <a:r>
+              <a:rPr lang="en-US" sz="1250" b="1" dirty="0">
+                <a:solidFill>
+                  <a:srgbClr val="0B0F19"/>
+                </a:solidFill>
+                <a:latin typeface="Inter" pitchFamily="34" charset="0"/>
+                <a:ea typeface="Inter" pitchFamily="34" charset="-122"/>
+                <a:cs typeface="Inter" pitchFamily="34" charset="-120"/>
+              </a:rPr>
+              <a:t>Le RGPD est dans le produit. </a:t>
+            </a:r>
+            <a:pPr indent="0" marL="0">
+              <a:lnSpc>
+                <a:spcPct val="118000"/>
+              </a:lnSpc>
+              <a:spcAft>
+                <a:spcPts val="1200"/>
+              </a:spcAft>
+              <a:buNone/>
+            </a:pPr>
+            <a:r>
+              <a:rPr lang="en-US" sz="1250" dirty="0">
+                <a:solidFill>
+                  <a:srgbClr val="3D4556"/>
+                </a:solidFill>
+                <a:latin typeface="Inter" pitchFamily="34" charset="0"/>
+                <a:ea typeface="Inter" pitchFamily="34" charset="-122"/>
+                <a:cs typeface="Inter" pitchFamily="34" charset="-120"/>
+              </a:rPr>
+              <a:t>Chaque personne peut télécharger ses données ou demander la suppression de son compte depuis son écran. Les clauses de sous-traitance sont fournies à la signature.</a:t>
+            </a:r>
+            <a:endParaRPr lang="en-US" sz="1250" dirty="0"/>
+          </a:p>
+        </p:txBody>
+      </p:sp>
+      <p:sp>
+        <p:nvSpPr>
+          <p:cNvPr id="8" name="Text 5"/>
+          <p:cNvSpPr/>
+          <p:nvPr/>
+        </p:nvSpPr>
+        <p:spPr>
+          <a:xfrm>
+            <a:off x="6368796" y="2286000"/>
+            <a:ext cx="5088636" cy="2926080"/>
+          </a:xfrm>
+          <a:prstGeom prst="rect">
+            <a:avLst/>
+          </a:prstGeom>
+          <a:noFill/>
+          <a:ln/>
+        </p:spPr>
+        <p:txBody>
+          <a:bodyPr wrap="square" lIns="0" tIns="0" rIns="0" bIns="0" rtlCol="0" anchor="t"/>
+          <a:lstStyle/>
+          <a:p>
+            <a:pPr indent="0" marL="0">
+              <a:lnSpc>
+                <a:spcPct val="118000"/>
+              </a:lnSpc>
+              <a:spcAft>
+                <a:spcPts val="1200"/>
+              </a:spcAft>
+              <a:buNone/>
+            </a:pPr>
+            <a:r>
+              <a:rPr lang="en-US" sz="1250" b="1" dirty="0">
+                <a:solidFill>
+                  <a:srgbClr val="0B0F19"/>
+                </a:solidFill>
+                <a:latin typeface="Inter" pitchFamily="34" charset="0"/>
+                <a:ea typeface="Inter" pitchFamily="34" charset="-122"/>
+                <a:cs typeface="Inter" pitchFamily="34" charset="-120"/>
+              </a:rPr>
+              <a:t>Les accès sont nominatifs. </a:t>
+            </a:r>
+            <a:pPr indent="0" marL="0">
+              <a:lnSpc>
+                <a:spcPct val="118000"/>
+              </a:lnSpc>
+              <a:spcAft>
+                <a:spcPts val="1200"/>
+              </a:spcAft>
+              <a:buNone/>
+            </a:pPr>
+            <a:r>
+              <a:rPr lang="en-US" sz="1250" dirty="0">
+                <a:solidFill>
+                  <a:srgbClr val="3D4556"/>
+                </a:solidFill>
+                <a:latin typeface="Inter" pitchFamily="34" charset="0"/>
+                <a:ea typeface="Inter" pitchFamily="34" charset="-122"/>
+                <a:cs typeface="Inter" pitchFamily="34" charset="-120"/>
+              </a:rPr>
+              <a:t>Pas d'inscription libre : on entre sur invitation. Administrateur, superviseur, compteur, chacun voit son périmètre. Double authentification pour qui le souhaite.</a:t>
+            </a:r>
+            <a:endParaRPr lang="en-US" sz="1250" dirty="0"/>
+          </a:p>
+          <a:p>
+            <a:pPr indent="0" marL="0">
+              <a:lnSpc>
+                <a:spcPct val="118000"/>
+              </a:lnSpc>
+              <a:spcAft>
+                <a:spcPts val="1200"/>
+              </a:spcAft>
+              <a:buNone/>
+            </a:pPr>
+            <a:r>
+              <a:rPr lang="en-US" sz="1250" b="1" dirty="0">
+                <a:solidFill>
+                  <a:srgbClr val="0B0F19"/>
+                </a:solidFill>
+                <a:latin typeface="Inter" pitchFamily="34" charset="0"/>
+                <a:ea typeface="Inter" pitchFamily="34" charset="-122"/>
+                <a:cs typeface="Inter" pitchFamily="34" charset="-120"/>
+              </a:rPr>
+              <a:t>Aucun traceur. </a:t>
+            </a:r>
+            <a:pPr indent="0" marL="0">
+              <a:lnSpc>
+                <a:spcPct val="118000"/>
+              </a:lnSpc>
+              <a:spcAft>
+                <a:spcPts val="1200"/>
+              </a:spcAft>
+              <a:buNone/>
+            </a:pPr>
+            <a:r>
+              <a:rPr lang="en-US" sz="1250" dirty="0">
+                <a:solidFill>
+                  <a:srgbClr val="3D4556"/>
+                </a:solidFill>
+                <a:latin typeface="Inter" pitchFamily="34" charset="0"/>
+                <a:ea typeface="Inter" pitchFamily="34" charset="-122"/>
+                <a:cs typeface="Inter" pitchFamily="34" charset="-120"/>
+              </a:rPr>
+              <a:t>Pas de cookie publicitaire, pas de mesure d'audience, pas de revente. L'outil travaille, il n'observe pas.</a:t>
+            </a:r>
+            <a:endParaRPr lang="en-US" sz="1250" dirty="0"/>
+          </a:p>
+        </p:txBody>
+      </p:sp>
+      <p:sp>
+        <p:nvSpPr>
+          <p:cNvPr id="9" name="Shape 6"/>
+          <p:cNvSpPr/>
+          <p:nvPr/>
+        </p:nvSpPr>
+        <p:spPr>
+          <a:xfrm>
+            <a:off x="731520" y="5257800"/>
+            <a:ext cx="10725912" cy="914400"/>
+          </a:xfrm>
+          <a:prstGeom prst="roundRect">
+            <a:avLst>
+              <a:gd name="adj" fmla="val 8000"/>
+            </a:avLst>
+          </a:prstGeom>
+          <a:solidFill>
+            <a:srgbClr val="F4F5F9"/>
+          </a:solidFill>
+          <a:ln w="12700">
             <a:solidFill>
-              <a:srgbClr val="E3E6EE"/>
+              <a:srgbClr val="F4F5F9"/>
             </a:solidFill>
             <a:prstDash val="solid"/>
           </a:ln>
@@ -3095,911 +3642,88 @@
       </p:sp>
       <p:sp>
         <p:nvSpPr>
+          <p:cNvPr id="10" name="Text 7"/>
+          <p:cNvSpPr/>
+          <p:nvPr/>
+        </p:nvSpPr>
+        <p:spPr>
+          <a:xfrm>
+            <a:off x="1005840" y="5422392"/>
+            <a:ext cx="10177272" cy="228600"/>
+          </a:xfrm>
+          <a:prstGeom prst="rect">
+            <a:avLst/>
+          </a:prstGeom>
+          <a:noFill/>
+          <a:ln/>
+        </p:spPr>
+        <p:txBody>
+          <a:bodyPr wrap="square" lIns="0" tIns="0" rIns="0" bIns="0" rtlCol="0" anchor="t"/>
+          <a:lstStyle/>
+          <a:p>
+            <a:pPr indent="0" marL="0">
+              <a:buNone/>
+            </a:pPr>
+            <a:r>
+              <a:rPr lang="en-US" sz="950" b="1" dirty="0">
+                <a:solidFill>
+                  <a:srgbClr val="5B6475"/>
+                </a:solidFill>
+                <a:latin typeface="Inter" pitchFamily="34" charset="0"/>
+                <a:ea typeface="Inter" pitchFamily="34" charset="-122"/>
+                <a:cs typeface="Inter" pitchFamily="34" charset="-120"/>
+              </a:rPr>
+              <a:t>Pour votre direction informatique</a:t>
+            </a:r>
+            <a:endParaRPr lang="en-US" sz="950" dirty="0"/>
+          </a:p>
+        </p:txBody>
+      </p:sp>
+      <p:sp>
+        <p:nvSpPr>
+          <p:cNvPr id="11" name="Text 8"/>
+          <p:cNvSpPr/>
+          <p:nvPr/>
+        </p:nvSpPr>
+        <p:spPr>
+          <a:xfrm>
+            <a:off x="1005840" y="5678424"/>
+            <a:ext cx="10177272" cy="365760"/>
+          </a:xfrm>
+          <a:prstGeom prst="rect">
+            <a:avLst/>
+          </a:prstGeom>
+          <a:noFill/>
+          <a:ln/>
+        </p:spPr>
+        <p:txBody>
+          <a:bodyPr wrap="square" lIns="0" tIns="0" rIns="0" bIns="0" rtlCol="0" anchor="t"/>
+          <a:lstStyle/>
+          <a:p>
+            <a:pPr indent="0" marL="0">
+              <a:lnSpc>
+                <a:spcPct val="115000"/>
+              </a:lnSpc>
+              <a:buNone/>
+            </a:pPr>
+            <a:r>
+              <a:rPr lang="en-US" sz="1150" i="1" dirty="0">
+                <a:solidFill>
+                  <a:srgbClr val="3D4556"/>
+                </a:solidFill>
+                <a:latin typeface="Inter" pitchFamily="34" charset="0"/>
+                <a:ea typeface="Inter" pitchFamily="34" charset="-122"/>
+                <a:cs typeface="Inter" pitchFamily="34" charset="-120"/>
+              </a:rPr>
+              <a:t>Un dossier technique séparé répond aux questions d'une DSI : architecture, hébergement, distribution de l'application, mise en place, comptes, sécurité. Demandez-le.</a:t>
+            </a:r>
+            <a:endParaRPr lang="en-US" sz="1150" dirty="0"/>
+          </a:p>
+        </p:txBody>
+      </p:sp>
+      <p:sp>
+        <p:nvSpPr>
           <p:cNvPr id="12" name="Text 9"/>
-          <p:cNvSpPr/>
-          <p:nvPr/>
-        </p:nvSpPr>
-        <p:spPr>
-          <a:xfrm>
-            <a:off x="5394960" y="1828800"/>
-            <a:ext cx="3291840" cy="274320"/>
-          </a:xfrm>
-          <a:prstGeom prst="rect">
-            <a:avLst/>
-          </a:prstGeom>
-          <a:noFill/>
-          <a:ln/>
-        </p:spPr>
-        <p:txBody>
-          <a:bodyPr wrap="square" lIns="0" tIns="0" rIns="0" bIns="0" rtlCol="0" anchor="t"/>
-          <a:lstStyle/>
-          <a:p>
-            <a:pPr indent="0" marL="0">
-              <a:buNone/>
-            </a:pPr>
-            <a:r>
-              <a:rPr lang="en-US" sz="1350" b="1" dirty="0">
-                <a:solidFill>
-                  <a:srgbClr val="0B0F19"/>
-                </a:solidFill>
-                <a:latin typeface="Sora" pitchFamily="34" charset="0"/>
-                <a:ea typeface="Sora" pitchFamily="34" charset="-122"/>
-                <a:cs typeface="Sora" pitchFamily="34" charset="-120"/>
-              </a:rPr>
-              <a:t>Boutique</a:t>
-            </a:r>
-            <a:endParaRPr lang="en-US" sz="1350" dirty="0"/>
-          </a:p>
-        </p:txBody>
-      </p:sp>
-      <p:sp>
-        <p:nvSpPr>
-          <p:cNvPr id="13" name="Text 10"/>
-          <p:cNvSpPr/>
-          <p:nvPr/>
-        </p:nvSpPr>
-        <p:spPr>
-          <a:xfrm>
-            <a:off x="5394960" y="2103120"/>
-            <a:ext cx="3291840" cy="237744"/>
-          </a:xfrm>
-          <a:prstGeom prst="rect">
-            <a:avLst/>
-          </a:prstGeom>
-          <a:noFill/>
-          <a:ln/>
-        </p:spPr>
-        <p:txBody>
-          <a:bodyPr wrap="square" lIns="0" tIns="0" rIns="0" bIns="0" rtlCol="0" anchor="t"/>
-          <a:lstStyle/>
-          <a:p>
-            <a:pPr indent="0" marL="0">
-              <a:buNone/>
-            </a:pPr>
-            <a:r>
-              <a:rPr lang="en-US" sz="1050" dirty="0">
-                <a:solidFill>
-                  <a:srgbClr val="5B6475"/>
-                </a:solidFill>
-                <a:latin typeface="Inter" pitchFamily="34" charset="0"/>
-                <a:ea typeface="Inter" pitchFamily="34" charset="-122"/>
-                <a:cs typeface="Inter" pitchFamily="34" charset="-120"/>
-              </a:rPr>
-              <a:t>jusqu’à 10 000 unités</a:t>
-            </a:r>
-            <a:endParaRPr lang="en-US" sz="1050" dirty="0"/>
-          </a:p>
-        </p:txBody>
-      </p:sp>
-      <p:sp>
-        <p:nvSpPr>
-          <p:cNvPr id="14" name="Text 11"/>
-          <p:cNvSpPr/>
-          <p:nvPr/>
-        </p:nvSpPr>
-        <p:spPr>
-          <a:xfrm>
-            <a:off x="8531352" y="1828800"/>
-            <a:ext cx="2926080" cy="457200"/>
-          </a:xfrm>
-          <a:prstGeom prst="rect">
-            <a:avLst/>
-          </a:prstGeom>
-          <a:noFill/>
-          <a:ln/>
-        </p:spPr>
-        <p:txBody>
-          <a:bodyPr wrap="square" lIns="0" tIns="0" rIns="0" bIns="0" rtlCol="0" anchor="t"/>
-          <a:lstStyle/>
-          <a:p>
-            <a:pPr algn="r" indent="0" marL="0">
-              <a:buNone/>
-            </a:pPr>
-            <a:r>
-              <a:rPr lang="en-US" sz="2000" b="1" dirty="0">
-                <a:solidFill>
-                  <a:srgbClr val="4636B0"/>
-                </a:solidFill>
-                <a:latin typeface="Sora" pitchFamily="34" charset="0"/>
-                <a:ea typeface="Sora" pitchFamily="34" charset="-122"/>
-                <a:cs typeface="Sora" pitchFamily="34" charset="-120"/>
-              </a:rPr>
-              <a:t>2 100 €</a:t>
-            </a:r>
-            <a:endParaRPr lang="en-US" sz="2000" dirty="0"/>
-          </a:p>
-        </p:txBody>
-      </p:sp>
-      <p:sp>
-        <p:nvSpPr>
-          <p:cNvPr id="15" name="Shape 12"/>
-          <p:cNvSpPr/>
-          <p:nvPr/>
-        </p:nvSpPr>
-        <p:spPr>
-          <a:xfrm>
-            <a:off x="5394960" y="2377440"/>
-            <a:ext cx="6062472" cy="0"/>
-          </a:xfrm>
-          <a:prstGeom prst="line">
-            <a:avLst/>
-          </a:prstGeom>
-          <a:noFill/>
-          <a:ln w="9525">
-            <a:solidFill>
-              <a:srgbClr val="E3E6EE"/>
-            </a:solidFill>
-            <a:prstDash val="solid"/>
-          </a:ln>
-        </p:spPr>
-      </p:sp>
-      <p:sp>
-        <p:nvSpPr>
-          <p:cNvPr id="16" name="Shape 13"/>
-          <p:cNvSpPr/>
-          <p:nvPr/>
-        </p:nvSpPr>
-        <p:spPr>
-          <a:xfrm>
-            <a:off x="5257800" y="2395728"/>
-            <a:ext cx="6336792" cy="621792"/>
-          </a:xfrm>
-          <a:prstGeom prst="rect">
-            <a:avLst/>
-          </a:prstGeom>
-          <a:solidFill>
-            <a:srgbClr val="EEEEFC"/>
-          </a:solidFill>
-          <a:ln w="12700">
-            <a:solidFill>
-              <a:srgbClr val="EEEEFC"/>
-            </a:solidFill>
-            <a:prstDash val="solid"/>
-          </a:ln>
-        </p:spPr>
-      </p:sp>
-      <p:sp>
-        <p:nvSpPr>
-          <p:cNvPr id="17" name="Text 14"/>
-          <p:cNvSpPr/>
-          <p:nvPr/>
-        </p:nvSpPr>
-        <p:spPr>
-          <a:xfrm>
-            <a:off x="5394960" y="2487168"/>
-            <a:ext cx="3291840" cy="274320"/>
-          </a:xfrm>
-          <a:prstGeom prst="rect">
-            <a:avLst/>
-          </a:prstGeom>
-          <a:noFill/>
-          <a:ln/>
-        </p:spPr>
-        <p:txBody>
-          <a:bodyPr wrap="square" lIns="0" tIns="0" rIns="0" bIns="0" rtlCol="0" anchor="t"/>
-          <a:lstStyle/>
-          <a:p>
-            <a:pPr indent="0" marL="0">
-              <a:buNone/>
-            </a:pPr>
-            <a:r>
-              <a:rPr lang="en-US" sz="1350" b="1" dirty="0">
-                <a:solidFill>
-                  <a:srgbClr val="0B0F19"/>
-                </a:solidFill>
-                <a:latin typeface="Sora" pitchFamily="34" charset="0"/>
-                <a:ea typeface="Sora" pitchFamily="34" charset="-122"/>
-                <a:cs typeface="Sora" pitchFamily="34" charset="-120"/>
-              </a:rPr>
-              <a:t>Magasin</a:t>
-            </a:r>
-            <a:endParaRPr lang="en-US" sz="1350" dirty="0"/>
-          </a:p>
-        </p:txBody>
-      </p:sp>
-      <p:sp>
-        <p:nvSpPr>
-          <p:cNvPr id="18" name="Text 15"/>
-          <p:cNvSpPr/>
-          <p:nvPr/>
-        </p:nvSpPr>
-        <p:spPr>
-          <a:xfrm>
-            <a:off x="5394960" y="2761488"/>
-            <a:ext cx="3291840" cy="237744"/>
-          </a:xfrm>
-          <a:prstGeom prst="rect">
-            <a:avLst/>
-          </a:prstGeom>
-          <a:noFill/>
-          <a:ln/>
-        </p:spPr>
-        <p:txBody>
-          <a:bodyPr wrap="square" lIns="0" tIns="0" rIns="0" bIns="0" rtlCol="0" anchor="t"/>
-          <a:lstStyle/>
-          <a:p>
-            <a:pPr indent="0" marL="0">
-              <a:buNone/>
-            </a:pPr>
-            <a:r>
-              <a:rPr lang="en-US" sz="1050" dirty="0">
-                <a:solidFill>
-                  <a:srgbClr val="5B6475"/>
-                </a:solidFill>
-                <a:latin typeface="Inter" pitchFamily="34" charset="0"/>
-                <a:ea typeface="Inter" pitchFamily="34" charset="-122"/>
-                <a:cs typeface="Inter" pitchFamily="34" charset="-120"/>
-              </a:rPr>
-              <a:t>10 001 à 50 000 unités</a:t>
-            </a:r>
-            <a:endParaRPr lang="en-US" sz="1050" dirty="0"/>
-          </a:p>
-        </p:txBody>
-      </p:sp>
-      <p:sp>
-        <p:nvSpPr>
-          <p:cNvPr id="19" name="Text 16"/>
-          <p:cNvSpPr/>
-          <p:nvPr/>
-        </p:nvSpPr>
-        <p:spPr>
-          <a:xfrm>
-            <a:off x="8686800" y="2578608"/>
-            <a:ext cx="1645920" cy="274320"/>
-          </a:xfrm>
-          <a:prstGeom prst="rect">
-            <a:avLst/>
-          </a:prstGeom>
-          <a:noFill/>
-          <a:ln/>
-        </p:spPr>
-        <p:txBody>
-          <a:bodyPr wrap="square" lIns="0" tIns="0" rIns="0" bIns="0" rtlCol="0" anchor="t"/>
-          <a:lstStyle/>
-          <a:p>
-            <a:pPr indent="0" marL="0">
-              <a:buNone/>
-            </a:pPr>
-            <a:r>
-              <a:rPr lang="en-US" sz="1000" i="1" dirty="0">
-                <a:solidFill>
-                  <a:srgbClr val="6366F1"/>
-                </a:solidFill>
-                <a:latin typeface="Inter" pitchFamily="34" charset="0"/>
-                <a:ea typeface="Inter" pitchFamily="34" charset="-122"/>
-                <a:cs typeface="Inter" pitchFamily="34" charset="-120"/>
-              </a:rPr>
-              <a:t>le plus courant</a:t>
-            </a:r>
-            <a:endParaRPr lang="en-US" sz="1000" dirty="0"/>
-          </a:p>
-        </p:txBody>
-      </p:sp>
-      <p:sp>
-        <p:nvSpPr>
-          <p:cNvPr id="20" name="Text 17"/>
-          <p:cNvSpPr/>
-          <p:nvPr/>
-        </p:nvSpPr>
-        <p:spPr>
-          <a:xfrm>
-            <a:off x="8531352" y="2487168"/>
-            <a:ext cx="2926080" cy="457200"/>
-          </a:xfrm>
-          <a:prstGeom prst="rect">
-            <a:avLst/>
-          </a:prstGeom>
-          <a:noFill/>
-          <a:ln/>
-        </p:spPr>
-        <p:txBody>
-          <a:bodyPr wrap="square" lIns="0" tIns="0" rIns="0" bIns="0" rtlCol="0" anchor="t"/>
-          <a:lstStyle/>
-          <a:p>
-            <a:pPr algn="r" indent="0" marL="0">
-              <a:buNone/>
-            </a:pPr>
-            <a:r>
-              <a:rPr lang="en-US" sz="2000" b="1" dirty="0">
-                <a:solidFill>
-                  <a:srgbClr val="4636B0"/>
-                </a:solidFill>
-                <a:latin typeface="Sora" pitchFamily="34" charset="0"/>
-                <a:ea typeface="Sora" pitchFamily="34" charset="-122"/>
-                <a:cs typeface="Sora" pitchFamily="34" charset="-120"/>
-              </a:rPr>
-              <a:t>4 200 €</a:t>
-            </a:r>
-            <a:endParaRPr lang="en-US" sz="2000" dirty="0"/>
-          </a:p>
-        </p:txBody>
-      </p:sp>
-      <p:sp>
-        <p:nvSpPr>
-          <p:cNvPr id="21" name="Shape 18"/>
-          <p:cNvSpPr/>
-          <p:nvPr/>
-        </p:nvSpPr>
-        <p:spPr>
-          <a:xfrm>
-            <a:off x="5394960" y="3035808"/>
-            <a:ext cx="6062472" cy="0"/>
-          </a:xfrm>
-          <a:prstGeom prst="line">
-            <a:avLst/>
-          </a:prstGeom>
-          <a:noFill/>
-          <a:ln w="9525">
-            <a:solidFill>
-              <a:srgbClr val="E3E6EE"/>
-            </a:solidFill>
-            <a:prstDash val="solid"/>
-          </a:ln>
-        </p:spPr>
-      </p:sp>
-      <p:sp>
-        <p:nvSpPr>
-          <p:cNvPr id="22" name="Text 19"/>
-          <p:cNvSpPr/>
-          <p:nvPr/>
-        </p:nvSpPr>
-        <p:spPr>
-          <a:xfrm>
-            <a:off x="5394960" y="3145536"/>
-            <a:ext cx="3291840" cy="274320"/>
-          </a:xfrm>
-          <a:prstGeom prst="rect">
-            <a:avLst/>
-          </a:prstGeom>
-          <a:noFill/>
-          <a:ln/>
-        </p:spPr>
-        <p:txBody>
-          <a:bodyPr wrap="square" lIns="0" tIns="0" rIns="0" bIns="0" rtlCol="0" anchor="t"/>
-          <a:lstStyle/>
-          <a:p>
-            <a:pPr indent="0" marL="0">
-              <a:buNone/>
-            </a:pPr>
-            <a:r>
-              <a:rPr lang="en-US" sz="1350" b="1" dirty="0">
-                <a:solidFill>
-                  <a:srgbClr val="0B0F19"/>
-                </a:solidFill>
-                <a:latin typeface="Sora" pitchFamily="34" charset="0"/>
-                <a:ea typeface="Sora" pitchFamily="34" charset="-122"/>
-                <a:cs typeface="Sora" pitchFamily="34" charset="-120"/>
-              </a:rPr>
-              <a:t>Grande surface</a:t>
-            </a:r>
-            <a:endParaRPr lang="en-US" sz="1350" dirty="0"/>
-          </a:p>
-        </p:txBody>
-      </p:sp>
-      <p:sp>
-        <p:nvSpPr>
-          <p:cNvPr id="23" name="Text 20"/>
-          <p:cNvSpPr/>
-          <p:nvPr/>
-        </p:nvSpPr>
-        <p:spPr>
-          <a:xfrm>
-            <a:off x="5394960" y="3419856"/>
-            <a:ext cx="3291840" cy="237744"/>
-          </a:xfrm>
-          <a:prstGeom prst="rect">
-            <a:avLst/>
-          </a:prstGeom>
-          <a:noFill/>
-          <a:ln/>
-        </p:spPr>
-        <p:txBody>
-          <a:bodyPr wrap="square" lIns="0" tIns="0" rIns="0" bIns="0" rtlCol="0" anchor="t"/>
-          <a:lstStyle/>
-          <a:p>
-            <a:pPr indent="0" marL="0">
-              <a:buNone/>
-            </a:pPr>
-            <a:r>
-              <a:rPr lang="en-US" sz="1050" dirty="0">
-                <a:solidFill>
-                  <a:srgbClr val="5B6475"/>
-                </a:solidFill>
-                <a:latin typeface="Inter" pitchFamily="34" charset="0"/>
-                <a:ea typeface="Inter" pitchFamily="34" charset="-122"/>
-                <a:cs typeface="Inter" pitchFamily="34" charset="-120"/>
-              </a:rPr>
-              <a:t>50 001 à 200 000 unités</a:t>
-            </a:r>
-            <a:endParaRPr lang="en-US" sz="1050" dirty="0"/>
-          </a:p>
-        </p:txBody>
-      </p:sp>
-      <p:sp>
-        <p:nvSpPr>
-          <p:cNvPr id="24" name="Text 21"/>
-          <p:cNvSpPr/>
-          <p:nvPr/>
-        </p:nvSpPr>
-        <p:spPr>
-          <a:xfrm>
-            <a:off x="8531352" y="3145536"/>
-            <a:ext cx="2926080" cy="457200"/>
-          </a:xfrm>
-          <a:prstGeom prst="rect">
-            <a:avLst/>
-          </a:prstGeom>
-          <a:noFill/>
-          <a:ln/>
-        </p:spPr>
-        <p:txBody>
-          <a:bodyPr wrap="square" lIns="0" tIns="0" rIns="0" bIns="0" rtlCol="0" anchor="t"/>
-          <a:lstStyle/>
-          <a:p>
-            <a:pPr algn="r" indent="0" marL="0">
-              <a:buNone/>
-            </a:pPr>
-            <a:r>
-              <a:rPr lang="en-US" sz="2000" b="1" dirty="0">
-                <a:solidFill>
-                  <a:srgbClr val="4636B0"/>
-                </a:solidFill>
-                <a:latin typeface="Sora" pitchFamily="34" charset="0"/>
-                <a:ea typeface="Sora" pitchFamily="34" charset="-122"/>
-                <a:cs typeface="Sora" pitchFamily="34" charset="-120"/>
-              </a:rPr>
-              <a:t>6 600 €</a:t>
-            </a:r>
-            <a:endParaRPr lang="en-US" sz="2000" dirty="0"/>
-          </a:p>
-        </p:txBody>
-      </p:sp>
-      <p:sp>
-        <p:nvSpPr>
-          <p:cNvPr id="25" name="Shape 22"/>
-          <p:cNvSpPr/>
-          <p:nvPr/>
-        </p:nvSpPr>
-        <p:spPr>
-          <a:xfrm>
-            <a:off x="5394960" y="3694176"/>
-            <a:ext cx="6062472" cy="0"/>
-          </a:xfrm>
-          <a:prstGeom prst="line">
-            <a:avLst/>
-          </a:prstGeom>
-          <a:noFill/>
-          <a:ln w="9525">
-            <a:solidFill>
-              <a:srgbClr val="E3E6EE"/>
-            </a:solidFill>
-            <a:prstDash val="solid"/>
-          </a:ln>
-        </p:spPr>
-      </p:sp>
-      <p:sp>
-        <p:nvSpPr>
-          <p:cNvPr id="26" name="Text 23"/>
-          <p:cNvSpPr/>
-          <p:nvPr/>
-        </p:nvSpPr>
-        <p:spPr>
-          <a:xfrm>
-            <a:off x="5394960" y="3803904"/>
-            <a:ext cx="3291840" cy="274320"/>
-          </a:xfrm>
-          <a:prstGeom prst="rect">
-            <a:avLst/>
-          </a:prstGeom>
-          <a:noFill/>
-          <a:ln/>
-        </p:spPr>
-        <p:txBody>
-          <a:bodyPr wrap="square" lIns="0" tIns="0" rIns="0" bIns="0" rtlCol="0" anchor="t"/>
-          <a:lstStyle/>
-          <a:p>
-            <a:pPr indent="0" marL="0">
-              <a:buNone/>
-            </a:pPr>
-            <a:r>
-              <a:rPr lang="en-US" sz="1350" b="1" dirty="0">
-                <a:solidFill>
-                  <a:srgbClr val="0B0F19"/>
-                </a:solidFill>
-                <a:latin typeface="Sora" pitchFamily="34" charset="0"/>
-                <a:ea typeface="Sora" pitchFamily="34" charset="-122"/>
-                <a:cs typeface="Sora" pitchFamily="34" charset="-120"/>
-              </a:rPr>
-              <a:t>Grand magasin</a:t>
-            </a:r>
-            <a:endParaRPr lang="en-US" sz="1350" dirty="0"/>
-          </a:p>
-        </p:txBody>
-      </p:sp>
-      <p:sp>
-        <p:nvSpPr>
-          <p:cNvPr id="27" name="Text 24"/>
-          <p:cNvSpPr/>
-          <p:nvPr/>
-        </p:nvSpPr>
-        <p:spPr>
-          <a:xfrm>
-            <a:off x="5394960" y="4078224"/>
-            <a:ext cx="3291840" cy="237744"/>
-          </a:xfrm>
-          <a:prstGeom prst="rect">
-            <a:avLst/>
-          </a:prstGeom>
-          <a:noFill/>
-          <a:ln/>
-        </p:spPr>
-        <p:txBody>
-          <a:bodyPr wrap="square" lIns="0" tIns="0" rIns="0" bIns="0" rtlCol="0" anchor="t"/>
-          <a:lstStyle/>
-          <a:p>
-            <a:pPr indent="0" marL="0">
-              <a:buNone/>
-            </a:pPr>
-            <a:r>
-              <a:rPr lang="en-US" sz="1050" dirty="0">
-                <a:solidFill>
-                  <a:srgbClr val="5B6475"/>
-                </a:solidFill>
-                <a:latin typeface="Inter" pitchFamily="34" charset="0"/>
-                <a:ea typeface="Inter" pitchFamily="34" charset="-122"/>
-                <a:cs typeface="Inter" pitchFamily="34" charset="-120"/>
-              </a:rPr>
-              <a:t>200 001 à 500 000 unités</a:t>
-            </a:r>
-            <a:endParaRPr lang="en-US" sz="1050" dirty="0"/>
-          </a:p>
-        </p:txBody>
-      </p:sp>
-      <p:sp>
-        <p:nvSpPr>
-          <p:cNvPr id="28" name="Text 25"/>
-          <p:cNvSpPr/>
-          <p:nvPr/>
-        </p:nvSpPr>
-        <p:spPr>
-          <a:xfrm>
-            <a:off x="8531352" y="3803904"/>
-            <a:ext cx="2926080" cy="457200"/>
-          </a:xfrm>
-          <a:prstGeom prst="rect">
-            <a:avLst/>
-          </a:prstGeom>
-          <a:noFill/>
-          <a:ln/>
-        </p:spPr>
-        <p:txBody>
-          <a:bodyPr wrap="square" lIns="0" tIns="0" rIns="0" bIns="0" rtlCol="0" anchor="t"/>
-          <a:lstStyle/>
-          <a:p>
-            <a:pPr algn="r" indent="0" marL="0">
-              <a:buNone/>
-            </a:pPr>
-            <a:r>
-              <a:rPr lang="en-US" sz="2000" b="1" dirty="0">
-                <a:solidFill>
-                  <a:srgbClr val="4636B0"/>
-                </a:solidFill>
-                <a:latin typeface="Sora" pitchFamily="34" charset="0"/>
-                <a:ea typeface="Sora" pitchFamily="34" charset="-122"/>
-                <a:cs typeface="Sora" pitchFamily="34" charset="-120"/>
-              </a:rPr>
-              <a:t>10 200 €</a:t>
-            </a:r>
-            <a:endParaRPr lang="en-US" sz="2000" dirty="0"/>
-          </a:p>
-        </p:txBody>
-      </p:sp>
-      <p:sp>
-        <p:nvSpPr>
-          <p:cNvPr id="29" name="Shape 26"/>
-          <p:cNvSpPr/>
-          <p:nvPr/>
-        </p:nvSpPr>
-        <p:spPr>
-          <a:xfrm>
-            <a:off x="5394960" y="4352544"/>
-            <a:ext cx="6062472" cy="0"/>
-          </a:xfrm>
-          <a:prstGeom prst="line">
-            <a:avLst/>
-          </a:prstGeom>
-          <a:noFill/>
-          <a:ln w="9525">
-            <a:solidFill>
-              <a:srgbClr val="E3E6EE"/>
-            </a:solidFill>
-            <a:prstDash val="solid"/>
-          </a:ln>
-        </p:spPr>
-      </p:sp>
-      <p:sp>
-        <p:nvSpPr>
-          <p:cNvPr id="30" name="Text 27"/>
-          <p:cNvSpPr/>
-          <p:nvPr/>
-        </p:nvSpPr>
-        <p:spPr>
-          <a:xfrm>
-            <a:off x="5394960" y="4462272"/>
-            <a:ext cx="3291840" cy="274320"/>
-          </a:xfrm>
-          <a:prstGeom prst="rect">
-            <a:avLst/>
-          </a:prstGeom>
-          <a:noFill/>
-          <a:ln/>
-        </p:spPr>
-        <p:txBody>
-          <a:bodyPr wrap="square" lIns="0" tIns="0" rIns="0" bIns="0" rtlCol="0" anchor="t"/>
-          <a:lstStyle/>
-          <a:p>
-            <a:pPr indent="0" marL="0">
-              <a:buNone/>
-            </a:pPr>
-            <a:r>
-              <a:rPr lang="en-US" sz="1350" b="1" dirty="0">
-                <a:solidFill>
-                  <a:srgbClr val="0B0F19"/>
-                </a:solidFill>
-                <a:latin typeface="Sora" pitchFamily="34" charset="0"/>
-                <a:ea typeface="Sora" pitchFamily="34" charset="-122"/>
-                <a:cs typeface="Sora" pitchFamily="34" charset="-120"/>
-              </a:rPr>
-              <a:t>Très grand magasin</a:t>
-            </a:r>
-            <a:endParaRPr lang="en-US" sz="1350" dirty="0"/>
-          </a:p>
-        </p:txBody>
-      </p:sp>
-      <p:sp>
-        <p:nvSpPr>
-          <p:cNvPr id="31" name="Text 28"/>
-          <p:cNvSpPr/>
-          <p:nvPr/>
-        </p:nvSpPr>
-        <p:spPr>
-          <a:xfrm>
-            <a:off x="5394960" y="4736592"/>
-            <a:ext cx="3291840" cy="237744"/>
-          </a:xfrm>
-          <a:prstGeom prst="rect">
-            <a:avLst/>
-          </a:prstGeom>
-          <a:noFill/>
-          <a:ln/>
-        </p:spPr>
-        <p:txBody>
-          <a:bodyPr wrap="square" lIns="0" tIns="0" rIns="0" bIns="0" rtlCol="0" anchor="t"/>
-          <a:lstStyle/>
-          <a:p>
-            <a:pPr indent="0" marL="0">
-              <a:buNone/>
-            </a:pPr>
-            <a:r>
-              <a:rPr lang="en-US" sz="1050" dirty="0">
-                <a:solidFill>
-                  <a:srgbClr val="5B6475"/>
-                </a:solidFill>
-                <a:latin typeface="Inter" pitchFamily="34" charset="0"/>
-                <a:ea typeface="Inter" pitchFamily="34" charset="-122"/>
-                <a:cs typeface="Inter" pitchFamily="34" charset="-120"/>
-              </a:rPr>
-              <a:t>500 001 à 1 000 000 unités</a:t>
-            </a:r>
-            <a:endParaRPr lang="en-US" sz="1050" dirty="0"/>
-          </a:p>
-        </p:txBody>
-      </p:sp>
-      <p:sp>
-        <p:nvSpPr>
-          <p:cNvPr id="32" name="Text 29"/>
-          <p:cNvSpPr/>
-          <p:nvPr/>
-        </p:nvSpPr>
-        <p:spPr>
-          <a:xfrm>
-            <a:off x="8531352" y="4462272"/>
-            <a:ext cx="2926080" cy="457200"/>
-          </a:xfrm>
-          <a:prstGeom prst="rect">
-            <a:avLst/>
-          </a:prstGeom>
-          <a:noFill/>
-          <a:ln/>
-        </p:spPr>
-        <p:txBody>
-          <a:bodyPr wrap="square" lIns="0" tIns="0" rIns="0" bIns="0" rtlCol="0" anchor="t"/>
-          <a:lstStyle/>
-          <a:p>
-            <a:pPr algn="r" indent="0" marL="0">
-              <a:buNone/>
-            </a:pPr>
-            <a:r>
-              <a:rPr lang="en-US" sz="2000" b="1" dirty="0">
-                <a:solidFill>
-                  <a:srgbClr val="4636B0"/>
-                </a:solidFill>
-                <a:latin typeface="Sora" pitchFamily="34" charset="0"/>
-                <a:ea typeface="Sora" pitchFamily="34" charset="-122"/>
-                <a:cs typeface="Sora" pitchFamily="34" charset="-120"/>
-              </a:rPr>
-              <a:t>14 400 €</a:t>
-            </a:r>
-            <a:endParaRPr lang="en-US" sz="2000" dirty="0"/>
-          </a:p>
-        </p:txBody>
-      </p:sp>
-      <p:sp>
-        <p:nvSpPr>
-          <p:cNvPr id="33" name="Shape 30"/>
-          <p:cNvSpPr/>
-          <p:nvPr/>
-        </p:nvSpPr>
-        <p:spPr>
-          <a:xfrm>
-            <a:off x="5394960" y="5010912"/>
-            <a:ext cx="6062472" cy="0"/>
-          </a:xfrm>
-          <a:prstGeom prst="line">
-            <a:avLst/>
-          </a:prstGeom>
-          <a:noFill/>
-          <a:ln w="9525">
-            <a:solidFill>
-              <a:srgbClr val="E3E6EE"/>
-            </a:solidFill>
-            <a:prstDash val="solid"/>
-          </a:ln>
-        </p:spPr>
-      </p:sp>
-      <p:sp>
-        <p:nvSpPr>
-          <p:cNvPr id="34" name="Text 31"/>
-          <p:cNvSpPr/>
-          <p:nvPr/>
-        </p:nvSpPr>
-        <p:spPr>
-          <a:xfrm>
-            <a:off x="5394960" y="5120640"/>
-            <a:ext cx="3291840" cy="274320"/>
-          </a:xfrm>
-          <a:prstGeom prst="rect">
-            <a:avLst/>
-          </a:prstGeom>
-          <a:noFill/>
-          <a:ln/>
-        </p:spPr>
-        <p:txBody>
-          <a:bodyPr wrap="square" lIns="0" tIns="0" rIns="0" bIns="0" rtlCol="0" anchor="t"/>
-          <a:lstStyle/>
-          <a:p>
-            <a:pPr indent="0" marL="0">
-              <a:buNone/>
-            </a:pPr>
-            <a:r>
-              <a:rPr lang="en-US" sz="1350" b="1" dirty="0">
-                <a:solidFill>
-                  <a:srgbClr val="0B0F19"/>
-                </a:solidFill>
-                <a:latin typeface="Sora" pitchFamily="34" charset="0"/>
-                <a:ea typeface="Sora" pitchFamily="34" charset="-122"/>
-                <a:cs typeface="Sora" pitchFamily="34" charset="-120"/>
-              </a:rPr>
-              <a:t>Au-delà</a:t>
-            </a:r>
-            <a:endParaRPr lang="en-US" sz="1350" dirty="0"/>
-          </a:p>
-        </p:txBody>
-      </p:sp>
-      <p:sp>
-        <p:nvSpPr>
-          <p:cNvPr id="35" name="Text 32"/>
-          <p:cNvSpPr/>
-          <p:nvPr/>
-        </p:nvSpPr>
-        <p:spPr>
-          <a:xfrm>
-            <a:off x="5394960" y="5394960"/>
-            <a:ext cx="3291840" cy="237744"/>
-          </a:xfrm>
-          <a:prstGeom prst="rect">
-            <a:avLst/>
-          </a:prstGeom>
-          <a:noFill/>
-          <a:ln/>
-        </p:spPr>
-        <p:txBody>
-          <a:bodyPr wrap="square" lIns="0" tIns="0" rIns="0" bIns="0" rtlCol="0" anchor="t"/>
-          <a:lstStyle/>
-          <a:p>
-            <a:pPr indent="0" marL="0">
-              <a:buNone/>
-            </a:pPr>
-            <a:r>
-              <a:rPr lang="en-US" sz="1050" dirty="0">
-                <a:solidFill>
-                  <a:srgbClr val="5B6475"/>
-                </a:solidFill>
-                <a:latin typeface="Inter" pitchFamily="34" charset="0"/>
-                <a:ea typeface="Inter" pitchFamily="34" charset="-122"/>
-                <a:cs typeface="Inter" pitchFamily="34" charset="-120"/>
-              </a:rPr>
-              <a:t>plus d’un million d’unités</a:t>
-            </a:r>
-            <a:endParaRPr lang="en-US" sz="1050" dirty="0"/>
-          </a:p>
-        </p:txBody>
-      </p:sp>
-      <p:sp>
-        <p:nvSpPr>
-          <p:cNvPr id="36" name="Text 33"/>
-          <p:cNvSpPr/>
-          <p:nvPr/>
-        </p:nvSpPr>
-        <p:spPr>
-          <a:xfrm>
-            <a:off x="8531352" y="5120640"/>
-            <a:ext cx="2926080" cy="457200"/>
-          </a:xfrm>
-          <a:prstGeom prst="rect">
-            <a:avLst/>
-          </a:prstGeom>
-          <a:noFill/>
-          <a:ln/>
-        </p:spPr>
-        <p:txBody>
-          <a:bodyPr wrap="square" lIns="0" tIns="0" rIns="0" bIns="0" rtlCol="0" anchor="t"/>
-          <a:lstStyle/>
-          <a:p>
-            <a:pPr algn="r" indent="0" marL="0">
-              <a:buNone/>
-            </a:pPr>
-            <a:r>
-              <a:rPr lang="en-US" sz="2000" b="1" dirty="0">
-                <a:solidFill>
-                  <a:srgbClr val="4636B0"/>
-                </a:solidFill>
-                <a:latin typeface="Sora" pitchFamily="34" charset="0"/>
-                <a:ea typeface="Sora" pitchFamily="34" charset="-122"/>
-                <a:cs typeface="Sora" pitchFamily="34" charset="-120"/>
-              </a:rPr>
-              <a:t>sur devis</a:t>
-            </a:r>
-            <a:endParaRPr lang="en-US" sz="2000" dirty="0"/>
-          </a:p>
-        </p:txBody>
-      </p:sp>
-      <p:sp>
-        <p:nvSpPr>
-          <p:cNvPr id="37" name="Shape 34"/>
-          <p:cNvSpPr/>
-          <p:nvPr/>
-        </p:nvSpPr>
-        <p:spPr>
-          <a:xfrm>
-            <a:off x="5394960" y="5669280"/>
-            <a:ext cx="6062472" cy="0"/>
-          </a:xfrm>
-          <a:prstGeom prst="line">
-            <a:avLst/>
-          </a:prstGeom>
-          <a:noFill/>
-          <a:ln w="9525">
-            <a:solidFill>
-              <a:srgbClr val="E3E6EE"/>
-            </a:solidFill>
-            <a:prstDash val="solid"/>
-          </a:ln>
-        </p:spPr>
-      </p:sp>
-      <p:sp>
-        <p:nvSpPr>
-          <p:cNvPr id="38" name="Text 35"/>
           <p:cNvSpPr/>
           <p:nvPr/>
         </p:nvSpPr>
@@ -4038,7 +3762,7 @@
       </p:sp>
       <p:sp>
         <p:nvSpPr>
-          <p:cNvPr id="39" name="Text 36"/>
+          <p:cNvPr id="13" name="Text 10"/>
           <p:cNvSpPr/>
           <p:nvPr/>
         </p:nvSpPr>
@@ -4123,6 +3847,1705 @@
         </p:blipFill>
         <p:spPr>
           <a:xfrm>
+            <a:off x="731520" y="384048"/>
+            <a:ext cx="329184" cy="329184"/>
+          </a:xfrm>
+          <a:prstGeom prst="rect">
+            <a:avLst/>
+          </a:prstGeom>
+        </p:spPr>
+      </p:pic>
+      <p:sp>
+        <p:nvSpPr>
+          <p:cNvPr id="3" name="Text 0"/>
+          <p:cNvSpPr/>
+          <p:nvPr/>
+        </p:nvSpPr>
+        <p:spPr>
+          <a:xfrm>
+            <a:off x="1170432" y="347472"/>
+            <a:ext cx="2743200" cy="402336"/>
+          </a:xfrm>
+          <a:prstGeom prst="rect">
+            <a:avLst/>
+          </a:prstGeom>
+          <a:noFill/>
+          <a:ln/>
+        </p:spPr>
+        <p:txBody>
+          <a:bodyPr wrap="square" lIns="0" tIns="0" rIns="0" bIns="0" rtlCol="0" anchor="ctr"/>
+          <a:lstStyle/>
+          <a:p>
+            <a:pPr indent="0" marL="0">
+              <a:buNone/>
+            </a:pPr>
+            <a:r>
+              <a:rPr lang="en-US" sz="1600" b="1" dirty="0">
+                <a:solidFill>
+                  <a:srgbClr val="0B0F19"/>
+                </a:solidFill>
+                <a:latin typeface="Sora" pitchFamily="34" charset="0"/>
+                <a:ea typeface="Sora" pitchFamily="34" charset="-122"/>
+                <a:cs typeface="Sora" pitchFamily="34" charset="-120"/>
+              </a:rPr>
+              <a:t>Quantinvo</a:t>
+            </a:r>
+            <a:endParaRPr lang="en-US" sz="1600" dirty="0"/>
+          </a:p>
+        </p:txBody>
+      </p:sp>
+      <p:sp>
+        <p:nvSpPr>
+          <p:cNvPr id="4" name="Text 1"/>
+          <p:cNvSpPr/>
+          <p:nvPr/>
+        </p:nvSpPr>
+        <p:spPr>
+          <a:xfrm>
+            <a:off x="5971032" y="347472"/>
+            <a:ext cx="5486400" cy="402336"/>
+          </a:xfrm>
+          <a:prstGeom prst="rect">
+            <a:avLst/>
+          </a:prstGeom>
+          <a:noFill/>
+          <a:ln/>
+        </p:spPr>
+        <p:txBody>
+          <a:bodyPr wrap="square" lIns="0" tIns="0" rIns="0" bIns="0" rtlCol="0" anchor="ctr"/>
+          <a:lstStyle/>
+          <a:p>
+            <a:pPr algn="r" indent="0" marL="0">
+              <a:buNone/>
+            </a:pPr>
+            <a:r>
+              <a:rPr lang="en-US" sz="1000" dirty="0">
+                <a:solidFill>
+                  <a:srgbClr val="5B6475"/>
+                </a:solidFill>
+                <a:latin typeface="Inter" pitchFamily="34" charset="0"/>
+                <a:ea typeface="Inter" pitchFamily="34" charset="-122"/>
+                <a:cs typeface="Inter" pitchFamily="34" charset="-120"/>
+              </a:rPr>
+              <a:t>L'offre</a:t>
+            </a:r>
+            <a:endParaRPr lang="en-US" sz="1000" dirty="0"/>
+          </a:p>
+        </p:txBody>
+      </p:sp>
+      <p:sp>
+        <p:nvSpPr>
+          <p:cNvPr id="5" name="Shape 2"/>
+          <p:cNvSpPr/>
+          <p:nvPr/>
+        </p:nvSpPr>
+        <p:spPr>
+          <a:xfrm>
+            <a:off x="731520" y="877824"/>
+            <a:ext cx="10725912" cy="25603"/>
+          </a:xfrm>
+          <a:prstGeom prst="rect">
+            <a:avLst/>
+          </a:prstGeom>
+          <a:solidFill>
+            <a:srgbClr val="38C9FF"/>
+          </a:solidFill>
+          <a:ln w="12700">
+            <a:solidFill>
+              <a:srgbClr val="38C9FF"/>
+            </a:solidFill>
+            <a:prstDash val="solid"/>
+          </a:ln>
+        </p:spPr>
+      </p:sp>
+      <p:sp>
+        <p:nvSpPr>
+          <p:cNvPr id="6" name="Text 3"/>
+          <p:cNvSpPr/>
+          <p:nvPr/>
+        </p:nvSpPr>
+        <p:spPr>
+          <a:xfrm>
+            <a:off x="731520" y="1188720"/>
+            <a:ext cx="10725912" cy="822960"/>
+          </a:xfrm>
+          <a:prstGeom prst="rect">
+            <a:avLst/>
+          </a:prstGeom>
+          <a:noFill/>
+          <a:ln/>
+        </p:spPr>
+        <p:txBody>
+          <a:bodyPr wrap="square" lIns="0" tIns="0" rIns="0" bIns="0" rtlCol="0" anchor="t"/>
+          <a:lstStyle/>
+          <a:p>
+            <a:pPr indent="0" marL="0">
+              <a:lnSpc>
+                <a:spcPct val="105000"/>
+              </a:lnSpc>
+              <a:buNone/>
+            </a:pPr>
+            <a:r>
+              <a:rPr lang="en-US" sz="2600" b="1" dirty="0">
+                <a:solidFill>
+                  <a:srgbClr val="4636B0"/>
+                </a:solidFill>
+                <a:latin typeface="Sora" pitchFamily="34" charset="0"/>
+                <a:ea typeface="Sora" pitchFamily="34" charset="-122"/>
+                <a:cs typeface="Sora" pitchFamily="34" charset="-120"/>
+              </a:rPr>
+              <a:t>Une licence par magasin, comptages illimités</a:t>
+            </a:r>
+            <a:endParaRPr lang="en-US" sz="2600" dirty="0"/>
+          </a:p>
+        </p:txBody>
+      </p:sp>
+      <p:sp>
+        <p:nvSpPr>
+          <p:cNvPr id="7" name="Text 4"/>
+          <p:cNvSpPr/>
+          <p:nvPr/>
+        </p:nvSpPr>
+        <p:spPr>
+          <a:xfrm>
+            <a:off x="731520" y="1783080"/>
+            <a:ext cx="10725912" cy="457200"/>
+          </a:xfrm>
+          <a:prstGeom prst="rect">
+            <a:avLst/>
+          </a:prstGeom>
+          <a:noFill/>
+          <a:ln/>
+        </p:spPr>
+        <p:txBody>
+          <a:bodyPr wrap="square" lIns="0" tIns="0" rIns="0" bIns="0" rtlCol="0" anchor="t"/>
+          <a:lstStyle/>
+          <a:p>
+            <a:pPr algn="l" indent="0" marL="0">
+              <a:lnSpc>
+                <a:spcPct val="118000"/>
+              </a:lnSpc>
+              <a:buNone/>
+            </a:pPr>
+            <a:r>
+              <a:rPr lang="en-US" sz="1150" dirty="0">
+                <a:solidFill>
+                  <a:srgbClr val="5B6475"/>
+                </a:solidFill>
+                <a:latin typeface="Inter" pitchFamily="34" charset="0"/>
+                <a:ea typeface="Inter" pitchFamily="34" charset="-122"/>
+                <a:cs typeface="Inter" pitchFamily="34" charset="-120"/>
+              </a:rPr>
+              <a:t>Le prix suit le nombre d'appareils qui comptent en même temps — la seule chose que vous puissiez vérifier vous-même. Ni le volume de votre stock, ni le nombre de comptes, ni le nombre d'inventaires dans l'année.</a:t>
+            </a:r>
+            <a:endParaRPr lang="en-US" sz="1150" dirty="0"/>
+          </a:p>
+        </p:txBody>
+      </p:sp>
+      <p:sp>
+        <p:nvSpPr>
+          <p:cNvPr id="8" name="Shape 5"/>
+          <p:cNvSpPr/>
+          <p:nvPr/>
+        </p:nvSpPr>
+        <p:spPr>
+          <a:xfrm>
+            <a:off x="731520" y="2331720"/>
+            <a:ext cx="3404616" cy="2743200"/>
+          </a:xfrm>
+          <a:prstGeom prst="roundRect">
+            <a:avLst>
+              <a:gd name="adj" fmla="val 4000"/>
+            </a:avLst>
+          </a:prstGeom>
+          <a:solidFill>
+            <a:srgbClr val="FFFFFF"/>
+          </a:solidFill>
+          <a:ln w="12700">
+            <a:solidFill>
+              <a:srgbClr val="E3E6EE"/>
+            </a:solidFill>
+            <a:prstDash val="solid"/>
+          </a:ln>
+        </p:spPr>
+      </p:sp>
+      <p:sp>
+        <p:nvSpPr>
+          <p:cNvPr id="9" name="Text 6"/>
+          <p:cNvSpPr/>
+          <p:nvPr/>
+        </p:nvSpPr>
+        <p:spPr>
+          <a:xfrm>
+            <a:off x="987552" y="2825496"/>
+            <a:ext cx="2892552" cy="347472"/>
+          </a:xfrm>
+          <a:prstGeom prst="rect">
+            <a:avLst/>
+          </a:prstGeom>
+          <a:noFill/>
+          <a:ln/>
+        </p:spPr>
+        <p:txBody>
+          <a:bodyPr wrap="square" lIns="0" tIns="0" rIns="0" bIns="0" rtlCol="0" anchor="t"/>
+          <a:lstStyle/>
+          <a:p>
+            <a:pPr indent="0" marL="0">
+              <a:buNone/>
+            </a:pPr>
+            <a:r>
+              <a:rPr lang="en-US" sz="1800" b="1" dirty="0">
+                <a:solidFill>
+                  <a:srgbClr val="0B0F19"/>
+                </a:solidFill>
+                <a:latin typeface="Sora" pitchFamily="34" charset="0"/>
+                <a:ea typeface="Sora" pitchFamily="34" charset="-122"/>
+                <a:cs typeface="Sora" pitchFamily="34" charset="-120"/>
+              </a:rPr>
+              <a:t>Essential</a:t>
+            </a:r>
+            <a:endParaRPr lang="en-US" sz="1800" dirty="0"/>
+          </a:p>
+        </p:txBody>
+      </p:sp>
+      <p:sp>
+        <p:nvSpPr>
+          <p:cNvPr id="10" name="Text 7"/>
+          <p:cNvSpPr/>
+          <p:nvPr/>
+        </p:nvSpPr>
+        <p:spPr>
+          <a:xfrm>
+            <a:off x="987552" y="3227832"/>
+            <a:ext cx="2892552" cy="256032"/>
+          </a:xfrm>
+          <a:prstGeom prst="rect">
+            <a:avLst/>
+          </a:prstGeom>
+          <a:noFill/>
+          <a:ln/>
+        </p:spPr>
+        <p:txBody>
+          <a:bodyPr wrap="square" lIns="0" tIns="0" rIns="0" bIns="0" rtlCol="0" anchor="t"/>
+          <a:lstStyle/>
+          <a:p>
+            <a:pPr indent="0" marL="0">
+              <a:buNone/>
+            </a:pPr>
+            <a:r>
+              <a:rPr lang="en-US" sz="1100" b="1" dirty="0">
+                <a:solidFill>
+                  <a:srgbClr val="6366F1"/>
+                </a:solidFill>
+                <a:latin typeface="Inter" pitchFamily="34" charset="0"/>
+                <a:ea typeface="Inter" pitchFamily="34" charset="-122"/>
+                <a:cs typeface="Inter" pitchFamily="34" charset="-120"/>
+              </a:rPr>
+              <a:t>2 appareils</a:t>
+            </a:r>
+            <a:endParaRPr lang="en-US" sz="1100" dirty="0"/>
+          </a:p>
+        </p:txBody>
+      </p:sp>
+      <p:sp>
+        <p:nvSpPr>
+          <p:cNvPr id="11" name="Text 8"/>
+          <p:cNvSpPr/>
+          <p:nvPr/>
+        </p:nvSpPr>
+        <p:spPr>
+          <a:xfrm>
+            <a:off x="987552" y="3538728"/>
+            <a:ext cx="2892552" cy="457200"/>
+          </a:xfrm>
+          <a:prstGeom prst="rect">
+            <a:avLst/>
+          </a:prstGeom>
+          <a:noFill/>
+          <a:ln/>
+        </p:spPr>
+        <p:txBody>
+          <a:bodyPr wrap="square" lIns="0" tIns="0" rIns="0" bIns="0" rtlCol="0" anchor="t"/>
+          <a:lstStyle/>
+          <a:p>
+            <a:pPr indent="0" marL="0">
+              <a:lnSpc>
+                <a:spcPct val="112000"/>
+              </a:lnSpc>
+              <a:buNone/>
+            </a:pPr>
+            <a:r>
+              <a:rPr lang="en-US" sz="1000" dirty="0">
+                <a:solidFill>
+                  <a:srgbClr val="5B6475"/>
+                </a:solidFill>
+                <a:latin typeface="Inter" pitchFamily="34" charset="0"/>
+                <a:ea typeface="Inter" pitchFamily="34" charset="-122"/>
+                <a:cs typeface="Inter" pitchFamily="34" charset="-120"/>
+              </a:rPr>
+              <a:t>Vous comptez seul ou à deux, dans un magasin.</a:t>
+            </a:r>
+            <a:endParaRPr lang="en-US" sz="1000" dirty="0"/>
+          </a:p>
+        </p:txBody>
+      </p:sp>
+      <p:sp>
+        <p:nvSpPr>
+          <p:cNvPr id="12" name="Text 9"/>
+          <p:cNvSpPr/>
+          <p:nvPr/>
+        </p:nvSpPr>
+        <p:spPr>
+          <a:xfrm>
+            <a:off x="987552" y="4050792"/>
+            <a:ext cx="2892552" cy="457200"/>
+          </a:xfrm>
+          <a:prstGeom prst="rect">
+            <a:avLst/>
+          </a:prstGeom>
+          <a:noFill/>
+          <a:ln/>
+        </p:spPr>
+        <p:txBody>
+          <a:bodyPr wrap="square" lIns="0" tIns="0" rIns="0" bIns="0" rtlCol="0" anchor="b"/>
+          <a:lstStyle/>
+          <a:p>
+            <a:pPr indent="0" marL="0">
+              <a:buNone/>
+            </a:pPr>
+            <a:r>
+              <a:rPr lang="en-US" sz="2600" b="1" dirty="0">
+                <a:solidFill>
+                  <a:srgbClr val="4636B0"/>
+                </a:solidFill>
+                <a:latin typeface="Sora" pitchFamily="34" charset="0"/>
+                <a:ea typeface="Sora" pitchFamily="34" charset="-122"/>
+                <a:cs typeface="Sora" pitchFamily="34" charset="-120"/>
+              </a:rPr>
+              <a:t>65 €</a:t>
+            </a:r>
+            <a:pPr indent="0" marL="0">
+              <a:buNone/>
+            </a:pPr>
+            <a:r>
+              <a:rPr lang="en-US" sz="1050" dirty="0">
+                <a:solidFill>
+                  <a:srgbClr val="5B6475"/>
+                </a:solidFill>
+                <a:latin typeface="Inter" pitchFamily="34" charset="0"/>
+                <a:ea typeface="Inter" pitchFamily="34" charset="-122"/>
+                <a:cs typeface="Inter" pitchFamily="34" charset="-120"/>
+              </a:rPr>
+              <a:t>  HT / mois</a:t>
+            </a:r>
+            <a:endParaRPr lang="en-US" sz="2600" dirty="0"/>
+          </a:p>
+        </p:txBody>
+      </p:sp>
+      <p:sp>
+        <p:nvSpPr>
+          <p:cNvPr id="13" name="Text 10"/>
+          <p:cNvSpPr/>
+          <p:nvPr/>
+        </p:nvSpPr>
+        <p:spPr>
+          <a:xfrm>
+            <a:off x="987552" y="4507992"/>
+            <a:ext cx="2892552" cy="274320"/>
+          </a:xfrm>
+          <a:prstGeom prst="rect">
+            <a:avLst/>
+          </a:prstGeom>
+          <a:noFill/>
+          <a:ln/>
+        </p:spPr>
+        <p:txBody>
+          <a:bodyPr wrap="square" lIns="0" tIns="0" rIns="0" bIns="0" rtlCol="0" anchor="t"/>
+          <a:lstStyle/>
+          <a:p>
+            <a:pPr indent="0" marL="0">
+              <a:buNone/>
+            </a:pPr>
+            <a:r>
+              <a:rPr lang="en-US" sz="950" dirty="0">
+                <a:solidFill>
+                  <a:srgbClr val="1F7A5C"/>
+                </a:solidFill>
+                <a:latin typeface="Inter" pitchFamily="34" charset="0"/>
+                <a:ea typeface="Inter" pitchFamily="34" charset="-122"/>
+                <a:cs typeface="Inter" pitchFamily="34" charset="-120"/>
+              </a:rPr>
+              <a:t>ou 690 € à l’année — 90 € de moins</a:t>
+            </a:r>
+            <a:endParaRPr lang="en-US" sz="950" dirty="0"/>
+          </a:p>
+        </p:txBody>
+      </p:sp>
+      <p:sp>
+        <p:nvSpPr>
+          <p:cNvPr id="14" name="Shape 11"/>
+          <p:cNvSpPr/>
+          <p:nvPr/>
+        </p:nvSpPr>
+        <p:spPr>
+          <a:xfrm>
+            <a:off x="4392168" y="2331720"/>
+            <a:ext cx="3404616" cy="2743200"/>
+          </a:xfrm>
+          <a:prstGeom prst="roundRect">
+            <a:avLst>
+              <a:gd name="adj" fmla="val 4000"/>
+            </a:avLst>
+          </a:prstGeom>
+          <a:solidFill>
+            <a:srgbClr val="EEEEFC"/>
+          </a:solidFill>
+          <a:ln w="19050">
+            <a:solidFill>
+              <a:srgbClr val="6366F1"/>
+            </a:solidFill>
+            <a:prstDash val="solid"/>
+          </a:ln>
+        </p:spPr>
+      </p:sp>
+      <p:sp>
+        <p:nvSpPr>
+          <p:cNvPr id="15" name="Text 12"/>
+          <p:cNvSpPr/>
+          <p:nvPr/>
+        </p:nvSpPr>
+        <p:spPr>
+          <a:xfrm>
+            <a:off x="4648200" y="2532888"/>
+            <a:ext cx="2892552" cy="219456"/>
+          </a:xfrm>
+          <a:prstGeom prst="rect">
+            <a:avLst/>
+          </a:prstGeom>
+          <a:noFill/>
+          <a:ln/>
+        </p:spPr>
+        <p:txBody>
+          <a:bodyPr wrap="square" lIns="0" tIns="0" rIns="0" bIns="0" rtlCol="0" anchor="t"/>
+          <a:lstStyle/>
+          <a:p>
+            <a:pPr indent="0" marL="0">
+              <a:buNone/>
+            </a:pPr>
+            <a:r>
+              <a:rPr lang="en-US" sz="800" b="1" spc="60" kern="0" dirty="0">
+                <a:solidFill>
+                  <a:srgbClr val="6366F1"/>
+                </a:solidFill>
+                <a:latin typeface="Inter" pitchFamily="34" charset="0"/>
+                <a:ea typeface="Inter" pitchFamily="34" charset="-122"/>
+                <a:cs typeface="Inter" pitchFamily="34" charset="-120"/>
+              </a:rPr>
+              <a:t>LE PLUS COURANT</a:t>
+            </a:r>
+            <a:endParaRPr lang="en-US" sz="800" dirty="0"/>
+          </a:p>
+        </p:txBody>
+      </p:sp>
+      <p:sp>
+        <p:nvSpPr>
+          <p:cNvPr id="16" name="Text 13"/>
+          <p:cNvSpPr/>
+          <p:nvPr/>
+        </p:nvSpPr>
+        <p:spPr>
+          <a:xfrm>
+            <a:off x="4648200" y="2825496"/>
+            <a:ext cx="2892552" cy="347472"/>
+          </a:xfrm>
+          <a:prstGeom prst="rect">
+            <a:avLst/>
+          </a:prstGeom>
+          <a:noFill/>
+          <a:ln/>
+        </p:spPr>
+        <p:txBody>
+          <a:bodyPr wrap="square" lIns="0" tIns="0" rIns="0" bIns="0" rtlCol="0" anchor="t"/>
+          <a:lstStyle/>
+          <a:p>
+            <a:pPr indent="0" marL="0">
+              <a:buNone/>
+            </a:pPr>
+            <a:r>
+              <a:rPr lang="en-US" sz="1800" b="1" dirty="0">
+                <a:solidFill>
+                  <a:srgbClr val="0B0F19"/>
+                </a:solidFill>
+                <a:latin typeface="Sora" pitchFamily="34" charset="0"/>
+                <a:ea typeface="Sora" pitchFamily="34" charset="-122"/>
+                <a:cs typeface="Sora" pitchFamily="34" charset="-120"/>
+              </a:rPr>
+              <a:t>Advanced</a:t>
+            </a:r>
+            <a:endParaRPr lang="en-US" sz="1800" dirty="0"/>
+          </a:p>
+        </p:txBody>
+      </p:sp>
+      <p:sp>
+        <p:nvSpPr>
+          <p:cNvPr id="17" name="Text 14"/>
+          <p:cNvSpPr/>
+          <p:nvPr/>
+        </p:nvSpPr>
+        <p:spPr>
+          <a:xfrm>
+            <a:off x="4648200" y="3227832"/>
+            <a:ext cx="2892552" cy="256032"/>
+          </a:xfrm>
+          <a:prstGeom prst="rect">
+            <a:avLst/>
+          </a:prstGeom>
+          <a:noFill/>
+          <a:ln/>
+        </p:spPr>
+        <p:txBody>
+          <a:bodyPr wrap="square" lIns="0" tIns="0" rIns="0" bIns="0" rtlCol="0" anchor="t"/>
+          <a:lstStyle/>
+          <a:p>
+            <a:pPr indent="0" marL="0">
+              <a:buNone/>
+            </a:pPr>
+            <a:r>
+              <a:rPr lang="en-US" sz="1100" b="1" dirty="0">
+                <a:solidFill>
+                  <a:srgbClr val="6366F1"/>
+                </a:solidFill>
+                <a:latin typeface="Inter" pitchFamily="34" charset="0"/>
+                <a:ea typeface="Inter" pitchFamily="34" charset="-122"/>
+                <a:cs typeface="Inter" pitchFamily="34" charset="-120"/>
+              </a:rPr>
+              <a:t>3 à 20 appareils</a:t>
+            </a:r>
+            <a:endParaRPr lang="en-US" sz="1100" dirty="0"/>
+          </a:p>
+        </p:txBody>
+      </p:sp>
+      <p:sp>
+        <p:nvSpPr>
+          <p:cNvPr id="18" name="Text 15"/>
+          <p:cNvSpPr/>
+          <p:nvPr/>
+        </p:nvSpPr>
+        <p:spPr>
+          <a:xfrm>
+            <a:off x="4648200" y="3538728"/>
+            <a:ext cx="2892552" cy="457200"/>
+          </a:xfrm>
+          <a:prstGeom prst="rect">
+            <a:avLst/>
+          </a:prstGeom>
+          <a:noFill/>
+          <a:ln/>
+        </p:spPr>
+        <p:txBody>
+          <a:bodyPr wrap="square" lIns="0" tIns="0" rIns="0" bIns="0" rtlCol="0" anchor="t"/>
+          <a:lstStyle/>
+          <a:p>
+            <a:pPr indent="0" marL="0">
+              <a:lnSpc>
+                <a:spcPct val="112000"/>
+              </a:lnSpc>
+              <a:buNone/>
+            </a:pPr>
+            <a:r>
+              <a:rPr lang="en-US" sz="1000" dirty="0">
+                <a:solidFill>
+                  <a:srgbClr val="5B6475"/>
+                </a:solidFill>
+                <a:latin typeface="Inter" pitchFamily="34" charset="0"/>
+                <a:ea typeface="Inter" pitchFamily="34" charset="-122"/>
+                <a:cs typeface="Inter" pitchFamily="34" charset="-120"/>
+              </a:rPr>
+              <a:t>Vous montez une équipe le jour de l’inventaire.</a:t>
+            </a:r>
+            <a:endParaRPr lang="en-US" sz="1000" dirty="0"/>
+          </a:p>
+        </p:txBody>
+      </p:sp>
+      <p:sp>
+        <p:nvSpPr>
+          <p:cNvPr id="19" name="Text 16"/>
+          <p:cNvSpPr/>
+          <p:nvPr/>
+        </p:nvSpPr>
+        <p:spPr>
+          <a:xfrm>
+            <a:off x="4648200" y="4050792"/>
+            <a:ext cx="2892552" cy="457200"/>
+          </a:xfrm>
+          <a:prstGeom prst="rect">
+            <a:avLst/>
+          </a:prstGeom>
+          <a:noFill/>
+          <a:ln/>
+        </p:spPr>
+        <p:txBody>
+          <a:bodyPr wrap="square" lIns="0" tIns="0" rIns="0" bIns="0" rtlCol="0" anchor="b"/>
+          <a:lstStyle/>
+          <a:p>
+            <a:pPr indent="0" marL="0">
+              <a:buNone/>
+            </a:pPr>
+            <a:r>
+              <a:rPr lang="en-US" sz="2600" b="1" dirty="0">
+                <a:solidFill>
+                  <a:srgbClr val="4636B0"/>
+                </a:solidFill>
+                <a:latin typeface="Sora" pitchFamily="34" charset="0"/>
+                <a:ea typeface="Sora" pitchFamily="34" charset="-122"/>
+                <a:cs typeface="Sora" pitchFamily="34" charset="-120"/>
+              </a:rPr>
+              <a:t>225 €</a:t>
+            </a:r>
+            <a:pPr indent="0" marL="0">
+              <a:buNone/>
+            </a:pPr>
+            <a:r>
+              <a:rPr lang="en-US" sz="1050" dirty="0">
+                <a:solidFill>
+                  <a:srgbClr val="5B6475"/>
+                </a:solidFill>
+                <a:latin typeface="Inter" pitchFamily="34" charset="0"/>
+                <a:ea typeface="Inter" pitchFamily="34" charset="-122"/>
+                <a:cs typeface="Inter" pitchFamily="34" charset="-120"/>
+              </a:rPr>
+              <a:t>  HT / mois</a:t>
+            </a:r>
+            <a:endParaRPr lang="en-US" sz="2600" dirty="0"/>
+          </a:p>
+        </p:txBody>
+      </p:sp>
+      <p:sp>
+        <p:nvSpPr>
+          <p:cNvPr id="20" name="Text 17"/>
+          <p:cNvSpPr/>
+          <p:nvPr/>
+        </p:nvSpPr>
+        <p:spPr>
+          <a:xfrm>
+            <a:off x="4648200" y="4507992"/>
+            <a:ext cx="2892552" cy="274320"/>
+          </a:xfrm>
+          <a:prstGeom prst="rect">
+            <a:avLst/>
+          </a:prstGeom>
+          <a:noFill/>
+          <a:ln/>
+        </p:spPr>
+        <p:txBody>
+          <a:bodyPr wrap="square" lIns="0" tIns="0" rIns="0" bIns="0" rtlCol="0" anchor="t"/>
+          <a:lstStyle/>
+          <a:p>
+            <a:pPr indent="0" marL="0">
+              <a:buNone/>
+            </a:pPr>
+            <a:r>
+              <a:rPr lang="en-US" sz="950" dirty="0">
+                <a:solidFill>
+                  <a:srgbClr val="1F7A5C"/>
+                </a:solidFill>
+                <a:latin typeface="Inter" pitchFamily="34" charset="0"/>
+                <a:ea typeface="Inter" pitchFamily="34" charset="-122"/>
+                <a:cs typeface="Inter" pitchFamily="34" charset="-120"/>
+              </a:rPr>
+              <a:t>ou 2 400 € à l’année — 300 € de moins</a:t>
+            </a:r>
+            <a:endParaRPr lang="en-US" sz="950" dirty="0"/>
+          </a:p>
+        </p:txBody>
+      </p:sp>
+      <p:sp>
+        <p:nvSpPr>
+          <p:cNvPr id="21" name="Shape 18"/>
+          <p:cNvSpPr/>
+          <p:nvPr/>
+        </p:nvSpPr>
+        <p:spPr>
+          <a:xfrm>
+            <a:off x="8052816" y="2331720"/>
+            <a:ext cx="3404616" cy="2743200"/>
+          </a:xfrm>
+          <a:prstGeom prst="roundRect">
+            <a:avLst>
+              <a:gd name="adj" fmla="val 4000"/>
+            </a:avLst>
+          </a:prstGeom>
+          <a:solidFill>
+            <a:srgbClr val="FFFFFF"/>
+          </a:solidFill>
+          <a:ln w="12700">
+            <a:solidFill>
+              <a:srgbClr val="E3E6EE"/>
+            </a:solidFill>
+            <a:prstDash val="solid"/>
+          </a:ln>
+        </p:spPr>
+      </p:sp>
+      <p:sp>
+        <p:nvSpPr>
+          <p:cNvPr id="22" name="Text 19"/>
+          <p:cNvSpPr/>
+          <p:nvPr/>
+        </p:nvSpPr>
+        <p:spPr>
+          <a:xfrm>
+            <a:off x="8308848" y="2825496"/>
+            <a:ext cx="2892552" cy="347472"/>
+          </a:xfrm>
+          <a:prstGeom prst="rect">
+            <a:avLst/>
+          </a:prstGeom>
+          <a:noFill/>
+          <a:ln/>
+        </p:spPr>
+        <p:txBody>
+          <a:bodyPr wrap="square" lIns="0" tIns="0" rIns="0" bIns="0" rtlCol="0" anchor="t"/>
+          <a:lstStyle/>
+          <a:p>
+            <a:pPr indent="0" marL="0">
+              <a:buNone/>
+            </a:pPr>
+            <a:r>
+              <a:rPr lang="en-US" sz="1800" b="1" dirty="0">
+                <a:solidFill>
+                  <a:srgbClr val="0B0F19"/>
+                </a:solidFill>
+                <a:latin typeface="Sora" pitchFamily="34" charset="0"/>
+                <a:ea typeface="Sora" pitchFamily="34" charset="-122"/>
+                <a:cs typeface="Sora" pitchFamily="34" charset="-120"/>
+              </a:rPr>
+              <a:t>Enterprise</a:t>
+            </a:r>
+            <a:endParaRPr lang="en-US" sz="1800" dirty="0"/>
+          </a:p>
+        </p:txBody>
+      </p:sp>
+      <p:sp>
+        <p:nvSpPr>
+          <p:cNvPr id="23" name="Text 20"/>
+          <p:cNvSpPr/>
+          <p:nvPr/>
+        </p:nvSpPr>
+        <p:spPr>
+          <a:xfrm>
+            <a:off x="8308848" y="3227832"/>
+            <a:ext cx="2892552" cy="256032"/>
+          </a:xfrm>
+          <a:prstGeom prst="rect">
+            <a:avLst/>
+          </a:prstGeom>
+          <a:noFill/>
+          <a:ln/>
+        </p:spPr>
+        <p:txBody>
+          <a:bodyPr wrap="square" lIns="0" tIns="0" rIns="0" bIns="0" rtlCol="0" anchor="t"/>
+          <a:lstStyle/>
+          <a:p>
+            <a:pPr indent="0" marL="0">
+              <a:buNone/>
+            </a:pPr>
+            <a:r>
+              <a:rPr lang="en-US" sz="1100" b="1" dirty="0">
+                <a:solidFill>
+                  <a:srgbClr val="6366F1"/>
+                </a:solidFill>
+                <a:latin typeface="Inter" pitchFamily="34" charset="0"/>
+                <a:ea typeface="Inter" pitchFamily="34" charset="-122"/>
+                <a:cs typeface="Inter" pitchFamily="34" charset="-120"/>
+              </a:rPr>
+              <a:t>21 à 100 appareils</a:t>
+            </a:r>
+            <a:endParaRPr lang="en-US" sz="1100" dirty="0"/>
+          </a:p>
+        </p:txBody>
+      </p:sp>
+      <p:sp>
+        <p:nvSpPr>
+          <p:cNvPr id="24" name="Text 21"/>
+          <p:cNvSpPr/>
+          <p:nvPr/>
+        </p:nvSpPr>
+        <p:spPr>
+          <a:xfrm>
+            <a:off x="8308848" y="3538728"/>
+            <a:ext cx="2892552" cy="457200"/>
+          </a:xfrm>
+          <a:prstGeom prst="rect">
+            <a:avLst/>
+          </a:prstGeom>
+          <a:noFill/>
+          <a:ln/>
+        </p:spPr>
+        <p:txBody>
+          <a:bodyPr wrap="square" lIns="0" tIns="0" rIns="0" bIns="0" rtlCol="0" anchor="t"/>
+          <a:lstStyle/>
+          <a:p>
+            <a:pPr indent="0" marL="0">
+              <a:lnSpc>
+                <a:spcPct val="112000"/>
+              </a:lnSpc>
+              <a:buNone/>
+            </a:pPr>
+            <a:r>
+              <a:rPr lang="en-US" sz="1000" dirty="0">
+                <a:solidFill>
+                  <a:srgbClr val="5B6475"/>
+                </a:solidFill>
+                <a:latin typeface="Inter" pitchFamily="34" charset="0"/>
+                <a:ea typeface="Inter" pitchFamily="34" charset="-122"/>
+                <a:cs typeface="Inter" pitchFamily="34" charset="-120"/>
+              </a:rPr>
+              <a:t>La grande surface, qui mobilise une équipe entière.</a:t>
+            </a:r>
+            <a:endParaRPr lang="en-US" sz="1000" dirty="0"/>
+          </a:p>
+        </p:txBody>
+      </p:sp>
+      <p:sp>
+        <p:nvSpPr>
+          <p:cNvPr id="25" name="Text 22"/>
+          <p:cNvSpPr/>
+          <p:nvPr/>
+        </p:nvSpPr>
+        <p:spPr>
+          <a:xfrm>
+            <a:off x="8308848" y="4050792"/>
+            <a:ext cx="2892552" cy="457200"/>
+          </a:xfrm>
+          <a:prstGeom prst="rect">
+            <a:avLst/>
+          </a:prstGeom>
+          <a:noFill/>
+          <a:ln/>
+        </p:spPr>
+        <p:txBody>
+          <a:bodyPr wrap="square" lIns="0" tIns="0" rIns="0" bIns="0" rtlCol="0" anchor="b"/>
+          <a:lstStyle/>
+          <a:p>
+            <a:pPr indent="0" marL="0">
+              <a:buNone/>
+            </a:pPr>
+            <a:r>
+              <a:rPr lang="en-US" sz="2600" b="1" dirty="0">
+                <a:solidFill>
+                  <a:srgbClr val="4636B0"/>
+                </a:solidFill>
+                <a:latin typeface="Sora" pitchFamily="34" charset="0"/>
+                <a:ea typeface="Sora" pitchFamily="34" charset="-122"/>
+                <a:cs typeface="Sora" pitchFamily="34" charset="-120"/>
+              </a:rPr>
+              <a:t>650 €</a:t>
+            </a:r>
+            <a:pPr indent="0" marL="0">
+              <a:buNone/>
+            </a:pPr>
+            <a:r>
+              <a:rPr lang="en-US" sz="1050" dirty="0">
+                <a:solidFill>
+                  <a:srgbClr val="5B6475"/>
+                </a:solidFill>
+                <a:latin typeface="Inter" pitchFamily="34" charset="0"/>
+                <a:ea typeface="Inter" pitchFamily="34" charset="-122"/>
+                <a:cs typeface="Inter" pitchFamily="34" charset="-120"/>
+              </a:rPr>
+              <a:t>  HT / mois</a:t>
+            </a:r>
+            <a:endParaRPr lang="en-US" sz="2600" dirty="0"/>
+          </a:p>
+        </p:txBody>
+      </p:sp>
+      <p:sp>
+        <p:nvSpPr>
+          <p:cNvPr id="26" name="Text 23"/>
+          <p:cNvSpPr/>
+          <p:nvPr/>
+        </p:nvSpPr>
+        <p:spPr>
+          <a:xfrm>
+            <a:off x="8308848" y="4507992"/>
+            <a:ext cx="2892552" cy="274320"/>
+          </a:xfrm>
+          <a:prstGeom prst="rect">
+            <a:avLst/>
+          </a:prstGeom>
+          <a:noFill/>
+          <a:ln/>
+        </p:spPr>
+        <p:txBody>
+          <a:bodyPr wrap="square" lIns="0" tIns="0" rIns="0" bIns="0" rtlCol="0" anchor="t"/>
+          <a:lstStyle/>
+          <a:p>
+            <a:pPr indent="0" marL="0">
+              <a:buNone/>
+            </a:pPr>
+            <a:r>
+              <a:rPr lang="en-US" sz="950" dirty="0">
+                <a:solidFill>
+                  <a:srgbClr val="1F7A5C"/>
+                </a:solidFill>
+                <a:latin typeface="Inter" pitchFamily="34" charset="0"/>
+                <a:ea typeface="Inter" pitchFamily="34" charset="-122"/>
+                <a:cs typeface="Inter" pitchFamily="34" charset="-120"/>
+              </a:rPr>
+              <a:t>ou 6 900 € à l’année — 900 € de moins</a:t>
+            </a:r>
+            <a:endParaRPr lang="en-US" sz="950" dirty="0"/>
+          </a:p>
+        </p:txBody>
+      </p:sp>
+      <p:sp>
+        <p:nvSpPr>
+          <p:cNvPr id="27" name="Text 24"/>
+          <p:cNvSpPr/>
+          <p:nvPr/>
+        </p:nvSpPr>
+        <p:spPr>
+          <a:xfrm>
+            <a:off x="731520" y="5257800"/>
+            <a:ext cx="10725912" cy="640080"/>
+          </a:xfrm>
+          <a:prstGeom prst="rect">
+            <a:avLst/>
+          </a:prstGeom>
+          <a:noFill/>
+          <a:ln/>
+        </p:spPr>
+        <p:txBody>
+          <a:bodyPr wrap="square" lIns="0" tIns="0" rIns="0" bIns="0" rtlCol="0" anchor="t"/>
+          <a:lstStyle/>
+          <a:p>
+            <a:pPr indent="0" marL="0">
+              <a:lnSpc>
+                <a:spcPct val="118000"/>
+              </a:lnSpc>
+              <a:spcAft>
+                <a:spcPts val="1000"/>
+              </a:spcAft>
+              <a:buNone/>
+            </a:pPr>
+            <a:r>
+              <a:rPr lang="en-US" sz="1250" b="1" dirty="0">
+                <a:solidFill>
+                  <a:srgbClr val="0B0F19"/>
+                </a:solidFill>
+                <a:latin typeface="Inter" pitchFamily="34" charset="0"/>
+                <a:ea typeface="Inter" pitchFamily="34" charset="-122"/>
+                <a:cs typeface="Inter" pitchFamily="34" charset="-120"/>
+              </a:rPr>
+              <a:t>Tout est compris. </a:t>
+            </a:r>
+            <a:pPr indent="0" marL="0">
+              <a:lnSpc>
+                <a:spcPct val="118000"/>
+              </a:lnSpc>
+              <a:spcAft>
+                <a:spcPts val="1000"/>
+              </a:spcAft>
+              <a:buNone/>
+            </a:pPr>
+            <a:r>
+              <a:rPr lang="en-US" sz="1250" dirty="0">
+                <a:solidFill>
+                  <a:srgbClr val="3D4556"/>
+                </a:solidFill>
+                <a:latin typeface="Inter" pitchFamily="34" charset="0"/>
+                <a:ea typeface="Inter" pitchFamily="34" charset="-122"/>
+                <a:cs typeface="Inter" pitchFamily="34" charset="-120"/>
+              </a:rPr>
+              <a:t>L'application, le tableau de bord, les rapports, les mises à jour. Aucun terminal à acheter. Un réseau active une licence par magasin, à son rythme.</a:t>
+            </a:r>
+            <a:endParaRPr lang="en-US" sz="1250" dirty="0"/>
+          </a:p>
+        </p:txBody>
+      </p:sp>
+      <p:sp>
+        <p:nvSpPr>
+          <p:cNvPr id="28" name="Text 25"/>
+          <p:cNvSpPr/>
+          <p:nvPr/>
+        </p:nvSpPr>
+        <p:spPr>
+          <a:xfrm>
+            <a:off x="731520" y="5897880"/>
+            <a:ext cx="10725912" cy="365760"/>
+          </a:xfrm>
+          <a:prstGeom prst="rect">
+            <a:avLst/>
+          </a:prstGeom>
+          <a:noFill/>
+          <a:ln/>
+        </p:spPr>
+        <p:txBody>
+          <a:bodyPr wrap="square" lIns="0" tIns="0" rIns="0" bIns="0" rtlCol="0" anchor="t"/>
+          <a:lstStyle/>
+          <a:p>
+            <a:pPr algn="l" indent="0" marL="0">
+              <a:lnSpc>
+                <a:spcPct val="118000"/>
+              </a:lnSpc>
+              <a:buNone/>
+            </a:pPr>
+            <a:r>
+              <a:rPr lang="en-US" sz="1050" i="1" dirty="0">
+                <a:solidFill>
+                  <a:srgbClr val="5B6475"/>
+                </a:solidFill>
+                <a:latin typeface="Inter" pitchFamily="34" charset="0"/>
+                <a:ea typeface="Inter" pitchFamily="34" charset="-122"/>
+                <a:cs typeface="Inter" pitchFamily="34" charset="-120"/>
+              </a:rPr>
+              <a:t>Plus de 100 appareils dans un même magasin ? 47 € par mois, ou 500 € à l’année, par tranche de 10 appareils supplémentaires.</a:t>
+            </a:r>
+            <a:endParaRPr lang="en-US" sz="1050" dirty="0"/>
+          </a:p>
+        </p:txBody>
+      </p:sp>
+      <p:sp>
+        <p:nvSpPr>
+          <p:cNvPr id="29" name="Text 26"/>
+          <p:cNvSpPr/>
+          <p:nvPr/>
+        </p:nvSpPr>
+        <p:spPr>
+          <a:xfrm>
+            <a:off x="731520" y="6400800"/>
+            <a:ext cx="6400800" cy="274320"/>
+          </a:xfrm>
+          <a:prstGeom prst="rect">
+            <a:avLst/>
+          </a:prstGeom>
+          <a:noFill/>
+          <a:ln/>
+        </p:spPr>
+        <p:txBody>
+          <a:bodyPr wrap="square" lIns="0" tIns="0" rIns="0" bIns="0" rtlCol="0" anchor="t"/>
+          <a:lstStyle/>
+          <a:p>
+            <a:pPr indent="0" marL="0">
+              <a:buNone/>
+            </a:pPr>
+            <a:r>
+              <a:rPr lang="en-US" sz="900" dirty="0">
+                <a:solidFill>
+                  <a:srgbClr val="5B6475"/>
+                </a:solidFill>
+                <a:latin typeface="Inter" pitchFamily="34" charset="0"/>
+                <a:ea typeface="Inter" pitchFamily="34" charset="-122"/>
+                <a:cs typeface="Inter" pitchFamily="34" charset="-120"/>
+              </a:rPr>
+              <a:t>Quantinvo · présentation</a:t>
+            </a:r>
+            <a:endParaRPr lang="en-US" sz="900" dirty="0"/>
+          </a:p>
+        </p:txBody>
+      </p:sp>
+      <p:sp>
+        <p:nvSpPr>
+          <p:cNvPr id="30" name="Text 27"/>
+          <p:cNvSpPr/>
+          <p:nvPr/>
+        </p:nvSpPr>
+        <p:spPr>
+          <a:xfrm>
+            <a:off x="11000232" y="6400800"/>
+            <a:ext cx="457200" cy="274320"/>
+          </a:xfrm>
+          <a:prstGeom prst="rect">
+            <a:avLst/>
+          </a:prstGeom>
+          <a:noFill/>
+          <a:ln/>
+        </p:spPr>
+        <p:txBody>
+          <a:bodyPr wrap="square" lIns="0" tIns="0" rIns="0" bIns="0" rtlCol="0" anchor="t"/>
+          <a:lstStyle/>
+          <a:p>
+            <a:pPr algn="r" indent="0" marL="0">
+              <a:buNone/>
+            </a:pPr>
+            <a:r>
+              <a:rPr lang="en-US" sz="900" dirty="0">
+                <a:solidFill>
+                  <a:srgbClr val="5B6475"/>
+                </a:solidFill>
+                <a:latin typeface="Inter" pitchFamily="34" charset="0"/>
+                <a:ea typeface="Inter" pitchFamily="34" charset="-122"/>
+                <a:cs typeface="Inter" pitchFamily="34" charset="-120"/>
+              </a:rPr>
+              <a:t>12</a:t>
+            </a:r>
+            <a:endParaRPr lang="en-US" sz="900" dirty="0"/>
+          </a:p>
+        </p:txBody>
+      </p:sp>
+    </p:spTree>
+  </p:cSld>
+  <p:clrMapOvr>
+    <a:masterClrMapping/>
+  </p:clrMapOvr>
+</p:sld>
+</file>
+
+<file path=ppt/slides/slide13.xml><?xml version="1.0" encoding="utf-8"?>
+<p:sld xmlns:a="http://schemas.openxmlformats.org/drawingml/2006/main" xmlns:r="http://schemas.openxmlformats.org/officeDocument/2006/relationships" xmlns:p="http://schemas.openxmlformats.org/presentationml/2006/main">
+  <p:cSld name="Slide 13">
+    <p:bg>
+      <p:bgPr>
+        <a:solidFill>
+          <a:srgbClr val="FFFFFF"/>
+        </a:solidFill>
+      </p:bgPr>
+    </p:bg>
+    <p:spTree>
+      <p:nvGrpSpPr>
+        <p:cNvPr id="1" name=""/>
+        <p:cNvGrpSpPr/>
+        <p:nvPr/>
+      </p:nvGrpSpPr>
+      <p:grpSpPr>
+        <a:xfrm>
+          <a:off x="0" y="0"/>
+          <a:ext cx="0" cy="0"/>
+          <a:chOff x="0" y="0"/>
+          <a:chExt cx="0" cy="0"/>
+        </a:xfrm>
+      </p:grpSpPr>
+      <p:pic>
+        <p:nvPicPr>
+          <p:cNvPr id="2" name="Image 0" descr="preencoded.png">    </p:cNvPr>
+          <p:cNvPicPr>
+            <a:picLocks noChangeAspect="1"/>
+          </p:cNvPicPr>
+          <p:nvPr/>
+        </p:nvPicPr>
+        <p:blipFill>
+          <a:blip r:embed="rId1"/>
+          <a:stretch>
+            <a:fillRect/>
+          </a:stretch>
+        </p:blipFill>
+        <p:spPr>
+          <a:xfrm>
+            <a:off x="731520" y="384048"/>
+            <a:ext cx="329184" cy="329184"/>
+          </a:xfrm>
+          <a:prstGeom prst="rect">
+            <a:avLst/>
+          </a:prstGeom>
+        </p:spPr>
+      </p:pic>
+      <p:sp>
+        <p:nvSpPr>
+          <p:cNvPr id="3" name="Text 0"/>
+          <p:cNvSpPr/>
+          <p:nvPr/>
+        </p:nvSpPr>
+        <p:spPr>
+          <a:xfrm>
+            <a:off x="1170432" y="347472"/>
+            <a:ext cx="2743200" cy="402336"/>
+          </a:xfrm>
+          <a:prstGeom prst="rect">
+            <a:avLst/>
+          </a:prstGeom>
+          <a:noFill/>
+          <a:ln/>
+        </p:spPr>
+        <p:txBody>
+          <a:bodyPr wrap="square" lIns="0" tIns="0" rIns="0" bIns="0" rtlCol="0" anchor="ctr"/>
+          <a:lstStyle/>
+          <a:p>
+            <a:pPr indent="0" marL="0">
+              <a:buNone/>
+            </a:pPr>
+            <a:r>
+              <a:rPr lang="en-US" sz="1600" b="1" dirty="0">
+                <a:solidFill>
+                  <a:srgbClr val="0B0F19"/>
+                </a:solidFill>
+                <a:latin typeface="Sora" pitchFamily="34" charset="0"/>
+                <a:ea typeface="Sora" pitchFamily="34" charset="-122"/>
+                <a:cs typeface="Sora" pitchFamily="34" charset="-120"/>
+              </a:rPr>
+              <a:t>Quantinvo</a:t>
+            </a:r>
+            <a:endParaRPr lang="en-US" sz="1600" dirty="0"/>
+          </a:p>
+        </p:txBody>
+      </p:sp>
+      <p:sp>
+        <p:nvSpPr>
+          <p:cNvPr id="4" name="Text 1"/>
+          <p:cNvSpPr/>
+          <p:nvPr/>
+        </p:nvSpPr>
+        <p:spPr>
+          <a:xfrm>
+            <a:off x="5971032" y="347472"/>
+            <a:ext cx="5486400" cy="402336"/>
+          </a:xfrm>
+          <a:prstGeom prst="rect">
+            <a:avLst/>
+          </a:prstGeom>
+          <a:noFill/>
+          <a:ln/>
+        </p:spPr>
+        <p:txBody>
+          <a:bodyPr wrap="square" lIns="0" tIns="0" rIns="0" bIns="0" rtlCol="0" anchor="ctr"/>
+          <a:lstStyle/>
+          <a:p>
+            <a:pPr algn="r" indent="0" marL="0">
+              <a:buNone/>
+            </a:pPr>
+            <a:r>
+              <a:rPr lang="en-US" sz="1000" dirty="0">
+                <a:solidFill>
+                  <a:srgbClr val="5B6475"/>
+                </a:solidFill>
+                <a:latin typeface="Inter" pitchFamily="34" charset="0"/>
+                <a:ea typeface="Inter" pitchFamily="34" charset="-122"/>
+                <a:cs typeface="Inter" pitchFamily="34" charset="-120"/>
+              </a:rPr>
+              <a:t>Pour être clair</a:t>
+            </a:r>
+            <a:endParaRPr lang="en-US" sz="1000" dirty="0"/>
+          </a:p>
+        </p:txBody>
+      </p:sp>
+      <p:sp>
+        <p:nvSpPr>
+          <p:cNvPr id="5" name="Shape 2"/>
+          <p:cNvSpPr/>
+          <p:nvPr/>
+        </p:nvSpPr>
+        <p:spPr>
+          <a:xfrm>
+            <a:off x="731520" y="877824"/>
+            <a:ext cx="10725912" cy="25603"/>
+          </a:xfrm>
+          <a:prstGeom prst="rect">
+            <a:avLst/>
+          </a:prstGeom>
+          <a:solidFill>
+            <a:srgbClr val="38C9FF"/>
+          </a:solidFill>
+          <a:ln w="12700">
+            <a:solidFill>
+              <a:srgbClr val="38C9FF"/>
+            </a:solidFill>
+            <a:prstDash val="solid"/>
+          </a:ln>
+        </p:spPr>
+      </p:sp>
+      <p:sp>
+        <p:nvSpPr>
+          <p:cNvPr id="6" name="Text 3"/>
+          <p:cNvSpPr/>
+          <p:nvPr/>
+        </p:nvSpPr>
+        <p:spPr>
+          <a:xfrm>
+            <a:off x="731520" y="1325880"/>
+            <a:ext cx="4206240" cy="2011680"/>
+          </a:xfrm>
+          <a:prstGeom prst="rect">
+            <a:avLst/>
+          </a:prstGeom>
+          <a:noFill/>
+          <a:ln/>
+        </p:spPr>
+        <p:txBody>
+          <a:bodyPr wrap="square" lIns="0" tIns="0" rIns="0" bIns="0" rtlCol="0" anchor="t"/>
+          <a:lstStyle/>
+          <a:p>
+            <a:pPr indent="0" marL="0">
+              <a:lnSpc>
+                <a:spcPct val="105000"/>
+              </a:lnSpc>
+              <a:buNone/>
+            </a:pPr>
+            <a:r>
+              <a:rPr lang="en-US" sz="2600" b="1" dirty="0">
+                <a:solidFill>
+                  <a:srgbClr val="4636B0"/>
+                </a:solidFill>
+                <a:latin typeface="Sora" pitchFamily="34" charset="0"/>
+                <a:ea typeface="Sora" pitchFamily="34" charset="-122"/>
+                <a:cs typeface="Sora" pitchFamily="34" charset="-120"/>
+              </a:rPr>
+              <a:t>Ce qu'on ne vous promet pas.</a:t>
+            </a:r>
+            <a:endParaRPr lang="en-US" sz="2600" dirty="0"/>
+          </a:p>
+        </p:txBody>
+      </p:sp>
+      <p:sp>
+        <p:nvSpPr>
+          <p:cNvPr id="7" name="Text 4"/>
+          <p:cNvSpPr/>
+          <p:nvPr/>
+        </p:nvSpPr>
+        <p:spPr>
+          <a:xfrm>
+            <a:off x="731520" y="3383280"/>
+            <a:ext cx="4206240" cy="548640"/>
+          </a:xfrm>
+          <a:prstGeom prst="rect">
+            <a:avLst/>
+          </a:prstGeom>
+          <a:noFill/>
+          <a:ln/>
+        </p:spPr>
+        <p:txBody>
+          <a:bodyPr wrap="square" lIns="0" tIns="0" rIns="0" bIns="0" rtlCol="0" anchor="t"/>
+          <a:lstStyle/>
+          <a:p>
+            <a:pPr algn="l" indent="0" marL="0">
+              <a:lnSpc>
+                <a:spcPct val="118000"/>
+              </a:lnSpc>
+              <a:buNone/>
+            </a:pPr>
+            <a:r>
+              <a:rPr lang="en-US" sz="1250" i="1" dirty="0">
+                <a:solidFill>
+                  <a:srgbClr val="5B6475"/>
+                </a:solidFill>
+                <a:latin typeface="Inter" pitchFamily="34" charset="0"/>
+                <a:ea typeface="Inter" pitchFamily="34" charset="-122"/>
+                <a:cs typeface="Inter" pitchFamily="34" charset="-120"/>
+              </a:rPr>
+              <a:t>Autant le dire avant la démonstration qu'après.</a:t>
+            </a:r>
+            <a:endParaRPr lang="en-US" sz="1250" dirty="0"/>
+          </a:p>
+        </p:txBody>
+      </p:sp>
+      <p:sp>
+        <p:nvSpPr>
+          <p:cNvPr id="8" name="Text 5"/>
+          <p:cNvSpPr/>
+          <p:nvPr/>
+        </p:nvSpPr>
+        <p:spPr>
+          <a:xfrm>
+            <a:off x="5394960" y="1371600"/>
+            <a:ext cx="6062472" cy="4389120"/>
+          </a:xfrm>
+          <a:prstGeom prst="rect">
+            <a:avLst/>
+          </a:prstGeom>
+          <a:noFill/>
+          <a:ln/>
+        </p:spPr>
+        <p:txBody>
+          <a:bodyPr wrap="square" lIns="0" tIns="0" rIns="0" bIns="0" rtlCol="0" anchor="t"/>
+          <a:lstStyle/>
+          <a:p>
+            <a:pPr indent="0" marL="0">
+              <a:lnSpc>
+                <a:spcPct val="118000"/>
+              </a:lnSpc>
+              <a:spcAft>
+                <a:spcPts val="1400"/>
+              </a:spcAft>
+              <a:buNone/>
+            </a:pPr>
+            <a:r>
+              <a:rPr lang="en-US" sz="1400" b="1" dirty="0">
+                <a:solidFill>
+                  <a:srgbClr val="0B0F19"/>
+                </a:solidFill>
+                <a:latin typeface="Inter" pitchFamily="34" charset="0"/>
+                <a:ea typeface="Inter" pitchFamily="34" charset="-122"/>
+                <a:cs typeface="Inter" pitchFamily="34" charset="-120"/>
+              </a:rPr>
+              <a:t>L'inventaire fiscal certifié. </a:t>
+            </a:r>
+            <a:pPr indent="0" marL="0">
+              <a:lnSpc>
+                <a:spcPct val="118000"/>
+              </a:lnSpc>
+              <a:spcAft>
+                <a:spcPts val="1400"/>
+              </a:spcAft>
+              <a:buNone/>
+            </a:pPr>
+            <a:r>
+              <a:rPr lang="en-US" sz="1400" dirty="0">
+                <a:solidFill>
+                  <a:srgbClr val="3D4556"/>
+                </a:solidFill>
+                <a:latin typeface="Inter" pitchFamily="34" charset="0"/>
+                <a:ea typeface="Inter" pitchFamily="34" charset="-122"/>
+                <a:cs typeface="Inter" pitchFamily="34" charset="-120"/>
+              </a:rPr>
+              <a:t>Si votre commissaire aux comptes exige un comptage par un tiers, ce comptage reste. Quantinvo fait tout le reste de l'année, et il le prépare.</a:t>
+            </a:r>
+            <a:endParaRPr lang="en-US" sz="1400" dirty="0"/>
+          </a:p>
+          <a:p>
+            <a:pPr indent="0" marL="0">
+              <a:lnSpc>
+                <a:spcPct val="118000"/>
+              </a:lnSpc>
+              <a:spcAft>
+                <a:spcPts val="1400"/>
+              </a:spcAft>
+              <a:buNone/>
+            </a:pPr>
+            <a:r>
+              <a:rPr lang="en-US" sz="1400" b="1" dirty="0">
+                <a:solidFill>
+                  <a:srgbClr val="0B0F19"/>
+                </a:solidFill>
+                <a:latin typeface="Inter" pitchFamily="34" charset="0"/>
+                <a:ea typeface="Inter" pitchFamily="34" charset="-122"/>
+                <a:cs typeface="Inter" pitchFamily="34" charset="-120"/>
+              </a:rPr>
+              <a:t>Une connexion à votre ERP. </a:t>
+            </a:r>
+            <a:pPr indent="0" marL="0">
+              <a:lnSpc>
+                <a:spcPct val="118000"/>
+              </a:lnSpc>
+              <a:spcAft>
+                <a:spcPts val="1400"/>
+              </a:spcAft>
+              <a:buNone/>
+            </a:pPr>
+            <a:r>
+              <a:rPr lang="en-US" sz="1400" dirty="0">
+                <a:solidFill>
+                  <a:srgbClr val="3D4556"/>
+                </a:solidFill>
+                <a:latin typeface="Inter" pitchFamily="34" charset="0"/>
+                <a:ea typeface="Inter" pitchFamily="34" charset="-122"/>
+                <a:cs typeface="Inter" pitchFamily="34" charset="-120"/>
+              </a:rPr>
+              <a:t>Pas encore. Quantinvo importe vos fichiers et rend un Excel. C'est ce qui permet de démarrer en une journée, sans projet informatique.</a:t>
+            </a:r>
+            <a:endParaRPr lang="en-US" sz="1400" dirty="0"/>
+          </a:p>
+          <a:p>
+            <a:pPr indent="0" marL="0">
+              <a:lnSpc>
+                <a:spcPct val="118000"/>
+              </a:lnSpc>
+              <a:spcAft>
+                <a:spcPts val="1400"/>
+              </a:spcAft>
+              <a:buNone/>
+            </a:pPr>
+            <a:r>
+              <a:rPr lang="en-US" sz="1400" b="1" dirty="0">
+                <a:solidFill>
+                  <a:srgbClr val="0B0F19"/>
+                </a:solidFill>
+                <a:latin typeface="Inter" pitchFamily="34" charset="0"/>
+                <a:ea typeface="Inter" pitchFamily="34" charset="-122"/>
+                <a:cs typeface="Inter" pitchFamily="34" charset="-120"/>
+              </a:rPr>
+              <a:t>Android sur les boutiques. </a:t>
+            </a:r>
+            <a:pPr indent="0" marL="0">
+              <a:lnSpc>
+                <a:spcPct val="118000"/>
+              </a:lnSpc>
+              <a:spcAft>
+                <a:spcPts val="1400"/>
+              </a:spcAft>
+              <a:buNone/>
+            </a:pPr>
+            <a:r>
+              <a:rPr lang="en-US" sz="1400" dirty="0">
+                <a:solidFill>
+                  <a:srgbClr val="3D4556"/>
+                </a:solidFill>
+                <a:latin typeface="Inter" pitchFamily="34" charset="0"/>
+                <a:ea typeface="Inter" pitchFamily="34" charset="-122"/>
+                <a:cs typeface="Inter" pitchFamily="34" charset="-120"/>
+              </a:rPr>
+              <a:t>L'application tourne sur Android, et elle est disponible sur iPhone. La mise en ligne sur Google Play est en cours ; d'ici là, l'installation passe par votre catalogue d'entreprise.</a:t>
+            </a:r>
+            <a:endParaRPr lang="en-US" sz="1400" dirty="0"/>
+          </a:p>
+          <a:p>
+            <a:pPr indent="0" marL="0">
+              <a:lnSpc>
+                <a:spcPct val="118000"/>
+              </a:lnSpc>
+              <a:spcAft>
+                <a:spcPts val="1400"/>
+              </a:spcAft>
+              <a:buNone/>
+            </a:pPr>
+            <a:r>
+              <a:rPr lang="en-US" sz="1400" b="1" dirty="0">
+                <a:solidFill>
+                  <a:srgbClr val="0B0F19"/>
+                </a:solidFill>
+                <a:latin typeface="Inter" pitchFamily="34" charset="0"/>
+                <a:ea typeface="Inter" pitchFamily="34" charset="-122"/>
+                <a:cs typeface="Inter" pitchFamily="34" charset="-120"/>
+              </a:rPr>
+              <a:t>La connexion par votre annuaire. </a:t>
+            </a:r>
+            <a:pPr indent="0" marL="0">
+              <a:lnSpc>
+                <a:spcPct val="118000"/>
+              </a:lnSpc>
+              <a:spcAft>
+                <a:spcPts val="1400"/>
+              </a:spcAft>
+              <a:buNone/>
+            </a:pPr>
+            <a:r>
+              <a:rPr lang="en-US" sz="1400" dirty="0">
+                <a:solidFill>
+                  <a:srgbClr val="3D4556"/>
+                </a:solidFill>
+                <a:latin typeface="Inter" pitchFamily="34" charset="0"/>
+                <a:ea typeface="Inter" pitchFamily="34" charset="-122"/>
+                <a:cs typeface="Inter" pitchFamily="34" charset="-120"/>
+              </a:rPr>
+              <a:t>Les comptes sont nominatifs, créés par invitation. Pas de SAML ni d'Entra ID pour l'instant ; dites-nous si c'est une exigence.</a:t>
+            </a:r>
+            <a:endParaRPr lang="en-US" sz="1400" dirty="0"/>
+          </a:p>
+        </p:txBody>
+      </p:sp>
+      <p:sp>
+        <p:nvSpPr>
+          <p:cNvPr id="9" name="Text 6"/>
+          <p:cNvSpPr/>
+          <p:nvPr/>
+        </p:nvSpPr>
+        <p:spPr>
+          <a:xfrm>
+            <a:off x="731520" y="6400800"/>
+            <a:ext cx="6400800" cy="274320"/>
+          </a:xfrm>
+          <a:prstGeom prst="rect">
+            <a:avLst/>
+          </a:prstGeom>
+          <a:noFill/>
+          <a:ln/>
+        </p:spPr>
+        <p:txBody>
+          <a:bodyPr wrap="square" lIns="0" tIns="0" rIns="0" bIns="0" rtlCol="0" anchor="t"/>
+          <a:lstStyle/>
+          <a:p>
+            <a:pPr indent="0" marL="0">
+              <a:buNone/>
+            </a:pPr>
+            <a:r>
+              <a:rPr lang="en-US" sz="900" dirty="0">
+                <a:solidFill>
+                  <a:srgbClr val="5B6475"/>
+                </a:solidFill>
+                <a:latin typeface="Inter" pitchFamily="34" charset="0"/>
+                <a:ea typeface="Inter" pitchFamily="34" charset="-122"/>
+                <a:cs typeface="Inter" pitchFamily="34" charset="-120"/>
+              </a:rPr>
+              <a:t>Quantinvo · présentation</a:t>
+            </a:r>
+            <a:endParaRPr lang="en-US" sz="900" dirty="0"/>
+          </a:p>
+        </p:txBody>
+      </p:sp>
+      <p:sp>
+        <p:nvSpPr>
+          <p:cNvPr id="10" name="Text 7"/>
+          <p:cNvSpPr/>
+          <p:nvPr/>
+        </p:nvSpPr>
+        <p:spPr>
+          <a:xfrm>
+            <a:off x="11000232" y="6400800"/>
+            <a:ext cx="457200" cy="274320"/>
+          </a:xfrm>
+          <a:prstGeom prst="rect">
+            <a:avLst/>
+          </a:prstGeom>
+          <a:noFill/>
+          <a:ln/>
+        </p:spPr>
+        <p:txBody>
+          <a:bodyPr wrap="square" lIns="0" tIns="0" rIns="0" bIns="0" rtlCol="0" anchor="t"/>
+          <a:lstStyle/>
+          <a:p>
+            <a:pPr algn="r" indent="0" marL="0">
+              <a:buNone/>
+            </a:pPr>
+            <a:r>
+              <a:rPr lang="en-US" sz="900" dirty="0">
+                <a:solidFill>
+                  <a:srgbClr val="5B6475"/>
+                </a:solidFill>
+                <a:latin typeface="Inter" pitchFamily="34" charset="0"/>
+                <a:ea typeface="Inter" pitchFamily="34" charset="-122"/>
+                <a:cs typeface="Inter" pitchFamily="34" charset="-120"/>
+              </a:rPr>
+              <a:t>13</a:t>
+            </a:r>
+            <a:endParaRPr lang="en-US" sz="900" dirty="0"/>
+          </a:p>
+        </p:txBody>
+      </p:sp>
+    </p:spTree>
+  </p:cSld>
+  <p:clrMapOvr>
+    <a:masterClrMapping/>
+  </p:clrMapOvr>
+</p:sld>
+</file>
+
+<file path=ppt/slides/slide14.xml><?xml version="1.0" encoding="utf-8"?>
+<p:sld xmlns:a="http://schemas.openxmlformats.org/drawingml/2006/main" xmlns:r="http://schemas.openxmlformats.org/officeDocument/2006/relationships" xmlns:p="http://schemas.openxmlformats.org/presentationml/2006/main">
+  <p:cSld name="Slide 14">
+    <p:bg>
+      <p:bgPr>
+        <a:solidFill>
+          <a:srgbClr val="FFFFFF"/>
+        </a:solidFill>
+      </p:bgPr>
+    </p:bg>
+    <p:spTree>
+      <p:nvGrpSpPr>
+        <p:cNvPr id="1" name=""/>
+        <p:cNvGrpSpPr/>
+        <p:nvPr/>
+      </p:nvGrpSpPr>
+      <p:grpSpPr>
+        <a:xfrm>
+          <a:off x="0" y="0"/>
+          <a:ext cx="0" cy="0"/>
+          <a:chOff x="0" y="0"/>
+          <a:chExt cx="0" cy="0"/>
+        </a:xfrm>
+      </p:grpSpPr>
+      <p:pic>
+        <p:nvPicPr>
+          <p:cNvPr id="2" name="Image 0" descr="preencoded.png">    </p:cNvPr>
+          <p:cNvPicPr>
+            <a:picLocks noChangeAspect="1"/>
+          </p:cNvPicPr>
+          <p:nvPr/>
+        </p:nvPicPr>
+        <p:blipFill>
+          <a:blip r:embed="rId1"/>
+          <a:stretch>
+            <a:fillRect/>
+          </a:stretch>
+        </p:blipFill>
+        <p:spPr>
+          <a:xfrm>
             <a:off x="731520" y="685800"/>
             <a:ext cx="566928" cy="566928"/>
           </a:xfrm>
@@ -5193,7 +6616,7 @@
                 <a:ea typeface="Inter" pitchFamily="34" charset="-122"/>
                 <a:cs typeface="Inter" pitchFamily="34" charset="-120"/>
               </a:rPr>
-              <a:t>Son auteur fait du contrôle des stocks en magasin. Les irritants, il les a sous les yeux à chaque inventaire : la balise qu'on ne retrouve pas, la réserve sans réseau, le fichier Excel qu'il faut reformater avant chaque import, le rapport qui arrive trois jours après, quand tout le monde est passé à autre chose.</a:t>
+              <a:t>Je fais du contrôle des stocks en magasin. Les irritants, je les ai sous les yeux à chaque inventaire : la balise qu'on ne retrouve pas, la réserve sans réseau, le fichier Excel qu'il faut reformater avant chaque import, le rapport qui arrive trois jours après, quand tout le monde est passé à autre chose.</a:t>
             </a:r>
             <a:endParaRPr lang="en-US" sz="1400" dirty="0"/>
           </a:p>
@@ -5216,7 +6639,7 @@
                 <a:ea typeface="Inter" pitchFamily="34" charset="-122"/>
                 <a:cs typeface="Inter" pitchFamily="34" charset="-120"/>
               </a:rPr>
-              <a:t>Quantinvo est la réponse à ces irritants. Rien de plus. Une application sur le téléphone que l'équipe a déjà en poche, un tableau de bord pour celui qui pilote, un rapport à la fin.</a:t>
+              <a:t>Quantinvo est la réponse à ces irritants, et rien de plus. Une application sur le téléphone que l'équipe a déjà en poche, un tableau de bord pour celui qui pilote, un rapport à la fin.</a:t>
             </a:r>
             <a:endParaRPr lang="en-US" sz="1400" dirty="0"/>
           </a:p>
@@ -7280,7 +8703,7 @@
                 <a:ea typeface="Inter" pitchFamily="34" charset="-122"/>
                 <a:cs typeface="Inter" pitchFamily="34" charset="-120"/>
               </a:rPr>
-              <a:t>Le tableau de bord</a:t>
+              <a:t>L'application</a:t>
             </a:r>
             <a:endParaRPr lang="en-US" sz="1000" dirty="0"/>
           </a:p>
@@ -7319,7 +8742,7 @@
         </p:nvSpPr>
         <p:spPr>
           <a:xfrm>
-            <a:off x="731520" y="1280160"/>
+            <a:off x="731520" y="1188720"/>
             <a:ext cx="10725912" cy="822960"/>
           </a:xfrm>
           <a:prstGeom prst="rect">
@@ -7347,7 +8770,7 @@
                 <a:ea typeface="Sora" pitchFamily="34" charset="-122"/>
                 <a:cs typeface="Sora" pitchFamily="34" charset="-120"/>
               </a:rPr>
-              <a:t>Pendant que ça compte, vous voyez où ça en est.</a:t>
+              <a:t>Ce que voit la personne qui compte</a:t>
             </a:r>
             <a:endParaRPr lang="en-US" sz="2600" dirty="0"/>
           </a:p>
@@ -7361,27 +8784,69 @@
         </p:nvSpPr>
         <p:spPr>
           <a:xfrm>
-            <a:off x="731520" y="2103120"/>
-            <a:ext cx="10725912" cy="731520"/>
-          </a:xfrm>
-          <a:prstGeom prst="rect">
-            <a:avLst/>
-          </a:prstGeom>
-          <a:noFill/>
-          <a:ln/>
-        </p:spPr>
-        <p:txBody>
-          <a:bodyPr wrap="square" lIns="0" tIns="0" rIns="0" bIns="0" rtlCol="0" anchor="t"/>
-          <a:lstStyle/>
-          <a:p>
-            <a:pPr algn="l" indent="0" marL="0">
+            <a:off x="731520" y="1874520"/>
+            <a:ext cx="3392424" cy="365760"/>
+          </a:xfrm>
+          <a:prstGeom prst="rect">
+            <a:avLst/>
+          </a:prstGeom>
+          <a:noFill/>
+          <a:ln/>
+        </p:spPr>
+        <p:txBody>
+          <a:bodyPr wrap="square" lIns="0" tIns="0" rIns="0" bIns="0" rtlCol="0" anchor="t"/>
+          <a:lstStyle/>
+          <a:p>
+            <a:pPr indent="0" marL="0">
               <a:lnSpc>
-                <a:spcPct val="118000"/>
+                <a:spcPct val="100000"/>
               </a:lnSpc>
               <a:buNone/>
             </a:pPr>
             <a:r>
-              <a:rPr lang="en-US" sz="1250" dirty="0">
+              <a:rPr lang="en-US" sz="1350" b="1" dirty="0">
+                <a:solidFill>
+                  <a:srgbClr val="4636B0"/>
+                </a:solidFill>
+                <a:latin typeface="Sora" pitchFamily="34" charset="0"/>
+                <a:ea typeface="Sora" pitchFamily="34" charset="-122"/>
+                <a:cs typeface="Sora" pitchFamily="34" charset="-120"/>
+              </a:rPr>
+              <a:t>Les balises s’impriment</a:t>
+            </a:r>
+            <a:endParaRPr lang="en-US" sz="1350" dirty="0"/>
+          </a:p>
+        </p:txBody>
+      </p:sp>
+      <p:sp>
+        <p:nvSpPr>
+          <p:cNvPr id="8" name="Text 5"/>
+          <p:cNvSpPr/>
+          <p:nvPr/>
+        </p:nvSpPr>
+        <p:spPr>
+          <a:xfrm>
+            <a:off x="731520" y="2258568"/>
+            <a:ext cx="3392424" cy="585216"/>
+          </a:xfrm>
+          <a:prstGeom prst="rect">
+            <a:avLst/>
+          </a:prstGeom>
+          <a:noFill/>
+          <a:ln/>
+        </p:spPr>
+        <p:txBody>
+          <a:bodyPr wrap="square" lIns="0" tIns="0" rIns="0" bIns="0" rtlCol="0" anchor="t"/>
+          <a:lstStyle/>
+          <a:p>
+            <a:pPr indent="0" marL="0">
+              <a:lnSpc>
+                <a:spcPct val="115000"/>
+              </a:lnSpc>
+              <a:buNone/>
+            </a:pPr>
+            <a:r>
+              <a:rPr lang="en-US" sz="1100" dirty="0">
                 <a:solidFill>
                   <a:srgbClr val="3D4556"/>
                 </a:solidFill>
@@ -7389,34 +8854,34 @@
                 <a:ea typeface="Inter" pitchFamily="34" charset="-122"/>
                 <a:cs typeface="Inter" pitchFamily="34" charset="-120"/>
               </a:rPr>
-              <a:t>Depuis le bureau, sur le site : combien d'appareils comptent, combien auditent, l'avancement zone par zone, les derniers scans. Ce que vous ne voyez pas, et c'est voulu : qui fait quoi. Le suivi est agrégé, on pilote le travail, pas les personnes.</a:t>
-            </a:r>
-            <a:endParaRPr lang="en-US" sz="1250" dirty="0"/>
-          </a:p>
-        </p:txBody>
-      </p:sp>
-      <p:sp>
-        <p:nvSpPr>
-          <p:cNvPr id="8" name="Shape 5"/>
-          <p:cNvSpPr/>
-          <p:nvPr/>
-        </p:nvSpPr>
-        <p:spPr>
-          <a:xfrm>
-            <a:off x="1556182" y="2825496"/>
-            <a:ext cx="9076589" cy="3355848"/>
+              <a:t>Une planche d'étiquettes numérotées, en PDF. Elles délimitent les zones et se collent en rayon.</a:t>
+            </a:r>
+            <a:endParaRPr lang="en-US" sz="1100" dirty="0"/>
+          </a:p>
+        </p:txBody>
+      </p:sp>
+      <p:sp>
+        <p:nvSpPr>
+          <p:cNvPr id="9" name="Shape 6"/>
+          <p:cNvSpPr/>
+          <p:nvPr/>
+        </p:nvSpPr>
+        <p:spPr>
+          <a:xfrm>
+            <a:off x="731520" y="2880360"/>
+            <a:ext cx="3392424" cy="3319272"/>
           </a:xfrm>
           <a:prstGeom prst="roundRect">
             <a:avLst>
-              <a:gd name="adj" fmla="val 2180"/>
+              <a:gd name="adj" fmla="val 3857"/>
             </a:avLst>
           </a:prstGeom>
           <a:solidFill>
-            <a:srgbClr val="FFFFFF"/>
+            <a:srgbClr val="F4F5F9"/>
           </a:solidFill>
           <a:ln w="12700">
             <a:solidFill>
-              <a:srgbClr val="E3E6EE"/>
+              <a:srgbClr val="F4F5F9"/>
             </a:solidFill>
             <a:prstDash val="solid"/>
           </a:ln>
@@ -7424,7 +8889,7 @@
       </p:sp>
       <p:pic>
         <p:nvPicPr>
-          <p:cNvPr id="9" name="Image 1" descr="preencoded.png">    </p:cNvPr>
+          <p:cNvPr id="10" name="Image 1" descr="preencoded.png">    </p:cNvPr>
           <p:cNvPicPr>
             <a:picLocks noChangeAspect="1"/>
           </p:cNvPicPr>
@@ -7438,8 +8903,8 @@
         </p:blipFill>
         <p:spPr>
           <a:xfrm>
-            <a:off x="1611046" y="2880360"/>
-            <a:ext cx="8966861" cy="3246120"/>
+            <a:off x="1042416" y="2880963"/>
+            <a:ext cx="2770632" cy="3318669"/>
           </a:xfrm>
           <a:prstGeom prst="rect">
             <a:avLst/>
@@ -7448,46 +8913,277 @@
       </p:pic>
       <p:sp>
         <p:nvSpPr>
-          <p:cNvPr id="10" name="Text 6"/>
-          <p:cNvSpPr/>
-          <p:nvPr/>
-        </p:nvSpPr>
-        <p:spPr>
-          <a:xfrm>
-            <a:off x="1611046" y="6263640"/>
-            <a:ext cx="6062472" cy="365760"/>
-          </a:xfrm>
-          <a:prstGeom prst="rect">
-            <a:avLst/>
-          </a:prstGeom>
-          <a:noFill/>
-          <a:ln/>
-        </p:spPr>
-        <p:txBody>
-          <a:bodyPr wrap="square" lIns="0" tIns="0" rIns="0" bIns="0" rtlCol="0" anchor="t"/>
-          <a:lstStyle/>
-          <a:p>
-            <a:pPr indent="0" marL="0">
-              <a:buNone/>
-            </a:pPr>
-            <a:r>
-              <a:rPr lang="en-US" sz="1000" i="1" dirty="0">
-                <a:solidFill>
-                  <a:srgbClr val="5B6475"/>
-                </a:solidFill>
-                <a:latin typeface="Inter" pitchFamily="34" charset="0"/>
-                <a:ea typeface="Inter" pitchFamily="34" charset="-122"/>
-                <a:cs typeface="Inter" pitchFamily="34" charset="-120"/>
-              </a:rPr>
-              <a:t>Onglet Suivi, données d’essai.</a:t>
-            </a:r>
-            <a:endParaRPr lang="en-US" sz="1000" dirty="0"/>
-          </a:p>
-        </p:txBody>
-      </p:sp>
-      <p:sp>
-        <p:nvSpPr>
           <p:cNvPr id="11" name="Text 7"/>
+          <p:cNvSpPr/>
+          <p:nvPr/>
+        </p:nvSpPr>
+        <p:spPr>
+          <a:xfrm>
+            <a:off x="4398264" y="1874520"/>
+            <a:ext cx="3392424" cy="365760"/>
+          </a:xfrm>
+          <a:prstGeom prst="rect">
+            <a:avLst/>
+          </a:prstGeom>
+          <a:noFill/>
+          <a:ln/>
+        </p:spPr>
+        <p:txBody>
+          <a:bodyPr wrap="square" lIns="0" tIns="0" rIns="0" bIns="0" rtlCol="0" anchor="t"/>
+          <a:lstStyle/>
+          <a:p>
+            <a:pPr indent="0" marL="0">
+              <a:lnSpc>
+                <a:spcPct val="100000"/>
+              </a:lnSpc>
+              <a:buNone/>
+            </a:pPr>
+            <a:r>
+              <a:rPr lang="en-US" sz="1350" b="1" dirty="0">
+                <a:solidFill>
+                  <a:srgbClr val="4636B0"/>
+                </a:solidFill>
+                <a:latin typeface="Sora" pitchFamily="34" charset="0"/>
+                <a:ea typeface="Sora" pitchFamily="34" charset="-122"/>
+                <a:cs typeface="Sora" pitchFamily="34" charset="-120"/>
+              </a:rPr>
+              <a:t>On scanne, ça compte</a:t>
+            </a:r>
+            <a:endParaRPr lang="en-US" sz="1350" dirty="0"/>
+          </a:p>
+        </p:txBody>
+      </p:sp>
+      <p:sp>
+        <p:nvSpPr>
+          <p:cNvPr id="12" name="Text 8"/>
+          <p:cNvSpPr/>
+          <p:nvPr/>
+        </p:nvSpPr>
+        <p:spPr>
+          <a:xfrm>
+            <a:off x="4398264" y="2258568"/>
+            <a:ext cx="3392424" cy="585216"/>
+          </a:xfrm>
+          <a:prstGeom prst="rect">
+            <a:avLst/>
+          </a:prstGeom>
+          <a:noFill/>
+          <a:ln/>
+        </p:spPr>
+        <p:txBody>
+          <a:bodyPr wrap="square" lIns="0" tIns="0" rIns="0" bIns="0" rtlCol="0" anchor="t"/>
+          <a:lstStyle/>
+          <a:p>
+            <a:pPr indent="0" marL="0">
+              <a:lnSpc>
+                <a:spcPct val="115000"/>
+              </a:lnSpc>
+              <a:buNone/>
+            </a:pPr>
+            <a:r>
+              <a:rPr lang="en-US" sz="1100" dirty="0">
+                <a:solidFill>
+                  <a:srgbClr val="3D4556"/>
+                </a:solidFill>
+                <a:latin typeface="Inter" pitchFamily="34" charset="0"/>
+                <a:ea typeface="Inter" pitchFamily="34" charset="-122"/>
+                <a:cs typeface="Inter" pitchFamily="34" charset="-120"/>
+              </a:rPr>
+              <a:t>Caméra, saisie manuelle ou douchette Bluetooth. La quantité se corrige d'un appui.</a:t>
+            </a:r>
+            <a:endParaRPr lang="en-US" sz="1100" dirty="0"/>
+          </a:p>
+        </p:txBody>
+      </p:sp>
+      <p:sp>
+        <p:nvSpPr>
+          <p:cNvPr id="13" name="Shape 9"/>
+          <p:cNvSpPr/>
+          <p:nvPr/>
+        </p:nvSpPr>
+        <p:spPr>
+          <a:xfrm>
+            <a:off x="4398264" y="2880360"/>
+            <a:ext cx="3392424" cy="3319272"/>
+          </a:xfrm>
+          <a:prstGeom prst="roundRect">
+            <a:avLst>
+              <a:gd name="adj" fmla="val 3857"/>
+            </a:avLst>
+          </a:prstGeom>
+          <a:solidFill>
+            <a:srgbClr val="EEEEFC"/>
+          </a:solidFill>
+          <a:ln w="12700">
+            <a:solidFill>
+              <a:srgbClr val="EEEEFC"/>
+            </a:solidFill>
+            <a:prstDash val="solid"/>
+          </a:ln>
+        </p:spPr>
+      </p:sp>
+      <p:pic>
+        <p:nvPicPr>
+          <p:cNvPr id="14" name="Image 2" descr="preencoded.png">    </p:cNvPr>
+          <p:cNvPicPr>
+            <a:picLocks noChangeAspect="1"/>
+          </p:cNvPicPr>
+          <p:nvPr/>
+        </p:nvPicPr>
+        <p:blipFill>
+          <a:blip r:embed="rId3"/>
+          <a:stretch>
+            <a:fillRect/>
+          </a:stretch>
+        </p:blipFill>
+        <p:spPr>
+          <a:xfrm>
+            <a:off x="4709160" y="2880963"/>
+            <a:ext cx="2770632" cy="3318669"/>
+          </a:xfrm>
+          <a:prstGeom prst="rect">
+            <a:avLst/>
+          </a:prstGeom>
+        </p:spPr>
+      </p:pic>
+      <p:sp>
+        <p:nvSpPr>
+          <p:cNvPr id="15" name="Text 10"/>
+          <p:cNvSpPr/>
+          <p:nvPr/>
+        </p:nvSpPr>
+        <p:spPr>
+          <a:xfrm>
+            <a:off x="8065008" y="1874520"/>
+            <a:ext cx="3392424" cy="365760"/>
+          </a:xfrm>
+          <a:prstGeom prst="rect">
+            <a:avLst/>
+          </a:prstGeom>
+          <a:noFill/>
+          <a:ln/>
+        </p:spPr>
+        <p:txBody>
+          <a:bodyPr wrap="square" lIns="0" tIns="0" rIns="0" bIns="0" rtlCol="0" anchor="t"/>
+          <a:lstStyle/>
+          <a:p>
+            <a:pPr indent="0" marL="0">
+              <a:lnSpc>
+                <a:spcPct val="100000"/>
+              </a:lnSpc>
+              <a:buNone/>
+            </a:pPr>
+            <a:r>
+              <a:rPr lang="en-US" sz="1350" b="1" dirty="0">
+                <a:solidFill>
+                  <a:srgbClr val="4636B0"/>
+                </a:solidFill>
+                <a:latin typeface="Sora" pitchFamily="34" charset="0"/>
+                <a:ea typeface="Sora" pitchFamily="34" charset="-122"/>
+                <a:cs typeface="Sora" pitchFamily="34" charset="-120"/>
+              </a:rPr>
+              <a:t>L’audit repasse derrière</a:t>
+            </a:r>
+            <a:endParaRPr lang="en-US" sz="1350" dirty="0"/>
+          </a:p>
+        </p:txBody>
+      </p:sp>
+      <p:sp>
+        <p:nvSpPr>
+          <p:cNvPr id="16" name="Text 11"/>
+          <p:cNvSpPr/>
+          <p:nvPr/>
+        </p:nvSpPr>
+        <p:spPr>
+          <a:xfrm>
+            <a:off x="8065008" y="2258568"/>
+            <a:ext cx="3392424" cy="585216"/>
+          </a:xfrm>
+          <a:prstGeom prst="rect">
+            <a:avLst/>
+          </a:prstGeom>
+          <a:noFill/>
+          <a:ln/>
+        </p:spPr>
+        <p:txBody>
+          <a:bodyPr wrap="square" lIns="0" tIns="0" rIns="0" bIns="0" rtlCol="0" anchor="t"/>
+          <a:lstStyle/>
+          <a:p>
+            <a:pPr indent="0" marL="0">
+              <a:lnSpc>
+                <a:spcPct val="115000"/>
+              </a:lnSpc>
+              <a:buNone/>
+            </a:pPr>
+            <a:r>
+              <a:rPr lang="en-US" sz="1100" dirty="0">
+                <a:solidFill>
+                  <a:srgbClr val="3D4556"/>
+                </a:solidFill>
+                <a:latin typeface="Inter" pitchFamily="34" charset="0"/>
+                <a:ea typeface="Inter" pitchFamily="34" charset="-122"/>
+                <a:cs typeface="Inter" pitchFamily="34" charset="-120"/>
+              </a:rPr>
+              <a:t>Un second passage sur la même zone, par quelqu'un d'autre. C'est ce qui fiabilise le comptage.</a:t>
+            </a:r>
+            <a:endParaRPr lang="en-US" sz="1100" dirty="0"/>
+          </a:p>
+        </p:txBody>
+      </p:sp>
+      <p:sp>
+        <p:nvSpPr>
+          <p:cNvPr id="17" name="Shape 12"/>
+          <p:cNvSpPr/>
+          <p:nvPr/>
+        </p:nvSpPr>
+        <p:spPr>
+          <a:xfrm>
+            <a:off x="8065008" y="2880360"/>
+            <a:ext cx="3392424" cy="3319272"/>
+          </a:xfrm>
+          <a:prstGeom prst="roundRect">
+            <a:avLst>
+              <a:gd name="adj" fmla="val 3857"/>
+            </a:avLst>
+          </a:prstGeom>
+          <a:solidFill>
+            <a:srgbClr val="F4F5F9"/>
+          </a:solidFill>
+          <a:ln w="12700">
+            <a:solidFill>
+              <a:srgbClr val="F4F5F9"/>
+            </a:solidFill>
+            <a:prstDash val="solid"/>
+          </a:ln>
+        </p:spPr>
+      </p:sp>
+      <p:pic>
+        <p:nvPicPr>
+          <p:cNvPr id="18" name="Image 3" descr="preencoded.png">    </p:cNvPr>
+          <p:cNvPicPr>
+            <a:picLocks noChangeAspect="1"/>
+          </p:cNvPicPr>
+          <p:nvPr/>
+        </p:nvPicPr>
+        <p:blipFill>
+          <a:blip r:embed="rId4"/>
+          <a:stretch>
+            <a:fillRect/>
+          </a:stretch>
+        </p:blipFill>
+        <p:spPr>
+          <a:xfrm>
+            <a:off x="8375904" y="2880963"/>
+            <a:ext cx="2770632" cy="3318669"/>
+          </a:xfrm>
+          <a:prstGeom prst="rect">
+            <a:avLst/>
+          </a:prstGeom>
+        </p:spPr>
+      </p:pic>
+      <p:sp>
+        <p:nvSpPr>
+          <p:cNvPr id="19" name="Text 13"/>
           <p:cNvSpPr/>
           <p:nvPr/>
         </p:nvSpPr>
@@ -7526,7 +9222,7 @@
       </p:sp>
       <p:sp>
         <p:nvSpPr>
-          <p:cNvPr id="12" name="Text 8"/>
+          <p:cNvPr id="20" name="Text 14"/>
           <p:cNvSpPr/>
           <p:nvPr/>
         </p:nvSpPr>
@@ -7691,7 +9387,7 @@
                 <a:ea typeface="Inter" pitchFamily="34" charset="-122"/>
                 <a:cs typeface="Inter" pitchFamily="34" charset="-120"/>
               </a:rPr>
-              <a:t>Les écarts</a:t>
+              <a:t>Le tableau de bord</a:t>
             </a:r>
             <a:endParaRPr lang="en-US" sz="1000" dirty="0"/>
           </a:p>
@@ -7758,7 +9454,7 @@
                 <a:ea typeface="Sora" pitchFamily="34" charset="-122"/>
                 <a:cs typeface="Sora" pitchFamily="34" charset="-120"/>
               </a:rPr>
-              <a:t>Un écart se règle pendant l'inventaire, pas trois jours après.</a:t>
+              <a:t>Pendant que ça compte, vous voyez où ça en est.</a:t>
             </a:r>
             <a:endParaRPr lang="en-US" sz="2600" dirty="0"/>
           </a:p>
@@ -7772,7 +9468,7 @@
         </p:nvSpPr>
         <p:spPr>
           <a:xfrm>
-            <a:off x="731520" y="2103120"/>
+            <a:off x="731520" y="2057400"/>
             <a:ext cx="10725912" cy="731520"/>
           </a:xfrm>
           <a:prstGeom prst="rect">
@@ -7800,7 +9496,7 @@
                 <a:ea typeface="Inter" pitchFamily="34" charset="-122"/>
                 <a:cs typeface="Inter" pitchFamily="34" charset="-120"/>
               </a:rPr>
-              <a:t>Quand une balise a été comptée puis auditée, les deux quantités s'affichent côte à côte, avec l'écart en pièces et en valeur d'achat. Le superviseur retient l'une, l'autre, ou une troisième qu'il a vérifiée lui-même. Tant qu'il n'a pas tranché, le rapport le lui rappelle.</a:t>
+              <a:t>Depuis le bureau, sur le site : combien d'appareils comptent, combien auditent, l'avancement zone par zone, les derniers scans. Ce que vous ne voyez pas, et c'est voulu : qui fait quoi. Le suivi est agrégé, on pilote le travail, pas les personnes.</a:t>
             </a:r>
             <a:endParaRPr lang="en-US" sz="1250" dirty="0"/>
           </a:p>
@@ -7814,12 +9510,12 @@
         </p:nvSpPr>
         <p:spPr>
           <a:xfrm>
-            <a:off x="2139696" y="2825496"/>
-            <a:ext cx="7909560" cy="3082758"/>
+            <a:off x="2066046" y="2779776"/>
+            <a:ext cx="8056860" cy="3127248"/>
           </a:xfrm>
           <a:prstGeom prst="roundRect">
             <a:avLst>
-              <a:gd name="adj" fmla="val 2373"/>
+              <a:gd name="adj" fmla="val 2339"/>
             </a:avLst>
           </a:prstGeom>
           <a:solidFill>
@@ -7849,8 +9545,8 @@
         </p:blipFill>
         <p:spPr>
           <a:xfrm>
-            <a:off x="2194560" y="2880360"/>
-            <a:ext cx="7799832" cy="2973030"/>
+            <a:off x="2120910" y="2834640"/>
+            <a:ext cx="7947132" cy="3017520"/>
           </a:xfrm>
           <a:prstGeom prst="rect">
             <a:avLst/>
@@ -7865,7 +9561,7 @@
         </p:nvSpPr>
         <p:spPr>
           <a:xfrm>
-            <a:off x="2194560" y="5990550"/>
+            <a:off x="2120910" y="5980176"/>
             <a:ext cx="6062472" cy="365760"/>
           </a:xfrm>
           <a:prstGeom prst="rect">
@@ -7890,7 +9586,7 @@
                 <a:ea typeface="Inter" pitchFamily="34" charset="-122"/>
                 <a:cs typeface="Inter" pitchFamily="34" charset="-120"/>
               </a:rPr>
-              <a:t>Onglet Écarts d'audit, données d'essai.</a:t>
+              <a:t>Onglet Suivi, données d’essai.</a:t>
             </a:r>
             <a:endParaRPr lang="en-US" sz="1000" dirty="0"/>
           </a:p>
@@ -8102,7 +9798,7 @@
                 <a:ea typeface="Inter" pitchFamily="34" charset="-122"/>
                 <a:cs typeface="Inter" pitchFamily="34" charset="-120"/>
               </a:rPr>
-              <a:t>Le rapport</a:t>
+              <a:t>Les écarts</a:t>
             </a:r>
             <a:endParaRPr lang="en-US" sz="1000" dirty="0"/>
           </a:p>
@@ -8141,8 +9837,8 @@
         </p:nvSpPr>
         <p:spPr>
           <a:xfrm>
-            <a:off x="731520" y="1325880"/>
-            <a:ext cx="4206240" cy="2011680"/>
+            <a:off x="731520" y="1280160"/>
+            <a:ext cx="10725912" cy="822960"/>
           </a:xfrm>
           <a:prstGeom prst="rect">
             <a:avLst/>
@@ -8161,7 +9857,7 @@
               <a:buNone/>
             </a:pPr>
             <a:r>
-              <a:rPr lang="en-US" sz="2400" b="1" dirty="0">
+              <a:rPr lang="en-US" sz="2600" b="1" dirty="0">
                 <a:solidFill>
                   <a:srgbClr val="4636B0"/>
                 </a:solidFill>
@@ -8169,9 +9865,9 @@
                 <a:ea typeface="Sora" pitchFamily="34" charset="-122"/>
                 <a:cs typeface="Sora" pitchFamily="34" charset="-120"/>
               </a:rPr>
-              <a:t>À la fin, un rapport qui dit aussi ce qui n'a pas été compté.</a:t>
-            </a:r>
-            <a:endParaRPr lang="en-US" sz="2400" dirty="0"/>
+              <a:t>Un écart se règle pendant l'inventaire, pas trois jours après.</a:t>
+            </a:r>
+            <a:endParaRPr lang="en-US" sz="2600" dirty="0"/>
           </a:p>
         </p:txBody>
       </p:sp>
@@ -8183,8 +9879,8 @@
         </p:nvSpPr>
         <p:spPr>
           <a:xfrm>
-            <a:off x="731520" y="3108960"/>
-            <a:ext cx="4206240" cy="1371600"/>
+            <a:off x="731520" y="2057400"/>
+            <a:ext cx="10725912" cy="731520"/>
           </a:xfrm>
           <a:prstGeom prst="rect">
             <a:avLst/>
@@ -8211,7 +9907,7 @@
                 <a:ea typeface="Inter" pitchFamily="34" charset="-122"/>
                 <a:cs typeface="Inter" pitchFamily="34" charset="-120"/>
               </a:rPr>
-              <a:t>Le rapport part du stock attendu, pas seulement de ce qui a été scanné. Un article attendu et jamais trouvé y figure, avec son manque. C'est la démarque que l'inventaire est censé révéler.</a:t>
+              <a:t>Quand une balise a été comptée puis auditée, les deux quantités s'affichent côte à côte, avec l'écart en pièces et en valeur d'achat. Le superviseur retient l'une, l'autre, ou une troisième qu'il a vérifiée lui-même — en un appui. Tant qu'il n'a pas tranché, le rapport le lui rappelle.</a:t>
             </a:r>
             <a:endParaRPr lang="en-US" sz="1250" dirty="0"/>
           </a:p>
@@ -8219,60 +9915,18 @@
       </p:sp>
       <p:sp>
         <p:nvSpPr>
-          <p:cNvPr id="8" name="Text 5"/>
-          <p:cNvSpPr/>
-          <p:nvPr/>
-        </p:nvSpPr>
-        <p:spPr>
-          <a:xfrm>
-            <a:off x="731520" y="4526280"/>
-            <a:ext cx="4206240" cy="548640"/>
-          </a:xfrm>
-          <a:prstGeom prst="rect">
-            <a:avLst/>
-          </a:prstGeom>
-          <a:noFill/>
-          <a:ln/>
-        </p:spPr>
-        <p:txBody>
-          <a:bodyPr wrap="square" lIns="0" tIns="0" rIns="0" bIns="0" rtlCol="0" anchor="t"/>
-          <a:lstStyle/>
-          <a:p>
-            <a:pPr algn="l" indent="0" marL="0">
-              <a:lnSpc>
-                <a:spcPct val="118000"/>
-              </a:lnSpc>
-              <a:buNone/>
-            </a:pPr>
-            <a:r>
-              <a:rPr lang="en-US" sz="1250" dirty="0">
-                <a:solidFill>
-                  <a:srgbClr val="3D4556"/>
-                </a:solidFill>
-                <a:latin typeface="Inter" pitchFamily="34" charset="0"/>
-                <a:ea typeface="Inter" pitchFamily="34" charset="-122"/>
-                <a:cs typeface="Inter" pitchFamily="34" charset="-120"/>
-              </a:rPr>
-              <a:t>Export Excel en un clic, prêt pour la correction du stock.</a:t>
-            </a:r>
-            <a:endParaRPr lang="en-US" sz="1250" dirty="0"/>
-          </a:p>
-        </p:txBody>
-      </p:sp>
-      <p:sp>
-        <p:nvSpPr>
-          <p:cNvPr id="9" name="Shape 6"/>
-          <p:cNvSpPr/>
-          <p:nvPr/>
-        </p:nvSpPr>
-        <p:spPr>
-          <a:xfrm>
-            <a:off x="5340096" y="1316736"/>
-            <a:ext cx="6172200" cy="4187624"/>
+          <p:cNvPr id="8" name="Shape 5"/>
+          <p:cNvSpPr/>
+          <p:nvPr/>
+        </p:nvSpPr>
+        <p:spPr>
+          <a:xfrm>
+            <a:off x="2139696" y="2779776"/>
+            <a:ext cx="7909560" cy="3103439"/>
           </a:xfrm>
           <a:prstGeom prst="roundRect">
             <a:avLst>
-              <a:gd name="adj" fmla="val 1747"/>
+              <a:gd name="adj" fmla="val 2357"/>
             </a:avLst>
           </a:prstGeom>
           <a:solidFill>
@@ -8288,7 +9942,7 @@
       </p:sp>
       <p:pic>
         <p:nvPicPr>
-          <p:cNvPr id="10" name="Image 1" descr="preencoded.png">    </p:cNvPr>
+          <p:cNvPr id="9" name="Image 1" descr="preencoded.png">    </p:cNvPr>
           <p:cNvPicPr>
             <a:picLocks noChangeAspect="1"/>
           </p:cNvPicPr>
@@ -8302,8 +9956,8 @@
         </p:blipFill>
         <p:spPr>
           <a:xfrm>
-            <a:off x="5394960" y="1371600"/>
-            <a:ext cx="6062472" cy="4077896"/>
+            <a:off x="2194560" y="2834640"/>
+            <a:ext cx="7799832" cy="2993711"/>
           </a:xfrm>
           <a:prstGeom prst="rect">
             <a:avLst/>
@@ -8312,46 +9966,46 @@
       </p:pic>
       <p:sp>
         <p:nvSpPr>
+          <p:cNvPr id="10" name="Text 6"/>
+          <p:cNvSpPr/>
+          <p:nvPr/>
+        </p:nvSpPr>
+        <p:spPr>
+          <a:xfrm>
+            <a:off x="2194560" y="5956367"/>
+            <a:ext cx="6062472" cy="365760"/>
+          </a:xfrm>
+          <a:prstGeom prst="rect">
+            <a:avLst/>
+          </a:prstGeom>
+          <a:noFill/>
+          <a:ln/>
+        </p:spPr>
+        <p:txBody>
+          <a:bodyPr wrap="square" lIns="0" tIns="0" rIns="0" bIns="0" rtlCol="0" anchor="t"/>
+          <a:lstStyle/>
+          <a:p>
+            <a:pPr indent="0" marL="0">
+              <a:buNone/>
+            </a:pPr>
+            <a:r>
+              <a:rPr lang="en-US" sz="1000" i="1" dirty="0">
+                <a:solidFill>
+                  <a:srgbClr val="5B6475"/>
+                </a:solidFill>
+                <a:latin typeface="Inter" pitchFamily="34" charset="0"/>
+                <a:ea typeface="Inter" pitchFamily="34" charset="-122"/>
+                <a:cs typeface="Inter" pitchFamily="34" charset="-120"/>
+              </a:rPr>
+              <a:t>Onglet Écarts d'audit, données d'essai.</a:t>
+            </a:r>
+            <a:endParaRPr lang="en-US" sz="1000" dirty="0"/>
+          </a:p>
+        </p:txBody>
+      </p:sp>
+      <p:sp>
+        <p:nvSpPr>
           <p:cNvPr id="11" name="Text 7"/>
-          <p:cNvSpPr/>
-          <p:nvPr/>
-        </p:nvSpPr>
-        <p:spPr>
-          <a:xfrm>
-            <a:off x="5394960" y="5586656"/>
-            <a:ext cx="6062472" cy="365760"/>
-          </a:xfrm>
-          <a:prstGeom prst="rect">
-            <a:avLst/>
-          </a:prstGeom>
-          <a:noFill/>
-          <a:ln/>
-        </p:spPr>
-        <p:txBody>
-          <a:bodyPr wrap="square" lIns="0" tIns="0" rIns="0" bIns="0" rtlCol="0" anchor="t"/>
-          <a:lstStyle/>
-          <a:p>
-            <a:pPr indent="0" marL="0">
-              <a:buNone/>
-            </a:pPr>
-            <a:r>
-              <a:rPr lang="en-US" sz="1000" i="1" dirty="0">
-                <a:solidFill>
-                  <a:srgbClr val="5B6475"/>
-                </a:solidFill>
-                <a:latin typeface="Inter" pitchFamily="34" charset="0"/>
-                <a:ea typeface="Inter" pitchFamily="34" charset="-122"/>
-                <a:cs typeface="Inter" pitchFamily="34" charset="-120"/>
-              </a:rPr>
-              <a:t>Onglet Rapport, données d'essai.</a:t>
-            </a:r>
-            <a:endParaRPr lang="en-US" sz="1000" dirty="0"/>
-          </a:p>
-        </p:txBody>
-      </p:sp>
-      <p:sp>
-        <p:nvSpPr>
-          <p:cNvPr id="12" name="Text 8"/>
           <p:cNvSpPr/>
           <p:nvPr/>
         </p:nvSpPr>
@@ -8390,7 +10044,7 @@
       </p:sp>
       <p:sp>
         <p:nvSpPr>
-          <p:cNvPr id="13" name="Text 9"/>
+          <p:cNvPr id="12" name="Text 8"/>
           <p:cNvSpPr/>
           <p:nvPr/>
         </p:nvSpPr>
@@ -8555,7 +10209,7 @@
                 <a:ea typeface="Inter" pitchFamily="34" charset="-122"/>
                 <a:cs typeface="Inter" pitchFamily="34" charset="-120"/>
               </a:rPr>
-              <a:t>Pour être clair</a:t>
+              <a:t>Le rapport</a:t>
             </a:r>
             <a:endParaRPr lang="en-US" sz="1000" dirty="0"/>
           </a:p>
@@ -8614,7 +10268,7 @@
               <a:buNone/>
             </a:pPr>
             <a:r>
-              <a:rPr lang="en-US" sz="2600" b="1" dirty="0">
+              <a:rPr lang="en-US" sz="2400" b="1" dirty="0">
                 <a:solidFill>
                   <a:srgbClr val="4636B0"/>
                 </a:solidFill>
@@ -8622,9 +10276,9 @@
                 <a:ea typeface="Sora" pitchFamily="34" charset="-122"/>
                 <a:cs typeface="Sora" pitchFamily="34" charset="-120"/>
               </a:rPr>
-              <a:t>Ce qu'on ne vous promet pas.</a:t>
-            </a:r>
-            <a:endParaRPr lang="en-US" sz="2600" dirty="0"/>
+              <a:t>À la fin, un rapport qui dit aussi ce qui n'a pas été compté.</a:t>
+            </a:r>
+            <a:endParaRPr lang="en-US" sz="2400" dirty="0"/>
           </a:p>
         </p:txBody>
       </p:sp>
@@ -8636,8 +10290,8 @@
         </p:nvSpPr>
         <p:spPr>
           <a:xfrm>
-            <a:off x="731520" y="3383280"/>
-            <a:ext cx="4206240" cy="548640"/>
+            <a:off x="731520" y="3108960"/>
+            <a:ext cx="4206240" cy="1371600"/>
           </a:xfrm>
           <a:prstGeom prst="rect">
             <a:avLst/>
@@ -8656,15 +10310,15 @@
               <a:buNone/>
             </a:pPr>
             <a:r>
-              <a:rPr lang="en-US" sz="1250" i="1" dirty="0">
-                <a:solidFill>
-                  <a:srgbClr val="5B6475"/>
-                </a:solidFill>
-                <a:latin typeface="Inter" pitchFamily="34" charset="0"/>
-                <a:ea typeface="Inter" pitchFamily="34" charset="-122"/>
-                <a:cs typeface="Inter" pitchFamily="34" charset="-120"/>
-              </a:rPr>
-              <a:t>Autant le dire avant la démonstration qu'après.</a:t>
+              <a:rPr lang="en-US" sz="1250" dirty="0">
+                <a:solidFill>
+                  <a:srgbClr val="3D4556"/>
+                </a:solidFill>
+                <a:latin typeface="Inter" pitchFamily="34" charset="0"/>
+                <a:ea typeface="Inter" pitchFamily="34" charset="-122"/>
+                <a:cs typeface="Inter" pitchFamily="34" charset="-120"/>
+              </a:rPr>
+              <a:t>Le rapport part du stock attendu, pas seulement de ce qui a été scanné. Un article attendu et jamais trouvé y figure, avec son manque. C'est la démarque que l'inventaire est censé révéler.</a:t>
             </a:r>
             <a:endParaRPr lang="en-US" sz="1250" dirty="0"/>
           </a:p>
@@ -8678,50 +10332,27 @@
         </p:nvSpPr>
         <p:spPr>
           <a:xfrm>
-            <a:off x="5394960" y="1371600"/>
-            <a:ext cx="6062472" cy="4389120"/>
-          </a:xfrm>
-          <a:prstGeom prst="rect">
-            <a:avLst/>
-          </a:prstGeom>
-          <a:noFill/>
-          <a:ln/>
-        </p:spPr>
-        <p:txBody>
-          <a:bodyPr wrap="square" lIns="0" tIns="0" rIns="0" bIns="0" rtlCol="0" anchor="t"/>
-          <a:lstStyle/>
-          <a:p>
-            <a:pPr indent="0" marL="0">
+            <a:off x="731520" y="4526280"/>
+            <a:ext cx="4206240" cy="548640"/>
+          </a:xfrm>
+          <a:prstGeom prst="rect">
+            <a:avLst/>
+          </a:prstGeom>
+          <a:noFill/>
+          <a:ln/>
+        </p:spPr>
+        <p:txBody>
+          <a:bodyPr wrap="square" lIns="0" tIns="0" rIns="0" bIns="0" rtlCol="0" anchor="t"/>
+          <a:lstStyle/>
+          <a:p>
+            <a:pPr algn="l" indent="0" marL="0">
               <a:lnSpc>
                 <a:spcPct val="118000"/>
               </a:lnSpc>
-              <a:spcAft>
-                <a:spcPts val="1400"/>
-              </a:spcAft>
-              <a:buNone/>
-            </a:pPr>
-            <a:r>
-              <a:rPr lang="en-US" sz="1400" b="1" dirty="0">
-                <a:solidFill>
-                  <a:srgbClr val="0B0F19"/>
-                </a:solidFill>
-                <a:latin typeface="Inter" pitchFamily="34" charset="0"/>
-                <a:ea typeface="Inter" pitchFamily="34" charset="-122"/>
-                <a:cs typeface="Inter" pitchFamily="34" charset="-120"/>
-              </a:rPr>
-              <a:t>L'inventaire fiscal certifié. </a:t>
-            </a:r>
-            <a:pPr indent="0" marL="0">
-              <a:lnSpc>
-                <a:spcPct val="118000"/>
-              </a:lnSpc>
-              <a:spcAft>
-                <a:spcPts val="1400"/>
-              </a:spcAft>
-              <a:buNone/>
-            </a:pPr>
-            <a:r>
-              <a:rPr lang="en-US" sz="1400" dirty="0">
+              <a:buNone/>
+            </a:pPr>
+            <a:r>
+              <a:rPr lang="en-US" sz="1250" dirty="0">
                 <a:solidFill>
                   <a:srgbClr val="3D4556"/>
                 </a:solidFill>
@@ -8729,144 +10360,105 @@
                 <a:ea typeface="Inter" pitchFamily="34" charset="-122"/>
                 <a:cs typeface="Inter" pitchFamily="34" charset="-120"/>
               </a:rPr>
-              <a:t>Si votre commissaire aux comptes exige un comptage par un tiers, ce comptage reste. Quantinvo fait tout le reste de l'année, et il le prépare.</a:t>
-            </a:r>
-            <a:endParaRPr lang="en-US" sz="1400" dirty="0"/>
-          </a:p>
-          <a:p>
-            <a:pPr indent="0" marL="0">
-              <a:lnSpc>
-                <a:spcPct val="118000"/>
-              </a:lnSpc>
-              <a:spcAft>
-                <a:spcPts val="1400"/>
-              </a:spcAft>
-              <a:buNone/>
-            </a:pPr>
-            <a:r>
-              <a:rPr lang="en-US" sz="1400" b="1" dirty="0">
-                <a:solidFill>
-                  <a:srgbClr val="0B0F19"/>
-                </a:solidFill>
-                <a:latin typeface="Inter" pitchFamily="34" charset="0"/>
-                <a:ea typeface="Inter" pitchFamily="34" charset="-122"/>
-                <a:cs typeface="Inter" pitchFamily="34" charset="-120"/>
-              </a:rPr>
-              <a:t>Une connexion à votre ERP. </a:t>
-            </a:r>
-            <a:pPr indent="0" marL="0">
-              <a:lnSpc>
-                <a:spcPct val="118000"/>
-              </a:lnSpc>
-              <a:spcAft>
-                <a:spcPts val="1400"/>
-              </a:spcAft>
-              <a:buNone/>
-            </a:pPr>
-            <a:r>
-              <a:rPr lang="en-US" sz="1400" dirty="0">
-                <a:solidFill>
-                  <a:srgbClr val="3D4556"/>
-                </a:solidFill>
-                <a:latin typeface="Inter" pitchFamily="34" charset="0"/>
-                <a:ea typeface="Inter" pitchFamily="34" charset="-122"/>
-                <a:cs typeface="Inter" pitchFamily="34" charset="-120"/>
-              </a:rPr>
-              <a:t>Pas encore. Quantinvo importe vos fichiers et rend un Excel. C'est ce qui permet de démarrer en une journée, sans projet informatique.</a:t>
-            </a:r>
-            <a:endParaRPr lang="en-US" sz="1400" dirty="0"/>
-          </a:p>
-          <a:p>
-            <a:pPr indent="0" marL="0">
-              <a:lnSpc>
-                <a:spcPct val="118000"/>
-              </a:lnSpc>
-              <a:spcAft>
-                <a:spcPts val="1400"/>
-              </a:spcAft>
-              <a:buNone/>
-            </a:pPr>
-            <a:r>
-              <a:rPr lang="en-US" sz="1400" b="1" dirty="0">
-                <a:solidFill>
-                  <a:srgbClr val="0B0F19"/>
-                </a:solidFill>
-                <a:latin typeface="Inter" pitchFamily="34" charset="0"/>
-                <a:ea typeface="Inter" pitchFamily="34" charset="-122"/>
-                <a:cs typeface="Inter" pitchFamily="34" charset="-120"/>
-              </a:rPr>
-              <a:t>Android. </a:t>
-            </a:r>
-            <a:pPr indent="0" marL="0">
-              <a:lnSpc>
-                <a:spcPct val="118000"/>
-              </a:lnSpc>
-              <a:spcAft>
-                <a:spcPts val="1400"/>
-              </a:spcAft>
-              <a:buNone/>
-            </a:pPr>
-            <a:r>
-              <a:rPr lang="en-US" sz="1400" dirty="0">
-                <a:solidFill>
-                  <a:srgbClr val="3D4556"/>
-                </a:solidFill>
-                <a:latin typeface="Inter" pitchFamily="34" charset="0"/>
-                <a:ea typeface="Inter" pitchFamily="34" charset="-122"/>
-                <a:cs typeface="Inter" pitchFamily="34" charset="-120"/>
-              </a:rPr>
-              <a:t>L'application est sur iPhone aujourd'hui. La version Android est en cours.</a:t>
-            </a:r>
-            <a:endParaRPr lang="en-US" sz="1400" dirty="0"/>
-          </a:p>
-          <a:p>
-            <a:pPr indent="0" marL="0">
-              <a:lnSpc>
-                <a:spcPct val="118000"/>
-              </a:lnSpc>
-              <a:spcAft>
-                <a:spcPts val="1400"/>
-              </a:spcAft>
-              <a:buNone/>
-            </a:pPr>
-            <a:r>
-              <a:rPr lang="en-US" sz="1400" b="1" dirty="0">
-                <a:solidFill>
-                  <a:srgbClr val="0B0F19"/>
-                </a:solidFill>
-                <a:latin typeface="Inter" pitchFamily="34" charset="0"/>
-                <a:ea typeface="Inter" pitchFamily="34" charset="-122"/>
-                <a:cs typeface="Inter" pitchFamily="34" charset="-120"/>
-              </a:rPr>
-              <a:t>La connexion par votre annuaire. </a:t>
-            </a:r>
-            <a:pPr indent="0" marL="0">
-              <a:lnSpc>
-                <a:spcPct val="118000"/>
-              </a:lnSpc>
-              <a:spcAft>
-                <a:spcPts val="1400"/>
-              </a:spcAft>
-              <a:buNone/>
-            </a:pPr>
-            <a:r>
-              <a:rPr lang="en-US" sz="1400" dirty="0">
-                <a:solidFill>
-                  <a:srgbClr val="3D4556"/>
-                </a:solidFill>
-                <a:latin typeface="Inter" pitchFamily="34" charset="0"/>
-                <a:ea typeface="Inter" pitchFamily="34" charset="-122"/>
-                <a:cs typeface="Inter" pitchFamily="34" charset="-120"/>
-              </a:rPr>
-              <a:t>Les comptes sont nominatifs, créés par invitation. Pas de SAML ni d'Entra ID pour l'instant ; dites-nous si c'est une exigence.</a:t>
-            </a:r>
-            <a:endParaRPr lang="en-US" sz="1400" dirty="0"/>
-          </a:p>
-        </p:txBody>
-      </p:sp>
-      <p:sp>
-        <p:nvSpPr>
-          <p:cNvPr id="9" name="Text 6"/>
+              <a:t>Export Excel en un clic, prêt pour la correction du stock.</a:t>
+            </a:r>
+            <a:endParaRPr lang="en-US" sz="1250" dirty="0"/>
+          </a:p>
+        </p:txBody>
+      </p:sp>
+      <p:sp>
+        <p:nvSpPr>
+          <p:cNvPr id="9" name="Shape 6"/>
+          <p:cNvSpPr/>
+          <p:nvPr/>
+        </p:nvSpPr>
+        <p:spPr>
+          <a:xfrm>
+            <a:off x="5340096" y="1316736"/>
+            <a:ext cx="6172200" cy="4260383"/>
+          </a:xfrm>
+          <a:prstGeom prst="roundRect">
+            <a:avLst>
+              <a:gd name="adj" fmla="val 1717"/>
+            </a:avLst>
+          </a:prstGeom>
+          <a:solidFill>
+            <a:srgbClr val="FFFFFF"/>
+          </a:solidFill>
+          <a:ln w="12700">
+            <a:solidFill>
+              <a:srgbClr val="E3E6EE"/>
+            </a:solidFill>
+            <a:prstDash val="solid"/>
+          </a:ln>
+        </p:spPr>
+      </p:sp>
+      <p:pic>
+        <p:nvPicPr>
+          <p:cNvPr id="10" name="Image 1" descr="preencoded.png">    </p:cNvPr>
+          <p:cNvPicPr>
+            <a:picLocks noChangeAspect="1"/>
+          </p:cNvPicPr>
+          <p:nvPr/>
+        </p:nvPicPr>
+        <p:blipFill>
+          <a:blip r:embed="rId2"/>
+          <a:stretch>
+            <a:fillRect/>
+          </a:stretch>
+        </p:blipFill>
+        <p:spPr>
+          <a:xfrm>
+            <a:off x="5394960" y="1371600"/>
+            <a:ext cx="6062472" cy="4150655"/>
+          </a:xfrm>
+          <a:prstGeom prst="rect">
+            <a:avLst/>
+          </a:prstGeom>
+        </p:spPr>
+      </p:pic>
+      <p:sp>
+        <p:nvSpPr>
+          <p:cNvPr id="11" name="Text 7"/>
+          <p:cNvSpPr/>
+          <p:nvPr/>
+        </p:nvSpPr>
+        <p:spPr>
+          <a:xfrm>
+            <a:off x="5394960" y="5650271"/>
+            <a:ext cx="6062472" cy="365760"/>
+          </a:xfrm>
+          <a:prstGeom prst="rect">
+            <a:avLst/>
+          </a:prstGeom>
+          <a:noFill/>
+          <a:ln/>
+        </p:spPr>
+        <p:txBody>
+          <a:bodyPr wrap="square" lIns="0" tIns="0" rIns="0" bIns="0" rtlCol="0" anchor="t"/>
+          <a:lstStyle/>
+          <a:p>
+            <a:pPr indent="0" marL="0">
+              <a:buNone/>
+            </a:pPr>
+            <a:r>
+              <a:rPr lang="en-US" sz="1000" i="1" dirty="0">
+                <a:solidFill>
+                  <a:srgbClr val="5B6475"/>
+                </a:solidFill>
+                <a:latin typeface="Inter" pitchFamily="34" charset="0"/>
+                <a:ea typeface="Inter" pitchFamily="34" charset="-122"/>
+                <a:cs typeface="Inter" pitchFamily="34" charset="-120"/>
+              </a:rPr>
+              <a:t>Onglet Rapport, données d'essai.</a:t>
+            </a:r>
+            <a:endParaRPr lang="en-US" sz="1000" dirty="0"/>
+          </a:p>
+        </p:txBody>
+      </p:sp>
+      <p:sp>
+        <p:nvSpPr>
+          <p:cNvPr id="12" name="Text 8"/>
           <p:cNvSpPr/>
           <p:nvPr/>
         </p:nvSpPr>
@@ -8905,7 +10497,7 @@
       </p:sp>
       <p:sp>
         <p:nvSpPr>
-          <p:cNvPr id="10" name="Text 7"/>
+          <p:cNvPr id="13" name="Text 9"/>
           <p:cNvSpPr/>
           <p:nvPr/>
         </p:nvSpPr>

--- a/docs/entreprise/deck/Quantinvo-presentation-marque.pptx
+++ b/docs/entreprise/deck/Quantinvo-presentation-marque.pptx
@@ -779,7 +779,7 @@
           <a:p>
             <a:r>
               <a:rPr lang="en-US" dirty="0"/>
-              <a:t>Parler en budget d'inventaire annuel, jamais en prix d'application : comparer au prestataire et au matériel. Annoncer le mensuel ; l'annuel économise 300 € sur Advanced. Le détail vit dans le deck tarification.</a:t>
+              <a:t>Parler en budget d'inventaire annuel, jamais en prix d'application : comparer au prestataire et au matériel. Annoncer le mensuel ; l'annuel économise 420 € sur Advanced. Le détail vit dans le deck tarification.</a:t>
             </a:r>
             <a:endParaRPr lang="en-US" dirty="0"/>
           </a:p>
@@ -4222,7 +4222,7 @@
                 <a:ea typeface="Sora" pitchFamily="34" charset="-122"/>
                 <a:cs typeface="Sora" pitchFamily="34" charset="-120"/>
               </a:rPr>
-              <a:t>65 €</a:t>
+              <a:t>89 €</a:t>
             </a:r>
             <a:pPr indent="0" marL="0">
               <a:buNone/>
@@ -4275,7 +4275,7 @@
                 <a:ea typeface="Inter" pitchFamily="34" charset="-122"/>
                 <a:cs typeface="Inter" pitchFamily="34" charset="-120"/>
               </a:rPr>
-              <a:t>ou 690 € à l’année — 90 € de moins</a:t>
+              <a:t>ou 950 € à l’année — 118 € de moins</a:t>
             </a:r>
             <a:endParaRPr lang="en-US" sz="950" dirty="0"/>
           </a:p>
@@ -4500,7 +4500,7 @@
                 <a:ea typeface="Sora" pitchFamily="34" charset="-122"/>
                 <a:cs typeface="Sora" pitchFamily="34" charset="-120"/>
               </a:rPr>
-              <a:t>225 €</a:t>
+              <a:t>310 €</a:t>
             </a:r>
             <a:pPr indent="0" marL="0">
               <a:buNone/>
@@ -4553,7 +4553,7 @@
                 <a:ea typeface="Inter" pitchFamily="34" charset="-122"/>
                 <a:cs typeface="Inter" pitchFamily="34" charset="-120"/>
               </a:rPr>
-              <a:t>ou 2 400 € à l’année — 300 € de moins</a:t>
+              <a:t>ou 3 300 € à l’année — 420 € de moins</a:t>
             </a:r>
             <a:endParaRPr lang="en-US" sz="950" dirty="0"/>
           </a:p>
@@ -4739,7 +4739,7 @@
                 <a:ea typeface="Sora" pitchFamily="34" charset="-122"/>
                 <a:cs typeface="Sora" pitchFamily="34" charset="-120"/>
               </a:rPr>
-              <a:t>650 €</a:t>
+              <a:t>890 €</a:t>
             </a:r>
             <a:pPr indent="0" marL="0">
               <a:buNone/>
@@ -4792,7 +4792,7 @@
                 <a:ea typeface="Inter" pitchFamily="34" charset="-122"/>
                 <a:cs typeface="Inter" pitchFamily="34" charset="-120"/>
               </a:rPr>
-              <a:t>ou 6 900 € à l’année — 900 € de moins</a:t>
+              <a:t>ou 9 450 € à l’année — 1 230 € de moins</a:t>
             </a:r>
             <a:endParaRPr lang="en-US" sz="950" dirty="0"/>
           </a:p>
@@ -4899,7 +4899,7 @@
                 <a:ea typeface="Inter" pitchFamily="34" charset="-122"/>
                 <a:cs typeface="Inter" pitchFamily="34" charset="-120"/>
               </a:rPr>
-              <a:t>Plus de 100 appareils dans un même magasin ? 47 € par mois, ou 500 € à l’année, par tranche de 10 appareils supplémentaires.</a:t>
+              <a:t>Plus de 100 appareils dans un même magasin ? 64 € par mois, ou 690 € à l’année, par tranche de 10 appareils supplémentaires.</a:t>
             </a:r>
             <a:endParaRPr lang="en-US" sz="1050" dirty="0"/>
           </a:p>

--- a/docs/entreprise/deck/Quantinvo-presentation-marque.pptx
+++ b/docs/entreprise/deck/Quantinvo-presentation-marque.pptx
@@ -2083,11 +2083,11 @@
             <a:r>
               <a:rPr lang="en-US" sz="2400" b="1" dirty="0">
                 <a:solidFill>
-                  <a:srgbClr val="0B0F19"/>
-                </a:solidFill>
-                <a:latin typeface="Sora" pitchFamily="34" charset="0"/>
-                <a:ea typeface="Sora" pitchFamily="34" charset="-122"/>
-                <a:cs typeface="Sora" pitchFamily="34" charset="-120"/>
+                  <a:srgbClr val="14181A"/>
+                </a:solidFill>
+                <a:latin typeface="Archivo" pitchFamily="34" charset="0"/>
+                <a:ea typeface="Archivo" pitchFamily="34" charset="-122"/>
+                <a:cs typeface="Archivo" pitchFamily="34" charset="-120"/>
               </a:rPr>
               <a:t>Quantinvo</a:t>
             </a:r>
@@ -2104,17 +2104,17 @@
         <p:spPr>
           <a:xfrm>
             <a:off x="731520" y="1481328"/>
-            <a:ext cx="2377440" cy="25603"/>
+            <a:ext cx="2011680" cy="20117"/>
           </a:xfrm>
           <a:prstGeom prst="rect">
             <a:avLst/>
           </a:prstGeom>
           <a:solidFill>
-            <a:srgbClr val="38C9FF"/>
+            <a:srgbClr val="14181A"/>
           </a:solidFill>
           <a:ln w="12700">
             <a:solidFill>
-              <a:srgbClr val="38C9FF"/>
+              <a:srgbClr val="14181A"/>
             </a:solidFill>
             <a:prstDash val="solid"/>
           </a:ln>
@@ -2147,11 +2147,11 @@
             <a:r>
               <a:rPr lang="en-US" sz="1300" dirty="0">
                 <a:solidFill>
-                  <a:srgbClr val="5B6475"/>
-                </a:solidFill>
-                <a:latin typeface="Inter" pitchFamily="34" charset="0"/>
-                <a:ea typeface="Inter" pitchFamily="34" charset="-122"/>
-                <a:cs typeface="Inter" pitchFamily="34" charset="-120"/>
+                  <a:srgbClr val="575F5C"/>
+                </a:solidFill>
+                <a:latin typeface="Public Sans" pitchFamily="34" charset="0"/>
+                <a:ea typeface="Public Sans" pitchFamily="34" charset="-122"/>
+                <a:cs typeface="Public Sans" pitchFamily="34" charset="-120"/>
               </a:rPr>
               <a:t>L'outil d'inventaire pour le commerce</a:t>
             </a:r>
@@ -2189,11 +2189,11 @@
             <a:r>
               <a:rPr lang="en-US" sz="4000" b="1" dirty="0">
                 <a:solidFill>
-                  <a:srgbClr val="4636B0"/>
-                </a:solidFill>
-                <a:latin typeface="Sora" pitchFamily="34" charset="0"/>
-                <a:ea typeface="Sora" pitchFamily="34" charset="-122"/>
-                <a:cs typeface="Sora" pitchFamily="34" charset="-120"/>
+                  <a:srgbClr val="14181A"/>
+                </a:solidFill>
+                <a:latin typeface="Archivo" pitchFamily="34" charset="0"/>
+                <a:ea typeface="Archivo" pitchFamily="34" charset="-122"/>
+                <a:cs typeface="Archivo" pitchFamily="34" charset="-120"/>
               </a:rPr>
               <a:t>Un stock fiable toute l’année, compté par vos propres équipes.</a:t>
             </a:r>
@@ -2231,11 +2231,11 @@
             <a:r>
               <a:rPr lang="en-US" sz="1500" dirty="0">
                 <a:solidFill>
-                  <a:srgbClr val="3D4556"/>
-                </a:solidFill>
-                <a:latin typeface="Inter" pitchFamily="34" charset="0"/>
-                <a:ea typeface="Inter" pitchFamily="34" charset="-122"/>
-                <a:cs typeface="Inter" pitchFamily="34" charset="-120"/>
+                  <a:srgbClr val="3A423F"/>
+                </a:solidFill>
+                <a:latin typeface="Public Sans" pitchFamily="34" charset="0"/>
+                <a:ea typeface="Public Sans" pitchFamily="34" charset="-122"/>
+                <a:cs typeface="Public Sans" pitchFamily="34" charset="-120"/>
               </a:rPr>
               <a:t>Une application sur le téléphone des compteurs, un tableau de bord pour celui qui pilote, un rapport à la fin. Rien d'autre à acheter.</a:t>
             </a:r>
@@ -2270,11 +2270,11 @@
             <a:r>
               <a:rPr lang="en-US" sz="1050" dirty="0">
                 <a:solidFill>
-                  <a:srgbClr val="5B6475"/>
-                </a:solidFill>
-                <a:latin typeface="Inter" pitchFamily="34" charset="0"/>
-                <a:ea typeface="Inter" pitchFamily="34" charset="-122"/>
-                <a:cs typeface="Inter" pitchFamily="34" charset="-120"/>
+                  <a:srgbClr val="575F5C"/>
+                </a:solidFill>
+                <a:latin typeface="Public Sans" pitchFamily="34" charset="0"/>
+                <a:ea typeface="Public Sans" pitchFamily="34" charset="-122"/>
+                <a:cs typeface="Public Sans" pitchFamily="34" charset="-120"/>
               </a:rPr>
               <a:t>Devkaylab  ·  août 2026  ·  www.quantinvo.com</a:t>
             </a:r>
@@ -2365,11 +2365,11 @@
             <a:r>
               <a:rPr lang="en-US" sz="1600" b="1" dirty="0">
                 <a:solidFill>
-                  <a:srgbClr val="0B0F19"/>
-                </a:solidFill>
-                <a:latin typeface="Sora" pitchFamily="34" charset="0"/>
-                <a:ea typeface="Sora" pitchFamily="34" charset="-122"/>
-                <a:cs typeface="Sora" pitchFamily="34" charset="-120"/>
+                  <a:srgbClr val="14181A"/>
+                </a:solidFill>
+                <a:latin typeface="Archivo" pitchFamily="34" charset="0"/>
+                <a:ea typeface="Archivo" pitchFamily="34" charset="-122"/>
+                <a:cs typeface="Archivo" pitchFamily="34" charset="-120"/>
               </a:rPr>
               <a:t>Quantinvo</a:t>
             </a:r>
@@ -2404,11 +2404,11 @@
             <a:r>
               <a:rPr lang="en-US" sz="1000" dirty="0">
                 <a:solidFill>
-                  <a:srgbClr val="5B6475"/>
-                </a:solidFill>
-                <a:latin typeface="Inter" pitchFamily="34" charset="0"/>
-                <a:ea typeface="Inter" pitchFamily="34" charset="-122"/>
-                <a:cs typeface="Inter" pitchFamily="34" charset="-120"/>
+                  <a:srgbClr val="575F5C"/>
+                </a:solidFill>
+                <a:latin typeface="Public Sans" pitchFamily="34" charset="0"/>
+                <a:ea typeface="Public Sans" pitchFamily="34" charset="-122"/>
+                <a:cs typeface="Public Sans" pitchFamily="34" charset="-120"/>
               </a:rPr>
               <a:t>Mise en route</a:t>
             </a:r>
@@ -2425,17 +2425,17 @@
         <p:spPr>
           <a:xfrm>
             <a:off x="731520" y="877824"/>
-            <a:ext cx="10725912" cy="25603"/>
+            <a:ext cx="10725912" cy="10973"/>
           </a:xfrm>
           <a:prstGeom prst="rect">
             <a:avLst/>
           </a:prstGeom>
           <a:solidFill>
-            <a:srgbClr val="38C9FF"/>
+            <a:srgbClr val="E2E5E1"/>
           </a:solidFill>
           <a:ln w="12700">
             <a:solidFill>
-              <a:srgbClr val="38C9FF"/>
+              <a:srgbClr val="E2E5E1"/>
             </a:solidFill>
             <a:prstDash val="solid"/>
           </a:ln>
@@ -2471,11 +2471,11 @@
             <a:r>
               <a:rPr lang="en-US" sz="2600" b="1" dirty="0">
                 <a:solidFill>
-                  <a:srgbClr val="4636B0"/>
-                </a:solidFill>
-                <a:latin typeface="Sora" pitchFamily="34" charset="0"/>
-                <a:ea typeface="Sora" pitchFamily="34" charset="-122"/>
-                <a:cs typeface="Sora" pitchFamily="34" charset="-120"/>
+                  <a:srgbClr val="14181A"/>
+                </a:solidFill>
+                <a:latin typeface="Archivo" pitchFamily="34" charset="0"/>
+                <a:ea typeface="Archivo" pitchFamily="34" charset="-122"/>
+                <a:cs typeface="Archivo" pitchFamily="34" charset="-120"/>
               </a:rPr>
               <a:t>De la souscription au premier comptage</a:t>
             </a:r>
@@ -2500,7 +2500,7 @@
           <a:noFill/>
           <a:ln w="9525">
             <a:solidFill>
-              <a:srgbClr val="E3E6EE"/>
+              <a:srgbClr val="E2E5E1"/>
             </a:solidFill>
             <a:prstDash val="solid"/>
           </a:ln>
@@ -2521,11 +2521,11 @@
             <a:avLst/>
           </a:prstGeom>
           <a:solidFill>
-            <a:srgbClr val="4636B0"/>
+            <a:srgbClr val="1E4D3B"/>
           </a:solidFill>
           <a:ln>
             <a:solidFill>
-              <a:srgbClr val="4636B0"/>
+              <a:srgbClr val="1E4D3B"/>
             </a:solidFill>
           </a:ln>
         </p:spPr>
@@ -2541,9 +2541,9 @@
                 <a:solidFill>
                   <a:srgbClr val="FFFFFF"/>
                 </a:solidFill>
-                <a:latin typeface="Sora" pitchFamily="34" charset="0"/>
-                <a:ea typeface="Sora" pitchFamily="34" charset="-122"/>
-                <a:cs typeface="Sora" pitchFamily="34" charset="-120"/>
+                <a:latin typeface="Archivo" pitchFamily="34" charset="0"/>
+                <a:ea typeface="Archivo" pitchFamily="34" charset="-122"/>
+                <a:cs typeface="Archivo" pitchFamily="34" charset="-120"/>
               </a:rPr>
               <a:t>1</a:t>
             </a:r>
@@ -2578,11 +2578,11 @@
             <a:r>
               <a:rPr lang="en-US" sz="1600" b="1" dirty="0">
                 <a:solidFill>
-                  <a:srgbClr val="4636B0"/>
-                </a:solidFill>
-                <a:latin typeface="Sora" pitchFamily="34" charset="0"/>
-                <a:ea typeface="Sora" pitchFamily="34" charset="-122"/>
-                <a:cs typeface="Sora" pitchFamily="34" charset="-120"/>
+                  <a:srgbClr val="14181A"/>
+                </a:solidFill>
+                <a:latin typeface="Archivo" pitchFamily="34" charset="0"/>
+                <a:ea typeface="Archivo" pitchFamily="34" charset="-122"/>
+                <a:cs typeface="Archivo" pitchFamily="34" charset="-120"/>
               </a:rPr>
               <a:t>Le jour même</a:t>
             </a:r>
@@ -2620,11 +2620,11 @@
             <a:r>
               <a:rPr lang="en-US" sz="1200" dirty="0">
                 <a:solidFill>
-                  <a:srgbClr val="3D4556"/>
-                </a:solidFill>
-                <a:latin typeface="Inter" pitchFamily="34" charset="0"/>
-                <a:ea typeface="Inter" pitchFamily="34" charset="-122"/>
-                <a:cs typeface="Inter" pitchFamily="34" charset="-120"/>
+                  <a:srgbClr val="3A423F"/>
+                </a:solidFill>
+                <a:latin typeface="Public Sans" pitchFamily="34" charset="0"/>
+                <a:ea typeface="Public Sans" pitchFamily="34" charset="-122"/>
+                <a:cs typeface="Public Sans" pitchFamily="34" charset="-120"/>
               </a:rPr>
               <a:t>Vous souscrivez en ligne, votre espace est créé dès l'encaissement. Vous recevez vos accès par e-mail.</a:t>
             </a:r>
@@ -2647,11 +2647,11 @@
             <a:avLst/>
           </a:prstGeom>
           <a:solidFill>
-            <a:srgbClr val="4636B0"/>
+            <a:srgbClr val="1E4D3B"/>
           </a:solidFill>
           <a:ln>
             <a:solidFill>
-              <a:srgbClr val="4636B0"/>
+              <a:srgbClr val="1E4D3B"/>
             </a:solidFill>
           </a:ln>
         </p:spPr>
@@ -2667,9 +2667,9 @@
                 <a:solidFill>
                   <a:srgbClr val="FFFFFF"/>
                 </a:solidFill>
-                <a:latin typeface="Sora" pitchFamily="34" charset="0"/>
-                <a:ea typeface="Sora" pitchFamily="34" charset="-122"/>
-                <a:cs typeface="Sora" pitchFamily="34" charset="-120"/>
+                <a:latin typeface="Archivo" pitchFamily="34" charset="0"/>
+                <a:ea typeface="Archivo" pitchFamily="34" charset="-122"/>
+                <a:cs typeface="Archivo" pitchFamily="34" charset="-120"/>
               </a:rPr>
               <a:t>2</a:t>
             </a:r>
@@ -2704,11 +2704,11 @@
             <a:r>
               <a:rPr lang="en-US" sz="1600" b="1" dirty="0">
                 <a:solidFill>
-                  <a:srgbClr val="4636B0"/>
-                </a:solidFill>
-                <a:latin typeface="Sora" pitchFamily="34" charset="0"/>
-                <a:ea typeface="Sora" pitchFamily="34" charset="-122"/>
-                <a:cs typeface="Sora" pitchFamily="34" charset="-120"/>
+                  <a:srgbClr val="14181A"/>
+                </a:solidFill>
+                <a:latin typeface="Archivo" pitchFamily="34" charset="0"/>
+                <a:ea typeface="Archivo" pitchFamily="34" charset="-122"/>
+                <a:cs typeface="Archivo" pitchFamily="34" charset="-120"/>
               </a:rPr>
               <a:t>Dans l’heure</a:t>
             </a:r>
@@ -2746,11 +2746,11 @@
             <a:r>
               <a:rPr lang="en-US" sz="1200" dirty="0">
                 <a:solidFill>
-                  <a:srgbClr val="3D4556"/>
-                </a:solidFill>
-                <a:latin typeface="Inter" pitchFamily="34" charset="0"/>
-                <a:ea typeface="Inter" pitchFamily="34" charset="-122"/>
-                <a:cs typeface="Inter" pitchFamily="34" charset="-120"/>
+                  <a:srgbClr val="3A423F"/>
+                </a:solidFill>
+                <a:latin typeface="Public Sans" pitchFamily="34" charset="0"/>
+                <a:ea typeface="Public Sans" pitchFamily="34" charset="-122"/>
+                <a:cs typeface="Public Sans" pitchFamily="34" charset="-120"/>
               </a:rPr>
               <a:t>Vous invitez votre équipe — prénom, nom, adresse. Chacun reçoit son lien, choisit son mot de passe et installe l'application.</a:t>
             </a:r>
@@ -2773,11 +2773,11 @@
             <a:avLst/>
           </a:prstGeom>
           <a:solidFill>
-            <a:srgbClr val="4636B0"/>
+            <a:srgbClr val="1E4D3B"/>
           </a:solidFill>
           <a:ln>
             <a:solidFill>
-              <a:srgbClr val="4636B0"/>
+              <a:srgbClr val="1E4D3B"/>
             </a:solidFill>
           </a:ln>
         </p:spPr>
@@ -2793,9 +2793,9 @@
                 <a:solidFill>
                   <a:srgbClr val="FFFFFF"/>
                 </a:solidFill>
-                <a:latin typeface="Sora" pitchFamily="34" charset="0"/>
-                <a:ea typeface="Sora" pitchFamily="34" charset="-122"/>
-                <a:cs typeface="Sora" pitchFamily="34" charset="-120"/>
+                <a:latin typeface="Archivo" pitchFamily="34" charset="0"/>
+                <a:ea typeface="Archivo" pitchFamily="34" charset="-122"/>
+                <a:cs typeface="Archivo" pitchFamily="34" charset="-120"/>
               </a:rPr>
               <a:t>3</a:t>
             </a:r>
@@ -2830,11 +2830,11 @@
             <a:r>
               <a:rPr lang="en-US" sz="1600" b="1" dirty="0">
                 <a:solidFill>
-                  <a:srgbClr val="4636B0"/>
-                </a:solidFill>
-                <a:latin typeface="Sora" pitchFamily="34" charset="0"/>
-                <a:ea typeface="Sora" pitchFamily="34" charset="-122"/>
-                <a:cs typeface="Sora" pitchFamily="34" charset="-120"/>
+                  <a:srgbClr val="14181A"/>
+                </a:solidFill>
+                <a:latin typeface="Archivo" pitchFamily="34" charset="0"/>
+                <a:ea typeface="Archivo" pitchFamily="34" charset="-122"/>
+                <a:cs typeface="Archivo" pitchFamily="34" charset="-120"/>
               </a:rPr>
               <a:t>Le premier rayon</a:t>
             </a:r>
@@ -2872,11 +2872,11 @@
             <a:r>
               <a:rPr lang="en-US" sz="1200" dirty="0">
                 <a:solidFill>
-                  <a:srgbClr val="3D4556"/>
-                </a:solidFill>
-                <a:latin typeface="Inter" pitchFamily="34" charset="0"/>
-                <a:ea typeface="Inter" pitchFamily="34" charset="-122"/>
-                <a:cs typeface="Inter" pitchFamily="34" charset="-120"/>
+                  <a:srgbClr val="3A423F"/>
+                </a:solidFill>
+                <a:latin typeface="Public Sans" pitchFamily="34" charset="0"/>
+                <a:ea typeface="Public Sans" pitchFamily="34" charset="-122"/>
+                <a:cs typeface="Public Sans" pitchFamily="34" charset="-120"/>
               </a:rPr>
               <a:t>Vous importez vos fichiers, vous imprimez une planche de balises, et deux personnes comptent un rayon pour prendre la main.</a:t>
             </a:r>
@@ -2899,11 +2899,11 @@
             <a:avLst/>
           </a:prstGeom>
           <a:solidFill>
-            <a:srgbClr val="4636B0"/>
+            <a:srgbClr val="1E4D3B"/>
           </a:solidFill>
           <a:ln>
             <a:solidFill>
-              <a:srgbClr val="4636B0"/>
+              <a:srgbClr val="1E4D3B"/>
             </a:solidFill>
           </a:ln>
         </p:spPr>
@@ -2919,9 +2919,9 @@
                 <a:solidFill>
                   <a:srgbClr val="FFFFFF"/>
                 </a:solidFill>
-                <a:latin typeface="Sora" pitchFamily="34" charset="0"/>
-                <a:ea typeface="Sora" pitchFamily="34" charset="-122"/>
-                <a:cs typeface="Sora" pitchFamily="34" charset="-120"/>
+                <a:latin typeface="Archivo" pitchFamily="34" charset="0"/>
+                <a:ea typeface="Archivo" pitchFamily="34" charset="-122"/>
+                <a:cs typeface="Archivo" pitchFamily="34" charset="-120"/>
               </a:rPr>
               <a:t>4</a:t>
             </a:r>
@@ -2956,11 +2956,11 @@
             <a:r>
               <a:rPr lang="en-US" sz="1600" b="1" dirty="0">
                 <a:solidFill>
-                  <a:srgbClr val="4636B0"/>
-                </a:solidFill>
-                <a:latin typeface="Sora" pitchFamily="34" charset="0"/>
-                <a:ea typeface="Sora" pitchFamily="34" charset="-122"/>
-                <a:cs typeface="Sora" pitchFamily="34" charset="-120"/>
+                  <a:srgbClr val="14181A"/>
+                </a:solidFill>
+                <a:latin typeface="Archivo" pitchFamily="34" charset="0"/>
+                <a:ea typeface="Archivo" pitchFamily="34" charset="-122"/>
+                <a:cs typeface="Archivo" pitchFamily="34" charset="-120"/>
               </a:rPr>
               <a:t>Ensuite</a:t>
             </a:r>
@@ -2998,11 +2998,11 @@
             <a:r>
               <a:rPr lang="en-US" sz="1200" dirty="0">
                 <a:solidFill>
-                  <a:srgbClr val="3D4556"/>
-                </a:solidFill>
-                <a:latin typeface="Inter" pitchFamily="34" charset="0"/>
-                <a:ea typeface="Inter" pitchFamily="34" charset="-122"/>
-                <a:cs typeface="Inter" pitchFamily="34" charset="-120"/>
+                  <a:srgbClr val="3A423F"/>
+                </a:solidFill>
+                <a:latin typeface="Public Sans" pitchFamily="34" charset="0"/>
+                <a:ea typeface="Public Sans" pitchFamily="34" charset="-122"/>
+                <a:cs typeface="Public Sans" pitchFamily="34" charset="-120"/>
               </a:rPr>
               <a:t>Vous comptez à votre rythme : un rayon par semaine, une marque, un magasin entier. Le prix ne bouge pas.</a:t>
             </a:r>
@@ -3023,15 +3023,15 @@
           </a:xfrm>
           <a:prstGeom prst="roundRect">
             <a:avLst>
-              <a:gd name="adj" fmla="val 8000"/>
+              <a:gd name="adj" fmla="val 4000"/>
             </a:avLst>
           </a:prstGeom>
           <a:solidFill>
-            <a:srgbClr val="F4F5F9"/>
+            <a:srgbClr val="F2F3F1"/>
           </a:solidFill>
           <a:ln w="12700">
             <a:solidFill>
-              <a:srgbClr val="F4F5F9"/>
+              <a:srgbClr val="F2F3F1"/>
             </a:solidFill>
             <a:prstDash val="solid"/>
           </a:ln>
@@ -3064,11 +3064,11 @@
             <a:r>
               <a:rPr lang="en-US" sz="950" b="1" dirty="0">
                 <a:solidFill>
-                  <a:srgbClr val="5B6475"/>
-                </a:solidFill>
-                <a:latin typeface="Inter" pitchFamily="34" charset="0"/>
-                <a:ea typeface="Inter" pitchFamily="34" charset="-122"/>
-                <a:cs typeface="Inter" pitchFamily="34" charset="-120"/>
+                  <a:srgbClr val="575F5C"/>
+                </a:solidFill>
+                <a:latin typeface="Public Sans" pitchFamily="34" charset="0"/>
+                <a:ea typeface="Public Sans" pitchFamily="34" charset="-122"/>
+                <a:cs typeface="Public Sans" pitchFamily="34" charset="-120"/>
               </a:rPr>
               <a:t>Pas de projet informatique</a:t>
             </a:r>
@@ -3106,11 +3106,11 @@
             <a:r>
               <a:rPr lang="en-US" sz="1150" i="1" dirty="0">
                 <a:solidFill>
-                  <a:srgbClr val="3D4556"/>
-                </a:solidFill>
-                <a:latin typeface="Inter" pitchFamily="34" charset="0"/>
-                <a:ea typeface="Inter" pitchFamily="34" charset="-122"/>
-                <a:cs typeface="Inter" pitchFamily="34" charset="-120"/>
+                  <a:srgbClr val="3A423F"/>
+                </a:solidFill>
+                <a:latin typeface="Public Sans" pitchFamily="34" charset="0"/>
+                <a:ea typeface="Public Sans" pitchFamily="34" charset="-122"/>
+                <a:cs typeface="Public Sans" pitchFamily="34" charset="-120"/>
               </a:rPr>
               <a:t>Aucun serveur à installer, aucune intégration obligatoire, aucun développement. L'échange se fait par fichiers : vous importez un CSV ou un Excel, vous récupérez un Excel.</a:t>
             </a:r>
@@ -3145,11 +3145,11 @@
             <a:r>
               <a:rPr lang="en-US" sz="900" dirty="0">
                 <a:solidFill>
-                  <a:srgbClr val="5B6475"/>
-                </a:solidFill>
-                <a:latin typeface="Inter" pitchFamily="34" charset="0"/>
-                <a:ea typeface="Inter" pitchFamily="34" charset="-122"/>
-                <a:cs typeface="Inter" pitchFamily="34" charset="-120"/>
+                  <a:srgbClr val="575F5C"/>
+                </a:solidFill>
+                <a:latin typeface="Public Sans" pitchFamily="34" charset="0"/>
+                <a:ea typeface="Public Sans" pitchFamily="34" charset="-122"/>
+                <a:cs typeface="Public Sans" pitchFamily="34" charset="-120"/>
               </a:rPr>
               <a:t>Quantinvo · présentation</a:t>
             </a:r>
@@ -3184,11 +3184,11 @@
             <a:r>
               <a:rPr lang="en-US" sz="900" dirty="0">
                 <a:solidFill>
-                  <a:srgbClr val="5B6475"/>
-                </a:solidFill>
-                <a:latin typeface="Inter" pitchFamily="34" charset="0"/>
-                <a:ea typeface="Inter" pitchFamily="34" charset="-122"/>
-                <a:cs typeface="Inter" pitchFamily="34" charset="-120"/>
+                  <a:srgbClr val="575F5C"/>
+                </a:solidFill>
+                <a:latin typeface="Public Sans" pitchFamily="34" charset="0"/>
+                <a:ea typeface="Public Sans" pitchFamily="34" charset="-122"/>
+                <a:cs typeface="Public Sans" pitchFamily="34" charset="-120"/>
               </a:rPr>
               <a:t>10</a:t>
             </a:r>
@@ -3279,11 +3279,11 @@
             <a:r>
               <a:rPr lang="en-US" sz="1600" b="1" dirty="0">
                 <a:solidFill>
-                  <a:srgbClr val="0B0F19"/>
-                </a:solidFill>
-                <a:latin typeface="Sora" pitchFamily="34" charset="0"/>
-                <a:ea typeface="Sora" pitchFamily="34" charset="-122"/>
-                <a:cs typeface="Sora" pitchFamily="34" charset="-120"/>
+                  <a:srgbClr val="14181A"/>
+                </a:solidFill>
+                <a:latin typeface="Archivo" pitchFamily="34" charset="0"/>
+                <a:ea typeface="Archivo" pitchFamily="34" charset="-122"/>
+                <a:cs typeface="Archivo" pitchFamily="34" charset="-120"/>
               </a:rPr>
               <a:t>Quantinvo</a:t>
             </a:r>
@@ -3318,11 +3318,11 @@
             <a:r>
               <a:rPr lang="en-US" sz="1000" dirty="0">
                 <a:solidFill>
-                  <a:srgbClr val="5B6475"/>
-                </a:solidFill>
-                <a:latin typeface="Inter" pitchFamily="34" charset="0"/>
-                <a:ea typeface="Inter" pitchFamily="34" charset="-122"/>
-                <a:cs typeface="Inter" pitchFamily="34" charset="-120"/>
+                  <a:srgbClr val="575F5C"/>
+                </a:solidFill>
+                <a:latin typeface="Public Sans" pitchFamily="34" charset="0"/>
+                <a:ea typeface="Public Sans" pitchFamily="34" charset="-122"/>
+                <a:cs typeface="Public Sans" pitchFamily="34" charset="-120"/>
               </a:rPr>
               <a:t>Confiance</a:t>
             </a:r>
@@ -3339,17 +3339,17 @@
         <p:spPr>
           <a:xfrm>
             <a:off x="731520" y="877824"/>
-            <a:ext cx="10725912" cy="25603"/>
+            <a:ext cx="10725912" cy="10973"/>
           </a:xfrm>
           <a:prstGeom prst="rect">
             <a:avLst/>
           </a:prstGeom>
           <a:solidFill>
-            <a:srgbClr val="38C9FF"/>
+            <a:srgbClr val="E2E5E1"/>
           </a:solidFill>
           <a:ln w="12700">
             <a:solidFill>
-              <a:srgbClr val="38C9FF"/>
+              <a:srgbClr val="E2E5E1"/>
             </a:solidFill>
             <a:prstDash val="solid"/>
           </a:ln>
@@ -3385,11 +3385,11 @@
             <a:r>
               <a:rPr lang="en-US" sz="2600" b="1" dirty="0">
                 <a:solidFill>
-                  <a:srgbClr val="4636B0"/>
-                </a:solidFill>
-                <a:latin typeface="Sora" pitchFamily="34" charset="0"/>
-                <a:ea typeface="Sora" pitchFamily="34" charset="-122"/>
-                <a:cs typeface="Sora" pitchFamily="34" charset="-120"/>
+                  <a:srgbClr val="14181A"/>
+                </a:solidFill>
+                <a:latin typeface="Archivo" pitchFamily="34" charset="0"/>
+                <a:ea typeface="Archivo" pitchFamily="34" charset="-122"/>
+                <a:cs typeface="Archivo" pitchFamily="34" charset="-120"/>
               </a:rPr>
               <a:t>Pensé pour une entreprise, pas pour un particulier</a:t>
             </a:r>
@@ -3430,11 +3430,11 @@
             <a:r>
               <a:rPr lang="en-US" sz="1250" b="1" dirty="0">
                 <a:solidFill>
-                  <a:srgbClr val="0B0F19"/>
-                </a:solidFill>
-                <a:latin typeface="Inter" pitchFamily="34" charset="0"/>
-                <a:ea typeface="Inter" pitchFamily="34" charset="-122"/>
-                <a:cs typeface="Inter" pitchFamily="34" charset="-120"/>
+                  <a:srgbClr val="14181A"/>
+                </a:solidFill>
+                <a:latin typeface="Public Sans" pitchFamily="34" charset="0"/>
+                <a:ea typeface="Public Sans" pitchFamily="34" charset="-122"/>
+                <a:cs typeface="Public Sans" pitchFamily="34" charset="-120"/>
               </a:rPr>
               <a:t>Les données restent en Europe. </a:t>
             </a:r>
@@ -3450,11 +3450,11 @@
             <a:r>
               <a:rPr lang="en-US" sz="1250" dirty="0">
                 <a:solidFill>
-                  <a:srgbClr val="3D4556"/>
-                </a:solidFill>
-                <a:latin typeface="Inter" pitchFamily="34" charset="0"/>
-                <a:ea typeface="Inter" pitchFamily="34" charset="-122"/>
-                <a:cs typeface="Inter" pitchFamily="34" charset="-120"/>
+                  <a:srgbClr val="3A423F"/>
+                </a:solidFill>
+                <a:latin typeface="Public Sans" pitchFamily="34" charset="0"/>
+                <a:ea typeface="Public Sans" pitchFamily="34" charset="-122"/>
+                <a:cs typeface="Public Sans" pitchFamily="34" charset="-120"/>
               </a:rPr>
               <a:t>Les données d'inventaire sont hébergées en Irlande. La politique de confidentialité est publique et les sous-traitants y sont nommés.</a:t>
             </a:r>
@@ -3473,11 +3473,11 @@
             <a:r>
               <a:rPr lang="en-US" sz="1250" b="1" dirty="0">
                 <a:solidFill>
-                  <a:srgbClr val="0B0F19"/>
-                </a:solidFill>
-                <a:latin typeface="Inter" pitchFamily="34" charset="0"/>
-                <a:ea typeface="Inter" pitchFamily="34" charset="-122"/>
-                <a:cs typeface="Inter" pitchFamily="34" charset="-120"/>
+                  <a:srgbClr val="14181A"/>
+                </a:solidFill>
+                <a:latin typeface="Public Sans" pitchFamily="34" charset="0"/>
+                <a:ea typeface="Public Sans" pitchFamily="34" charset="-122"/>
+                <a:cs typeface="Public Sans" pitchFamily="34" charset="-120"/>
               </a:rPr>
               <a:t>Le RGPD est dans le produit. </a:t>
             </a:r>
@@ -3493,11 +3493,11 @@
             <a:r>
               <a:rPr lang="en-US" sz="1250" dirty="0">
                 <a:solidFill>
-                  <a:srgbClr val="3D4556"/>
-                </a:solidFill>
-                <a:latin typeface="Inter" pitchFamily="34" charset="0"/>
-                <a:ea typeface="Inter" pitchFamily="34" charset="-122"/>
-                <a:cs typeface="Inter" pitchFamily="34" charset="-120"/>
+                  <a:srgbClr val="3A423F"/>
+                </a:solidFill>
+                <a:latin typeface="Public Sans" pitchFamily="34" charset="0"/>
+                <a:ea typeface="Public Sans" pitchFamily="34" charset="-122"/>
+                <a:cs typeface="Public Sans" pitchFamily="34" charset="-120"/>
               </a:rPr>
               <a:t>Chaque personne peut télécharger ses données ou demander la suppression de son compte depuis son écran. Les clauses de sous-traitance sont fournies à la signature.</a:t>
             </a:r>
@@ -3538,11 +3538,11 @@
             <a:r>
               <a:rPr lang="en-US" sz="1250" b="1" dirty="0">
                 <a:solidFill>
-                  <a:srgbClr val="0B0F19"/>
-                </a:solidFill>
-                <a:latin typeface="Inter" pitchFamily="34" charset="0"/>
-                <a:ea typeface="Inter" pitchFamily="34" charset="-122"/>
-                <a:cs typeface="Inter" pitchFamily="34" charset="-120"/>
+                  <a:srgbClr val="14181A"/>
+                </a:solidFill>
+                <a:latin typeface="Public Sans" pitchFamily="34" charset="0"/>
+                <a:ea typeface="Public Sans" pitchFamily="34" charset="-122"/>
+                <a:cs typeface="Public Sans" pitchFamily="34" charset="-120"/>
               </a:rPr>
               <a:t>Les accès sont nominatifs. </a:t>
             </a:r>
@@ -3558,11 +3558,11 @@
             <a:r>
               <a:rPr lang="en-US" sz="1250" dirty="0">
                 <a:solidFill>
-                  <a:srgbClr val="3D4556"/>
-                </a:solidFill>
-                <a:latin typeface="Inter" pitchFamily="34" charset="0"/>
-                <a:ea typeface="Inter" pitchFamily="34" charset="-122"/>
-                <a:cs typeface="Inter" pitchFamily="34" charset="-120"/>
+                  <a:srgbClr val="3A423F"/>
+                </a:solidFill>
+                <a:latin typeface="Public Sans" pitchFamily="34" charset="0"/>
+                <a:ea typeface="Public Sans" pitchFamily="34" charset="-122"/>
+                <a:cs typeface="Public Sans" pitchFamily="34" charset="-120"/>
               </a:rPr>
               <a:t>Pas d'inscription libre : on entre sur invitation. Administrateur, superviseur, compteur, chacun voit son périmètre. Double authentification pour qui le souhaite.</a:t>
             </a:r>
@@ -3581,11 +3581,11 @@
             <a:r>
               <a:rPr lang="en-US" sz="1250" b="1" dirty="0">
                 <a:solidFill>
-                  <a:srgbClr val="0B0F19"/>
-                </a:solidFill>
-                <a:latin typeface="Inter" pitchFamily="34" charset="0"/>
-                <a:ea typeface="Inter" pitchFamily="34" charset="-122"/>
-                <a:cs typeface="Inter" pitchFamily="34" charset="-120"/>
+                  <a:srgbClr val="14181A"/>
+                </a:solidFill>
+                <a:latin typeface="Public Sans" pitchFamily="34" charset="0"/>
+                <a:ea typeface="Public Sans" pitchFamily="34" charset="-122"/>
+                <a:cs typeface="Public Sans" pitchFamily="34" charset="-120"/>
               </a:rPr>
               <a:t>Aucun traceur. </a:t>
             </a:r>
@@ -3601,11 +3601,11 @@
             <a:r>
               <a:rPr lang="en-US" sz="1250" dirty="0">
                 <a:solidFill>
-                  <a:srgbClr val="3D4556"/>
-                </a:solidFill>
-                <a:latin typeface="Inter" pitchFamily="34" charset="0"/>
-                <a:ea typeface="Inter" pitchFamily="34" charset="-122"/>
-                <a:cs typeface="Inter" pitchFamily="34" charset="-120"/>
+                  <a:srgbClr val="3A423F"/>
+                </a:solidFill>
+                <a:latin typeface="Public Sans" pitchFamily="34" charset="0"/>
+                <a:ea typeface="Public Sans" pitchFamily="34" charset="-122"/>
+                <a:cs typeface="Public Sans" pitchFamily="34" charset="-120"/>
               </a:rPr>
               <a:t>Pas de cookie publicitaire, pas de mesure d'audience, pas de revente. L'outil travaille, il n'observe pas.</a:t>
             </a:r>
@@ -3626,15 +3626,15 @@
           </a:xfrm>
           <a:prstGeom prst="roundRect">
             <a:avLst>
-              <a:gd name="adj" fmla="val 8000"/>
+              <a:gd name="adj" fmla="val 4000"/>
             </a:avLst>
           </a:prstGeom>
           <a:solidFill>
-            <a:srgbClr val="F4F5F9"/>
+            <a:srgbClr val="F2F3F1"/>
           </a:solidFill>
           <a:ln w="12700">
             <a:solidFill>
-              <a:srgbClr val="F4F5F9"/>
+              <a:srgbClr val="F2F3F1"/>
             </a:solidFill>
             <a:prstDash val="solid"/>
           </a:ln>
@@ -3667,11 +3667,11 @@
             <a:r>
               <a:rPr lang="en-US" sz="950" b="1" dirty="0">
                 <a:solidFill>
-                  <a:srgbClr val="5B6475"/>
-                </a:solidFill>
-                <a:latin typeface="Inter" pitchFamily="34" charset="0"/>
-                <a:ea typeface="Inter" pitchFamily="34" charset="-122"/>
-                <a:cs typeface="Inter" pitchFamily="34" charset="-120"/>
+                  <a:srgbClr val="575F5C"/>
+                </a:solidFill>
+                <a:latin typeface="Public Sans" pitchFamily="34" charset="0"/>
+                <a:ea typeface="Public Sans" pitchFamily="34" charset="-122"/>
+                <a:cs typeface="Public Sans" pitchFamily="34" charset="-120"/>
               </a:rPr>
               <a:t>Pour votre direction informatique</a:t>
             </a:r>
@@ -3709,11 +3709,11 @@
             <a:r>
               <a:rPr lang="en-US" sz="1150" i="1" dirty="0">
                 <a:solidFill>
-                  <a:srgbClr val="3D4556"/>
-                </a:solidFill>
-                <a:latin typeface="Inter" pitchFamily="34" charset="0"/>
-                <a:ea typeface="Inter" pitchFamily="34" charset="-122"/>
-                <a:cs typeface="Inter" pitchFamily="34" charset="-120"/>
+                  <a:srgbClr val="3A423F"/>
+                </a:solidFill>
+                <a:latin typeface="Public Sans" pitchFamily="34" charset="0"/>
+                <a:ea typeface="Public Sans" pitchFamily="34" charset="-122"/>
+                <a:cs typeface="Public Sans" pitchFamily="34" charset="-120"/>
               </a:rPr>
               <a:t>Un dossier technique séparé répond aux questions d'une DSI : architecture, hébergement, distribution de l'application, mise en place, comptes, sécurité. Demandez-le.</a:t>
             </a:r>
@@ -3748,11 +3748,11 @@
             <a:r>
               <a:rPr lang="en-US" sz="900" dirty="0">
                 <a:solidFill>
-                  <a:srgbClr val="5B6475"/>
-                </a:solidFill>
-                <a:latin typeface="Inter" pitchFamily="34" charset="0"/>
-                <a:ea typeface="Inter" pitchFamily="34" charset="-122"/>
-                <a:cs typeface="Inter" pitchFamily="34" charset="-120"/>
+                  <a:srgbClr val="575F5C"/>
+                </a:solidFill>
+                <a:latin typeface="Public Sans" pitchFamily="34" charset="0"/>
+                <a:ea typeface="Public Sans" pitchFamily="34" charset="-122"/>
+                <a:cs typeface="Public Sans" pitchFamily="34" charset="-120"/>
               </a:rPr>
               <a:t>Quantinvo · présentation</a:t>
             </a:r>
@@ -3787,11 +3787,11 @@
             <a:r>
               <a:rPr lang="en-US" sz="900" dirty="0">
                 <a:solidFill>
-                  <a:srgbClr val="5B6475"/>
-                </a:solidFill>
-                <a:latin typeface="Inter" pitchFamily="34" charset="0"/>
-                <a:ea typeface="Inter" pitchFamily="34" charset="-122"/>
-                <a:cs typeface="Inter" pitchFamily="34" charset="-120"/>
+                  <a:srgbClr val="575F5C"/>
+                </a:solidFill>
+                <a:latin typeface="Public Sans" pitchFamily="34" charset="0"/>
+                <a:ea typeface="Public Sans" pitchFamily="34" charset="-122"/>
+                <a:cs typeface="Public Sans" pitchFamily="34" charset="-120"/>
               </a:rPr>
               <a:t>11</a:t>
             </a:r>
@@ -3882,11 +3882,11 @@
             <a:r>
               <a:rPr lang="en-US" sz="1600" b="1" dirty="0">
                 <a:solidFill>
-                  <a:srgbClr val="0B0F19"/>
-                </a:solidFill>
-                <a:latin typeface="Sora" pitchFamily="34" charset="0"/>
-                <a:ea typeface="Sora" pitchFamily="34" charset="-122"/>
-                <a:cs typeface="Sora" pitchFamily="34" charset="-120"/>
+                  <a:srgbClr val="14181A"/>
+                </a:solidFill>
+                <a:latin typeface="Archivo" pitchFamily="34" charset="0"/>
+                <a:ea typeface="Archivo" pitchFamily="34" charset="-122"/>
+                <a:cs typeface="Archivo" pitchFamily="34" charset="-120"/>
               </a:rPr>
               <a:t>Quantinvo</a:t>
             </a:r>
@@ -3921,11 +3921,11 @@
             <a:r>
               <a:rPr lang="en-US" sz="1000" dirty="0">
                 <a:solidFill>
-                  <a:srgbClr val="5B6475"/>
-                </a:solidFill>
-                <a:latin typeface="Inter" pitchFamily="34" charset="0"/>
-                <a:ea typeface="Inter" pitchFamily="34" charset="-122"/>
-                <a:cs typeface="Inter" pitchFamily="34" charset="-120"/>
+                  <a:srgbClr val="575F5C"/>
+                </a:solidFill>
+                <a:latin typeface="Public Sans" pitchFamily="34" charset="0"/>
+                <a:ea typeface="Public Sans" pitchFamily="34" charset="-122"/>
+                <a:cs typeface="Public Sans" pitchFamily="34" charset="-120"/>
               </a:rPr>
               <a:t>L'offre</a:t>
             </a:r>
@@ -3942,17 +3942,17 @@
         <p:spPr>
           <a:xfrm>
             <a:off x="731520" y="877824"/>
-            <a:ext cx="10725912" cy="25603"/>
+            <a:ext cx="10725912" cy="10973"/>
           </a:xfrm>
           <a:prstGeom prst="rect">
             <a:avLst/>
           </a:prstGeom>
           <a:solidFill>
-            <a:srgbClr val="38C9FF"/>
+            <a:srgbClr val="E2E5E1"/>
           </a:solidFill>
           <a:ln w="12700">
             <a:solidFill>
-              <a:srgbClr val="38C9FF"/>
+              <a:srgbClr val="E2E5E1"/>
             </a:solidFill>
             <a:prstDash val="solid"/>
           </a:ln>
@@ -3988,11 +3988,11 @@
             <a:r>
               <a:rPr lang="en-US" sz="2600" b="1" dirty="0">
                 <a:solidFill>
-                  <a:srgbClr val="4636B0"/>
-                </a:solidFill>
-                <a:latin typeface="Sora" pitchFamily="34" charset="0"/>
-                <a:ea typeface="Sora" pitchFamily="34" charset="-122"/>
-                <a:cs typeface="Sora" pitchFamily="34" charset="-120"/>
+                  <a:srgbClr val="14181A"/>
+                </a:solidFill>
+                <a:latin typeface="Archivo" pitchFamily="34" charset="0"/>
+                <a:ea typeface="Archivo" pitchFamily="34" charset="-122"/>
+                <a:cs typeface="Archivo" pitchFamily="34" charset="-120"/>
               </a:rPr>
               <a:t>Une licence par magasin, comptages illimités</a:t>
             </a:r>
@@ -4030,11 +4030,11 @@
             <a:r>
               <a:rPr lang="en-US" sz="1150" dirty="0">
                 <a:solidFill>
-                  <a:srgbClr val="5B6475"/>
-                </a:solidFill>
-                <a:latin typeface="Inter" pitchFamily="34" charset="0"/>
-                <a:ea typeface="Inter" pitchFamily="34" charset="-122"/>
-                <a:cs typeface="Inter" pitchFamily="34" charset="-120"/>
+                  <a:srgbClr val="575F5C"/>
+                </a:solidFill>
+                <a:latin typeface="Public Sans" pitchFamily="34" charset="0"/>
+                <a:ea typeface="Public Sans" pitchFamily="34" charset="-122"/>
+                <a:cs typeface="Public Sans" pitchFamily="34" charset="-120"/>
               </a:rPr>
               <a:t>Le prix suit le nombre d'appareils qui comptent en même temps — la seule chose que vous puissiez vérifier vous-même. Ni le volume de votre stock, ni le nombre de comptes, ni le nombre d'inventaires dans l'année.</a:t>
             </a:r>
@@ -4055,15 +4055,15 @@
           </a:xfrm>
           <a:prstGeom prst="roundRect">
             <a:avLst>
-              <a:gd name="adj" fmla="val 4000"/>
+              <a:gd name="adj" fmla="val 1333"/>
             </a:avLst>
           </a:prstGeom>
           <a:solidFill>
-            <a:srgbClr val="FFFFFF"/>
+            <a:srgbClr val="F2F3F1"/>
           </a:solidFill>
           <a:ln w="12700">
             <a:solidFill>
-              <a:srgbClr val="E3E6EE"/>
+              <a:srgbClr val="F2F3F1"/>
             </a:solidFill>
             <a:prstDash val="solid"/>
           </a:ln>
@@ -4096,11 +4096,11 @@
             <a:r>
               <a:rPr lang="en-US" sz="1800" b="1" dirty="0">
                 <a:solidFill>
-                  <a:srgbClr val="0B0F19"/>
-                </a:solidFill>
-                <a:latin typeface="Sora" pitchFamily="34" charset="0"/>
-                <a:ea typeface="Sora" pitchFamily="34" charset="-122"/>
-                <a:cs typeface="Sora" pitchFamily="34" charset="-120"/>
+                  <a:srgbClr val="14181A"/>
+                </a:solidFill>
+                <a:latin typeface="Archivo" pitchFamily="34" charset="0"/>
+                <a:ea typeface="Archivo" pitchFamily="34" charset="-122"/>
+                <a:cs typeface="Archivo" pitchFamily="34" charset="-120"/>
               </a:rPr>
               <a:t>Essential</a:t>
             </a:r>
@@ -4135,13 +4135,13 @@
             <a:r>
               <a:rPr lang="en-US" sz="1100" b="1" dirty="0">
                 <a:solidFill>
-                  <a:srgbClr val="6366F1"/>
-                </a:solidFill>
-                <a:latin typeface="Inter" pitchFamily="34" charset="0"/>
-                <a:ea typeface="Inter" pitchFamily="34" charset="-122"/>
-                <a:cs typeface="Inter" pitchFamily="34" charset="-120"/>
-              </a:rPr>
-              <a:t>2 appareils</a:t>
+                  <a:srgbClr val="1E4D3B"/>
+                </a:solidFill>
+                <a:latin typeface="Public Sans" pitchFamily="34" charset="0"/>
+                <a:ea typeface="Public Sans" pitchFamily="34" charset="-122"/>
+                <a:cs typeface="Public Sans" pitchFamily="34" charset="-120"/>
+              </a:rPr>
+              <a:t>Jusqu’à 2 appareils</a:t>
             </a:r>
             <a:endParaRPr lang="en-US" sz="1100" dirty="0"/>
           </a:p>
@@ -4177,11 +4177,11 @@
             <a:r>
               <a:rPr lang="en-US" sz="1000" dirty="0">
                 <a:solidFill>
-                  <a:srgbClr val="5B6475"/>
-                </a:solidFill>
-                <a:latin typeface="Inter" pitchFamily="34" charset="0"/>
-                <a:ea typeface="Inter" pitchFamily="34" charset="-122"/>
-                <a:cs typeface="Inter" pitchFamily="34" charset="-120"/>
+                  <a:srgbClr val="575F5C"/>
+                </a:solidFill>
+                <a:latin typeface="Public Sans" pitchFamily="34" charset="0"/>
+                <a:ea typeface="Public Sans" pitchFamily="34" charset="-122"/>
+                <a:cs typeface="Public Sans" pitchFamily="34" charset="-120"/>
               </a:rPr>
               <a:t>Vous comptez seul ou à deux, dans un magasin.</a:t>
             </a:r>
@@ -4216,11 +4216,11 @@
             <a:r>
               <a:rPr lang="en-US" sz="2600" b="1" dirty="0">
                 <a:solidFill>
-                  <a:srgbClr val="4636B0"/>
-                </a:solidFill>
-                <a:latin typeface="Sora" pitchFamily="34" charset="0"/>
-                <a:ea typeface="Sora" pitchFamily="34" charset="-122"/>
-                <a:cs typeface="Sora" pitchFamily="34" charset="-120"/>
+                  <a:srgbClr val="14181A"/>
+                </a:solidFill>
+                <a:latin typeface="Archivo" pitchFamily="34" charset="0"/>
+                <a:ea typeface="Archivo" pitchFamily="34" charset="-122"/>
+                <a:cs typeface="Archivo" pitchFamily="34" charset="-120"/>
               </a:rPr>
               <a:t>89 €</a:t>
             </a:r>
@@ -4230,11 +4230,11 @@
             <a:r>
               <a:rPr lang="en-US" sz="1050" dirty="0">
                 <a:solidFill>
-                  <a:srgbClr val="5B6475"/>
-                </a:solidFill>
-                <a:latin typeface="Inter" pitchFamily="34" charset="0"/>
-                <a:ea typeface="Inter" pitchFamily="34" charset="-122"/>
-                <a:cs typeface="Inter" pitchFamily="34" charset="-120"/>
+                  <a:srgbClr val="575F5C"/>
+                </a:solidFill>
+                <a:latin typeface="Public Sans" pitchFamily="34" charset="0"/>
+                <a:ea typeface="Public Sans" pitchFamily="34" charset="-122"/>
+                <a:cs typeface="Public Sans" pitchFamily="34" charset="-120"/>
               </a:rPr>
               <a:t>  HT / mois</a:t>
             </a:r>
@@ -4269,11 +4269,11 @@
             <a:r>
               <a:rPr lang="en-US" sz="950" dirty="0">
                 <a:solidFill>
-                  <a:srgbClr val="1F7A5C"/>
-                </a:solidFill>
-                <a:latin typeface="Inter" pitchFamily="34" charset="0"/>
-                <a:ea typeface="Inter" pitchFamily="34" charset="-122"/>
-                <a:cs typeface="Inter" pitchFamily="34" charset="-120"/>
+                  <a:srgbClr val="15704F"/>
+                </a:solidFill>
+                <a:latin typeface="Public Sans" pitchFamily="34" charset="0"/>
+                <a:ea typeface="Public Sans" pitchFamily="34" charset="-122"/>
+                <a:cs typeface="Public Sans" pitchFamily="34" charset="-120"/>
               </a:rPr>
               <a:t>ou 950 € à l’année — 118 € de moins</a:t>
             </a:r>
@@ -4294,15 +4294,15 @@
           </a:xfrm>
           <a:prstGeom prst="roundRect">
             <a:avLst>
-              <a:gd name="adj" fmla="val 4000"/>
+              <a:gd name="adj" fmla="val 1333"/>
             </a:avLst>
           </a:prstGeom>
           <a:solidFill>
-            <a:srgbClr val="EEEEFC"/>
+            <a:srgbClr val="E7EDE9"/>
           </a:solidFill>
-          <a:ln w="19050">
+          <a:ln w="15875">
             <a:solidFill>
-              <a:srgbClr val="6366F1"/>
+              <a:srgbClr val="1E4D3B"/>
             </a:solidFill>
             <a:prstDash val="solid"/>
           </a:ln>
@@ -4335,11 +4335,11 @@
             <a:r>
               <a:rPr lang="en-US" sz="800" b="1" spc="60" kern="0" dirty="0">
                 <a:solidFill>
-                  <a:srgbClr val="6366F1"/>
-                </a:solidFill>
-                <a:latin typeface="Inter" pitchFamily="34" charset="0"/>
-                <a:ea typeface="Inter" pitchFamily="34" charset="-122"/>
-                <a:cs typeface="Inter" pitchFamily="34" charset="-120"/>
+                  <a:srgbClr val="1E4D3B"/>
+                </a:solidFill>
+                <a:latin typeface="Public Sans" pitchFamily="34" charset="0"/>
+                <a:ea typeface="Public Sans" pitchFamily="34" charset="-122"/>
+                <a:cs typeface="Public Sans" pitchFamily="34" charset="-120"/>
               </a:rPr>
               <a:t>LE PLUS COURANT</a:t>
             </a:r>
@@ -4374,11 +4374,11 @@
             <a:r>
               <a:rPr lang="en-US" sz="1800" b="1" dirty="0">
                 <a:solidFill>
-                  <a:srgbClr val="0B0F19"/>
-                </a:solidFill>
-                <a:latin typeface="Sora" pitchFamily="34" charset="0"/>
-                <a:ea typeface="Sora" pitchFamily="34" charset="-122"/>
-                <a:cs typeface="Sora" pitchFamily="34" charset="-120"/>
+                  <a:srgbClr val="14181A"/>
+                </a:solidFill>
+                <a:latin typeface="Archivo" pitchFamily="34" charset="0"/>
+                <a:ea typeface="Archivo" pitchFamily="34" charset="-122"/>
+                <a:cs typeface="Archivo" pitchFamily="34" charset="-120"/>
               </a:rPr>
               <a:t>Advanced</a:t>
             </a:r>
@@ -4413,13 +4413,13 @@
             <a:r>
               <a:rPr lang="en-US" sz="1100" b="1" dirty="0">
                 <a:solidFill>
-                  <a:srgbClr val="6366F1"/>
-                </a:solidFill>
-                <a:latin typeface="Inter" pitchFamily="34" charset="0"/>
-                <a:ea typeface="Inter" pitchFamily="34" charset="-122"/>
-                <a:cs typeface="Inter" pitchFamily="34" charset="-120"/>
-              </a:rPr>
-              <a:t>3 à 20 appareils</a:t>
+                  <a:srgbClr val="1E4D3B"/>
+                </a:solidFill>
+                <a:latin typeface="Public Sans" pitchFamily="34" charset="0"/>
+                <a:ea typeface="Public Sans" pitchFamily="34" charset="-122"/>
+                <a:cs typeface="Public Sans" pitchFamily="34" charset="-120"/>
+              </a:rPr>
+              <a:t>Jusqu’à 20 appareils</a:t>
             </a:r>
             <a:endParaRPr lang="en-US" sz="1100" dirty="0"/>
           </a:p>
@@ -4455,11 +4455,11 @@
             <a:r>
               <a:rPr lang="en-US" sz="1000" dirty="0">
                 <a:solidFill>
-                  <a:srgbClr val="5B6475"/>
-                </a:solidFill>
-                <a:latin typeface="Inter" pitchFamily="34" charset="0"/>
-                <a:ea typeface="Inter" pitchFamily="34" charset="-122"/>
-                <a:cs typeface="Inter" pitchFamily="34" charset="-120"/>
+                  <a:srgbClr val="575F5C"/>
+                </a:solidFill>
+                <a:latin typeface="Public Sans" pitchFamily="34" charset="0"/>
+                <a:ea typeface="Public Sans" pitchFamily="34" charset="-122"/>
+                <a:cs typeface="Public Sans" pitchFamily="34" charset="-120"/>
               </a:rPr>
               <a:t>Vous montez une équipe le jour de l’inventaire.</a:t>
             </a:r>
@@ -4494,11 +4494,11 @@
             <a:r>
               <a:rPr lang="en-US" sz="2600" b="1" dirty="0">
                 <a:solidFill>
-                  <a:srgbClr val="4636B0"/>
-                </a:solidFill>
-                <a:latin typeface="Sora" pitchFamily="34" charset="0"/>
-                <a:ea typeface="Sora" pitchFamily="34" charset="-122"/>
-                <a:cs typeface="Sora" pitchFamily="34" charset="-120"/>
+                  <a:srgbClr val="14181A"/>
+                </a:solidFill>
+                <a:latin typeface="Archivo" pitchFamily="34" charset="0"/>
+                <a:ea typeface="Archivo" pitchFamily="34" charset="-122"/>
+                <a:cs typeface="Archivo" pitchFamily="34" charset="-120"/>
               </a:rPr>
               <a:t>310 €</a:t>
             </a:r>
@@ -4508,11 +4508,11 @@
             <a:r>
               <a:rPr lang="en-US" sz="1050" dirty="0">
                 <a:solidFill>
-                  <a:srgbClr val="5B6475"/>
-                </a:solidFill>
-                <a:latin typeface="Inter" pitchFamily="34" charset="0"/>
-                <a:ea typeface="Inter" pitchFamily="34" charset="-122"/>
-                <a:cs typeface="Inter" pitchFamily="34" charset="-120"/>
+                  <a:srgbClr val="575F5C"/>
+                </a:solidFill>
+                <a:latin typeface="Public Sans" pitchFamily="34" charset="0"/>
+                <a:ea typeface="Public Sans" pitchFamily="34" charset="-122"/>
+                <a:cs typeface="Public Sans" pitchFamily="34" charset="-120"/>
               </a:rPr>
               <a:t>  HT / mois</a:t>
             </a:r>
@@ -4547,11 +4547,11 @@
             <a:r>
               <a:rPr lang="en-US" sz="950" dirty="0">
                 <a:solidFill>
-                  <a:srgbClr val="1F7A5C"/>
-                </a:solidFill>
-                <a:latin typeface="Inter" pitchFamily="34" charset="0"/>
-                <a:ea typeface="Inter" pitchFamily="34" charset="-122"/>
-                <a:cs typeface="Inter" pitchFamily="34" charset="-120"/>
+                  <a:srgbClr val="15704F"/>
+                </a:solidFill>
+                <a:latin typeface="Public Sans" pitchFamily="34" charset="0"/>
+                <a:ea typeface="Public Sans" pitchFamily="34" charset="-122"/>
+                <a:cs typeface="Public Sans" pitchFamily="34" charset="-120"/>
               </a:rPr>
               <a:t>ou 3 300 € à l’année — 420 € de moins</a:t>
             </a:r>
@@ -4572,15 +4572,15 @@
           </a:xfrm>
           <a:prstGeom prst="roundRect">
             <a:avLst>
-              <a:gd name="adj" fmla="val 4000"/>
+              <a:gd name="adj" fmla="val 1333"/>
             </a:avLst>
           </a:prstGeom>
           <a:solidFill>
-            <a:srgbClr val="FFFFFF"/>
+            <a:srgbClr val="F2F3F1"/>
           </a:solidFill>
           <a:ln w="12700">
             <a:solidFill>
-              <a:srgbClr val="E3E6EE"/>
+              <a:srgbClr val="F2F3F1"/>
             </a:solidFill>
             <a:prstDash val="solid"/>
           </a:ln>
@@ -4613,11 +4613,11 @@
             <a:r>
               <a:rPr lang="en-US" sz="1800" b="1" dirty="0">
                 <a:solidFill>
-                  <a:srgbClr val="0B0F19"/>
-                </a:solidFill>
-                <a:latin typeface="Sora" pitchFamily="34" charset="0"/>
-                <a:ea typeface="Sora" pitchFamily="34" charset="-122"/>
-                <a:cs typeface="Sora" pitchFamily="34" charset="-120"/>
+                  <a:srgbClr val="14181A"/>
+                </a:solidFill>
+                <a:latin typeface="Archivo" pitchFamily="34" charset="0"/>
+                <a:ea typeface="Archivo" pitchFamily="34" charset="-122"/>
+                <a:cs typeface="Archivo" pitchFamily="34" charset="-120"/>
               </a:rPr>
               <a:t>Enterprise</a:t>
             </a:r>
@@ -4652,13 +4652,13 @@
             <a:r>
               <a:rPr lang="en-US" sz="1100" b="1" dirty="0">
                 <a:solidFill>
-                  <a:srgbClr val="6366F1"/>
-                </a:solidFill>
-                <a:latin typeface="Inter" pitchFamily="34" charset="0"/>
-                <a:ea typeface="Inter" pitchFamily="34" charset="-122"/>
-                <a:cs typeface="Inter" pitchFamily="34" charset="-120"/>
-              </a:rPr>
-              <a:t>21 à 100 appareils</a:t>
+                  <a:srgbClr val="1E4D3B"/>
+                </a:solidFill>
+                <a:latin typeface="Public Sans" pitchFamily="34" charset="0"/>
+                <a:ea typeface="Public Sans" pitchFamily="34" charset="-122"/>
+                <a:cs typeface="Public Sans" pitchFamily="34" charset="-120"/>
+              </a:rPr>
+              <a:t>Jusqu’à 100 appareils</a:t>
             </a:r>
             <a:endParaRPr lang="en-US" sz="1100" dirty="0"/>
           </a:p>
@@ -4694,11 +4694,11 @@
             <a:r>
               <a:rPr lang="en-US" sz="1000" dirty="0">
                 <a:solidFill>
-                  <a:srgbClr val="5B6475"/>
-                </a:solidFill>
-                <a:latin typeface="Inter" pitchFamily="34" charset="0"/>
-                <a:ea typeface="Inter" pitchFamily="34" charset="-122"/>
-                <a:cs typeface="Inter" pitchFamily="34" charset="-120"/>
+                  <a:srgbClr val="575F5C"/>
+                </a:solidFill>
+                <a:latin typeface="Public Sans" pitchFamily="34" charset="0"/>
+                <a:ea typeface="Public Sans" pitchFamily="34" charset="-122"/>
+                <a:cs typeface="Public Sans" pitchFamily="34" charset="-120"/>
               </a:rPr>
               <a:t>La grande surface, qui mobilise une équipe entière.</a:t>
             </a:r>
@@ -4733,11 +4733,11 @@
             <a:r>
               <a:rPr lang="en-US" sz="2600" b="1" dirty="0">
                 <a:solidFill>
-                  <a:srgbClr val="4636B0"/>
-                </a:solidFill>
-                <a:latin typeface="Sora" pitchFamily="34" charset="0"/>
-                <a:ea typeface="Sora" pitchFamily="34" charset="-122"/>
-                <a:cs typeface="Sora" pitchFamily="34" charset="-120"/>
+                  <a:srgbClr val="14181A"/>
+                </a:solidFill>
+                <a:latin typeface="Archivo" pitchFamily="34" charset="0"/>
+                <a:ea typeface="Archivo" pitchFamily="34" charset="-122"/>
+                <a:cs typeface="Archivo" pitchFamily="34" charset="-120"/>
               </a:rPr>
               <a:t>890 €</a:t>
             </a:r>
@@ -4747,11 +4747,11 @@
             <a:r>
               <a:rPr lang="en-US" sz="1050" dirty="0">
                 <a:solidFill>
-                  <a:srgbClr val="5B6475"/>
-                </a:solidFill>
-                <a:latin typeface="Inter" pitchFamily="34" charset="0"/>
-                <a:ea typeface="Inter" pitchFamily="34" charset="-122"/>
-                <a:cs typeface="Inter" pitchFamily="34" charset="-120"/>
+                  <a:srgbClr val="575F5C"/>
+                </a:solidFill>
+                <a:latin typeface="Public Sans" pitchFamily="34" charset="0"/>
+                <a:ea typeface="Public Sans" pitchFamily="34" charset="-122"/>
+                <a:cs typeface="Public Sans" pitchFamily="34" charset="-120"/>
               </a:rPr>
               <a:t>  HT / mois</a:t>
             </a:r>
@@ -4786,11 +4786,11 @@
             <a:r>
               <a:rPr lang="en-US" sz="950" dirty="0">
                 <a:solidFill>
-                  <a:srgbClr val="1F7A5C"/>
-                </a:solidFill>
-                <a:latin typeface="Inter" pitchFamily="34" charset="0"/>
-                <a:ea typeface="Inter" pitchFamily="34" charset="-122"/>
-                <a:cs typeface="Inter" pitchFamily="34" charset="-120"/>
+                  <a:srgbClr val="15704F"/>
+                </a:solidFill>
+                <a:latin typeface="Public Sans" pitchFamily="34" charset="0"/>
+                <a:ea typeface="Public Sans" pitchFamily="34" charset="-122"/>
+                <a:cs typeface="Public Sans" pitchFamily="34" charset="-120"/>
               </a:rPr>
               <a:t>ou 9 450 € à l’année — 1 230 € de moins</a:t>
             </a:r>
@@ -4831,11 +4831,11 @@
             <a:r>
               <a:rPr lang="en-US" sz="1250" b="1" dirty="0">
                 <a:solidFill>
-                  <a:srgbClr val="0B0F19"/>
-                </a:solidFill>
-                <a:latin typeface="Inter" pitchFamily="34" charset="0"/>
-                <a:ea typeface="Inter" pitchFamily="34" charset="-122"/>
-                <a:cs typeface="Inter" pitchFamily="34" charset="-120"/>
+                  <a:srgbClr val="14181A"/>
+                </a:solidFill>
+                <a:latin typeface="Public Sans" pitchFamily="34" charset="0"/>
+                <a:ea typeface="Public Sans" pitchFamily="34" charset="-122"/>
+                <a:cs typeface="Public Sans" pitchFamily="34" charset="-120"/>
               </a:rPr>
               <a:t>Tout est compris. </a:t>
             </a:r>
@@ -4851,11 +4851,11 @@
             <a:r>
               <a:rPr lang="en-US" sz="1250" dirty="0">
                 <a:solidFill>
-                  <a:srgbClr val="3D4556"/>
-                </a:solidFill>
-                <a:latin typeface="Inter" pitchFamily="34" charset="0"/>
-                <a:ea typeface="Inter" pitchFamily="34" charset="-122"/>
-                <a:cs typeface="Inter" pitchFamily="34" charset="-120"/>
+                  <a:srgbClr val="3A423F"/>
+                </a:solidFill>
+                <a:latin typeface="Public Sans" pitchFamily="34" charset="0"/>
+                <a:ea typeface="Public Sans" pitchFamily="34" charset="-122"/>
+                <a:cs typeface="Public Sans" pitchFamily="34" charset="-120"/>
               </a:rPr>
               <a:t>L'application, le tableau de bord, les rapports, les mises à jour. Aucun terminal à acheter. Un réseau active une licence par magasin, à son rythme.</a:t>
             </a:r>
@@ -4893,11 +4893,11 @@
             <a:r>
               <a:rPr lang="en-US" sz="1050" i="1" dirty="0">
                 <a:solidFill>
-                  <a:srgbClr val="5B6475"/>
-                </a:solidFill>
-                <a:latin typeface="Inter" pitchFamily="34" charset="0"/>
-                <a:ea typeface="Inter" pitchFamily="34" charset="-122"/>
-                <a:cs typeface="Inter" pitchFamily="34" charset="-120"/>
+                  <a:srgbClr val="575F5C"/>
+                </a:solidFill>
+                <a:latin typeface="Public Sans" pitchFamily="34" charset="0"/>
+                <a:ea typeface="Public Sans" pitchFamily="34" charset="-122"/>
+                <a:cs typeface="Public Sans" pitchFamily="34" charset="-120"/>
               </a:rPr>
               <a:t>Plus de 100 appareils dans un même magasin ? 64 € par mois, ou 690 € à l’année, par tranche de 10 appareils supplémentaires.</a:t>
             </a:r>
@@ -4932,11 +4932,11 @@
             <a:r>
               <a:rPr lang="en-US" sz="900" dirty="0">
                 <a:solidFill>
-                  <a:srgbClr val="5B6475"/>
-                </a:solidFill>
-                <a:latin typeface="Inter" pitchFamily="34" charset="0"/>
-                <a:ea typeface="Inter" pitchFamily="34" charset="-122"/>
-                <a:cs typeface="Inter" pitchFamily="34" charset="-120"/>
+                  <a:srgbClr val="575F5C"/>
+                </a:solidFill>
+                <a:latin typeface="Public Sans" pitchFamily="34" charset="0"/>
+                <a:ea typeface="Public Sans" pitchFamily="34" charset="-122"/>
+                <a:cs typeface="Public Sans" pitchFamily="34" charset="-120"/>
               </a:rPr>
               <a:t>Quantinvo · présentation</a:t>
             </a:r>
@@ -4971,11 +4971,11 @@
             <a:r>
               <a:rPr lang="en-US" sz="900" dirty="0">
                 <a:solidFill>
-                  <a:srgbClr val="5B6475"/>
-                </a:solidFill>
-                <a:latin typeface="Inter" pitchFamily="34" charset="0"/>
-                <a:ea typeface="Inter" pitchFamily="34" charset="-122"/>
-                <a:cs typeface="Inter" pitchFamily="34" charset="-120"/>
+                  <a:srgbClr val="575F5C"/>
+                </a:solidFill>
+                <a:latin typeface="Public Sans" pitchFamily="34" charset="0"/>
+                <a:ea typeface="Public Sans" pitchFamily="34" charset="-122"/>
+                <a:cs typeface="Public Sans" pitchFamily="34" charset="-120"/>
               </a:rPr>
               <a:t>12</a:t>
             </a:r>
@@ -5066,11 +5066,11 @@
             <a:r>
               <a:rPr lang="en-US" sz="1600" b="1" dirty="0">
                 <a:solidFill>
-                  <a:srgbClr val="0B0F19"/>
-                </a:solidFill>
-                <a:latin typeface="Sora" pitchFamily="34" charset="0"/>
-                <a:ea typeface="Sora" pitchFamily="34" charset="-122"/>
-                <a:cs typeface="Sora" pitchFamily="34" charset="-120"/>
+                  <a:srgbClr val="14181A"/>
+                </a:solidFill>
+                <a:latin typeface="Archivo" pitchFamily="34" charset="0"/>
+                <a:ea typeface="Archivo" pitchFamily="34" charset="-122"/>
+                <a:cs typeface="Archivo" pitchFamily="34" charset="-120"/>
               </a:rPr>
               <a:t>Quantinvo</a:t>
             </a:r>
@@ -5105,11 +5105,11 @@
             <a:r>
               <a:rPr lang="en-US" sz="1000" dirty="0">
                 <a:solidFill>
-                  <a:srgbClr val="5B6475"/>
-                </a:solidFill>
-                <a:latin typeface="Inter" pitchFamily="34" charset="0"/>
-                <a:ea typeface="Inter" pitchFamily="34" charset="-122"/>
-                <a:cs typeface="Inter" pitchFamily="34" charset="-120"/>
+                  <a:srgbClr val="575F5C"/>
+                </a:solidFill>
+                <a:latin typeface="Public Sans" pitchFamily="34" charset="0"/>
+                <a:ea typeface="Public Sans" pitchFamily="34" charset="-122"/>
+                <a:cs typeface="Public Sans" pitchFamily="34" charset="-120"/>
               </a:rPr>
               <a:t>Pour être clair</a:t>
             </a:r>
@@ -5126,17 +5126,17 @@
         <p:spPr>
           <a:xfrm>
             <a:off x="731520" y="877824"/>
-            <a:ext cx="10725912" cy="25603"/>
+            <a:ext cx="10725912" cy="10973"/>
           </a:xfrm>
           <a:prstGeom prst="rect">
             <a:avLst/>
           </a:prstGeom>
           <a:solidFill>
-            <a:srgbClr val="38C9FF"/>
+            <a:srgbClr val="E2E5E1"/>
           </a:solidFill>
           <a:ln w="12700">
             <a:solidFill>
-              <a:srgbClr val="38C9FF"/>
+              <a:srgbClr val="E2E5E1"/>
             </a:solidFill>
             <a:prstDash val="solid"/>
           </a:ln>
@@ -5172,11 +5172,11 @@
             <a:r>
               <a:rPr lang="en-US" sz="2600" b="1" dirty="0">
                 <a:solidFill>
-                  <a:srgbClr val="4636B0"/>
-                </a:solidFill>
-                <a:latin typeface="Sora" pitchFamily="34" charset="0"/>
-                <a:ea typeface="Sora" pitchFamily="34" charset="-122"/>
-                <a:cs typeface="Sora" pitchFamily="34" charset="-120"/>
+                  <a:srgbClr val="14181A"/>
+                </a:solidFill>
+                <a:latin typeface="Archivo" pitchFamily="34" charset="0"/>
+                <a:ea typeface="Archivo" pitchFamily="34" charset="-122"/>
+                <a:cs typeface="Archivo" pitchFamily="34" charset="-120"/>
               </a:rPr>
               <a:t>Ce qu'on ne vous promet pas.</a:t>
             </a:r>
@@ -5214,11 +5214,11 @@
             <a:r>
               <a:rPr lang="en-US" sz="1250" i="1" dirty="0">
                 <a:solidFill>
-                  <a:srgbClr val="5B6475"/>
-                </a:solidFill>
-                <a:latin typeface="Inter" pitchFamily="34" charset="0"/>
-                <a:ea typeface="Inter" pitchFamily="34" charset="-122"/>
-                <a:cs typeface="Inter" pitchFamily="34" charset="-120"/>
+                  <a:srgbClr val="575F5C"/>
+                </a:solidFill>
+                <a:latin typeface="Public Sans" pitchFamily="34" charset="0"/>
+                <a:ea typeface="Public Sans" pitchFamily="34" charset="-122"/>
+                <a:cs typeface="Public Sans" pitchFamily="34" charset="-120"/>
               </a:rPr>
               <a:t>Autant le dire avant la démonstration qu'après.</a:t>
             </a:r>
@@ -5259,11 +5259,11 @@
             <a:r>
               <a:rPr lang="en-US" sz="1400" b="1" dirty="0">
                 <a:solidFill>
-                  <a:srgbClr val="0B0F19"/>
-                </a:solidFill>
-                <a:latin typeface="Inter" pitchFamily="34" charset="0"/>
-                <a:ea typeface="Inter" pitchFamily="34" charset="-122"/>
-                <a:cs typeface="Inter" pitchFamily="34" charset="-120"/>
+                  <a:srgbClr val="14181A"/>
+                </a:solidFill>
+                <a:latin typeface="Public Sans" pitchFamily="34" charset="0"/>
+                <a:ea typeface="Public Sans" pitchFamily="34" charset="-122"/>
+                <a:cs typeface="Public Sans" pitchFamily="34" charset="-120"/>
               </a:rPr>
               <a:t>L'inventaire fiscal certifié. </a:t>
             </a:r>
@@ -5279,11 +5279,11 @@
             <a:r>
               <a:rPr lang="en-US" sz="1400" dirty="0">
                 <a:solidFill>
-                  <a:srgbClr val="3D4556"/>
-                </a:solidFill>
-                <a:latin typeface="Inter" pitchFamily="34" charset="0"/>
-                <a:ea typeface="Inter" pitchFamily="34" charset="-122"/>
-                <a:cs typeface="Inter" pitchFamily="34" charset="-120"/>
+                  <a:srgbClr val="3A423F"/>
+                </a:solidFill>
+                <a:latin typeface="Public Sans" pitchFamily="34" charset="0"/>
+                <a:ea typeface="Public Sans" pitchFamily="34" charset="-122"/>
+                <a:cs typeface="Public Sans" pitchFamily="34" charset="-120"/>
               </a:rPr>
               <a:t>Si votre commissaire aux comptes exige un comptage par un tiers, ce comptage reste. Quantinvo fait tout le reste de l'année, et il le prépare.</a:t>
             </a:r>
@@ -5302,11 +5302,11 @@
             <a:r>
               <a:rPr lang="en-US" sz="1400" b="1" dirty="0">
                 <a:solidFill>
-                  <a:srgbClr val="0B0F19"/>
-                </a:solidFill>
-                <a:latin typeface="Inter" pitchFamily="34" charset="0"/>
-                <a:ea typeface="Inter" pitchFamily="34" charset="-122"/>
-                <a:cs typeface="Inter" pitchFamily="34" charset="-120"/>
+                  <a:srgbClr val="14181A"/>
+                </a:solidFill>
+                <a:latin typeface="Public Sans" pitchFamily="34" charset="0"/>
+                <a:ea typeface="Public Sans" pitchFamily="34" charset="-122"/>
+                <a:cs typeface="Public Sans" pitchFamily="34" charset="-120"/>
               </a:rPr>
               <a:t>Une connexion à votre ERP. </a:t>
             </a:r>
@@ -5322,11 +5322,11 @@
             <a:r>
               <a:rPr lang="en-US" sz="1400" dirty="0">
                 <a:solidFill>
-                  <a:srgbClr val="3D4556"/>
-                </a:solidFill>
-                <a:latin typeface="Inter" pitchFamily="34" charset="0"/>
-                <a:ea typeface="Inter" pitchFamily="34" charset="-122"/>
-                <a:cs typeface="Inter" pitchFamily="34" charset="-120"/>
+                  <a:srgbClr val="3A423F"/>
+                </a:solidFill>
+                <a:latin typeface="Public Sans" pitchFamily="34" charset="0"/>
+                <a:ea typeface="Public Sans" pitchFamily="34" charset="-122"/>
+                <a:cs typeface="Public Sans" pitchFamily="34" charset="-120"/>
               </a:rPr>
               <a:t>Pas encore. Quantinvo importe vos fichiers et rend un Excel. C'est ce qui permet de démarrer en une journée, sans projet informatique.</a:t>
             </a:r>
@@ -5345,11 +5345,11 @@
             <a:r>
               <a:rPr lang="en-US" sz="1400" b="1" dirty="0">
                 <a:solidFill>
-                  <a:srgbClr val="0B0F19"/>
-                </a:solidFill>
-                <a:latin typeface="Inter" pitchFamily="34" charset="0"/>
-                <a:ea typeface="Inter" pitchFamily="34" charset="-122"/>
-                <a:cs typeface="Inter" pitchFamily="34" charset="-120"/>
+                  <a:srgbClr val="14181A"/>
+                </a:solidFill>
+                <a:latin typeface="Public Sans" pitchFamily="34" charset="0"/>
+                <a:ea typeface="Public Sans" pitchFamily="34" charset="-122"/>
+                <a:cs typeface="Public Sans" pitchFamily="34" charset="-120"/>
               </a:rPr>
               <a:t>Android sur les boutiques. </a:t>
             </a:r>
@@ -5365,11 +5365,11 @@
             <a:r>
               <a:rPr lang="en-US" sz="1400" dirty="0">
                 <a:solidFill>
-                  <a:srgbClr val="3D4556"/>
-                </a:solidFill>
-                <a:latin typeface="Inter" pitchFamily="34" charset="0"/>
-                <a:ea typeface="Inter" pitchFamily="34" charset="-122"/>
-                <a:cs typeface="Inter" pitchFamily="34" charset="-120"/>
+                  <a:srgbClr val="3A423F"/>
+                </a:solidFill>
+                <a:latin typeface="Public Sans" pitchFamily="34" charset="0"/>
+                <a:ea typeface="Public Sans" pitchFamily="34" charset="-122"/>
+                <a:cs typeface="Public Sans" pitchFamily="34" charset="-120"/>
               </a:rPr>
               <a:t>L'application tourne sur Android, et elle est disponible sur iPhone. La mise en ligne sur Google Play est en cours ; d'ici là, l'installation passe par votre catalogue d'entreprise.</a:t>
             </a:r>
@@ -5388,11 +5388,11 @@
             <a:r>
               <a:rPr lang="en-US" sz="1400" b="1" dirty="0">
                 <a:solidFill>
-                  <a:srgbClr val="0B0F19"/>
-                </a:solidFill>
-                <a:latin typeface="Inter" pitchFamily="34" charset="0"/>
-                <a:ea typeface="Inter" pitchFamily="34" charset="-122"/>
-                <a:cs typeface="Inter" pitchFamily="34" charset="-120"/>
+                  <a:srgbClr val="14181A"/>
+                </a:solidFill>
+                <a:latin typeface="Public Sans" pitchFamily="34" charset="0"/>
+                <a:ea typeface="Public Sans" pitchFamily="34" charset="-122"/>
+                <a:cs typeface="Public Sans" pitchFamily="34" charset="-120"/>
               </a:rPr>
               <a:t>La connexion par votre annuaire. </a:t>
             </a:r>
@@ -5408,11 +5408,11 @@
             <a:r>
               <a:rPr lang="en-US" sz="1400" dirty="0">
                 <a:solidFill>
-                  <a:srgbClr val="3D4556"/>
-                </a:solidFill>
-                <a:latin typeface="Inter" pitchFamily="34" charset="0"/>
-                <a:ea typeface="Inter" pitchFamily="34" charset="-122"/>
-                <a:cs typeface="Inter" pitchFamily="34" charset="-120"/>
+                  <a:srgbClr val="3A423F"/>
+                </a:solidFill>
+                <a:latin typeface="Public Sans" pitchFamily="34" charset="0"/>
+                <a:ea typeface="Public Sans" pitchFamily="34" charset="-122"/>
+                <a:cs typeface="Public Sans" pitchFamily="34" charset="-120"/>
               </a:rPr>
               <a:t>Les comptes sont nominatifs, créés par invitation. Pas de SAML ni d'Entra ID pour l'instant ; dites-nous si c'est une exigence.</a:t>
             </a:r>
@@ -5447,11 +5447,11 @@
             <a:r>
               <a:rPr lang="en-US" sz="900" dirty="0">
                 <a:solidFill>
-                  <a:srgbClr val="5B6475"/>
-                </a:solidFill>
-                <a:latin typeface="Inter" pitchFamily="34" charset="0"/>
-                <a:ea typeface="Inter" pitchFamily="34" charset="-122"/>
-                <a:cs typeface="Inter" pitchFamily="34" charset="-120"/>
+                  <a:srgbClr val="575F5C"/>
+                </a:solidFill>
+                <a:latin typeface="Public Sans" pitchFamily="34" charset="0"/>
+                <a:ea typeface="Public Sans" pitchFamily="34" charset="-122"/>
+                <a:cs typeface="Public Sans" pitchFamily="34" charset="-120"/>
               </a:rPr>
               <a:t>Quantinvo · présentation</a:t>
             </a:r>
@@ -5486,11 +5486,11 @@
             <a:r>
               <a:rPr lang="en-US" sz="900" dirty="0">
                 <a:solidFill>
-                  <a:srgbClr val="5B6475"/>
-                </a:solidFill>
-                <a:latin typeface="Inter" pitchFamily="34" charset="0"/>
-                <a:ea typeface="Inter" pitchFamily="34" charset="-122"/>
-                <a:cs typeface="Inter" pitchFamily="34" charset="-120"/>
+                  <a:srgbClr val="575F5C"/>
+                </a:solidFill>
+                <a:latin typeface="Public Sans" pitchFamily="34" charset="0"/>
+                <a:ea typeface="Public Sans" pitchFamily="34" charset="-122"/>
+                <a:cs typeface="Public Sans" pitchFamily="34" charset="-120"/>
               </a:rPr>
               <a:t>13</a:t>
             </a:r>
@@ -5581,11 +5581,11 @@
             <a:r>
               <a:rPr lang="en-US" sz="2400" b="1" dirty="0">
                 <a:solidFill>
-                  <a:srgbClr val="0B0F19"/>
-                </a:solidFill>
-                <a:latin typeface="Sora" pitchFamily="34" charset="0"/>
-                <a:ea typeface="Sora" pitchFamily="34" charset="-122"/>
-                <a:cs typeface="Sora" pitchFamily="34" charset="-120"/>
+                  <a:srgbClr val="14181A"/>
+                </a:solidFill>
+                <a:latin typeface="Archivo" pitchFamily="34" charset="0"/>
+                <a:ea typeface="Archivo" pitchFamily="34" charset="-122"/>
+                <a:cs typeface="Archivo" pitchFamily="34" charset="-120"/>
               </a:rPr>
               <a:t>Quantinvo</a:t>
             </a:r>
@@ -5602,17 +5602,17 @@
         <p:spPr>
           <a:xfrm>
             <a:off x="731520" y="1481328"/>
-            <a:ext cx="2377440" cy="25603"/>
+            <a:ext cx="2011680" cy="20117"/>
           </a:xfrm>
           <a:prstGeom prst="rect">
             <a:avLst/>
           </a:prstGeom>
           <a:solidFill>
-            <a:srgbClr val="38C9FF"/>
+            <a:srgbClr val="14181A"/>
           </a:solidFill>
           <a:ln w="12700">
             <a:solidFill>
-              <a:srgbClr val="38C9FF"/>
+              <a:srgbClr val="14181A"/>
             </a:solidFill>
             <a:prstDash val="solid"/>
           </a:ln>
@@ -5648,11 +5648,11 @@
             <a:r>
               <a:rPr lang="en-US" sz="3600" b="1" dirty="0">
                 <a:solidFill>
-                  <a:srgbClr val="4636B0"/>
-                </a:solidFill>
-                <a:latin typeface="Sora" pitchFamily="34" charset="0"/>
-                <a:ea typeface="Sora" pitchFamily="34" charset="-122"/>
-                <a:cs typeface="Sora" pitchFamily="34" charset="-120"/>
+                  <a:srgbClr val="14181A"/>
+                </a:solidFill>
+                <a:latin typeface="Archivo" pitchFamily="34" charset="0"/>
+                <a:ea typeface="Archivo" pitchFamily="34" charset="-122"/>
+                <a:cs typeface="Archivo" pitchFamily="34" charset="-120"/>
               </a:rPr>
               <a:t>Venez avec vos fichiers.</a:t>
             </a:r>
@@ -5690,11 +5690,11 @@
             <a:r>
               <a:rPr lang="en-US" sz="1450" dirty="0">
                 <a:solidFill>
-                  <a:srgbClr val="3D4556"/>
-                </a:solidFill>
-                <a:latin typeface="Inter" pitchFamily="34" charset="0"/>
-                <a:ea typeface="Inter" pitchFamily="34" charset="-122"/>
-                <a:cs typeface="Inter" pitchFamily="34" charset="-120"/>
+                  <a:srgbClr val="3A423F"/>
+                </a:solidFill>
+                <a:latin typeface="Public Sans" pitchFamily="34" charset="0"/>
+                <a:ea typeface="Public Sans" pitchFamily="34" charset="-122"/>
+                <a:cs typeface="Public Sans" pitchFamily="34" charset="-120"/>
               </a:rPr>
               <a:t>Une démonstration de trente minutes, sur votre propre référentiel : vous l'importez, on scanne quelques articles, et vous repartez avec le rapport. Pas de données fictives.</a:t>
             </a:r>
@@ -5729,11 +5729,11 @@
             <a:r>
               <a:rPr lang="en-US" sz="1500" b="1" dirty="0">
                 <a:solidFill>
-                  <a:srgbClr val="4636B0"/>
-                </a:solidFill>
-                <a:latin typeface="Sora" pitchFamily="34" charset="0"/>
-                <a:ea typeface="Sora" pitchFamily="34" charset="-122"/>
-                <a:cs typeface="Sora" pitchFamily="34" charset="-120"/>
+                  <a:srgbClr val="14181A"/>
+                </a:solidFill>
+                <a:latin typeface="Archivo" pitchFamily="34" charset="0"/>
+                <a:ea typeface="Archivo" pitchFamily="34" charset="-122"/>
+                <a:cs typeface="Archivo" pitchFamily="34" charset="-120"/>
               </a:rPr>
               <a:t>contact@quantinvo.com   ·   www.quantinvo.com</a:t>
             </a:r>
@@ -5768,11 +5768,11 @@
             <a:r>
               <a:rPr lang="en-US" sz="1050" dirty="0">
                 <a:solidFill>
-                  <a:srgbClr val="5B6475"/>
-                </a:solidFill>
-                <a:latin typeface="Inter" pitchFamily="34" charset="0"/>
-                <a:ea typeface="Inter" pitchFamily="34" charset="-122"/>
-                <a:cs typeface="Inter" pitchFamily="34" charset="-120"/>
+                  <a:srgbClr val="575F5C"/>
+                </a:solidFill>
+                <a:latin typeface="Public Sans" pitchFamily="34" charset="0"/>
+                <a:ea typeface="Public Sans" pitchFamily="34" charset="-122"/>
+                <a:cs typeface="Public Sans" pitchFamily="34" charset="-120"/>
               </a:rPr>
               <a:t>Quantinvo, par Devkaylab. L’outil d’inventaire pour le commerce.</a:t>
             </a:r>
@@ -5863,11 +5863,11 @@
             <a:r>
               <a:rPr lang="en-US" sz="1600" b="1" dirty="0">
                 <a:solidFill>
-                  <a:srgbClr val="0B0F19"/>
-                </a:solidFill>
-                <a:latin typeface="Sora" pitchFamily="34" charset="0"/>
-                <a:ea typeface="Sora" pitchFamily="34" charset="-122"/>
-                <a:cs typeface="Sora" pitchFamily="34" charset="-120"/>
+                  <a:srgbClr val="14181A"/>
+                </a:solidFill>
+                <a:latin typeface="Archivo" pitchFamily="34" charset="0"/>
+                <a:ea typeface="Archivo" pitchFamily="34" charset="-122"/>
+                <a:cs typeface="Archivo" pitchFamily="34" charset="-120"/>
               </a:rPr>
               <a:t>Quantinvo</a:t>
             </a:r>
@@ -5902,11 +5902,11 @@
             <a:r>
               <a:rPr lang="en-US" sz="1000" dirty="0">
                 <a:solidFill>
-                  <a:srgbClr val="5B6475"/>
-                </a:solidFill>
-                <a:latin typeface="Inter" pitchFamily="34" charset="0"/>
-                <a:ea typeface="Inter" pitchFamily="34" charset="-122"/>
-                <a:cs typeface="Inter" pitchFamily="34" charset="-120"/>
+                  <a:srgbClr val="575F5C"/>
+                </a:solidFill>
+                <a:latin typeface="Public Sans" pitchFamily="34" charset="0"/>
+                <a:ea typeface="Public Sans" pitchFamily="34" charset="-122"/>
+                <a:cs typeface="Public Sans" pitchFamily="34" charset="-120"/>
               </a:rPr>
               <a:t>Le constat</a:t>
             </a:r>
@@ -5923,17 +5923,17 @@
         <p:spPr>
           <a:xfrm>
             <a:off x="731520" y="877824"/>
-            <a:ext cx="10725912" cy="25603"/>
+            <a:ext cx="10725912" cy="10973"/>
           </a:xfrm>
           <a:prstGeom prst="rect">
             <a:avLst/>
           </a:prstGeom>
           <a:solidFill>
-            <a:srgbClr val="38C9FF"/>
+            <a:srgbClr val="E2E5E1"/>
           </a:solidFill>
           <a:ln w="12700">
             <a:solidFill>
-              <a:srgbClr val="38C9FF"/>
+              <a:srgbClr val="E2E5E1"/>
             </a:solidFill>
             <a:prstDash val="solid"/>
           </a:ln>
@@ -5969,11 +5969,11 @@
             <a:r>
               <a:rPr lang="en-US" sz="2600" b="1" dirty="0">
                 <a:solidFill>
-                  <a:srgbClr val="4636B0"/>
-                </a:solidFill>
-                <a:latin typeface="Sora" pitchFamily="34" charset="0"/>
-                <a:ea typeface="Sora" pitchFamily="34" charset="-122"/>
-                <a:cs typeface="Sora" pitchFamily="34" charset="-120"/>
+                  <a:srgbClr val="14181A"/>
+                </a:solidFill>
+                <a:latin typeface="Archivo" pitchFamily="34" charset="0"/>
+                <a:ea typeface="Archivo" pitchFamily="34" charset="-122"/>
+                <a:cs typeface="Archivo" pitchFamily="34" charset="-120"/>
               </a:rPr>
               <a:t>On compte son stock une fois par an. On décide dessus tous les jours.</a:t>
             </a:r>
@@ -6008,11 +6008,11 @@
             <a:r>
               <a:rPr lang="en-US" sz="5400" b="1" dirty="0">
                 <a:solidFill>
-                  <a:srgbClr val="4636B0"/>
-                </a:solidFill>
-                <a:latin typeface="Sora" pitchFamily="34" charset="0"/>
-                <a:ea typeface="Sora" pitchFamily="34" charset="-122"/>
-                <a:cs typeface="Sora" pitchFamily="34" charset="-120"/>
+                  <a:srgbClr val="1E4D3B"/>
+                </a:solidFill>
+                <a:latin typeface="Archivo" pitchFamily="34" charset="0"/>
+                <a:ea typeface="Archivo" pitchFamily="34" charset="-122"/>
+                <a:cs typeface="Archivo" pitchFamily="34" charset="-120"/>
               </a:rPr>
               <a:t>365</a:t>
             </a:r>
@@ -6050,11 +6050,11 @@
             <a:r>
               <a:rPr lang="en-US" sz="1200" dirty="0">
                 <a:solidFill>
-                  <a:srgbClr val="5B6475"/>
-                </a:solidFill>
-                <a:latin typeface="Inter" pitchFamily="34" charset="0"/>
-                <a:ea typeface="Inter" pitchFamily="34" charset="-122"/>
-                <a:cs typeface="Inter" pitchFamily="34" charset="-120"/>
+                  <a:srgbClr val="575F5C"/>
+                </a:solidFill>
+                <a:latin typeface="Public Sans" pitchFamily="34" charset="0"/>
+                <a:ea typeface="Public Sans" pitchFamily="34" charset="-122"/>
+                <a:cs typeface="Public Sans" pitchFamily="34" charset="-120"/>
               </a:rPr>
               <a:t>jours de commandes, de réassorts et de démarque reposent sur un chiffre vérifié une seule fois.</a:t>
             </a:r>
@@ -6095,11 +6095,11 @@
             <a:r>
               <a:rPr lang="en-US" sz="1400" b="1" dirty="0">
                 <a:solidFill>
-                  <a:srgbClr val="0B0F19"/>
-                </a:solidFill>
-                <a:latin typeface="Inter" pitchFamily="34" charset="0"/>
-                <a:ea typeface="Inter" pitchFamily="34" charset="-122"/>
-                <a:cs typeface="Inter" pitchFamily="34" charset="-120"/>
+                  <a:srgbClr val="14181A"/>
+                </a:solidFill>
+                <a:latin typeface="Public Sans" pitchFamily="34" charset="0"/>
+                <a:ea typeface="Public Sans" pitchFamily="34" charset="-122"/>
+                <a:cs typeface="Public Sans" pitchFamily="34" charset="-120"/>
               </a:rPr>
               <a:t>Le grand inventaire. </a:t>
             </a:r>
@@ -6115,11 +6115,11 @@
             <a:r>
               <a:rPr lang="en-US" sz="1400" dirty="0">
                 <a:solidFill>
-                  <a:srgbClr val="3D4556"/>
-                </a:solidFill>
-                <a:latin typeface="Inter" pitchFamily="34" charset="0"/>
-                <a:ea typeface="Inter" pitchFamily="34" charset="-122"/>
-                <a:cs typeface="Inter" pitchFamily="34" charset="-120"/>
+                  <a:srgbClr val="3A423F"/>
+                </a:solidFill>
+                <a:latin typeface="Public Sans" pitchFamily="34" charset="0"/>
+                <a:ea typeface="Public Sans" pitchFamily="34" charset="-122"/>
+                <a:cs typeface="Public Sans" pitchFamily="34" charset="-120"/>
               </a:rPr>
               <a:t>Il se prépare des mois à l'avance, il mobilise tout le magasin une nuit, et le lendemain chacun est soulagé d'en avoir fini pour un an.</a:t>
             </a:r>
@@ -6138,11 +6138,11 @@
             <a:r>
               <a:rPr lang="en-US" sz="1400" b="1" dirty="0">
                 <a:solidFill>
-                  <a:srgbClr val="0B0F19"/>
-                </a:solidFill>
-                <a:latin typeface="Inter" pitchFamily="34" charset="0"/>
-                <a:ea typeface="Inter" pitchFamily="34" charset="-122"/>
-                <a:cs typeface="Inter" pitchFamily="34" charset="-120"/>
+                  <a:srgbClr val="14181A"/>
+                </a:solidFill>
+                <a:latin typeface="Public Sans" pitchFamily="34" charset="0"/>
+                <a:ea typeface="Public Sans" pitchFamily="34" charset="-122"/>
+                <a:cs typeface="Public Sans" pitchFamily="34" charset="-120"/>
               </a:rPr>
               <a:t>Le prestataire. </a:t>
             </a:r>
@@ -6158,11 +6158,11 @@
             <a:r>
               <a:rPr lang="en-US" sz="1400" dirty="0">
                 <a:solidFill>
-                  <a:srgbClr val="3D4556"/>
-                </a:solidFill>
-                <a:latin typeface="Inter" pitchFamily="34" charset="0"/>
-                <a:ea typeface="Inter" pitchFamily="34" charset="-122"/>
-                <a:cs typeface="Inter" pitchFamily="34" charset="-120"/>
+                  <a:srgbClr val="3A423F"/>
+                </a:solidFill>
+                <a:latin typeface="Public Sans" pitchFamily="34" charset="0"/>
+                <a:ea typeface="Public Sans" pitchFamily="34" charset="-122"/>
+                <a:cs typeface="Public Sans" pitchFamily="34" charset="-120"/>
               </a:rPr>
               <a:t>Il compte vite, il facture à la pièce, et il repart. Entre deux passages, personne ne sait vraiment où en est le stock.</a:t>
             </a:r>
@@ -6181,11 +6181,11 @@
             <a:r>
               <a:rPr lang="en-US" sz="1400" b="1" dirty="0">
                 <a:solidFill>
-                  <a:srgbClr val="0B0F19"/>
-                </a:solidFill>
-                <a:latin typeface="Inter" pitchFamily="34" charset="0"/>
-                <a:ea typeface="Inter" pitchFamily="34" charset="-122"/>
-                <a:cs typeface="Inter" pitchFamily="34" charset="-120"/>
+                  <a:srgbClr val="14181A"/>
+                </a:solidFill>
+                <a:latin typeface="Public Sans" pitchFamily="34" charset="0"/>
+                <a:ea typeface="Public Sans" pitchFamily="34" charset="-122"/>
+                <a:cs typeface="Public Sans" pitchFamily="34" charset="-120"/>
               </a:rPr>
               <a:t>Le chiffre. </a:t>
             </a:r>
@@ -6201,11 +6201,11 @@
             <a:r>
               <a:rPr lang="en-US" sz="1400" dirty="0">
                 <a:solidFill>
-                  <a:srgbClr val="3D4556"/>
-                </a:solidFill>
-                <a:latin typeface="Inter" pitchFamily="34" charset="0"/>
-                <a:ea typeface="Inter" pitchFamily="34" charset="-122"/>
-                <a:cs typeface="Inter" pitchFamily="34" charset="-120"/>
+                  <a:srgbClr val="3A423F"/>
+                </a:solidFill>
+                <a:latin typeface="Public Sans" pitchFamily="34" charset="0"/>
+                <a:ea typeface="Public Sans" pitchFamily="34" charset="-122"/>
+                <a:cs typeface="Public Sans" pitchFamily="34" charset="-120"/>
               </a:rPr>
               <a:t>Le stock théorique se remet à dériver dès le lendemain. La démarque, on la découvre au comptage suivant, trop tard pour comprendre d'où elle vient.</a:t>
             </a:r>
@@ -6224,11 +6224,11 @@
             <a:r>
               <a:rPr lang="en-US" sz="1400" b="1" dirty="0">
                 <a:solidFill>
-                  <a:srgbClr val="0B0F19"/>
-                </a:solidFill>
-                <a:latin typeface="Inter" pitchFamily="34" charset="0"/>
-                <a:ea typeface="Inter" pitchFamily="34" charset="-122"/>
-                <a:cs typeface="Inter" pitchFamily="34" charset="-120"/>
+                  <a:srgbClr val="14181A"/>
+                </a:solidFill>
+                <a:latin typeface="Public Sans" pitchFamily="34" charset="0"/>
+                <a:ea typeface="Public Sans" pitchFamily="34" charset="-122"/>
+                <a:cs typeface="Public Sans" pitchFamily="34" charset="-120"/>
               </a:rPr>
               <a:t>Le papier. </a:t>
             </a:r>
@@ -6244,11 +6244,11 @@
             <a:r>
               <a:rPr lang="en-US" sz="1400" dirty="0">
                 <a:solidFill>
-                  <a:srgbClr val="3D4556"/>
-                </a:solidFill>
-                <a:latin typeface="Inter" pitchFamily="34" charset="0"/>
-                <a:ea typeface="Inter" pitchFamily="34" charset="-122"/>
-                <a:cs typeface="Inter" pitchFamily="34" charset="-120"/>
+                  <a:srgbClr val="3A423F"/>
+                </a:solidFill>
+                <a:latin typeface="Public Sans" pitchFamily="34" charset="0"/>
+                <a:ea typeface="Public Sans" pitchFamily="34" charset="-122"/>
+                <a:cs typeface="Public Sans" pitchFamily="34" charset="-120"/>
               </a:rPr>
               <a:t>Compter soi-même, sur une feuille ou un tableur, c'est possible. C'est lent, et une ligne sautée ne se voit pas.</a:t>
             </a:r>
@@ -6283,11 +6283,11 @@
             <a:r>
               <a:rPr lang="en-US" sz="900" dirty="0">
                 <a:solidFill>
-                  <a:srgbClr val="5B6475"/>
-                </a:solidFill>
-                <a:latin typeface="Inter" pitchFamily="34" charset="0"/>
-                <a:ea typeface="Inter" pitchFamily="34" charset="-122"/>
-                <a:cs typeface="Inter" pitchFamily="34" charset="-120"/>
+                  <a:srgbClr val="575F5C"/>
+                </a:solidFill>
+                <a:latin typeface="Public Sans" pitchFamily="34" charset="0"/>
+                <a:ea typeface="Public Sans" pitchFamily="34" charset="-122"/>
+                <a:cs typeface="Public Sans" pitchFamily="34" charset="-120"/>
               </a:rPr>
               <a:t>Quantinvo · présentation</a:t>
             </a:r>
@@ -6322,11 +6322,11 @@
             <a:r>
               <a:rPr lang="en-US" sz="900" dirty="0">
                 <a:solidFill>
-                  <a:srgbClr val="5B6475"/>
-                </a:solidFill>
-                <a:latin typeface="Inter" pitchFamily="34" charset="0"/>
-                <a:ea typeface="Inter" pitchFamily="34" charset="-122"/>
-                <a:cs typeface="Inter" pitchFamily="34" charset="-120"/>
+                  <a:srgbClr val="575F5C"/>
+                </a:solidFill>
+                <a:latin typeface="Public Sans" pitchFamily="34" charset="0"/>
+                <a:ea typeface="Public Sans" pitchFamily="34" charset="-122"/>
+                <a:cs typeface="Public Sans" pitchFamily="34" charset="-120"/>
               </a:rPr>
               <a:t>2</a:t>
             </a:r>
@@ -6417,11 +6417,11 @@
             <a:r>
               <a:rPr lang="en-US" sz="1600" b="1" dirty="0">
                 <a:solidFill>
-                  <a:srgbClr val="0B0F19"/>
-                </a:solidFill>
-                <a:latin typeface="Sora" pitchFamily="34" charset="0"/>
-                <a:ea typeface="Sora" pitchFamily="34" charset="-122"/>
-                <a:cs typeface="Sora" pitchFamily="34" charset="-120"/>
+                  <a:srgbClr val="14181A"/>
+                </a:solidFill>
+                <a:latin typeface="Archivo" pitchFamily="34" charset="0"/>
+                <a:ea typeface="Archivo" pitchFamily="34" charset="-122"/>
+                <a:cs typeface="Archivo" pitchFamily="34" charset="-120"/>
               </a:rPr>
               <a:t>Quantinvo</a:t>
             </a:r>
@@ -6456,11 +6456,11 @@
             <a:r>
               <a:rPr lang="en-US" sz="1000" dirty="0">
                 <a:solidFill>
-                  <a:srgbClr val="5B6475"/>
-                </a:solidFill>
-                <a:latin typeface="Inter" pitchFamily="34" charset="0"/>
-                <a:ea typeface="Inter" pitchFamily="34" charset="-122"/>
-                <a:cs typeface="Inter" pitchFamily="34" charset="-120"/>
+                  <a:srgbClr val="575F5C"/>
+                </a:solidFill>
+                <a:latin typeface="Public Sans" pitchFamily="34" charset="0"/>
+                <a:ea typeface="Public Sans" pitchFamily="34" charset="-122"/>
+                <a:cs typeface="Public Sans" pitchFamily="34" charset="-120"/>
               </a:rPr>
               <a:t>D'où ça vient</a:t>
             </a:r>
@@ -6477,17 +6477,17 @@
         <p:spPr>
           <a:xfrm>
             <a:off x="731520" y="877824"/>
-            <a:ext cx="10725912" cy="25603"/>
+            <a:ext cx="10725912" cy="10973"/>
           </a:xfrm>
           <a:prstGeom prst="rect">
             <a:avLst/>
           </a:prstGeom>
           <a:solidFill>
-            <a:srgbClr val="38C9FF"/>
+            <a:srgbClr val="E2E5E1"/>
           </a:solidFill>
           <a:ln w="12700">
             <a:solidFill>
-              <a:srgbClr val="38C9FF"/>
+              <a:srgbClr val="E2E5E1"/>
             </a:solidFill>
             <a:prstDash val="solid"/>
           </a:ln>
@@ -6523,11 +6523,11 @@
             <a:r>
               <a:rPr lang="en-US" sz="2200" i="1" dirty="0">
                 <a:solidFill>
-                  <a:srgbClr val="4636B0"/>
-                </a:solidFill>
-                <a:latin typeface="Sora" pitchFamily="34" charset="0"/>
-                <a:ea typeface="Sora" pitchFamily="34" charset="-122"/>
-                <a:cs typeface="Sora" pitchFamily="34" charset="-120"/>
+                  <a:srgbClr val="14181A"/>
+                </a:solidFill>
+                <a:latin typeface="Archivo" pitchFamily="34" charset="0"/>
+                <a:ea typeface="Archivo" pitchFamily="34" charset="-122"/>
+                <a:cs typeface="Archivo" pitchFamily="34" charset="-120"/>
               </a:rPr>
               <a:t>« J'ai dessiné Quantinvo pendant des inventaires, pas dans une salle de réunion. »</a:t>
             </a:r>
@@ -6565,11 +6565,11 @@
             <a:r>
               <a:rPr lang="en-US" sz="1200" dirty="0">
                 <a:solidFill>
-                  <a:srgbClr val="5B6475"/>
-                </a:solidFill>
-                <a:latin typeface="Inter" pitchFamily="34" charset="0"/>
-                <a:ea typeface="Inter" pitchFamily="34" charset="-122"/>
-                <a:cs typeface="Inter" pitchFamily="34" charset="-120"/>
+                  <a:srgbClr val="575F5C"/>
+                </a:solidFill>
+                <a:latin typeface="Public Sans" pitchFamily="34" charset="0"/>
+                <a:ea typeface="Public Sans" pitchFamily="34" charset="-122"/>
+                <a:cs typeface="Public Sans" pitchFamily="34" charset="-120"/>
               </a:rPr>
               <a:t>Julien Thiong-kay, Devkaylab</a:t>
             </a:r>
@@ -6610,11 +6610,11 @@
             <a:r>
               <a:rPr lang="en-US" sz="1400" dirty="0">
                 <a:solidFill>
-                  <a:srgbClr val="3D4556"/>
-                </a:solidFill>
-                <a:latin typeface="Inter" pitchFamily="34" charset="0"/>
-                <a:ea typeface="Inter" pitchFamily="34" charset="-122"/>
-                <a:cs typeface="Inter" pitchFamily="34" charset="-120"/>
+                  <a:srgbClr val="3A423F"/>
+                </a:solidFill>
+                <a:latin typeface="Public Sans" pitchFamily="34" charset="0"/>
+                <a:ea typeface="Public Sans" pitchFamily="34" charset="-122"/>
+                <a:cs typeface="Public Sans" pitchFamily="34" charset="-120"/>
               </a:rPr>
               <a:t>Je fais du contrôle des stocks en magasin. Les irritants, je les ai sous les yeux à chaque inventaire : la balise qu'on ne retrouve pas, la réserve sans réseau, le fichier Excel qu'il faut reformater avant chaque import, le rapport qui arrive trois jours après, quand tout le monde est passé à autre chose.</a:t>
             </a:r>
@@ -6633,11 +6633,11 @@
             <a:r>
               <a:rPr lang="en-US" sz="1400" dirty="0">
                 <a:solidFill>
-                  <a:srgbClr val="3D4556"/>
-                </a:solidFill>
-                <a:latin typeface="Inter" pitchFamily="34" charset="0"/>
-                <a:ea typeface="Inter" pitchFamily="34" charset="-122"/>
-                <a:cs typeface="Inter" pitchFamily="34" charset="-120"/>
+                  <a:srgbClr val="3A423F"/>
+                </a:solidFill>
+                <a:latin typeface="Public Sans" pitchFamily="34" charset="0"/>
+                <a:ea typeface="Public Sans" pitchFamily="34" charset="-122"/>
+                <a:cs typeface="Public Sans" pitchFamily="34" charset="-120"/>
               </a:rPr>
               <a:t>Quantinvo est la réponse à ces irritants, et rien de plus. Une application sur le téléphone que l'équipe a déjà en poche, un tableau de bord pour celui qui pilote, un rapport à la fin.</a:t>
             </a:r>
@@ -6656,11 +6656,11 @@
             <a:r>
               <a:rPr lang="en-US" sz="1400" dirty="0">
                 <a:solidFill>
-                  <a:srgbClr val="3D4556"/>
-                </a:solidFill>
-                <a:latin typeface="Inter" pitchFamily="34" charset="0"/>
-                <a:ea typeface="Inter" pitchFamily="34" charset="-122"/>
-                <a:cs typeface="Inter" pitchFamily="34" charset="-120"/>
+                  <a:srgbClr val="3A423F"/>
+                </a:solidFill>
+                <a:latin typeface="Public Sans" pitchFamily="34" charset="0"/>
+                <a:ea typeface="Public Sans" pitchFamily="34" charset="-122"/>
+                <a:cs typeface="Public Sans" pitchFamily="34" charset="-120"/>
               </a:rPr>
               <a:t>Ce n'est pas un module d'ERP qu'on adapte au magasin. C'est un outil de magasin, qui tient dans une poche et se prend en main en dix minutes.</a:t>
             </a:r>
@@ -6695,11 +6695,11 @@
             <a:r>
               <a:rPr lang="en-US" sz="900" dirty="0">
                 <a:solidFill>
-                  <a:srgbClr val="5B6475"/>
-                </a:solidFill>
-                <a:latin typeface="Inter" pitchFamily="34" charset="0"/>
-                <a:ea typeface="Inter" pitchFamily="34" charset="-122"/>
-                <a:cs typeface="Inter" pitchFamily="34" charset="-120"/>
+                  <a:srgbClr val="575F5C"/>
+                </a:solidFill>
+                <a:latin typeface="Public Sans" pitchFamily="34" charset="0"/>
+                <a:ea typeface="Public Sans" pitchFamily="34" charset="-122"/>
+                <a:cs typeface="Public Sans" pitchFamily="34" charset="-120"/>
               </a:rPr>
               <a:t>Quantinvo · présentation</a:t>
             </a:r>
@@ -6734,11 +6734,11 @@
             <a:r>
               <a:rPr lang="en-US" sz="900" dirty="0">
                 <a:solidFill>
-                  <a:srgbClr val="5B6475"/>
-                </a:solidFill>
-                <a:latin typeface="Inter" pitchFamily="34" charset="0"/>
-                <a:ea typeface="Inter" pitchFamily="34" charset="-122"/>
-                <a:cs typeface="Inter" pitchFamily="34" charset="-120"/>
+                  <a:srgbClr val="575F5C"/>
+                </a:solidFill>
+                <a:latin typeface="Public Sans" pitchFamily="34" charset="0"/>
+                <a:ea typeface="Public Sans" pitchFamily="34" charset="-122"/>
+                <a:cs typeface="Public Sans" pitchFamily="34" charset="-120"/>
               </a:rPr>
               <a:t>3</a:t>
             </a:r>
@@ -6829,11 +6829,11 @@
             <a:r>
               <a:rPr lang="en-US" sz="1600" b="1" dirty="0">
                 <a:solidFill>
-                  <a:srgbClr val="0B0F19"/>
-                </a:solidFill>
-                <a:latin typeface="Sora" pitchFamily="34" charset="0"/>
-                <a:ea typeface="Sora" pitchFamily="34" charset="-122"/>
-                <a:cs typeface="Sora" pitchFamily="34" charset="-120"/>
+                  <a:srgbClr val="14181A"/>
+                </a:solidFill>
+                <a:latin typeface="Archivo" pitchFamily="34" charset="0"/>
+                <a:ea typeface="Archivo" pitchFamily="34" charset="-122"/>
+                <a:cs typeface="Archivo" pitchFamily="34" charset="-120"/>
               </a:rPr>
               <a:t>Quantinvo</a:t>
             </a:r>
@@ -6868,11 +6868,11 @@
             <a:r>
               <a:rPr lang="en-US" sz="1000" dirty="0">
                 <a:solidFill>
-                  <a:srgbClr val="5B6475"/>
-                </a:solidFill>
-                <a:latin typeface="Inter" pitchFamily="34" charset="0"/>
-                <a:ea typeface="Inter" pitchFamily="34" charset="-122"/>
-                <a:cs typeface="Inter" pitchFamily="34" charset="-120"/>
+                  <a:srgbClr val="575F5C"/>
+                </a:solidFill>
+                <a:latin typeface="Public Sans" pitchFamily="34" charset="0"/>
+                <a:ea typeface="Public Sans" pitchFamily="34" charset="-122"/>
+                <a:cs typeface="Public Sans" pitchFamily="34" charset="-120"/>
               </a:rPr>
               <a:t>Ce que ça change</a:t>
             </a:r>
@@ -6889,17 +6889,17 @@
         <p:spPr>
           <a:xfrm>
             <a:off x="731520" y="877824"/>
-            <a:ext cx="10725912" cy="25603"/>
+            <a:ext cx="10725912" cy="10973"/>
           </a:xfrm>
           <a:prstGeom prst="rect">
             <a:avLst/>
           </a:prstGeom>
           <a:solidFill>
-            <a:srgbClr val="38C9FF"/>
+            <a:srgbClr val="E2E5E1"/>
           </a:solidFill>
           <a:ln w="12700">
             <a:solidFill>
-              <a:srgbClr val="38C9FF"/>
+              <a:srgbClr val="E2E5E1"/>
             </a:solidFill>
             <a:prstDash val="solid"/>
           </a:ln>
@@ -6935,11 +6935,11 @@
             <a:r>
               <a:rPr lang="en-US" sz="2600" b="1" dirty="0">
                 <a:solidFill>
-                  <a:srgbClr val="4636B0"/>
-                </a:solidFill>
-                <a:latin typeface="Sora" pitchFamily="34" charset="0"/>
-                <a:ea typeface="Sora" pitchFamily="34" charset="-122"/>
-                <a:cs typeface="Sora" pitchFamily="34" charset="-120"/>
+                  <a:srgbClr val="14181A"/>
+                </a:solidFill>
+                <a:latin typeface="Archivo" pitchFamily="34" charset="0"/>
+                <a:ea typeface="Archivo" pitchFamily="34" charset="-122"/>
+                <a:cs typeface="Archivo" pitchFamily="34" charset="-120"/>
               </a:rPr>
               <a:t>Ce que ça change, concrètement</a:t>
             </a:r>
@@ -6974,11 +6974,11 @@
             <a:r>
               <a:rPr lang="en-US" sz="1050" b="1" dirty="0">
                 <a:solidFill>
-                  <a:srgbClr val="5B6475"/>
-                </a:solidFill>
-                <a:latin typeface="Inter" pitchFamily="34" charset="0"/>
-                <a:ea typeface="Inter" pitchFamily="34" charset="-122"/>
-                <a:cs typeface="Inter" pitchFamily="34" charset="-120"/>
+                  <a:srgbClr val="575F5C"/>
+                </a:solidFill>
+                <a:latin typeface="Public Sans" pitchFamily="34" charset="0"/>
+                <a:ea typeface="Public Sans" pitchFamily="34" charset="-122"/>
+                <a:cs typeface="Public Sans" pitchFamily="34" charset="-120"/>
               </a:rPr>
               <a:t>Aujourd'hui</a:t>
             </a:r>
@@ -7013,11 +7013,11 @@
             <a:r>
               <a:rPr lang="en-US" sz="1050" b="1" dirty="0">
                 <a:solidFill>
-                  <a:srgbClr val="4636B0"/>
-                </a:solidFill>
-                <a:latin typeface="Inter" pitchFamily="34" charset="0"/>
-                <a:ea typeface="Inter" pitchFamily="34" charset="-122"/>
-                <a:cs typeface="Inter" pitchFamily="34" charset="-120"/>
+                  <a:srgbClr val="14181A"/>
+                </a:solidFill>
+                <a:latin typeface="Public Sans" pitchFamily="34" charset="0"/>
+                <a:ea typeface="Public Sans" pitchFamily="34" charset="-122"/>
+                <a:cs typeface="Public Sans" pitchFamily="34" charset="-120"/>
               </a:rPr>
               <a:t>Avec Quantinvo</a:t>
             </a:r>
@@ -7042,7 +7042,7 @@
           <a:noFill/>
           <a:ln w="9525">
             <a:solidFill>
-              <a:srgbClr val="E3E6EE"/>
+              <a:srgbClr val="E2E5E1"/>
             </a:solidFill>
             <a:prstDash val="solid"/>
           </a:ln>
@@ -7078,11 +7078,11 @@
             <a:r>
               <a:rPr lang="en-US" sz="1300" dirty="0">
                 <a:solidFill>
-                  <a:srgbClr val="3D4556"/>
-                </a:solidFill>
-                <a:latin typeface="Inter" pitchFamily="34" charset="0"/>
-                <a:ea typeface="Inter" pitchFamily="34" charset="-122"/>
-                <a:cs typeface="Inter" pitchFamily="34" charset="-120"/>
+                  <a:srgbClr val="3A423F"/>
+                </a:solidFill>
+                <a:latin typeface="Public Sans" pitchFamily="34" charset="0"/>
+                <a:ea typeface="Public Sans" pitchFamily="34" charset="-122"/>
+                <a:cs typeface="Public Sans" pitchFamily="34" charset="-120"/>
               </a:rPr>
               <a:t>Une date par an, imposée par le calendrier.</a:t>
             </a:r>
@@ -7120,11 +7120,11 @@
             <a:r>
               <a:rPr lang="en-US" sz="1300" dirty="0">
                 <a:solidFill>
-                  <a:srgbClr val="0B0F19"/>
-                </a:solidFill>
-                <a:latin typeface="Inter" pitchFamily="34" charset="0"/>
-                <a:ea typeface="Inter" pitchFamily="34" charset="-122"/>
-                <a:cs typeface="Inter" pitchFamily="34" charset="-120"/>
+                  <a:srgbClr val="14181A"/>
+                </a:solidFill>
+                <a:latin typeface="Public Sans" pitchFamily="34" charset="0"/>
+                <a:ea typeface="Public Sans" pitchFamily="34" charset="-122"/>
+                <a:cs typeface="Public Sans" pitchFamily="34" charset="-120"/>
               </a:rPr>
               <a:t>Vos dates. En janvier, en juin, un mardi matin avant l'ouverture. Autant de fois que vous voulez.</a:t>
             </a:r>
@@ -7149,7 +7149,7 @@
           <a:noFill/>
           <a:ln w="9525">
             <a:solidFill>
-              <a:srgbClr val="E3E6EE"/>
+              <a:srgbClr val="E2E5E1"/>
             </a:solidFill>
             <a:prstDash val="solid"/>
           </a:ln>
@@ -7185,11 +7185,11 @@
             <a:r>
               <a:rPr lang="en-US" sz="1300" dirty="0">
                 <a:solidFill>
-                  <a:srgbClr val="3D4556"/>
-                </a:solidFill>
-                <a:latin typeface="Inter" pitchFamily="34" charset="0"/>
-                <a:ea typeface="Inter" pitchFamily="34" charset="-122"/>
-                <a:cs typeface="Inter" pitchFamily="34" charset="-120"/>
+                  <a:srgbClr val="3A423F"/>
+                </a:solidFill>
+                <a:latin typeface="Public Sans" pitchFamily="34" charset="0"/>
+                <a:ea typeface="Public Sans" pitchFamily="34" charset="-122"/>
+                <a:cs typeface="Public Sans" pitchFamily="34" charset="-120"/>
               </a:rPr>
               <a:t>Des équipes externes, ou du papier.</a:t>
             </a:r>
@@ -7227,11 +7227,11 @@
             <a:r>
               <a:rPr lang="en-US" sz="1300" dirty="0">
                 <a:solidFill>
-                  <a:srgbClr val="0B0F19"/>
-                </a:solidFill>
-                <a:latin typeface="Inter" pitchFamily="34" charset="0"/>
-                <a:ea typeface="Inter" pitchFamily="34" charset="-122"/>
-                <a:cs typeface="Inter" pitchFamily="34" charset="-120"/>
+                  <a:srgbClr val="14181A"/>
+                </a:solidFill>
+                <a:latin typeface="Public Sans" pitchFamily="34" charset="0"/>
+                <a:ea typeface="Public Sans" pitchFamily="34" charset="-122"/>
+                <a:cs typeface="Public Sans" pitchFamily="34" charset="-120"/>
               </a:rPr>
               <a:t>Vos équipes, avec le téléphone qu’elles ont déjà.</a:t>
             </a:r>
@@ -7256,7 +7256,7 @@
           <a:noFill/>
           <a:ln w="9525">
             <a:solidFill>
-              <a:srgbClr val="E3E6EE"/>
+              <a:srgbClr val="E2E5E1"/>
             </a:solidFill>
             <a:prstDash val="solid"/>
           </a:ln>
@@ -7292,11 +7292,11 @@
             <a:r>
               <a:rPr lang="en-US" sz="1300" dirty="0">
                 <a:solidFill>
-                  <a:srgbClr val="3D4556"/>
-                </a:solidFill>
-                <a:latin typeface="Inter" pitchFamily="34" charset="0"/>
-                <a:ea typeface="Inter" pitchFamily="34" charset="-122"/>
-                <a:cs typeface="Inter" pitchFamily="34" charset="-120"/>
+                  <a:srgbClr val="3A423F"/>
+                </a:solidFill>
+                <a:latin typeface="Public Sans" pitchFamily="34" charset="0"/>
+                <a:ea typeface="Public Sans" pitchFamily="34" charset="-122"/>
+                <a:cs typeface="Public Sans" pitchFamily="34" charset="-120"/>
               </a:rPr>
               <a:t>On sait où on en est à la fin.</a:t>
             </a:r>
@@ -7334,11 +7334,11 @@
             <a:r>
               <a:rPr lang="en-US" sz="1300" dirty="0">
                 <a:solidFill>
-                  <a:srgbClr val="0B0F19"/>
-                </a:solidFill>
-                <a:latin typeface="Inter" pitchFamily="34" charset="0"/>
-                <a:ea typeface="Inter" pitchFamily="34" charset="-122"/>
-                <a:cs typeface="Inter" pitchFamily="34" charset="-120"/>
+                  <a:srgbClr val="14181A"/>
+                </a:solidFill>
+                <a:latin typeface="Public Sans" pitchFamily="34" charset="0"/>
+                <a:ea typeface="Public Sans" pitchFamily="34" charset="-122"/>
+                <a:cs typeface="Public Sans" pitchFamily="34" charset="-120"/>
               </a:rPr>
               <a:t>On le voit pendant, zone par zone, depuis le bureau.</a:t>
             </a:r>
@@ -7363,7 +7363,7 @@
           <a:noFill/>
           <a:ln w="9525">
             <a:solidFill>
-              <a:srgbClr val="E3E6EE"/>
+              <a:srgbClr val="E2E5E1"/>
             </a:solidFill>
             <a:prstDash val="solid"/>
           </a:ln>
@@ -7399,11 +7399,11 @@
             <a:r>
               <a:rPr lang="en-US" sz="1300" dirty="0">
                 <a:solidFill>
-                  <a:srgbClr val="3D4556"/>
-                </a:solidFill>
-                <a:latin typeface="Inter" pitchFamily="34" charset="0"/>
-                <a:ea typeface="Inter" pitchFamily="34" charset="-122"/>
-                <a:cs typeface="Inter" pitchFamily="34" charset="-120"/>
+                  <a:srgbClr val="3A423F"/>
+                </a:solidFill>
+                <a:latin typeface="Public Sans" pitchFamily="34" charset="0"/>
+                <a:ea typeface="Public Sans" pitchFamily="34" charset="-122"/>
+                <a:cs typeface="Public Sans" pitchFamily="34" charset="-120"/>
               </a:rPr>
               <a:t>Les écarts se découvrent au rapport.</a:t>
             </a:r>
@@ -7441,11 +7441,11 @@
             <a:r>
               <a:rPr lang="en-US" sz="1300" dirty="0">
                 <a:solidFill>
-                  <a:srgbClr val="0B0F19"/>
-                </a:solidFill>
-                <a:latin typeface="Inter" pitchFamily="34" charset="0"/>
-                <a:ea typeface="Inter" pitchFamily="34" charset="-122"/>
-                <a:cs typeface="Inter" pitchFamily="34" charset="-120"/>
+                  <a:srgbClr val="14181A"/>
+                </a:solidFill>
+                <a:latin typeface="Public Sans" pitchFamily="34" charset="0"/>
+                <a:ea typeface="Public Sans" pitchFamily="34" charset="-122"/>
+                <a:cs typeface="Public Sans" pitchFamily="34" charset="-120"/>
               </a:rPr>
               <a:t>Les écarts se règlent sur place, pendant que ça compte.</a:t>
             </a:r>
@@ -7470,7 +7470,7 @@
           <a:noFill/>
           <a:ln w="9525">
             <a:solidFill>
-              <a:srgbClr val="E3E6EE"/>
+              <a:srgbClr val="E2E5E1"/>
             </a:solidFill>
             <a:prstDash val="solid"/>
           </a:ln>
@@ -7506,11 +7506,11 @@
             <a:r>
               <a:rPr lang="en-US" sz="1300" dirty="0">
                 <a:solidFill>
-                  <a:srgbClr val="3D4556"/>
-                </a:solidFill>
-                <a:latin typeface="Inter" pitchFamily="34" charset="0"/>
-                <a:ea typeface="Inter" pitchFamily="34" charset="-122"/>
-                <a:cs typeface="Inter" pitchFamily="34" charset="-120"/>
+                  <a:srgbClr val="3A423F"/>
+                </a:solidFill>
+                <a:latin typeface="Public Sans" pitchFamily="34" charset="0"/>
+                <a:ea typeface="Public Sans" pitchFamily="34" charset="-122"/>
+                <a:cs typeface="Public Sans" pitchFamily="34" charset="-120"/>
               </a:rPr>
               <a:t>Un fichier à reformater avant chaque import.</a:t>
             </a:r>
@@ -7548,11 +7548,11 @@
             <a:r>
               <a:rPr lang="en-US" sz="1300" dirty="0">
                 <a:solidFill>
-                  <a:srgbClr val="0B0F19"/>
-                </a:solidFill>
-                <a:latin typeface="Inter" pitchFamily="34" charset="0"/>
-                <a:ea typeface="Inter" pitchFamily="34" charset="-122"/>
-                <a:cs typeface="Inter" pitchFamily="34" charset="-120"/>
+                  <a:srgbClr val="14181A"/>
+                </a:solidFill>
+                <a:latin typeface="Public Sans" pitchFamily="34" charset="0"/>
+                <a:ea typeface="Public Sans" pitchFamily="34" charset="-122"/>
+                <a:cs typeface="Public Sans" pitchFamily="34" charset="-120"/>
               </a:rPr>
               <a:t>Vos fichiers tels quels. Quantinvo reconnaît vos colonnes.</a:t>
             </a:r>
@@ -7577,7 +7577,7 @@
           <a:noFill/>
           <a:ln w="9525">
             <a:solidFill>
-              <a:srgbClr val="E3E6EE"/>
+              <a:srgbClr val="E2E5E1"/>
             </a:solidFill>
             <a:prstDash val="solid"/>
           </a:ln>
@@ -7610,11 +7610,11 @@
             <a:r>
               <a:rPr lang="en-US" sz="900" dirty="0">
                 <a:solidFill>
-                  <a:srgbClr val="5B6475"/>
-                </a:solidFill>
-                <a:latin typeface="Inter" pitchFamily="34" charset="0"/>
-                <a:ea typeface="Inter" pitchFamily="34" charset="-122"/>
-                <a:cs typeface="Inter" pitchFamily="34" charset="-120"/>
+                  <a:srgbClr val="575F5C"/>
+                </a:solidFill>
+                <a:latin typeface="Public Sans" pitchFamily="34" charset="0"/>
+                <a:ea typeface="Public Sans" pitchFamily="34" charset="-122"/>
+                <a:cs typeface="Public Sans" pitchFamily="34" charset="-120"/>
               </a:rPr>
               <a:t>Quantinvo · présentation</a:t>
             </a:r>
@@ -7649,11 +7649,11 @@
             <a:r>
               <a:rPr lang="en-US" sz="900" dirty="0">
                 <a:solidFill>
-                  <a:srgbClr val="5B6475"/>
-                </a:solidFill>
-                <a:latin typeface="Inter" pitchFamily="34" charset="0"/>
-                <a:ea typeface="Inter" pitchFamily="34" charset="-122"/>
-                <a:cs typeface="Inter" pitchFamily="34" charset="-120"/>
+                  <a:srgbClr val="575F5C"/>
+                </a:solidFill>
+                <a:latin typeface="Public Sans" pitchFamily="34" charset="0"/>
+                <a:ea typeface="Public Sans" pitchFamily="34" charset="-122"/>
+                <a:cs typeface="Public Sans" pitchFamily="34" charset="-120"/>
               </a:rPr>
               <a:t>4</a:t>
             </a:r>
@@ -7744,11 +7744,11 @@
             <a:r>
               <a:rPr lang="en-US" sz="1600" b="1" dirty="0">
                 <a:solidFill>
-                  <a:srgbClr val="0B0F19"/>
-                </a:solidFill>
-                <a:latin typeface="Sora" pitchFamily="34" charset="0"/>
-                <a:ea typeface="Sora" pitchFamily="34" charset="-122"/>
-                <a:cs typeface="Sora" pitchFamily="34" charset="-120"/>
+                  <a:srgbClr val="14181A"/>
+                </a:solidFill>
+                <a:latin typeface="Archivo" pitchFamily="34" charset="0"/>
+                <a:ea typeface="Archivo" pitchFamily="34" charset="-122"/>
+                <a:cs typeface="Archivo" pitchFamily="34" charset="-120"/>
               </a:rPr>
               <a:t>Quantinvo</a:t>
             </a:r>
@@ -7783,11 +7783,11 @@
             <a:r>
               <a:rPr lang="en-US" sz="1000" dirty="0">
                 <a:solidFill>
-                  <a:srgbClr val="5B6475"/>
-                </a:solidFill>
-                <a:latin typeface="Inter" pitchFamily="34" charset="0"/>
-                <a:ea typeface="Inter" pitchFamily="34" charset="-122"/>
-                <a:cs typeface="Inter" pitchFamily="34" charset="-120"/>
+                  <a:srgbClr val="575F5C"/>
+                </a:solidFill>
+                <a:latin typeface="Public Sans" pitchFamily="34" charset="0"/>
+                <a:ea typeface="Public Sans" pitchFamily="34" charset="-122"/>
+                <a:cs typeface="Public Sans" pitchFamily="34" charset="-120"/>
               </a:rPr>
               <a:t>Comment ça se passe</a:t>
             </a:r>
@@ -7804,17 +7804,17 @@
         <p:spPr>
           <a:xfrm>
             <a:off x="731520" y="877824"/>
-            <a:ext cx="10725912" cy="25603"/>
+            <a:ext cx="10725912" cy="10973"/>
           </a:xfrm>
           <a:prstGeom prst="rect">
             <a:avLst/>
           </a:prstGeom>
           <a:solidFill>
-            <a:srgbClr val="38C9FF"/>
+            <a:srgbClr val="E2E5E1"/>
           </a:solidFill>
           <a:ln w="12700">
             <a:solidFill>
-              <a:srgbClr val="38C9FF"/>
+              <a:srgbClr val="E2E5E1"/>
             </a:solidFill>
             <a:prstDash val="solid"/>
           </a:ln>
@@ -7850,11 +7850,11 @@
             <a:r>
               <a:rPr lang="en-US" sz="2600" b="1" dirty="0">
                 <a:solidFill>
-                  <a:srgbClr val="4636B0"/>
-                </a:solidFill>
-                <a:latin typeface="Sora" pitchFamily="34" charset="0"/>
-                <a:ea typeface="Sora" pitchFamily="34" charset="-122"/>
-                <a:cs typeface="Sora" pitchFamily="34" charset="-120"/>
+                  <a:srgbClr val="14181A"/>
+                </a:solidFill>
+                <a:latin typeface="Archivo" pitchFamily="34" charset="0"/>
+                <a:ea typeface="Archivo" pitchFamily="34" charset="-122"/>
+                <a:cs typeface="Archivo" pitchFamily="34" charset="-120"/>
               </a:rPr>
               <a:t>Un inventaire, en quatre gestes</a:t>
             </a:r>
@@ -7879,7 +7879,7 @@
           <a:noFill/>
           <a:ln w="9525">
             <a:solidFill>
-              <a:srgbClr val="E3E6EE"/>
+              <a:srgbClr val="E2E5E1"/>
             </a:solidFill>
             <a:prstDash val="solid"/>
           </a:ln>
@@ -7900,11 +7900,11 @@
             <a:avLst/>
           </a:prstGeom>
           <a:solidFill>
-            <a:srgbClr val="4636B0"/>
+            <a:srgbClr val="1E4D3B"/>
           </a:solidFill>
           <a:ln>
             <a:solidFill>
-              <a:srgbClr val="4636B0"/>
+              <a:srgbClr val="1E4D3B"/>
             </a:solidFill>
           </a:ln>
         </p:spPr>
@@ -7920,9 +7920,9 @@
                 <a:solidFill>
                   <a:srgbClr val="FFFFFF"/>
                 </a:solidFill>
-                <a:latin typeface="Sora" pitchFamily="34" charset="0"/>
-                <a:ea typeface="Sora" pitchFamily="34" charset="-122"/>
-                <a:cs typeface="Sora" pitchFamily="34" charset="-120"/>
+                <a:latin typeface="Archivo" pitchFamily="34" charset="0"/>
+                <a:ea typeface="Archivo" pitchFamily="34" charset="-122"/>
+                <a:cs typeface="Archivo" pitchFamily="34" charset="-120"/>
               </a:rPr>
               <a:t>1</a:t>
             </a:r>
@@ -7957,11 +7957,11 @@
             <a:r>
               <a:rPr lang="en-US" sz="1700" b="1" dirty="0">
                 <a:solidFill>
-                  <a:srgbClr val="4636B0"/>
-                </a:solidFill>
-                <a:latin typeface="Sora" pitchFamily="34" charset="0"/>
-                <a:ea typeface="Sora" pitchFamily="34" charset="-122"/>
-                <a:cs typeface="Sora" pitchFamily="34" charset="-120"/>
+                  <a:srgbClr val="14181A"/>
+                </a:solidFill>
+                <a:latin typeface="Archivo" pitchFamily="34" charset="0"/>
+                <a:ea typeface="Archivo" pitchFamily="34" charset="-122"/>
+                <a:cs typeface="Archivo" pitchFamily="34" charset="-120"/>
               </a:rPr>
               <a:t>Importez</a:t>
             </a:r>
@@ -7999,11 +7999,11 @@
             <a:r>
               <a:rPr lang="en-US" sz="1200" dirty="0">
                 <a:solidFill>
-                  <a:srgbClr val="3D4556"/>
-                </a:solidFill>
-                <a:latin typeface="Inter" pitchFamily="34" charset="0"/>
-                <a:ea typeface="Inter" pitchFamily="34" charset="-122"/>
-                <a:cs typeface="Inter" pitchFamily="34" charset="-120"/>
+                  <a:srgbClr val="3A423F"/>
+                </a:solidFill>
+                <a:latin typeface="Public Sans" pitchFamily="34" charset="0"/>
+                <a:ea typeface="Public Sans" pitchFamily="34" charset="-122"/>
+                <a:cs typeface="Public Sans" pitchFamily="34" charset="-120"/>
               </a:rPr>
               <a:t>Votre référentiel et votre stock théorique, en CSV ou en Excel, tels qu'ils sortent de votre système. SKU, EAN, Gencod, Qté : les noms de colonnes sont reconnus.</a:t>
             </a:r>
@@ -8026,11 +8026,11 @@
             <a:avLst/>
           </a:prstGeom>
           <a:solidFill>
-            <a:srgbClr val="4636B0"/>
+            <a:srgbClr val="1E4D3B"/>
           </a:solidFill>
           <a:ln>
             <a:solidFill>
-              <a:srgbClr val="4636B0"/>
+              <a:srgbClr val="1E4D3B"/>
             </a:solidFill>
           </a:ln>
         </p:spPr>
@@ -8046,9 +8046,9 @@
                 <a:solidFill>
                   <a:srgbClr val="FFFFFF"/>
                 </a:solidFill>
-                <a:latin typeface="Sora" pitchFamily="34" charset="0"/>
-                <a:ea typeface="Sora" pitchFamily="34" charset="-122"/>
-                <a:cs typeface="Sora" pitchFamily="34" charset="-120"/>
+                <a:latin typeface="Archivo" pitchFamily="34" charset="0"/>
+                <a:ea typeface="Archivo" pitchFamily="34" charset="-122"/>
+                <a:cs typeface="Archivo" pitchFamily="34" charset="-120"/>
               </a:rPr>
               <a:t>2</a:t>
             </a:r>
@@ -8083,11 +8083,11 @@
             <a:r>
               <a:rPr lang="en-US" sz="1700" b="1" dirty="0">
                 <a:solidFill>
-                  <a:srgbClr val="4636B0"/>
-                </a:solidFill>
-                <a:latin typeface="Sora" pitchFamily="34" charset="0"/>
-                <a:ea typeface="Sora" pitchFamily="34" charset="-122"/>
-                <a:cs typeface="Sora" pitchFamily="34" charset="-120"/>
+                  <a:srgbClr val="14181A"/>
+                </a:solidFill>
+                <a:latin typeface="Archivo" pitchFamily="34" charset="0"/>
+                <a:ea typeface="Archivo" pitchFamily="34" charset="-122"/>
+                <a:cs typeface="Archivo" pitchFamily="34" charset="-120"/>
               </a:rPr>
               <a:t>Scannez</a:t>
             </a:r>
@@ -8125,11 +8125,11 @@
             <a:r>
               <a:rPr lang="en-US" sz="1200" dirty="0">
                 <a:solidFill>
-                  <a:srgbClr val="3D4556"/>
-                </a:solidFill>
-                <a:latin typeface="Inter" pitchFamily="34" charset="0"/>
-                <a:ea typeface="Inter" pitchFamily="34" charset="-122"/>
-                <a:cs typeface="Inter" pitchFamily="34" charset="-120"/>
+                  <a:srgbClr val="3A423F"/>
+                </a:solidFill>
+                <a:latin typeface="Public Sans" pitchFamily="34" charset="0"/>
+                <a:ea typeface="Public Sans" pitchFamily="34" charset="-122"/>
+                <a:cs typeface="Public Sans" pitchFamily="34" charset="-120"/>
               </a:rPr>
               <a:t>Chaque compteur ouvre l'inventaire sur son téléphone, scanne la balise de son rayon, puis les articles. Plusieurs personnes comptent en même temps, chacune sa zone.</a:t>
             </a:r>
@@ -8152,11 +8152,11 @@
             <a:avLst/>
           </a:prstGeom>
           <a:solidFill>
-            <a:srgbClr val="4636B0"/>
+            <a:srgbClr val="1E4D3B"/>
           </a:solidFill>
           <a:ln>
             <a:solidFill>
-              <a:srgbClr val="4636B0"/>
+              <a:srgbClr val="1E4D3B"/>
             </a:solidFill>
           </a:ln>
         </p:spPr>
@@ -8172,9 +8172,9 @@
                 <a:solidFill>
                   <a:srgbClr val="FFFFFF"/>
                 </a:solidFill>
-                <a:latin typeface="Sora" pitchFamily="34" charset="0"/>
-                <a:ea typeface="Sora" pitchFamily="34" charset="-122"/>
-                <a:cs typeface="Sora" pitchFamily="34" charset="-120"/>
+                <a:latin typeface="Archivo" pitchFamily="34" charset="0"/>
+                <a:ea typeface="Archivo" pitchFamily="34" charset="-122"/>
+                <a:cs typeface="Archivo" pitchFamily="34" charset="-120"/>
               </a:rPr>
               <a:t>3</a:t>
             </a:r>
@@ -8209,11 +8209,11 @@
             <a:r>
               <a:rPr lang="en-US" sz="1700" b="1" dirty="0">
                 <a:solidFill>
-                  <a:srgbClr val="4636B0"/>
-                </a:solidFill>
-                <a:latin typeface="Sora" pitchFamily="34" charset="0"/>
-                <a:ea typeface="Sora" pitchFamily="34" charset="-122"/>
-                <a:cs typeface="Sora" pitchFamily="34" charset="-120"/>
+                  <a:srgbClr val="14181A"/>
+                </a:solidFill>
+                <a:latin typeface="Archivo" pitchFamily="34" charset="0"/>
+                <a:ea typeface="Archivo" pitchFamily="34" charset="-122"/>
+                <a:cs typeface="Archivo" pitchFamily="34" charset="-120"/>
               </a:rPr>
               <a:t>Auditez</a:t>
             </a:r>
@@ -8251,11 +8251,11 @@
             <a:r>
               <a:rPr lang="en-US" sz="1200" dirty="0">
                 <a:solidFill>
-                  <a:srgbClr val="3D4556"/>
-                </a:solidFill>
-                <a:latin typeface="Inter" pitchFamily="34" charset="0"/>
-                <a:ea typeface="Inter" pitchFamily="34" charset="-122"/>
-                <a:cs typeface="Inter" pitchFamily="34" charset="-120"/>
+                  <a:srgbClr val="3A423F"/>
+                </a:solidFill>
+                <a:latin typeface="Public Sans" pitchFamily="34" charset="0"/>
+                <a:ea typeface="Public Sans" pitchFamily="34" charset="-122"/>
+                <a:cs typeface="Public Sans" pitchFamily="34" charset="-120"/>
               </a:rPr>
               <a:t>Un second passage sur les zones qui le méritent. L'écart entre les deux comptages s'affiche, le superviseur tranche.</a:t>
             </a:r>
@@ -8278,11 +8278,11 @@
             <a:avLst/>
           </a:prstGeom>
           <a:solidFill>
-            <a:srgbClr val="4636B0"/>
+            <a:srgbClr val="1E4D3B"/>
           </a:solidFill>
           <a:ln>
             <a:solidFill>
-              <a:srgbClr val="4636B0"/>
+              <a:srgbClr val="1E4D3B"/>
             </a:solidFill>
           </a:ln>
         </p:spPr>
@@ -8298,9 +8298,9 @@
                 <a:solidFill>
                   <a:srgbClr val="FFFFFF"/>
                 </a:solidFill>
-                <a:latin typeface="Sora" pitchFamily="34" charset="0"/>
-                <a:ea typeface="Sora" pitchFamily="34" charset="-122"/>
-                <a:cs typeface="Sora" pitchFamily="34" charset="-120"/>
+                <a:latin typeface="Archivo" pitchFamily="34" charset="0"/>
+                <a:ea typeface="Archivo" pitchFamily="34" charset="-122"/>
+                <a:cs typeface="Archivo" pitchFamily="34" charset="-120"/>
               </a:rPr>
               <a:t>4</a:t>
             </a:r>
@@ -8335,11 +8335,11 @@
             <a:r>
               <a:rPr lang="en-US" sz="1700" b="1" dirty="0">
                 <a:solidFill>
-                  <a:srgbClr val="4636B0"/>
-                </a:solidFill>
-                <a:latin typeface="Sora" pitchFamily="34" charset="0"/>
-                <a:ea typeface="Sora" pitchFamily="34" charset="-122"/>
-                <a:cs typeface="Sora" pitchFamily="34" charset="-120"/>
+                  <a:srgbClr val="14181A"/>
+                </a:solidFill>
+                <a:latin typeface="Archivo" pitchFamily="34" charset="0"/>
+                <a:ea typeface="Archivo" pitchFamily="34" charset="-122"/>
+                <a:cs typeface="Archivo" pitchFamily="34" charset="-120"/>
               </a:rPr>
               <a:t>Corrigez</a:t>
             </a:r>
@@ -8377,11 +8377,11 @@
             <a:r>
               <a:rPr lang="en-US" sz="1200" dirty="0">
                 <a:solidFill>
-                  <a:srgbClr val="3D4556"/>
-                </a:solidFill>
-                <a:latin typeface="Inter" pitchFamily="34" charset="0"/>
-                <a:ea typeface="Inter" pitchFamily="34" charset="-122"/>
-                <a:cs typeface="Inter" pitchFamily="34" charset="-120"/>
+                  <a:srgbClr val="3A423F"/>
+                </a:solidFill>
+                <a:latin typeface="Public Sans" pitchFamily="34" charset="0"/>
+                <a:ea typeface="Public Sans" pitchFamily="34" charset="-122"/>
+                <a:cs typeface="Public Sans" pitchFamily="34" charset="-120"/>
               </a:rPr>
               <a:t>Le rapport sort en Excel : résultats, écarts en valeur, détail par zone. Il part tel quel à la correction du stock.</a:t>
             </a:r>
@@ -8402,15 +8402,15 @@
           </a:xfrm>
           <a:prstGeom prst="roundRect">
             <a:avLst>
-              <a:gd name="adj" fmla="val 8000"/>
+              <a:gd name="adj" fmla="val 4000"/>
             </a:avLst>
           </a:prstGeom>
           <a:solidFill>
-            <a:srgbClr val="F4F5F9"/>
+            <a:srgbClr val="F2F3F1"/>
           </a:solidFill>
           <a:ln w="12700">
             <a:solidFill>
-              <a:srgbClr val="F4F5F9"/>
+              <a:srgbClr val="F2F3F1"/>
             </a:solidFill>
             <a:prstDash val="solid"/>
           </a:ln>
@@ -8443,11 +8443,11 @@
             <a:r>
               <a:rPr lang="en-US" sz="950" b="1" dirty="0">
                 <a:solidFill>
-                  <a:srgbClr val="5B6475"/>
-                </a:solidFill>
-                <a:latin typeface="Inter" pitchFamily="34" charset="0"/>
-                <a:ea typeface="Inter" pitchFamily="34" charset="-122"/>
-                <a:cs typeface="Inter" pitchFamily="34" charset="-120"/>
+                  <a:srgbClr val="575F5C"/>
+                </a:solidFill>
+                <a:latin typeface="Public Sans" pitchFamily="34" charset="0"/>
+                <a:ea typeface="Public Sans" pitchFamily="34" charset="-122"/>
+                <a:cs typeface="Public Sans" pitchFamily="34" charset="-120"/>
               </a:rPr>
               <a:t>Sur le terrain</a:t>
             </a:r>
@@ -8485,11 +8485,11 @@
             <a:r>
               <a:rPr lang="en-US" sz="1150" i="1" dirty="0">
                 <a:solidFill>
-                  <a:srgbClr val="3D4556"/>
-                </a:solidFill>
-                <a:latin typeface="Inter" pitchFamily="34" charset="0"/>
-                <a:ea typeface="Inter" pitchFamily="34" charset="-122"/>
-                <a:cs typeface="Inter" pitchFamily="34" charset="-120"/>
+                  <a:srgbClr val="3A423F"/>
+                </a:solidFill>
+                <a:latin typeface="Public Sans" pitchFamily="34" charset="0"/>
+                <a:ea typeface="Public Sans" pitchFamily="34" charset="-122"/>
+                <a:cs typeface="Public Sans" pitchFamily="34" charset="-120"/>
               </a:rPr>
               <a:t>Le premier inventaire se fait généralement sur un rayon, un mardi matin, avec deux personnes. Pas besoin de la nuit entière pour commencer : c'est justement l'idée.</a:t>
             </a:r>
@@ -8524,11 +8524,11 @@
             <a:r>
               <a:rPr lang="en-US" sz="900" dirty="0">
                 <a:solidFill>
-                  <a:srgbClr val="5B6475"/>
-                </a:solidFill>
-                <a:latin typeface="Inter" pitchFamily="34" charset="0"/>
-                <a:ea typeface="Inter" pitchFamily="34" charset="-122"/>
-                <a:cs typeface="Inter" pitchFamily="34" charset="-120"/>
+                  <a:srgbClr val="575F5C"/>
+                </a:solidFill>
+                <a:latin typeface="Public Sans" pitchFamily="34" charset="0"/>
+                <a:ea typeface="Public Sans" pitchFamily="34" charset="-122"/>
+                <a:cs typeface="Public Sans" pitchFamily="34" charset="-120"/>
               </a:rPr>
               <a:t>Quantinvo · présentation</a:t>
             </a:r>
@@ -8563,11 +8563,11 @@
             <a:r>
               <a:rPr lang="en-US" sz="900" dirty="0">
                 <a:solidFill>
-                  <a:srgbClr val="5B6475"/>
-                </a:solidFill>
-                <a:latin typeface="Inter" pitchFamily="34" charset="0"/>
-                <a:ea typeface="Inter" pitchFamily="34" charset="-122"/>
-                <a:cs typeface="Inter" pitchFamily="34" charset="-120"/>
+                  <a:srgbClr val="575F5C"/>
+                </a:solidFill>
+                <a:latin typeface="Public Sans" pitchFamily="34" charset="0"/>
+                <a:ea typeface="Public Sans" pitchFamily="34" charset="-122"/>
+                <a:cs typeface="Public Sans" pitchFamily="34" charset="-120"/>
               </a:rPr>
               <a:t>5</a:t>
             </a:r>
@@ -8658,11 +8658,11 @@
             <a:r>
               <a:rPr lang="en-US" sz="1600" b="1" dirty="0">
                 <a:solidFill>
-                  <a:srgbClr val="0B0F19"/>
-                </a:solidFill>
-                <a:latin typeface="Sora" pitchFamily="34" charset="0"/>
-                <a:ea typeface="Sora" pitchFamily="34" charset="-122"/>
-                <a:cs typeface="Sora" pitchFamily="34" charset="-120"/>
+                  <a:srgbClr val="14181A"/>
+                </a:solidFill>
+                <a:latin typeface="Archivo" pitchFamily="34" charset="0"/>
+                <a:ea typeface="Archivo" pitchFamily="34" charset="-122"/>
+                <a:cs typeface="Archivo" pitchFamily="34" charset="-120"/>
               </a:rPr>
               <a:t>Quantinvo</a:t>
             </a:r>
@@ -8697,11 +8697,11 @@
             <a:r>
               <a:rPr lang="en-US" sz="1000" dirty="0">
                 <a:solidFill>
-                  <a:srgbClr val="5B6475"/>
-                </a:solidFill>
-                <a:latin typeface="Inter" pitchFamily="34" charset="0"/>
-                <a:ea typeface="Inter" pitchFamily="34" charset="-122"/>
-                <a:cs typeface="Inter" pitchFamily="34" charset="-120"/>
+                  <a:srgbClr val="575F5C"/>
+                </a:solidFill>
+                <a:latin typeface="Public Sans" pitchFamily="34" charset="0"/>
+                <a:ea typeface="Public Sans" pitchFamily="34" charset="-122"/>
+                <a:cs typeface="Public Sans" pitchFamily="34" charset="-120"/>
               </a:rPr>
               <a:t>L'application</a:t>
             </a:r>
@@ -8718,17 +8718,17 @@
         <p:spPr>
           <a:xfrm>
             <a:off x="731520" y="877824"/>
-            <a:ext cx="10725912" cy="25603"/>
+            <a:ext cx="10725912" cy="10973"/>
           </a:xfrm>
           <a:prstGeom prst="rect">
             <a:avLst/>
           </a:prstGeom>
           <a:solidFill>
-            <a:srgbClr val="38C9FF"/>
+            <a:srgbClr val="E2E5E1"/>
           </a:solidFill>
           <a:ln w="12700">
             <a:solidFill>
-              <a:srgbClr val="38C9FF"/>
+              <a:srgbClr val="E2E5E1"/>
             </a:solidFill>
             <a:prstDash val="solid"/>
           </a:ln>
@@ -8764,11 +8764,11 @@
             <a:r>
               <a:rPr lang="en-US" sz="2600" b="1" dirty="0">
                 <a:solidFill>
-                  <a:srgbClr val="4636B0"/>
-                </a:solidFill>
-                <a:latin typeface="Sora" pitchFamily="34" charset="0"/>
-                <a:ea typeface="Sora" pitchFamily="34" charset="-122"/>
-                <a:cs typeface="Sora" pitchFamily="34" charset="-120"/>
+                  <a:srgbClr val="14181A"/>
+                </a:solidFill>
+                <a:latin typeface="Archivo" pitchFamily="34" charset="0"/>
+                <a:ea typeface="Archivo" pitchFamily="34" charset="-122"/>
+                <a:cs typeface="Archivo" pitchFamily="34" charset="-120"/>
               </a:rPr>
               <a:t>Ce que voit la personne qui compte</a:t>
             </a:r>
@@ -8806,11 +8806,11 @@
             <a:r>
               <a:rPr lang="en-US" sz="1350" b="1" dirty="0">
                 <a:solidFill>
-                  <a:srgbClr val="4636B0"/>
-                </a:solidFill>
-                <a:latin typeface="Sora" pitchFamily="34" charset="0"/>
-                <a:ea typeface="Sora" pitchFamily="34" charset="-122"/>
-                <a:cs typeface="Sora" pitchFamily="34" charset="-120"/>
+                  <a:srgbClr val="14181A"/>
+                </a:solidFill>
+                <a:latin typeface="Archivo" pitchFamily="34" charset="0"/>
+                <a:ea typeface="Archivo" pitchFamily="34" charset="-122"/>
+                <a:cs typeface="Archivo" pitchFamily="34" charset="-120"/>
               </a:rPr>
               <a:t>Les balises s’impriment</a:t>
             </a:r>
@@ -8848,11 +8848,11 @@
             <a:r>
               <a:rPr lang="en-US" sz="1100" dirty="0">
                 <a:solidFill>
-                  <a:srgbClr val="3D4556"/>
-                </a:solidFill>
-                <a:latin typeface="Inter" pitchFamily="34" charset="0"/>
-                <a:ea typeface="Inter" pitchFamily="34" charset="-122"/>
-                <a:cs typeface="Inter" pitchFamily="34" charset="-120"/>
+                  <a:srgbClr val="3A423F"/>
+                </a:solidFill>
+                <a:latin typeface="Public Sans" pitchFamily="34" charset="0"/>
+                <a:ea typeface="Public Sans" pitchFamily="34" charset="-122"/>
+                <a:cs typeface="Public Sans" pitchFamily="34" charset="-120"/>
               </a:rPr>
               <a:t>Une planche d'étiquettes numérotées, en PDF. Elles délimitent les zones et se collent en rayon.</a:t>
             </a:r>
@@ -8873,15 +8873,15 @@
           </a:xfrm>
           <a:prstGeom prst="roundRect">
             <a:avLst>
-              <a:gd name="adj" fmla="val 3857"/>
+              <a:gd name="adj" fmla="val 1102"/>
             </a:avLst>
           </a:prstGeom>
           <a:solidFill>
-            <a:srgbClr val="F4F5F9"/>
+            <a:srgbClr val="F2F3F1"/>
           </a:solidFill>
           <a:ln w="12700">
             <a:solidFill>
-              <a:srgbClr val="F4F5F9"/>
+              <a:srgbClr val="F2F3F1"/>
             </a:solidFill>
             <a:prstDash val="solid"/>
           </a:ln>
@@ -8941,11 +8941,11 @@
             <a:r>
               <a:rPr lang="en-US" sz="1350" b="1" dirty="0">
                 <a:solidFill>
-                  <a:srgbClr val="4636B0"/>
-                </a:solidFill>
-                <a:latin typeface="Sora" pitchFamily="34" charset="0"/>
-                <a:ea typeface="Sora" pitchFamily="34" charset="-122"/>
-                <a:cs typeface="Sora" pitchFamily="34" charset="-120"/>
+                  <a:srgbClr val="14181A"/>
+                </a:solidFill>
+                <a:latin typeface="Archivo" pitchFamily="34" charset="0"/>
+                <a:ea typeface="Archivo" pitchFamily="34" charset="-122"/>
+                <a:cs typeface="Archivo" pitchFamily="34" charset="-120"/>
               </a:rPr>
               <a:t>On scanne, ça compte</a:t>
             </a:r>
@@ -8983,11 +8983,11 @@
             <a:r>
               <a:rPr lang="en-US" sz="1100" dirty="0">
                 <a:solidFill>
-                  <a:srgbClr val="3D4556"/>
-                </a:solidFill>
-                <a:latin typeface="Inter" pitchFamily="34" charset="0"/>
-                <a:ea typeface="Inter" pitchFamily="34" charset="-122"/>
-                <a:cs typeface="Inter" pitchFamily="34" charset="-120"/>
+                  <a:srgbClr val="3A423F"/>
+                </a:solidFill>
+                <a:latin typeface="Public Sans" pitchFamily="34" charset="0"/>
+                <a:ea typeface="Public Sans" pitchFamily="34" charset="-122"/>
+                <a:cs typeface="Public Sans" pitchFamily="34" charset="-120"/>
               </a:rPr>
               <a:t>Caméra, saisie manuelle ou douchette Bluetooth. La quantité se corrige d'un appui.</a:t>
             </a:r>
@@ -9008,15 +9008,15 @@
           </a:xfrm>
           <a:prstGeom prst="roundRect">
             <a:avLst>
-              <a:gd name="adj" fmla="val 3857"/>
+              <a:gd name="adj" fmla="val 1102"/>
             </a:avLst>
           </a:prstGeom>
           <a:solidFill>
-            <a:srgbClr val="EEEEFC"/>
+            <a:srgbClr val="E7EDE9"/>
           </a:solidFill>
           <a:ln w="12700">
             <a:solidFill>
-              <a:srgbClr val="EEEEFC"/>
+              <a:srgbClr val="E7EDE9"/>
             </a:solidFill>
             <a:prstDash val="solid"/>
           </a:ln>
@@ -9076,11 +9076,11 @@
             <a:r>
               <a:rPr lang="en-US" sz="1350" b="1" dirty="0">
                 <a:solidFill>
-                  <a:srgbClr val="4636B0"/>
-                </a:solidFill>
-                <a:latin typeface="Sora" pitchFamily="34" charset="0"/>
-                <a:ea typeface="Sora" pitchFamily="34" charset="-122"/>
-                <a:cs typeface="Sora" pitchFamily="34" charset="-120"/>
+                  <a:srgbClr val="14181A"/>
+                </a:solidFill>
+                <a:latin typeface="Archivo" pitchFamily="34" charset="0"/>
+                <a:ea typeface="Archivo" pitchFamily="34" charset="-122"/>
+                <a:cs typeface="Archivo" pitchFamily="34" charset="-120"/>
               </a:rPr>
               <a:t>L’audit repasse derrière</a:t>
             </a:r>
@@ -9118,11 +9118,11 @@
             <a:r>
               <a:rPr lang="en-US" sz="1100" dirty="0">
                 <a:solidFill>
-                  <a:srgbClr val="3D4556"/>
-                </a:solidFill>
-                <a:latin typeface="Inter" pitchFamily="34" charset="0"/>
-                <a:ea typeface="Inter" pitchFamily="34" charset="-122"/>
-                <a:cs typeface="Inter" pitchFamily="34" charset="-120"/>
+                  <a:srgbClr val="3A423F"/>
+                </a:solidFill>
+                <a:latin typeface="Public Sans" pitchFamily="34" charset="0"/>
+                <a:ea typeface="Public Sans" pitchFamily="34" charset="-122"/>
+                <a:cs typeface="Public Sans" pitchFamily="34" charset="-120"/>
               </a:rPr>
               <a:t>Un second passage sur la même zone, par quelqu'un d'autre. C'est ce qui fiabilise le comptage.</a:t>
             </a:r>
@@ -9143,15 +9143,15 @@
           </a:xfrm>
           <a:prstGeom prst="roundRect">
             <a:avLst>
-              <a:gd name="adj" fmla="val 3857"/>
+              <a:gd name="adj" fmla="val 1102"/>
             </a:avLst>
           </a:prstGeom>
           <a:solidFill>
-            <a:srgbClr val="F4F5F9"/>
+            <a:srgbClr val="F2F3F1"/>
           </a:solidFill>
           <a:ln w="12700">
             <a:solidFill>
-              <a:srgbClr val="F4F5F9"/>
+              <a:srgbClr val="F2F3F1"/>
             </a:solidFill>
             <a:prstDash val="solid"/>
           </a:ln>
@@ -9208,11 +9208,11 @@
             <a:r>
               <a:rPr lang="en-US" sz="900" dirty="0">
                 <a:solidFill>
-                  <a:srgbClr val="5B6475"/>
-                </a:solidFill>
-                <a:latin typeface="Inter" pitchFamily="34" charset="0"/>
-                <a:ea typeface="Inter" pitchFamily="34" charset="-122"/>
-                <a:cs typeface="Inter" pitchFamily="34" charset="-120"/>
+                  <a:srgbClr val="575F5C"/>
+                </a:solidFill>
+                <a:latin typeface="Public Sans" pitchFamily="34" charset="0"/>
+                <a:ea typeface="Public Sans" pitchFamily="34" charset="-122"/>
+                <a:cs typeface="Public Sans" pitchFamily="34" charset="-120"/>
               </a:rPr>
               <a:t>Quantinvo · présentation</a:t>
             </a:r>
@@ -9247,11 +9247,11 @@
             <a:r>
               <a:rPr lang="en-US" sz="900" dirty="0">
                 <a:solidFill>
-                  <a:srgbClr val="5B6475"/>
-                </a:solidFill>
-                <a:latin typeface="Inter" pitchFamily="34" charset="0"/>
-                <a:ea typeface="Inter" pitchFamily="34" charset="-122"/>
-                <a:cs typeface="Inter" pitchFamily="34" charset="-120"/>
+                  <a:srgbClr val="575F5C"/>
+                </a:solidFill>
+                <a:latin typeface="Public Sans" pitchFamily="34" charset="0"/>
+                <a:ea typeface="Public Sans" pitchFamily="34" charset="-122"/>
+                <a:cs typeface="Public Sans" pitchFamily="34" charset="-120"/>
               </a:rPr>
               <a:t>6</a:t>
             </a:r>
@@ -9342,11 +9342,11 @@
             <a:r>
               <a:rPr lang="en-US" sz="1600" b="1" dirty="0">
                 <a:solidFill>
-                  <a:srgbClr val="0B0F19"/>
-                </a:solidFill>
-                <a:latin typeface="Sora" pitchFamily="34" charset="0"/>
-                <a:ea typeface="Sora" pitchFamily="34" charset="-122"/>
-                <a:cs typeface="Sora" pitchFamily="34" charset="-120"/>
+                  <a:srgbClr val="14181A"/>
+                </a:solidFill>
+                <a:latin typeface="Archivo" pitchFamily="34" charset="0"/>
+                <a:ea typeface="Archivo" pitchFamily="34" charset="-122"/>
+                <a:cs typeface="Archivo" pitchFamily="34" charset="-120"/>
               </a:rPr>
               <a:t>Quantinvo</a:t>
             </a:r>
@@ -9381,11 +9381,11 @@
             <a:r>
               <a:rPr lang="en-US" sz="1000" dirty="0">
                 <a:solidFill>
-                  <a:srgbClr val="5B6475"/>
-                </a:solidFill>
-                <a:latin typeface="Inter" pitchFamily="34" charset="0"/>
-                <a:ea typeface="Inter" pitchFamily="34" charset="-122"/>
-                <a:cs typeface="Inter" pitchFamily="34" charset="-120"/>
+                  <a:srgbClr val="575F5C"/>
+                </a:solidFill>
+                <a:latin typeface="Public Sans" pitchFamily="34" charset="0"/>
+                <a:ea typeface="Public Sans" pitchFamily="34" charset="-122"/>
+                <a:cs typeface="Public Sans" pitchFamily="34" charset="-120"/>
               </a:rPr>
               <a:t>Le tableau de bord</a:t>
             </a:r>
@@ -9402,17 +9402,17 @@
         <p:spPr>
           <a:xfrm>
             <a:off x="731520" y="877824"/>
-            <a:ext cx="10725912" cy="25603"/>
+            <a:ext cx="10725912" cy="10973"/>
           </a:xfrm>
           <a:prstGeom prst="rect">
             <a:avLst/>
           </a:prstGeom>
           <a:solidFill>
-            <a:srgbClr val="38C9FF"/>
+            <a:srgbClr val="E2E5E1"/>
           </a:solidFill>
           <a:ln w="12700">
             <a:solidFill>
-              <a:srgbClr val="38C9FF"/>
+              <a:srgbClr val="E2E5E1"/>
             </a:solidFill>
             <a:prstDash val="solid"/>
           </a:ln>
@@ -9448,11 +9448,11 @@
             <a:r>
               <a:rPr lang="en-US" sz="2600" b="1" dirty="0">
                 <a:solidFill>
-                  <a:srgbClr val="4636B0"/>
-                </a:solidFill>
-                <a:latin typeface="Sora" pitchFamily="34" charset="0"/>
-                <a:ea typeface="Sora" pitchFamily="34" charset="-122"/>
-                <a:cs typeface="Sora" pitchFamily="34" charset="-120"/>
+                  <a:srgbClr val="14181A"/>
+                </a:solidFill>
+                <a:latin typeface="Archivo" pitchFamily="34" charset="0"/>
+                <a:ea typeface="Archivo" pitchFamily="34" charset="-122"/>
+                <a:cs typeface="Archivo" pitchFamily="34" charset="-120"/>
               </a:rPr>
               <a:t>Pendant que ça compte, vous voyez où ça en est.</a:t>
             </a:r>
@@ -9490,11 +9490,11 @@
             <a:r>
               <a:rPr lang="en-US" sz="1250" dirty="0">
                 <a:solidFill>
-                  <a:srgbClr val="3D4556"/>
-                </a:solidFill>
-                <a:latin typeface="Inter" pitchFamily="34" charset="0"/>
-                <a:ea typeface="Inter" pitchFamily="34" charset="-122"/>
-                <a:cs typeface="Inter" pitchFamily="34" charset="-120"/>
+                  <a:srgbClr val="3A423F"/>
+                </a:solidFill>
+                <a:latin typeface="Public Sans" pitchFamily="34" charset="0"/>
+                <a:ea typeface="Public Sans" pitchFamily="34" charset="-122"/>
+                <a:cs typeface="Public Sans" pitchFamily="34" charset="-120"/>
               </a:rPr>
               <a:t>Depuis le bureau, sur le site : combien d'appareils comptent, combien auditent, l'avancement zone par zone, les derniers scans. Ce que vous ne voyez pas, et c'est voulu : qui fait quoi. Le suivi est agrégé, on pilote le travail, pas les personnes.</a:t>
             </a:r>
@@ -9515,7 +9515,7 @@
           </a:xfrm>
           <a:prstGeom prst="roundRect">
             <a:avLst>
-              <a:gd name="adj" fmla="val 2339"/>
+              <a:gd name="adj" fmla="val 1170"/>
             </a:avLst>
           </a:prstGeom>
           <a:solidFill>
@@ -9523,7 +9523,7 @@
           </a:solidFill>
           <a:ln w="12700">
             <a:solidFill>
-              <a:srgbClr val="E3E6EE"/>
+              <a:srgbClr val="E2E5E1"/>
             </a:solidFill>
             <a:prstDash val="solid"/>
           </a:ln>
@@ -9580,11 +9580,11 @@
             <a:r>
               <a:rPr lang="en-US" sz="1000" i="1" dirty="0">
                 <a:solidFill>
-                  <a:srgbClr val="5B6475"/>
-                </a:solidFill>
-                <a:latin typeface="Inter" pitchFamily="34" charset="0"/>
-                <a:ea typeface="Inter" pitchFamily="34" charset="-122"/>
-                <a:cs typeface="Inter" pitchFamily="34" charset="-120"/>
+                  <a:srgbClr val="575F5C"/>
+                </a:solidFill>
+                <a:latin typeface="Public Sans" pitchFamily="34" charset="0"/>
+                <a:ea typeface="Public Sans" pitchFamily="34" charset="-122"/>
+                <a:cs typeface="Public Sans" pitchFamily="34" charset="-120"/>
               </a:rPr>
               <a:t>Onglet Suivi, données d’essai.</a:t>
             </a:r>
@@ -9619,11 +9619,11 @@
             <a:r>
               <a:rPr lang="en-US" sz="900" dirty="0">
                 <a:solidFill>
-                  <a:srgbClr val="5B6475"/>
-                </a:solidFill>
-                <a:latin typeface="Inter" pitchFamily="34" charset="0"/>
-                <a:ea typeface="Inter" pitchFamily="34" charset="-122"/>
-                <a:cs typeface="Inter" pitchFamily="34" charset="-120"/>
+                  <a:srgbClr val="575F5C"/>
+                </a:solidFill>
+                <a:latin typeface="Public Sans" pitchFamily="34" charset="0"/>
+                <a:ea typeface="Public Sans" pitchFamily="34" charset="-122"/>
+                <a:cs typeface="Public Sans" pitchFamily="34" charset="-120"/>
               </a:rPr>
               <a:t>Quantinvo · présentation</a:t>
             </a:r>
@@ -9658,11 +9658,11 @@
             <a:r>
               <a:rPr lang="en-US" sz="900" dirty="0">
                 <a:solidFill>
-                  <a:srgbClr val="5B6475"/>
-                </a:solidFill>
-                <a:latin typeface="Inter" pitchFamily="34" charset="0"/>
-                <a:ea typeface="Inter" pitchFamily="34" charset="-122"/>
-                <a:cs typeface="Inter" pitchFamily="34" charset="-120"/>
+                  <a:srgbClr val="575F5C"/>
+                </a:solidFill>
+                <a:latin typeface="Public Sans" pitchFamily="34" charset="0"/>
+                <a:ea typeface="Public Sans" pitchFamily="34" charset="-122"/>
+                <a:cs typeface="Public Sans" pitchFamily="34" charset="-120"/>
               </a:rPr>
               <a:t>7</a:t>
             </a:r>
@@ -9753,11 +9753,11 @@
             <a:r>
               <a:rPr lang="en-US" sz="1600" b="1" dirty="0">
                 <a:solidFill>
-                  <a:srgbClr val="0B0F19"/>
-                </a:solidFill>
-                <a:latin typeface="Sora" pitchFamily="34" charset="0"/>
-                <a:ea typeface="Sora" pitchFamily="34" charset="-122"/>
-                <a:cs typeface="Sora" pitchFamily="34" charset="-120"/>
+                  <a:srgbClr val="14181A"/>
+                </a:solidFill>
+                <a:latin typeface="Archivo" pitchFamily="34" charset="0"/>
+                <a:ea typeface="Archivo" pitchFamily="34" charset="-122"/>
+                <a:cs typeface="Archivo" pitchFamily="34" charset="-120"/>
               </a:rPr>
               <a:t>Quantinvo</a:t>
             </a:r>
@@ -9792,11 +9792,11 @@
             <a:r>
               <a:rPr lang="en-US" sz="1000" dirty="0">
                 <a:solidFill>
-                  <a:srgbClr val="5B6475"/>
-                </a:solidFill>
-                <a:latin typeface="Inter" pitchFamily="34" charset="0"/>
-                <a:ea typeface="Inter" pitchFamily="34" charset="-122"/>
-                <a:cs typeface="Inter" pitchFamily="34" charset="-120"/>
+                  <a:srgbClr val="575F5C"/>
+                </a:solidFill>
+                <a:latin typeface="Public Sans" pitchFamily="34" charset="0"/>
+                <a:ea typeface="Public Sans" pitchFamily="34" charset="-122"/>
+                <a:cs typeface="Public Sans" pitchFamily="34" charset="-120"/>
               </a:rPr>
               <a:t>Les écarts</a:t>
             </a:r>
@@ -9813,17 +9813,17 @@
         <p:spPr>
           <a:xfrm>
             <a:off x="731520" y="877824"/>
-            <a:ext cx="10725912" cy="25603"/>
+            <a:ext cx="10725912" cy="10973"/>
           </a:xfrm>
           <a:prstGeom prst="rect">
             <a:avLst/>
           </a:prstGeom>
           <a:solidFill>
-            <a:srgbClr val="38C9FF"/>
+            <a:srgbClr val="E2E5E1"/>
           </a:solidFill>
           <a:ln w="12700">
             <a:solidFill>
-              <a:srgbClr val="38C9FF"/>
+              <a:srgbClr val="E2E5E1"/>
             </a:solidFill>
             <a:prstDash val="solid"/>
           </a:ln>
@@ -9859,11 +9859,11 @@
             <a:r>
               <a:rPr lang="en-US" sz="2600" b="1" dirty="0">
                 <a:solidFill>
-                  <a:srgbClr val="4636B0"/>
-                </a:solidFill>
-                <a:latin typeface="Sora" pitchFamily="34" charset="0"/>
-                <a:ea typeface="Sora" pitchFamily="34" charset="-122"/>
-                <a:cs typeface="Sora" pitchFamily="34" charset="-120"/>
+                  <a:srgbClr val="14181A"/>
+                </a:solidFill>
+                <a:latin typeface="Archivo" pitchFamily="34" charset="0"/>
+                <a:ea typeface="Archivo" pitchFamily="34" charset="-122"/>
+                <a:cs typeface="Archivo" pitchFamily="34" charset="-120"/>
               </a:rPr>
               <a:t>Un écart se règle pendant l'inventaire, pas trois jours après.</a:t>
             </a:r>
@@ -9901,11 +9901,11 @@
             <a:r>
               <a:rPr lang="en-US" sz="1250" dirty="0">
                 <a:solidFill>
-                  <a:srgbClr val="3D4556"/>
-                </a:solidFill>
-                <a:latin typeface="Inter" pitchFamily="34" charset="0"/>
-                <a:ea typeface="Inter" pitchFamily="34" charset="-122"/>
-                <a:cs typeface="Inter" pitchFamily="34" charset="-120"/>
+                  <a:srgbClr val="3A423F"/>
+                </a:solidFill>
+                <a:latin typeface="Public Sans" pitchFamily="34" charset="0"/>
+                <a:ea typeface="Public Sans" pitchFamily="34" charset="-122"/>
+                <a:cs typeface="Public Sans" pitchFamily="34" charset="-120"/>
               </a:rPr>
               <a:t>Quand une balise a été comptée puis auditée, les deux quantités s'affichent côte à côte, avec l'écart en pièces et en valeur d'achat. Le superviseur retient l'une, l'autre, ou une troisième qu'il a vérifiée lui-même — en un appui. Tant qu'il n'a pas tranché, le rapport le lui rappelle.</a:t>
             </a:r>
@@ -9926,7 +9926,7 @@
           </a:xfrm>
           <a:prstGeom prst="roundRect">
             <a:avLst>
-              <a:gd name="adj" fmla="val 2357"/>
+              <a:gd name="adj" fmla="val 1179"/>
             </a:avLst>
           </a:prstGeom>
           <a:solidFill>
@@ -9934,7 +9934,7 @@
           </a:solidFill>
           <a:ln w="12700">
             <a:solidFill>
-              <a:srgbClr val="E3E6EE"/>
+              <a:srgbClr val="E2E5E1"/>
             </a:solidFill>
             <a:prstDash val="solid"/>
           </a:ln>
@@ -9991,11 +9991,11 @@
             <a:r>
               <a:rPr lang="en-US" sz="1000" i="1" dirty="0">
                 <a:solidFill>
-                  <a:srgbClr val="5B6475"/>
-                </a:solidFill>
-                <a:latin typeface="Inter" pitchFamily="34" charset="0"/>
-                <a:ea typeface="Inter" pitchFamily="34" charset="-122"/>
-                <a:cs typeface="Inter" pitchFamily="34" charset="-120"/>
+                  <a:srgbClr val="575F5C"/>
+                </a:solidFill>
+                <a:latin typeface="Public Sans" pitchFamily="34" charset="0"/>
+                <a:ea typeface="Public Sans" pitchFamily="34" charset="-122"/>
+                <a:cs typeface="Public Sans" pitchFamily="34" charset="-120"/>
               </a:rPr>
               <a:t>Onglet Écarts d'audit, données d'essai.</a:t>
             </a:r>
@@ -10030,11 +10030,11 @@
             <a:r>
               <a:rPr lang="en-US" sz="900" dirty="0">
                 <a:solidFill>
-                  <a:srgbClr val="5B6475"/>
-                </a:solidFill>
-                <a:latin typeface="Inter" pitchFamily="34" charset="0"/>
-                <a:ea typeface="Inter" pitchFamily="34" charset="-122"/>
-                <a:cs typeface="Inter" pitchFamily="34" charset="-120"/>
+                  <a:srgbClr val="575F5C"/>
+                </a:solidFill>
+                <a:latin typeface="Public Sans" pitchFamily="34" charset="0"/>
+                <a:ea typeface="Public Sans" pitchFamily="34" charset="-122"/>
+                <a:cs typeface="Public Sans" pitchFamily="34" charset="-120"/>
               </a:rPr>
               <a:t>Quantinvo · présentation</a:t>
             </a:r>
@@ -10069,11 +10069,11 @@
             <a:r>
               <a:rPr lang="en-US" sz="900" dirty="0">
                 <a:solidFill>
-                  <a:srgbClr val="5B6475"/>
-                </a:solidFill>
-                <a:latin typeface="Inter" pitchFamily="34" charset="0"/>
-                <a:ea typeface="Inter" pitchFamily="34" charset="-122"/>
-                <a:cs typeface="Inter" pitchFamily="34" charset="-120"/>
+                  <a:srgbClr val="575F5C"/>
+                </a:solidFill>
+                <a:latin typeface="Public Sans" pitchFamily="34" charset="0"/>
+                <a:ea typeface="Public Sans" pitchFamily="34" charset="-122"/>
+                <a:cs typeface="Public Sans" pitchFamily="34" charset="-120"/>
               </a:rPr>
               <a:t>8</a:t>
             </a:r>
@@ -10164,11 +10164,11 @@
             <a:r>
               <a:rPr lang="en-US" sz="1600" b="1" dirty="0">
                 <a:solidFill>
-                  <a:srgbClr val="0B0F19"/>
-                </a:solidFill>
-                <a:latin typeface="Sora" pitchFamily="34" charset="0"/>
-                <a:ea typeface="Sora" pitchFamily="34" charset="-122"/>
-                <a:cs typeface="Sora" pitchFamily="34" charset="-120"/>
+                  <a:srgbClr val="14181A"/>
+                </a:solidFill>
+                <a:latin typeface="Archivo" pitchFamily="34" charset="0"/>
+                <a:ea typeface="Archivo" pitchFamily="34" charset="-122"/>
+                <a:cs typeface="Archivo" pitchFamily="34" charset="-120"/>
               </a:rPr>
               <a:t>Quantinvo</a:t>
             </a:r>
@@ -10203,11 +10203,11 @@
             <a:r>
               <a:rPr lang="en-US" sz="1000" dirty="0">
                 <a:solidFill>
-                  <a:srgbClr val="5B6475"/>
-                </a:solidFill>
-                <a:latin typeface="Inter" pitchFamily="34" charset="0"/>
-                <a:ea typeface="Inter" pitchFamily="34" charset="-122"/>
-                <a:cs typeface="Inter" pitchFamily="34" charset="-120"/>
+                  <a:srgbClr val="575F5C"/>
+                </a:solidFill>
+                <a:latin typeface="Public Sans" pitchFamily="34" charset="0"/>
+                <a:ea typeface="Public Sans" pitchFamily="34" charset="-122"/>
+                <a:cs typeface="Public Sans" pitchFamily="34" charset="-120"/>
               </a:rPr>
               <a:t>Le rapport</a:t>
             </a:r>
@@ -10224,17 +10224,17 @@
         <p:spPr>
           <a:xfrm>
             <a:off x="731520" y="877824"/>
-            <a:ext cx="10725912" cy="25603"/>
+            <a:ext cx="10725912" cy="10973"/>
           </a:xfrm>
           <a:prstGeom prst="rect">
             <a:avLst/>
           </a:prstGeom>
           <a:solidFill>
-            <a:srgbClr val="38C9FF"/>
+            <a:srgbClr val="E2E5E1"/>
           </a:solidFill>
           <a:ln w="12700">
             <a:solidFill>
-              <a:srgbClr val="38C9FF"/>
+              <a:srgbClr val="E2E5E1"/>
             </a:solidFill>
             <a:prstDash val="solid"/>
           </a:ln>
@@ -10270,11 +10270,11 @@
             <a:r>
               <a:rPr lang="en-US" sz="2400" b="1" dirty="0">
                 <a:solidFill>
-                  <a:srgbClr val="4636B0"/>
-                </a:solidFill>
-                <a:latin typeface="Sora" pitchFamily="34" charset="0"/>
-                <a:ea typeface="Sora" pitchFamily="34" charset="-122"/>
-                <a:cs typeface="Sora" pitchFamily="34" charset="-120"/>
+                  <a:srgbClr val="14181A"/>
+                </a:solidFill>
+                <a:latin typeface="Archivo" pitchFamily="34" charset="0"/>
+                <a:ea typeface="Archivo" pitchFamily="34" charset="-122"/>
+                <a:cs typeface="Archivo" pitchFamily="34" charset="-120"/>
               </a:rPr>
               <a:t>À la fin, un rapport qui dit aussi ce qui n'a pas été compté.</a:t>
             </a:r>
@@ -10312,11 +10312,11 @@
             <a:r>
               <a:rPr lang="en-US" sz="1250" dirty="0">
                 <a:solidFill>
-                  <a:srgbClr val="3D4556"/>
-                </a:solidFill>
-                <a:latin typeface="Inter" pitchFamily="34" charset="0"/>
-                <a:ea typeface="Inter" pitchFamily="34" charset="-122"/>
-                <a:cs typeface="Inter" pitchFamily="34" charset="-120"/>
+                  <a:srgbClr val="3A423F"/>
+                </a:solidFill>
+                <a:latin typeface="Public Sans" pitchFamily="34" charset="0"/>
+                <a:ea typeface="Public Sans" pitchFamily="34" charset="-122"/>
+                <a:cs typeface="Public Sans" pitchFamily="34" charset="-120"/>
               </a:rPr>
               <a:t>Le rapport part du stock attendu, pas seulement de ce qui a été scanné. Un article attendu et jamais trouvé y figure, avec son manque. C'est la démarque que l'inventaire est censé révéler.</a:t>
             </a:r>
@@ -10354,11 +10354,11 @@
             <a:r>
               <a:rPr lang="en-US" sz="1250" dirty="0">
                 <a:solidFill>
-                  <a:srgbClr val="3D4556"/>
-                </a:solidFill>
-                <a:latin typeface="Inter" pitchFamily="34" charset="0"/>
-                <a:ea typeface="Inter" pitchFamily="34" charset="-122"/>
-                <a:cs typeface="Inter" pitchFamily="34" charset="-120"/>
+                  <a:srgbClr val="3A423F"/>
+                </a:solidFill>
+                <a:latin typeface="Public Sans" pitchFamily="34" charset="0"/>
+                <a:ea typeface="Public Sans" pitchFamily="34" charset="-122"/>
+                <a:cs typeface="Public Sans" pitchFamily="34" charset="-120"/>
               </a:rPr>
               <a:t>Export Excel en un clic, prêt pour la correction du stock.</a:t>
             </a:r>
@@ -10379,7 +10379,7 @@
           </a:xfrm>
           <a:prstGeom prst="roundRect">
             <a:avLst>
-              <a:gd name="adj" fmla="val 1717"/>
+              <a:gd name="adj" fmla="val 859"/>
             </a:avLst>
           </a:prstGeom>
           <a:solidFill>
@@ -10387,7 +10387,7 @@
           </a:solidFill>
           <a:ln w="12700">
             <a:solidFill>
-              <a:srgbClr val="E3E6EE"/>
+              <a:srgbClr val="E2E5E1"/>
             </a:solidFill>
             <a:prstDash val="solid"/>
           </a:ln>
@@ -10444,11 +10444,11 @@
             <a:r>
               <a:rPr lang="en-US" sz="1000" i="1" dirty="0">
                 <a:solidFill>
-                  <a:srgbClr val="5B6475"/>
-                </a:solidFill>
-                <a:latin typeface="Inter" pitchFamily="34" charset="0"/>
-                <a:ea typeface="Inter" pitchFamily="34" charset="-122"/>
-                <a:cs typeface="Inter" pitchFamily="34" charset="-120"/>
+                  <a:srgbClr val="575F5C"/>
+                </a:solidFill>
+                <a:latin typeface="Public Sans" pitchFamily="34" charset="0"/>
+                <a:ea typeface="Public Sans" pitchFamily="34" charset="-122"/>
+                <a:cs typeface="Public Sans" pitchFamily="34" charset="-120"/>
               </a:rPr>
               <a:t>Onglet Rapport, données d'essai.</a:t>
             </a:r>
@@ -10483,11 +10483,11 @@
             <a:r>
               <a:rPr lang="en-US" sz="900" dirty="0">
                 <a:solidFill>
-                  <a:srgbClr val="5B6475"/>
-                </a:solidFill>
-                <a:latin typeface="Inter" pitchFamily="34" charset="0"/>
-                <a:ea typeface="Inter" pitchFamily="34" charset="-122"/>
-                <a:cs typeface="Inter" pitchFamily="34" charset="-120"/>
+                  <a:srgbClr val="575F5C"/>
+                </a:solidFill>
+                <a:latin typeface="Public Sans" pitchFamily="34" charset="0"/>
+                <a:ea typeface="Public Sans" pitchFamily="34" charset="-122"/>
+                <a:cs typeface="Public Sans" pitchFamily="34" charset="-120"/>
               </a:rPr>
               <a:t>Quantinvo · présentation</a:t>
             </a:r>
@@ -10522,11 +10522,11 @@
             <a:r>
               <a:rPr lang="en-US" sz="900" dirty="0">
                 <a:solidFill>
-                  <a:srgbClr val="5B6475"/>
-                </a:solidFill>
-                <a:latin typeface="Inter" pitchFamily="34" charset="0"/>
-                <a:ea typeface="Inter" pitchFamily="34" charset="-122"/>
-                <a:cs typeface="Inter" pitchFamily="34" charset="-120"/>
+                  <a:srgbClr val="575F5C"/>
+                </a:solidFill>
+                <a:latin typeface="Public Sans" pitchFamily="34" charset="0"/>
+                <a:ea typeface="Public Sans" pitchFamily="34" charset="-122"/>
+                <a:cs typeface="Public Sans" pitchFamily="34" charset="-120"/>
               </a:rPr>
               <a:t>9</a:t>
             </a:r>
